--- a/ppt/2.Kafka 기본 개념.pptx
+++ b/ppt/2.Kafka 기본 개념.pptx
@@ -19,6 +19,14 @@
     <p:sldId id="267" r:id="rId13"/>
     <p:sldId id="268" r:id="rId14"/>
     <p:sldId id="269" r:id="rId15"/>
+    <p:sldId id="271" r:id="rId16"/>
+    <p:sldId id="272" r:id="rId17"/>
+    <p:sldId id="273" r:id="rId18"/>
+    <p:sldId id="274" r:id="rId19"/>
+    <p:sldId id="275" r:id="rId20"/>
+    <p:sldId id="276" r:id="rId21"/>
+    <p:sldId id="277" r:id="rId22"/>
+    <p:sldId id="278" r:id="rId23"/>
   </p:sldIdLst>
   <p:sldSz cx="12192000" cy="6858000"/>
   <p:notesSz cx="7105650" cy="10236200"/>
@@ -154,7 +162,26 @@
             <p14:sldId id="269"/>
           </p14:sldIdLst>
         </p14:section>
+        <p14:section name="SpringBoot(Producer) 작성" id="{854DDE63-1510-455A-8AA0-BFC4AD822F67}">
+          <p14:sldIdLst>
+            <p14:sldId id="271"/>
+            <p14:sldId id="272"/>
+            <p14:sldId id="273"/>
+            <p14:sldId id="274"/>
+            <p14:sldId id="275"/>
+            <p14:sldId id="276"/>
+          </p14:sldIdLst>
+        </p14:section>
+        <p14:section name="SpringBoot가 Kafka에 메세지를 잘 넣었는지 확인" id="{13CA8B6C-8C88-44AB-9BE2-C7F99C555F2F}">
+          <p14:sldIdLst>
+            <p14:sldId id="277"/>
+            <p14:sldId id="278"/>
+          </p14:sldIdLst>
+        </p14:section>
       </p14:sectionLst>
+    </p:ext>
+    <p:ext uri="{EFAFB233-063F-42B5-8137-9DF3F51BA10A}">
+      <p15:sldGuideLst xmlns:p15="http://schemas.microsoft.com/office/powerpoint/2012/main"/>
     </p:ext>
   </p:extLst>
 </p:presentation>
@@ -5279,6 +5306,6735 @@
 </p:sld>
 </file>
 
+<file path=ppt/slides/slide15.xml><?xml version="1.0" encoding="utf-8"?>
+<p:sld xmlns:a="http://schemas.openxmlformats.org/drawingml/2006/main" xmlns:r="http://schemas.openxmlformats.org/officeDocument/2006/relationships" xmlns:p="http://schemas.openxmlformats.org/presentationml/2006/main">
+  <p:cSld>
+    <p:spTree>
+      <p:nvGrpSpPr>
+        <p:cNvPr id="1" name=""/>
+        <p:cNvGrpSpPr/>
+        <p:nvPr/>
+      </p:nvGrpSpPr>
+      <p:grpSpPr>
+        <a:xfrm>
+          <a:off x="0" y="0"/>
+          <a:ext cx="0" cy="0"/>
+          <a:chOff x="0" y="0"/>
+          <a:chExt cx="0" cy="0"/>
+        </a:xfrm>
+      </p:grpSpPr>
+      <p:sp>
+        <p:nvSpPr>
+          <p:cNvPr id="2" name="제목 1">
+            <a:extLst>
+              <a:ext uri="{FF2B5EF4-FFF2-40B4-BE49-F238E27FC236}">
+                <a16:creationId xmlns:a16="http://schemas.microsoft.com/office/drawing/2014/main" id="{F4231E1A-15FF-BC8C-03D1-6EC05F7D03F7}"/>
+              </a:ext>
+            </a:extLst>
+          </p:cNvPr>
+          <p:cNvSpPr>
+            <a:spLocks noGrp="1"/>
+          </p:cNvSpPr>
+          <p:nvPr>
+            <p:ph type="title"/>
+          </p:nvPr>
+        </p:nvSpPr>
+        <p:spPr/>
+        <p:txBody>
+          <a:bodyPr>
+            <a:normAutofit/>
+          </a:bodyPr>
+          <a:lstStyle/>
+          <a:p>
+            <a:r>
+              <a:rPr lang="en-US" altLang="ko-KR" sz="4000"/>
+              <a:t>Spring Boot Kafka</a:t>
+            </a:r>
+            <a:r>
+              <a:rPr lang="ko-KR" altLang="en-US" sz="4000"/>
+              <a:t>애플리케이션 생성</a:t>
+            </a:r>
+          </a:p>
+        </p:txBody>
+      </p:sp>
+      <p:pic>
+        <p:nvPicPr>
+          <p:cNvPr id="4" name="그림 3">
+            <a:extLst>
+              <a:ext uri="{FF2B5EF4-FFF2-40B4-BE49-F238E27FC236}">
+                <a16:creationId xmlns:a16="http://schemas.microsoft.com/office/drawing/2014/main" id="{477A0F50-2C64-E11C-0B9D-294B54F51072}"/>
+              </a:ext>
+            </a:extLst>
+          </p:cNvPr>
+          <p:cNvPicPr>
+            <a:picLocks noChangeAspect="1"/>
+          </p:cNvPicPr>
+          <p:nvPr/>
+        </p:nvPicPr>
+        <p:blipFill>
+          <a:blip r:embed="rId2"/>
+          <a:stretch>
+            <a:fillRect/>
+          </a:stretch>
+        </p:blipFill>
+        <p:spPr>
+          <a:xfrm>
+            <a:off x="1363723" y="1874520"/>
+            <a:ext cx="9525513" cy="4215995"/>
+          </a:xfrm>
+          <a:prstGeom prst="rect">
+            <a:avLst/>
+          </a:prstGeom>
+        </p:spPr>
+      </p:pic>
+    </p:spTree>
+    <p:extLst>
+      <p:ext uri="{BB962C8B-B14F-4D97-AF65-F5344CB8AC3E}">
+        <p14:creationId xmlns:p14="http://schemas.microsoft.com/office/powerpoint/2010/main" val="3847354921"/>
+      </p:ext>
+    </p:extLst>
+  </p:cSld>
+  <p:clrMapOvr>
+    <a:masterClrMapping/>
+  </p:clrMapOvr>
+</p:sld>
+</file>
+
+<file path=ppt/slides/slide16.xml><?xml version="1.0" encoding="utf-8"?>
+<p:sld xmlns:a="http://schemas.openxmlformats.org/drawingml/2006/main" xmlns:r="http://schemas.openxmlformats.org/officeDocument/2006/relationships" xmlns:p="http://schemas.openxmlformats.org/presentationml/2006/main">
+  <p:cSld>
+    <p:spTree>
+      <p:nvGrpSpPr>
+        <p:cNvPr id="1" name=""/>
+        <p:cNvGrpSpPr/>
+        <p:nvPr/>
+      </p:nvGrpSpPr>
+      <p:grpSpPr>
+        <a:xfrm>
+          <a:off x="0" y="0"/>
+          <a:ext cx="0" cy="0"/>
+          <a:chOff x="0" y="0"/>
+          <a:chExt cx="0" cy="0"/>
+        </a:xfrm>
+      </p:grpSpPr>
+      <p:sp>
+        <p:nvSpPr>
+          <p:cNvPr id="2" name="제목 1">
+            <a:extLst>
+              <a:ext uri="{FF2B5EF4-FFF2-40B4-BE49-F238E27FC236}">
+                <a16:creationId xmlns:a16="http://schemas.microsoft.com/office/drawing/2014/main" id="{43301AB7-C395-BC2D-A784-310647881F04}"/>
+              </a:ext>
+            </a:extLst>
+          </p:cNvPr>
+          <p:cNvSpPr>
+            <a:spLocks noGrp="1"/>
+          </p:cNvSpPr>
+          <p:nvPr>
+            <p:ph type="title"/>
+          </p:nvPr>
+        </p:nvSpPr>
+        <p:spPr/>
+        <p:txBody>
+          <a:bodyPr>
+            <a:normAutofit/>
+          </a:bodyPr>
+          <a:lstStyle/>
+          <a:p>
+            <a:r>
+              <a:rPr lang="en-US" altLang="ko-KR" sz="4000"/>
+              <a:t>SpringBoot Application.yml </a:t>
+            </a:r>
+            <a:r>
+              <a:rPr lang="ko-KR" altLang="en-US" sz="4000"/>
+              <a:t>에 </a:t>
+            </a:r>
+            <a:r>
+              <a:rPr lang="en-US" altLang="ko-KR" sz="4000"/>
+              <a:t>kafka </a:t>
+            </a:r>
+            <a:r>
+              <a:rPr lang="ko-KR" altLang="en-US" sz="4000"/>
+              <a:t>설정</a:t>
+            </a:r>
+          </a:p>
+        </p:txBody>
+      </p:sp>
+      <p:grpSp>
+        <p:nvGrpSpPr>
+          <p:cNvPr id="8" name="그룹 7">
+            <a:extLst>
+              <a:ext uri="{FF2B5EF4-FFF2-40B4-BE49-F238E27FC236}">
+                <a16:creationId xmlns:a16="http://schemas.microsoft.com/office/drawing/2014/main" id="{BBDCECF7-4046-3559-7511-DD16C8B2F1B0}"/>
+              </a:ext>
+            </a:extLst>
+          </p:cNvPr>
+          <p:cNvGrpSpPr/>
+          <p:nvPr/>
+        </p:nvGrpSpPr>
+        <p:grpSpPr>
+          <a:xfrm>
+            <a:off x="557778" y="1865259"/>
+            <a:ext cx="2810267" cy="4448796"/>
+            <a:chOff x="557778" y="1865259"/>
+            <a:chExt cx="2810267" cy="4448796"/>
+          </a:xfrm>
+        </p:grpSpPr>
+        <p:pic>
+          <p:nvPicPr>
+            <p:cNvPr id="6" name="그림 5">
+              <a:extLst>
+                <a:ext uri="{FF2B5EF4-FFF2-40B4-BE49-F238E27FC236}">
+                  <a16:creationId xmlns:a16="http://schemas.microsoft.com/office/drawing/2014/main" id="{7988D014-EAC1-283E-9AF0-F4529D26B28B}"/>
+                </a:ext>
+              </a:extLst>
+            </p:cNvPr>
+            <p:cNvPicPr>
+              <a:picLocks noChangeAspect="1"/>
+            </p:cNvPicPr>
+            <p:nvPr/>
+          </p:nvPicPr>
+          <p:blipFill>
+            <a:blip r:embed="rId2"/>
+            <a:stretch>
+              <a:fillRect/>
+            </a:stretch>
+          </p:blipFill>
+          <p:spPr>
+            <a:xfrm>
+              <a:off x="557778" y="1865259"/>
+              <a:ext cx="2810267" cy="4448796"/>
+            </a:xfrm>
+            <a:prstGeom prst="rect">
+              <a:avLst/>
+            </a:prstGeom>
+          </p:spPr>
+        </p:pic>
+        <p:sp>
+          <p:nvSpPr>
+            <p:cNvPr id="7" name="직사각형 6">
+              <a:extLst>
+                <a:ext uri="{FF2B5EF4-FFF2-40B4-BE49-F238E27FC236}">
+                  <a16:creationId xmlns:a16="http://schemas.microsoft.com/office/drawing/2014/main" id="{D917EC8B-E665-A4E5-7942-88803B2D7FE7}"/>
+                </a:ext>
+              </a:extLst>
+            </p:cNvPr>
+            <p:cNvSpPr/>
+            <p:nvPr/>
+          </p:nvSpPr>
+          <p:spPr>
+            <a:xfrm>
+              <a:off x="932688" y="4261104"/>
+              <a:ext cx="1179576" cy="219456"/>
+            </a:xfrm>
+            <a:prstGeom prst="rect">
+              <a:avLst/>
+            </a:prstGeom>
+            <a:noFill/>
+            <a:ln>
+              <a:solidFill>
+                <a:srgbClr val="FF0000"/>
+              </a:solidFill>
+            </a:ln>
+          </p:spPr>
+          <p:style>
+            <a:lnRef idx="2">
+              <a:schemeClr val="accent1">
+                <a:shade val="15000"/>
+              </a:schemeClr>
+            </a:lnRef>
+            <a:fillRef idx="1">
+              <a:schemeClr val="accent1"/>
+            </a:fillRef>
+            <a:effectRef idx="0">
+              <a:schemeClr val="accent1"/>
+            </a:effectRef>
+            <a:fontRef idx="minor">
+              <a:schemeClr val="lt1"/>
+            </a:fontRef>
+          </p:style>
+          <p:txBody>
+            <a:bodyPr rtlCol="0" anchor="ctr"/>
+            <a:lstStyle/>
+            <a:p>
+              <a:pPr algn="ctr"/>
+              <a:endParaRPr lang="ko-KR" altLang="en-US"/>
+            </a:p>
+          </p:txBody>
+        </p:sp>
+      </p:grpSp>
+      <p:grpSp>
+        <p:nvGrpSpPr>
+          <p:cNvPr id="5" name="그룹 4">
+            <a:extLst>
+              <a:ext uri="{FF2B5EF4-FFF2-40B4-BE49-F238E27FC236}">
+                <a16:creationId xmlns:a16="http://schemas.microsoft.com/office/drawing/2014/main" id="{EE9D4441-FA7A-7167-2566-4710D6A5FDDE}"/>
+              </a:ext>
+            </a:extLst>
+          </p:cNvPr>
+          <p:cNvGrpSpPr/>
+          <p:nvPr/>
+        </p:nvGrpSpPr>
+        <p:grpSpPr>
+          <a:xfrm>
+            <a:off x="3504438" y="1865259"/>
+            <a:ext cx="7440930" cy="1169551"/>
+            <a:chOff x="3504438" y="1865259"/>
+            <a:chExt cx="7440930" cy="1169551"/>
+          </a:xfrm>
+        </p:grpSpPr>
+        <p:sp>
+          <p:nvSpPr>
+            <p:cNvPr id="4" name="TextBox 3">
+              <a:extLst>
+                <a:ext uri="{FF2B5EF4-FFF2-40B4-BE49-F238E27FC236}">
+                  <a16:creationId xmlns:a16="http://schemas.microsoft.com/office/drawing/2014/main" id="{711978DE-E365-A935-7F43-B2E494DB1FD7}"/>
+                </a:ext>
+              </a:extLst>
+            </p:cNvPr>
+            <p:cNvSpPr txBox="1"/>
+            <p:nvPr/>
+          </p:nvSpPr>
+          <p:spPr>
+            <a:xfrm>
+              <a:off x="3504438" y="1865259"/>
+              <a:ext cx="7440930" cy="1169551"/>
+            </a:xfrm>
+            <a:prstGeom prst="rect">
+              <a:avLst/>
+            </a:prstGeom>
+            <a:solidFill>
+              <a:schemeClr val="tx1"/>
+            </a:solidFill>
+          </p:spPr>
+          <p:txBody>
+            <a:bodyPr wrap="square">
+              <a:spAutoFit/>
+            </a:bodyPr>
+            <a:lstStyle/>
+            <a:p>
+              <a:pPr>
+                <a:lnSpc>
+                  <a:spcPts val="1425"/>
+                </a:lnSpc>
+                <a:buNone/>
+              </a:pPr>
+              <a:r>
+                <a:rPr lang="en-US" altLang="ko-KR" sz="1200" b="0">
+                  <a:solidFill>
+                    <a:srgbClr val="7EE787"/>
+                  </a:solidFill>
+                  <a:effectLst/>
+                  <a:latin typeface="Consolas" panose="020B0609020204030204" pitchFamily="49" charset="0"/>
+                </a:rPr>
+                <a:t>spring</a:t>
+              </a:r>
+              <a:r>
+                <a:rPr lang="en-US" altLang="ko-KR" sz="1200" b="0">
+                  <a:solidFill>
+                    <a:srgbClr val="BBBEBF"/>
+                  </a:solidFill>
+                  <a:effectLst/>
+                  <a:latin typeface="Consolas" panose="020B0609020204030204" pitchFamily="49" charset="0"/>
+                </a:rPr>
+                <a:t>:</a:t>
+              </a:r>
+            </a:p>
+            <a:p>
+              <a:pPr>
+                <a:lnSpc>
+                  <a:spcPts val="1425"/>
+                </a:lnSpc>
+                <a:buNone/>
+              </a:pPr>
+              <a:r>
+                <a:rPr lang="en-US" altLang="ko-KR" sz="1200" b="0">
+                  <a:solidFill>
+                    <a:srgbClr val="BBBEBF"/>
+                  </a:solidFill>
+                  <a:effectLst/>
+                  <a:latin typeface="Consolas" panose="020B0609020204030204" pitchFamily="49" charset="0"/>
+                </a:rPr>
+                <a:t>    </a:t>
+              </a:r>
+              <a:r>
+                <a:rPr lang="en-US" altLang="ko-KR" sz="1200" b="0">
+                  <a:solidFill>
+                    <a:srgbClr val="7EE787"/>
+                  </a:solidFill>
+                  <a:effectLst/>
+                  <a:latin typeface="Consolas" panose="020B0609020204030204" pitchFamily="49" charset="0"/>
+                </a:rPr>
+                <a:t>kafka</a:t>
+              </a:r>
+              <a:r>
+                <a:rPr lang="en-US" altLang="ko-KR" sz="1200" b="0">
+                  <a:solidFill>
+                    <a:srgbClr val="BBBEBF"/>
+                  </a:solidFill>
+                  <a:effectLst/>
+                  <a:latin typeface="Consolas" panose="020B0609020204030204" pitchFamily="49" charset="0"/>
+                </a:rPr>
+                <a:t>:</a:t>
+              </a:r>
+            </a:p>
+            <a:p>
+              <a:pPr>
+                <a:lnSpc>
+                  <a:spcPts val="1425"/>
+                </a:lnSpc>
+                <a:buNone/>
+              </a:pPr>
+              <a:r>
+                <a:rPr lang="en-US" altLang="ko-KR" sz="1200" b="0">
+                  <a:solidFill>
+                    <a:srgbClr val="BBBEBF"/>
+                  </a:solidFill>
+                  <a:effectLst/>
+                  <a:latin typeface="Consolas" panose="020B0609020204030204" pitchFamily="49" charset="0"/>
+                </a:rPr>
+                <a:t>        </a:t>
+              </a:r>
+              <a:r>
+                <a:rPr lang="en-US" altLang="ko-KR" sz="1200" b="0">
+                  <a:solidFill>
+                    <a:srgbClr val="7EE787"/>
+                  </a:solidFill>
+                  <a:effectLst/>
+                  <a:latin typeface="Consolas" panose="020B0609020204030204" pitchFamily="49" charset="0"/>
+                </a:rPr>
+                <a:t>bootstrap-servers</a:t>
+              </a:r>
+              <a:r>
+                <a:rPr lang="en-US" altLang="ko-KR" sz="1200" b="0">
+                  <a:solidFill>
+                    <a:srgbClr val="BBBEBF"/>
+                  </a:solidFill>
+                  <a:effectLst/>
+                  <a:latin typeface="Consolas" panose="020B0609020204030204" pitchFamily="49" charset="0"/>
+                </a:rPr>
+                <a:t>: </a:t>
+              </a:r>
+              <a:r>
+                <a:rPr lang="en-US" altLang="ko-KR" sz="1200" b="0">
+                  <a:solidFill>
+                    <a:srgbClr val="A5D6FF"/>
+                  </a:solidFill>
+                  <a:effectLst/>
+                  <a:latin typeface="Consolas" panose="020B0609020204030204" pitchFamily="49" charset="0"/>
+                </a:rPr>
+                <a:t>43.200.183.198:9092</a:t>
+              </a:r>
+              <a:endParaRPr lang="en-US" altLang="ko-KR" sz="1200" b="0">
+                <a:solidFill>
+                  <a:srgbClr val="BBBEBF"/>
+                </a:solidFill>
+                <a:effectLst/>
+                <a:latin typeface="Consolas" panose="020B0609020204030204" pitchFamily="49" charset="0"/>
+              </a:endParaRPr>
+            </a:p>
+            <a:p>
+              <a:pPr>
+                <a:lnSpc>
+                  <a:spcPts val="1425"/>
+                </a:lnSpc>
+                <a:buNone/>
+              </a:pPr>
+              <a:r>
+                <a:rPr lang="en-US" altLang="ko-KR" sz="1200" b="0">
+                  <a:solidFill>
+                    <a:srgbClr val="BBBEBF"/>
+                  </a:solidFill>
+                  <a:effectLst/>
+                  <a:latin typeface="Consolas" panose="020B0609020204030204" pitchFamily="49" charset="0"/>
+                </a:rPr>
+                <a:t>        </a:t>
+              </a:r>
+              <a:r>
+                <a:rPr lang="en-US" altLang="ko-KR" sz="1200" b="0">
+                  <a:solidFill>
+                    <a:srgbClr val="7EE787"/>
+                  </a:solidFill>
+                  <a:effectLst/>
+                  <a:latin typeface="Consolas" panose="020B0609020204030204" pitchFamily="49" charset="0"/>
+                </a:rPr>
+                <a:t>producer</a:t>
+              </a:r>
+              <a:r>
+                <a:rPr lang="en-US" altLang="ko-KR" sz="1200" b="0">
+                  <a:solidFill>
+                    <a:srgbClr val="BBBEBF"/>
+                  </a:solidFill>
+                  <a:effectLst/>
+                  <a:latin typeface="Consolas" panose="020B0609020204030204" pitchFamily="49" charset="0"/>
+                </a:rPr>
+                <a:t>:</a:t>
+              </a:r>
+            </a:p>
+            <a:p>
+              <a:pPr>
+                <a:lnSpc>
+                  <a:spcPts val="1425"/>
+                </a:lnSpc>
+                <a:buNone/>
+              </a:pPr>
+              <a:r>
+                <a:rPr lang="en-US" altLang="ko-KR" sz="1200" b="0">
+                  <a:solidFill>
+                    <a:srgbClr val="BBBEBF"/>
+                  </a:solidFill>
+                  <a:effectLst/>
+                  <a:latin typeface="Consolas" panose="020B0609020204030204" pitchFamily="49" charset="0"/>
+                </a:rPr>
+                <a:t>            </a:t>
+              </a:r>
+              <a:r>
+                <a:rPr lang="en-US" altLang="ko-KR" sz="1200" b="0">
+                  <a:solidFill>
+                    <a:srgbClr val="7EE787"/>
+                  </a:solidFill>
+                  <a:effectLst/>
+                  <a:latin typeface="Consolas" panose="020B0609020204030204" pitchFamily="49" charset="0"/>
+                </a:rPr>
+                <a:t>key-serializer</a:t>
+              </a:r>
+              <a:r>
+                <a:rPr lang="en-US" altLang="ko-KR" sz="1200" b="0">
+                  <a:solidFill>
+                    <a:srgbClr val="BBBEBF"/>
+                  </a:solidFill>
+                  <a:effectLst/>
+                  <a:latin typeface="Consolas" panose="020B0609020204030204" pitchFamily="49" charset="0"/>
+                </a:rPr>
+                <a:t>: </a:t>
+              </a:r>
+              <a:r>
+                <a:rPr lang="en-US" altLang="ko-KR" sz="1200" b="0">
+                  <a:solidFill>
+                    <a:srgbClr val="A5D6FF"/>
+                  </a:solidFill>
+                  <a:effectLst/>
+                  <a:latin typeface="Consolas" panose="020B0609020204030204" pitchFamily="49" charset="0"/>
+                </a:rPr>
+                <a:t>org.apache.kafka.common.serialization.StringSerializer</a:t>
+              </a:r>
+              <a:endParaRPr lang="en-US" altLang="ko-KR" sz="1200" b="0">
+                <a:solidFill>
+                  <a:srgbClr val="BBBEBF"/>
+                </a:solidFill>
+                <a:effectLst/>
+                <a:latin typeface="Consolas" panose="020B0609020204030204" pitchFamily="49" charset="0"/>
+              </a:endParaRPr>
+            </a:p>
+            <a:p>
+              <a:pPr>
+                <a:lnSpc>
+                  <a:spcPts val="1425"/>
+                </a:lnSpc>
+                <a:buNone/>
+              </a:pPr>
+              <a:r>
+                <a:rPr lang="en-US" altLang="ko-KR" sz="1200" b="0">
+                  <a:solidFill>
+                    <a:srgbClr val="BBBEBF"/>
+                  </a:solidFill>
+                  <a:effectLst/>
+                  <a:latin typeface="Consolas" panose="020B0609020204030204" pitchFamily="49" charset="0"/>
+                </a:rPr>
+                <a:t>            </a:t>
+              </a:r>
+              <a:r>
+                <a:rPr lang="en-US" altLang="ko-KR" sz="1200" b="0">
+                  <a:solidFill>
+                    <a:srgbClr val="7EE787"/>
+                  </a:solidFill>
+                  <a:effectLst/>
+                  <a:latin typeface="Consolas" panose="020B0609020204030204" pitchFamily="49" charset="0"/>
+                </a:rPr>
+                <a:t>value-serializer</a:t>
+              </a:r>
+              <a:r>
+                <a:rPr lang="en-US" altLang="ko-KR" sz="1200" b="0">
+                  <a:solidFill>
+                    <a:srgbClr val="BBBEBF"/>
+                  </a:solidFill>
+                  <a:effectLst/>
+                  <a:latin typeface="Consolas" panose="020B0609020204030204" pitchFamily="49" charset="0"/>
+                </a:rPr>
+                <a:t>: </a:t>
+              </a:r>
+              <a:r>
+                <a:rPr lang="en-US" altLang="ko-KR" sz="1200" b="0">
+                  <a:solidFill>
+                    <a:srgbClr val="A5D6FF"/>
+                  </a:solidFill>
+                  <a:effectLst/>
+                  <a:latin typeface="Consolas" panose="020B0609020204030204" pitchFamily="49" charset="0"/>
+                </a:rPr>
+                <a:t>org.apache.kafka.common.serialization.StringSerializer</a:t>
+              </a:r>
+              <a:endParaRPr lang="en-US" altLang="ko-KR" sz="1200" b="0">
+                <a:solidFill>
+                  <a:srgbClr val="BBBEBF"/>
+                </a:solidFill>
+                <a:effectLst/>
+                <a:latin typeface="Consolas" panose="020B0609020204030204" pitchFamily="49" charset="0"/>
+              </a:endParaRPr>
+            </a:p>
+          </p:txBody>
+        </p:sp>
+        <p:sp>
+          <p:nvSpPr>
+            <p:cNvPr id="3" name="직사각형 2">
+              <a:extLst>
+                <a:ext uri="{FF2B5EF4-FFF2-40B4-BE49-F238E27FC236}">
+                  <a16:creationId xmlns:a16="http://schemas.microsoft.com/office/drawing/2014/main" id="{D171BC6C-FD8E-481C-C495-41293F012A9F}"/>
+                </a:ext>
+              </a:extLst>
+            </p:cNvPr>
+            <p:cNvSpPr/>
+            <p:nvPr/>
+          </p:nvSpPr>
+          <p:spPr>
+            <a:xfrm>
+              <a:off x="4544568" y="2606040"/>
+              <a:ext cx="6208776" cy="428770"/>
+            </a:xfrm>
+            <a:prstGeom prst="rect">
+              <a:avLst/>
+            </a:prstGeom>
+            <a:noFill/>
+            <a:ln>
+              <a:solidFill>
+                <a:srgbClr val="FF0000"/>
+              </a:solidFill>
+            </a:ln>
+          </p:spPr>
+          <p:style>
+            <a:lnRef idx="2">
+              <a:schemeClr val="accent1">
+                <a:shade val="15000"/>
+              </a:schemeClr>
+            </a:lnRef>
+            <a:fillRef idx="1">
+              <a:schemeClr val="accent1"/>
+            </a:fillRef>
+            <a:effectRef idx="0">
+              <a:schemeClr val="accent1"/>
+            </a:effectRef>
+            <a:fontRef idx="minor">
+              <a:schemeClr val="lt1"/>
+            </a:fontRef>
+          </p:style>
+          <p:txBody>
+            <a:bodyPr rtlCol="0" anchor="ctr"/>
+            <a:lstStyle/>
+            <a:p>
+              <a:pPr algn="ctr"/>
+              <a:endParaRPr lang="ko-KR" altLang="en-US"/>
+            </a:p>
+          </p:txBody>
+        </p:sp>
+      </p:grpSp>
+      <p:sp>
+        <p:nvSpPr>
+          <p:cNvPr id="9" name="TextBox 8">
+            <a:extLst>
+              <a:ext uri="{FF2B5EF4-FFF2-40B4-BE49-F238E27FC236}">
+                <a16:creationId xmlns:a16="http://schemas.microsoft.com/office/drawing/2014/main" id="{0B1135A9-0330-0368-5A7B-E282014459C4}"/>
+              </a:ext>
+            </a:extLst>
+          </p:cNvPr>
+          <p:cNvSpPr txBox="1"/>
+          <p:nvPr/>
+        </p:nvSpPr>
+        <p:spPr>
+          <a:xfrm>
+            <a:off x="3483864" y="3255264"/>
+            <a:ext cx="8485632" cy="1169551"/>
+          </a:xfrm>
+          <a:prstGeom prst="rect">
+            <a:avLst/>
+          </a:prstGeom>
+          <a:noFill/>
+        </p:spPr>
+        <p:txBody>
+          <a:bodyPr wrap="square" rtlCol="0">
+            <a:spAutoFit/>
+          </a:bodyPr>
+          <a:lstStyle/>
+          <a:p>
+            <a:pPr marL="285750" indent="-285750">
+              <a:buFont typeface="Wingdings" panose="05000000000000000000" pitchFamily="2" charset="2"/>
+              <a:buChar char="n"/>
+            </a:pPr>
+            <a:r>
+              <a:rPr lang="en-US" altLang="ko-KR" sz="1400"/>
+              <a:t>producer </a:t>
+            </a:r>
+            <a:r>
+              <a:rPr lang="ko-KR" altLang="en-US" sz="1400"/>
+              <a:t>설정 </a:t>
+            </a:r>
+            <a:endParaRPr lang="en-US" altLang="ko-KR" sz="1400"/>
+          </a:p>
+          <a:p>
+            <a:r>
+              <a:rPr lang="en-US" altLang="ko-KR" sz="1400"/>
+              <a:t>key-serializer : </a:t>
+            </a:r>
+            <a:r>
+              <a:rPr lang="ko-KR" altLang="en-US" sz="1400"/>
+              <a:t>키 설정을 문자열로 직렬화</a:t>
+            </a:r>
+            <a:endParaRPr lang="en-US" altLang="ko-KR" sz="1400"/>
+          </a:p>
+          <a:p>
+            <a:r>
+              <a:rPr lang="en-US" altLang="ko-KR" sz="1400"/>
+              <a:t>value-serializer : </a:t>
+            </a:r>
+            <a:r>
+              <a:rPr lang="ko-KR" altLang="en-US" sz="1400"/>
+              <a:t>값 설정을 문자열로 직렬화</a:t>
+            </a:r>
+            <a:endParaRPr lang="en-US" altLang="ko-KR" sz="1400"/>
+          </a:p>
+          <a:p>
+            <a:endParaRPr lang="en-US" altLang="ko-KR" sz="1400"/>
+          </a:p>
+          <a:p>
+            <a:r>
+              <a:rPr lang="ko-KR" altLang="en-US" sz="1400"/>
+              <a:t>직렬화 하는 이유 </a:t>
+            </a:r>
+            <a:r>
+              <a:rPr lang="en-US" altLang="ko-KR" sz="1400"/>
+              <a:t>: JAVA </a:t>
+            </a:r>
+            <a:r>
+              <a:rPr lang="ko-KR" altLang="en-US" sz="1400"/>
+              <a:t>객체를 </a:t>
+            </a:r>
+            <a:r>
+              <a:rPr lang="en-US" altLang="ko-KR" sz="1400"/>
+              <a:t>JSON </a:t>
+            </a:r>
+            <a:r>
+              <a:rPr lang="ko-KR" altLang="en-US" sz="1400"/>
+              <a:t>문자열 형태로 직렬화하여 메시지 큐로 저장하기 위하여</a:t>
+            </a:r>
+            <a:r>
+              <a:rPr lang="en-US" altLang="ko-KR" sz="1400"/>
+              <a:t>.</a:t>
+            </a:r>
+            <a:endParaRPr lang="ko-KR" altLang="en-US" sz="1400"/>
+          </a:p>
+        </p:txBody>
+      </p:sp>
+    </p:spTree>
+    <p:extLst>
+      <p:ext uri="{BB962C8B-B14F-4D97-AF65-F5344CB8AC3E}">
+        <p14:creationId xmlns:p14="http://schemas.microsoft.com/office/powerpoint/2010/main" val="2215123872"/>
+      </p:ext>
+    </p:extLst>
+  </p:cSld>
+  <p:clrMapOvr>
+    <a:masterClrMapping/>
+  </p:clrMapOvr>
+</p:sld>
+</file>
+
+<file path=ppt/slides/slide17.xml><?xml version="1.0" encoding="utf-8"?>
+<p:sld xmlns:a="http://schemas.openxmlformats.org/drawingml/2006/main" xmlns:r="http://schemas.openxmlformats.org/officeDocument/2006/relationships" xmlns:p="http://schemas.openxmlformats.org/presentationml/2006/main">
+  <p:cSld>
+    <p:spTree>
+      <p:nvGrpSpPr>
+        <p:cNvPr id="1" name=""/>
+        <p:cNvGrpSpPr/>
+        <p:nvPr/>
+      </p:nvGrpSpPr>
+      <p:grpSpPr>
+        <a:xfrm>
+          <a:off x="0" y="0"/>
+          <a:ext cx="0" cy="0"/>
+          <a:chOff x="0" y="0"/>
+          <a:chExt cx="0" cy="0"/>
+        </a:xfrm>
+      </p:grpSpPr>
+      <p:sp>
+        <p:nvSpPr>
+          <p:cNvPr id="2" name="제목 1">
+            <a:extLst>
+              <a:ext uri="{FF2B5EF4-FFF2-40B4-BE49-F238E27FC236}">
+                <a16:creationId xmlns:a16="http://schemas.microsoft.com/office/drawing/2014/main" id="{73456BDB-7C2D-D330-D71D-57979C137FB1}"/>
+              </a:ext>
+            </a:extLst>
+          </p:cNvPr>
+          <p:cNvSpPr>
+            <a:spLocks noGrp="1"/>
+          </p:cNvSpPr>
+          <p:nvPr>
+            <p:ph type="title"/>
+          </p:nvPr>
+        </p:nvSpPr>
+        <p:spPr/>
+        <p:txBody>
+          <a:bodyPr>
+            <a:normAutofit/>
+          </a:bodyPr>
+          <a:lstStyle/>
+          <a:p>
+            <a:r>
+              <a:rPr lang="en-US" altLang="ko-KR" sz="4000"/>
+              <a:t>SpringBoot</a:t>
+            </a:r>
+            <a:r>
+              <a:rPr lang="ko-KR" altLang="en-US" sz="4000"/>
+              <a:t>로 </a:t>
+            </a:r>
+            <a:r>
+              <a:rPr lang="en-US" altLang="ko-KR" sz="4000"/>
+              <a:t>Kafka</a:t>
+            </a:r>
+            <a:r>
+              <a:rPr lang="ko-KR" altLang="en-US" sz="4000"/>
+              <a:t>에 메시지 넣는 코드 작성</a:t>
+            </a:r>
+            <a:br>
+              <a:rPr lang="en-US" altLang="ko-KR" sz="4000"/>
+            </a:br>
+            <a:r>
+              <a:rPr lang="en-US" altLang="ko-KR" sz="4000"/>
+              <a:t>(Controller)</a:t>
+            </a:r>
+            <a:endParaRPr lang="ko-KR" altLang="en-US" sz="4000"/>
+          </a:p>
+        </p:txBody>
+      </p:sp>
+      <p:sp>
+        <p:nvSpPr>
+          <p:cNvPr id="4" name="TextBox 3">
+            <a:extLst>
+              <a:ext uri="{FF2B5EF4-FFF2-40B4-BE49-F238E27FC236}">
+                <a16:creationId xmlns:a16="http://schemas.microsoft.com/office/drawing/2014/main" id="{FA25AF9B-20F3-04E2-CF0E-6BA2807D6D63}"/>
+              </a:ext>
+            </a:extLst>
+          </p:cNvPr>
+          <p:cNvSpPr txBox="1"/>
+          <p:nvPr/>
+        </p:nvSpPr>
+        <p:spPr>
+          <a:xfrm>
+            <a:off x="4354830" y="1996720"/>
+            <a:ext cx="6094476" cy="3504806"/>
+          </a:xfrm>
+          <a:prstGeom prst="rect">
+            <a:avLst/>
+          </a:prstGeom>
+          <a:solidFill>
+            <a:schemeClr val="tx1"/>
+          </a:solidFill>
+        </p:spPr>
+        <p:txBody>
+          <a:bodyPr wrap="square">
+            <a:spAutoFit/>
+          </a:bodyPr>
+          <a:lstStyle/>
+          <a:p>
+            <a:pPr>
+              <a:lnSpc>
+                <a:spcPts val="1425"/>
+              </a:lnSpc>
+              <a:buNone/>
+            </a:pPr>
+            <a:r>
+              <a:rPr lang="en-US" altLang="ko-KR" sz="1200" b="0">
+                <a:solidFill>
+                  <a:srgbClr val="BBBEBF"/>
+                </a:solidFill>
+                <a:effectLst/>
+                <a:latin typeface="Consolas" panose="020B0609020204030204" pitchFamily="49" charset="0"/>
+              </a:rPr>
+              <a:t>@</a:t>
+            </a:r>
+            <a:r>
+              <a:rPr lang="en-US" altLang="ko-KR" sz="1200" b="0">
+                <a:solidFill>
+                  <a:srgbClr val="4EC9B0"/>
+                </a:solidFill>
+                <a:effectLst/>
+                <a:latin typeface="Consolas" panose="020B0609020204030204" pitchFamily="49" charset="0"/>
+              </a:rPr>
+              <a:t>RestController</a:t>
+            </a:r>
+            <a:endParaRPr lang="en-US" altLang="ko-KR" sz="1200" b="0">
+              <a:solidFill>
+                <a:srgbClr val="BBBEBF"/>
+              </a:solidFill>
+              <a:effectLst/>
+              <a:latin typeface="Consolas" panose="020B0609020204030204" pitchFamily="49" charset="0"/>
+            </a:endParaRPr>
+          </a:p>
+          <a:p>
+            <a:pPr>
+              <a:lnSpc>
+                <a:spcPts val="1425"/>
+              </a:lnSpc>
+              <a:buNone/>
+            </a:pPr>
+            <a:r>
+              <a:rPr lang="en-US" altLang="ko-KR" sz="1200" b="0">
+                <a:solidFill>
+                  <a:srgbClr val="BBBEBF"/>
+                </a:solidFill>
+                <a:effectLst/>
+                <a:latin typeface="Consolas" panose="020B0609020204030204" pitchFamily="49" charset="0"/>
+              </a:rPr>
+              <a:t>@</a:t>
+            </a:r>
+            <a:r>
+              <a:rPr lang="en-US" altLang="ko-KR" sz="1200" b="0">
+                <a:solidFill>
+                  <a:srgbClr val="4EC9B0"/>
+                </a:solidFill>
+                <a:effectLst/>
+                <a:latin typeface="Consolas" panose="020B0609020204030204" pitchFamily="49" charset="0"/>
+              </a:rPr>
+              <a:t>RequestMapping</a:t>
+            </a:r>
+            <a:r>
+              <a:rPr lang="en-US" altLang="ko-KR" sz="1200" b="0">
+                <a:solidFill>
+                  <a:srgbClr val="BBBEBF"/>
+                </a:solidFill>
+                <a:effectLst/>
+                <a:latin typeface="Consolas" panose="020B0609020204030204" pitchFamily="49" charset="0"/>
+              </a:rPr>
+              <a:t>(</a:t>
+            </a:r>
+            <a:r>
+              <a:rPr lang="en-US" altLang="ko-KR" sz="1200" b="0">
+                <a:solidFill>
+                  <a:srgbClr val="A5D6FF"/>
+                </a:solidFill>
+                <a:effectLst/>
+                <a:latin typeface="Consolas" panose="020B0609020204030204" pitchFamily="49" charset="0"/>
+              </a:rPr>
+              <a:t>"/api/emails"</a:t>
+            </a:r>
+            <a:r>
+              <a:rPr lang="en-US" altLang="ko-KR" sz="1200" b="0">
+                <a:solidFill>
+                  <a:srgbClr val="BBBEBF"/>
+                </a:solidFill>
+                <a:effectLst/>
+                <a:latin typeface="Consolas" panose="020B0609020204030204" pitchFamily="49" charset="0"/>
+              </a:rPr>
+              <a:t>)</a:t>
+            </a:r>
+          </a:p>
+          <a:p>
+            <a:pPr>
+              <a:lnSpc>
+                <a:spcPts val="1425"/>
+              </a:lnSpc>
+              <a:buNone/>
+            </a:pPr>
+            <a:r>
+              <a:rPr lang="en-US" altLang="ko-KR" sz="1200" b="0">
+                <a:solidFill>
+                  <a:srgbClr val="569CD6"/>
+                </a:solidFill>
+                <a:effectLst/>
+                <a:latin typeface="Consolas" panose="020B0609020204030204" pitchFamily="49" charset="0"/>
+              </a:rPr>
+              <a:t>public</a:t>
+            </a:r>
+            <a:r>
+              <a:rPr lang="en-US" altLang="ko-KR" sz="1200" b="0">
+                <a:solidFill>
+                  <a:srgbClr val="BBBEBF"/>
+                </a:solidFill>
+                <a:effectLst/>
+                <a:latin typeface="Consolas" panose="020B0609020204030204" pitchFamily="49" charset="0"/>
+              </a:rPr>
+              <a:t> </a:t>
+            </a:r>
+            <a:r>
+              <a:rPr lang="en-US" altLang="ko-KR" sz="1200" b="0">
+                <a:solidFill>
+                  <a:srgbClr val="569CD6"/>
+                </a:solidFill>
+                <a:effectLst/>
+                <a:latin typeface="Consolas" panose="020B0609020204030204" pitchFamily="49" charset="0"/>
+              </a:rPr>
+              <a:t>class</a:t>
+            </a:r>
+            <a:r>
+              <a:rPr lang="en-US" altLang="ko-KR" sz="1200" b="0">
+                <a:solidFill>
+                  <a:srgbClr val="BBBEBF"/>
+                </a:solidFill>
+                <a:effectLst/>
+                <a:latin typeface="Consolas" panose="020B0609020204030204" pitchFamily="49" charset="0"/>
+              </a:rPr>
+              <a:t> </a:t>
+            </a:r>
+            <a:r>
+              <a:rPr lang="en-US" altLang="ko-KR" sz="1200" b="0">
+                <a:solidFill>
+                  <a:srgbClr val="4EC9B0"/>
+                </a:solidFill>
+                <a:effectLst/>
+                <a:latin typeface="Consolas" panose="020B0609020204030204" pitchFamily="49" charset="0"/>
+              </a:rPr>
+              <a:t>EmailController</a:t>
+            </a:r>
+            <a:r>
+              <a:rPr lang="en-US" altLang="ko-KR" sz="1200" b="0">
+                <a:solidFill>
+                  <a:srgbClr val="BBBEBF"/>
+                </a:solidFill>
+                <a:effectLst/>
+                <a:latin typeface="Consolas" panose="020B0609020204030204" pitchFamily="49" charset="0"/>
+              </a:rPr>
+              <a:t> {</a:t>
+            </a:r>
+          </a:p>
+          <a:p>
+            <a:pPr>
+              <a:lnSpc>
+                <a:spcPts val="1425"/>
+              </a:lnSpc>
+              <a:buNone/>
+            </a:pPr>
+            <a:r>
+              <a:rPr lang="en-US" altLang="ko-KR" sz="1200" b="0">
+                <a:solidFill>
+                  <a:srgbClr val="BBBEBF"/>
+                </a:solidFill>
+                <a:effectLst/>
+                <a:latin typeface="Consolas" panose="020B0609020204030204" pitchFamily="49" charset="0"/>
+              </a:rPr>
+              <a:t>    </a:t>
+            </a:r>
+            <a:r>
+              <a:rPr lang="en-US" altLang="ko-KR" sz="1200" b="0">
+                <a:solidFill>
+                  <a:srgbClr val="569CD6"/>
+                </a:solidFill>
+                <a:effectLst/>
+                <a:latin typeface="Consolas" panose="020B0609020204030204" pitchFamily="49" charset="0"/>
+              </a:rPr>
+              <a:t>private</a:t>
+            </a:r>
+            <a:r>
+              <a:rPr lang="en-US" altLang="ko-KR" sz="1200" b="0">
+                <a:solidFill>
+                  <a:srgbClr val="BBBEBF"/>
+                </a:solidFill>
+                <a:effectLst/>
+                <a:latin typeface="Consolas" panose="020B0609020204030204" pitchFamily="49" charset="0"/>
+              </a:rPr>
+              <a:t> </a:t>
+            </a:r>
+            <a:r>
+              <a:rPr lang="en-US" altLang="ko-KR" sz="1200" b="0">
+                <a:solidFill>
+                  <a:srgbClr val="569CD6"/>
+                </a:solidFill>
+                <a:effectLst/>
+                <a:latin typeface="Consolas" panose="020B0609020204030204" pitchFamily="49" charset="0"/>
+              </a:rPr>
+              <a:t>final</a:t>
+            </a:r>
+            <a:r>
+              <a:rPr lang="en-US" altLang="ko-KR" sz="1200" b="0">
+                <a:solidFill>
+                  <a:srgbClr val="BBBEBF"/>
+                </a:solidFill>
+                <a:effectLst/>
+                <a:latin typeface="Consolas" panose="020B0609020204030204" pitchFamily="49" charset="0"/>
+              </a:rPr>
+              <a:t> </a:t>
+            </a:r>
+            <a:r>
+              <a:rPr lang="en-US" altLang="ko-KR" sz="1200" b="0">
+                <a:solidFill>
+                  <a:srgbClr val="4EC9B0"/>
+                </a:solidFill>
+                <a:effectLst/>
+                <a:latin typeface="Consolas" panose="020B0609020204030204" pitchFamily="49" charset="0"/>
+              </a:rPr>
+              <a:t>EmailService</a:t>
+            </a:r>
+            <a:r>
+              <a:rPr lang="en-US" altLang="ko-KR" sz="1200" b="0">
+                <a:solidFill>
+                  <a:srgbClr val="FFA657"/>
+                </a:solidFill>
+                <a:effectLst/>
+                <a:latin typeface="Consolas" panose="020B0609020204030204" pitchFamily="49" charset="0"/>
+              </a:rPr>
+              <a:t> </a:t>
+            </a:r>
+            <a:r>
+              <a:rPr lang="en-US" altLang="ko-KR" sz="1200" b="0">
+                <a:solidFill>
+                  <a:srgbClr val="79C0FF"/>
+                </a:solidFill>
+                <a:effectLst/>
+                <a:latin typeface="Consolas" panose="020B0609020204030204" pitchFamily="49" charset="0"/>
+              </a:rPr>
+              <a:t>emailService</a:t>
+            </a:r>
+            <a:r>
+              <a:rPr lang="en-US" altLang="ko-KR" sz="1200" b="0">
+                <a:solidFill>
+                  <a:srgbClr val="BBBEBF"/>
+                </a:solidFill>
+                <a:effectLst/>
+                <a:latin typeface="Consolas" panose="020B0609020204030204" pitchFamily="49" charset="0"/>
+              </a:rPr>
+              <a:t>;</a:t>
+            </a:r>
+          </a:p>
+          <a:p>
+            <a:pPr>
+              <a:lnSpc>
+                <a:spcPts val="1425"/>
+              </a:lnSpc>
+              <a:buNone/>
+            </a:pPr>
+            <a:r>
+              <a:rPr lang="en-US" altLang="ko-KR" sz="1200" b="0">
+                <a:solidFill>
+                  <a:srgbClr val="BBBEBF"/>
+                </a:solidFill>
+                <a:effectLst/>
+                <a:latin typeface="Consolas" panose="020B0609020204030204" pitchFamily="49" charset="0"/>
+              </a:rPr>
+              <a:t>    </a:t>
+            </a:r>
+            <a:r>
+              <a:rPr lang="en-US" altLang="ko-KR" sz="1200" b="0">
+                <a:solidFill>
+                  <a:srgbClr val="569CD6"/>
+                </a:solidFill>
+                <a:effectLst/>
+                <a:latin typeface="Consolas" panose="020B0609020204030204" pitchFamily="49" charset="0"/>
+              </a:rPr>
+              <a:t>public</a:t>
+            </a:r>
+            <a:r>
+              <a:rPr lang="en-US" altLang="ko-KR" sz="1200" b="0">
+                <a:solidFill>
+                  <a:srgbClr val="BBBEBF"/>
+                </a:solidFill>
+                <a:effectLst/>
+                <a:latin typeface="Consolas" panose="020B0609020204030204" pitchFamily="49" charset="0"/>
+              </a:rPr>
+              <a:t> </a:t>
+            </a:r>
+            <a:r>
+              <a:rPr lang="en-US" altLang="ko-KR" sz="1200" b="0">
+                <a:solidFill>
+                  <a:srgbClr val="D2A8FF"/>
+                </a:solidFill>
+                <a:effectLst/>
+                <a:latin typeface="Consolas" panose="020B0609020204030204" pitchFamily="49" charset="0"/>
+              </a:rPr>
+              <a:t>EmailController</a:t>
+            </a:r>
+            <a:r>
+              <a:rPr lang="en-US" altLang="ko-KR" sz="1200" b="0">
+                <a:solidFill>
+                  <a:srgbClr val="BBBEBF"/>
+                </a:solidFill>
+                <a:effectLst/>
+                <a:latin typeface="Consolas" panose="020B0609020204030204" pitchFamily="49" charset="0"/>
+              </a:rPr>
+              <a:t>(</a:t>
+            </a:r>
+            <a:r>
+              <a:rPr lang="en-US" altLang="ko-KR" sz="1200" b="0">
+                <a:solidFill>
+                  <a:srgbClr val="4EC9B0"/>
+                </a:solidFill>
+                <a:effectLst/>
+                <a:latin typeface="Consolas" panose="020B0609020204030204" pitchFamily="49" charset="0"/>
+              </a:rPr>
+              <a:t>EmailService</a:t>
+            </a:r>
+            <a:r>
+              <a:rPr lang="en-US" altLang="ko-KR" sz="1200" b="0">
+                <a:solidFill>
+                  <a:srgbClr val="BBBEBF"/>
+                </a:solidFill>
+                <a:effectLst/>
+                <a:latin typeface="Consolas" panose="020B0609020204030204" pitchFamily="49" charset="0"/>
+              </a:rPr>
+              <a:t> </a:t>
+            </a:r>
+            <a:r>
+              <a:rPr lang="en-US" altLang="ko-KR" sz="1200" b="0">
+                <a:solidFill>
+                  <a:srgbClr val="FFA657"/>
+                </a:solidFill>
+                <a:effectLst/>
+                <a:latin typeface="Consolas" panose="020B0609020204030204" pitchFamily="49" charset="0"/>
+              </a:rPr>
+              <a:t>emailService</a:t>
+            </a:r>
+            <a:r>
+              <a:rPr lang="en-US" altLang="ko-KR" sz="1200" b="0">
+                <a:solidFill>
+                  <a:srgbClr val="BBBEBF"/>
+                </a:solidFill>
+                <a:effectLst/>
+                <a:latin typeface="Consolas" panose="020B0609020204030204" pitchFamily="49" charset="0"/>
+              </a:rPr>
+              <a:t>){</a:t>
+            </a:r>
+          </a:p>
+          <a:p>
+            <a:pPr>
+              <a:lnSpc>
+                <a:spcPts val="1425"/>
+              </a:lnSpc>
+              <a:buNone/>
+            </a:pPr>
+            <a:r>
+              <a:rPr lang="en-US" altLang="ko-KR" sz="1200" b="0">
+                <a:solidFill>
+                  <a:srgbClr val="BBBEBF"/>
+                </a:solidFill>
+                <a:effectLst/>
+                <a:latin typeface="Consolas" panose="020B0609020204030204" pitchFamily="49" charset="0"/>
+              </a:rPr>
+              <a:t>        </a:t>
+            </a:r>
+            <a:r>
+              <a:rPr lang="en-US" altLang="ko-KR" sz="1200" b="0">
+                <a:solidFill>
+                  <a:srgbClr val="79C0FF"/>
+                </a:solidFill>
+                <a:effectLst/>
+                <a:latin typeface="Consolas" panose="020B0609020204030204" pitchFamily="49" charset="0"/>
+              </a:rPr>
+              <a:t>this</a:t>
+            </a:r>
+            <a:r>
+              <a:rPr lang="en-US" altLang="ko-KR" sz="1200" b="0">
+                <a:solidFill>
+                  <a:srgbClr val="BBBEBF"/>
+                </a:solidFill>
+                <a:effectLst/>
+                <a:latin typeface="Consolas" panose="020B0609020204030204" pitchFamily="49" charset="0"/>
+              </a:rPr>
+              <a:t>.</a:t>
+            </a:r>
+            <a:r>
+              <a:rPr lang="en-US" altLang="ko-KR" sz="1200" b="0">
+                <a:solidFill>
+                  <a:srgbClr val="79C0FF"/>
+                </a:solidFill>
+                <a:effectLst/>
+                <a:latin typeface="Consolas" panose="020B0609020204030204" pitchFamily="49" charset="0"/>
+              </a:rPr>
+              <a:t>emailService</a:t>
+            </a:r>
+            <a:r>
+              <a:rPr lang="en-US" altLang="ko-KR" sz="1200" b="0">
+                <a:solidFill>
+                  <a:srgbClr val="BBBEBF"/>
+                </a:solidFill>
+                <a:effectLst/>
+                <a:latin typeface="Consolas" panose="020B0609020204030204" pitchFamily="49" charset="0"/>
+              </a:rPr>
+              <a:t> </a:t>
+            </a:r>
+            <a:r>
+              <a:rPr lang="en-US" altLang="ko-KR" sz="1200" b="0">
+                <a:solidFill>
+                  <a:srgbClr val="D4D4D4"/>
+                </a:solidFill>
+                <a:effectLst/>
+                <a:latin typeface="Consolas" panose="020B0609020204030204" pitchFamily="49" charset="0"/>
+              </a:rPr>
+              <a:t>=</a:t>
+            </a:r>
+            <a:r>
+              <a:rPr lang="en-US" altLang="ko-KR" sz="1200" b="0">
+                <a:solidFill>
+                  <a:srgbClr val="BBBEBF"/>
+                </a:solidFill>
+                <a:effectLst/>
+                <a:latin typeface="Consolas" panose="020B0609020204030204" pitchFamily="49" charset="0"/>
+              </a:rPr>
+              <a:t> </a:t>
+            </a:r>
+            <a:r>
+              <a:rPr lang="en-US" altLang="ko-KR" sz="1200" b="0">
+                <a:solidFill>
+                  <a:srgbClr val="FFA657"/>
+                </a:solidFill>
+                <a:effectLst/>
+                <a:latin typeface="Consolas" panose="020B0609020204030204" pitchFamily="49" charset="0"/>
+              </a:rPr>
+              <a:t>emailService</a:t>
+            </a:r>
+            <a:r>
+              <a:rPr lang="en-US" altLang="ko-KR" sz="1200" b="0">
+                <a:solidFill>
+                  <a:srgbClr val="BBBEBF"/>
+                </a:solidFill>
+                <a:effectLst/>
+                <a:latin typeface="Consolas" panose="020B0609020204030204" pitchFamily="49" charset="0"/>
+              </a:rPr>
+              <a:t>;</a:t>
+            </a:r>
+          </a:p>
+          <a:p>
+            <a:pPr>
+              <a:lnSpc>
+                <a:spcPts val="1425"/>
+              </a:lnSpc>
+              <a:buNone/>
+            </a:pPr>
+            <a:r>
+              <a:rPr lang="en-US" altLang="ko-KR" sz="1200" b="0">
+                <a:solidFill>
+                  <a:srgbClr val="BBBEBF"/>
+                </a:solidFill>
+                <a:effectLst/>
+                <a:latin typeface="Consolas" panose="020B0609020204030204" pitchFamily="49" charset="0"/>
+              </a:rPr>
+              <a:t>    }</a:t>
+            </a:r>
+          </a:p>
+          <a:p>
+            <a:pPr>
+              <a:lnSpc>
+                <a:spcPts val="1425"/>
+              </a:lnSpc>
+              <a:buNone/>
+            </a:pPr>
+            <a:br>
+              <a:rPr lang="en-US" altLang="ko-KR" sz="1200" b="0">
+                <a:solidFill>
+                  <a:srgbClr val="BBBEBF"/>
+                </a:solidFill>
+                <a:effectLst/>
+                <a:latin typeface="Consolas" panose="020B0609020204030204" pitchFamily="49" charset="0"/>
+              </a:rPr>
+            </a:br>
+            <a:endParaRPr lang="en-US" altLang="ko-KR" sz="1200" b="0">
+              <a:solidFill>
+                <a:srgbClr val="BBBEBF"/>
+              </a:solidFill>
+              <a:effectLst/>
+              <a:latin typeface="Consolas" panose="020B0609020204030204" pitchFamily="49" charset="0"/>
+            </a:endParaRPr>
+          </a:p>
+          <a:p>
+            <a:pPr>
+              <a:lnSpc>
+                <a:spcPts val="1425"/>
+              </a:lnSpc>
+              <a:buNone/>
+            </a:pPr>
+            <a:r>
+              <a:rPr lang="en-US" altLang="ko-KR" sz="1200" b="0">
+                <a:solidFill>
+                  <a:srgbClr val="BBBEBF"/>
+                </a:solidFill>
+                <a:effectLst/>
+                <a:latin typeface="Consolas" panose="020B0609020204030204" pitchFamily="49" charset="0"/>
+              </a:rPr>
+              <a:t>    @</a:t>
+            </a:r>
+            <a:r>
+              <a:rPr lang="en-US" altLang="ko-KR" sz="1200" b="0">
+                <a:solidFill>
+                  <a:srgbClr val="4EC9B0"/>
+                </a:solidFill>
+                <a:effectLst/>
+                <a:latin typeface="Consolas" panose="020B0609020204030204" pitchFamily="49" charset="0"/>
+              </a:rPr>
+              <a:t>PostMapping</a:t>
+            </a:r>
+            <a:endParaRPr lang="en-US" altLang="ko-KR" sz="1200" b="0">
+              <a:solidFill>
+                <a:srgbClr val="BBBEBF"/>
+              </a:solidFill>
+              <a:effectLst/>
+              <a:latin typeface="Consolas" panose="020B0609020204030204" pitchFamily="49" charset="0"/>
+            </a:endParaRPr>
+          </a:p>
+          <a:p>
+            <a:pPr>
+              <a:lnSpc>
+                <a:spcPts val="1425"/>
+              </a:lnSpc>
+              <a:buNone/>
+            </a:pPr>
+            <a:r>
+              <a:rPr lang="en-US" altLang="ko-KR" sz="1200" b="0">
+                <a:solidFill>
+                  <a:srgbClr val="BBBEBF"/>
+                </a:solidFill>
+                <a:effectLst/>
+                <a:latin typeface="Consolas" panose="020B0609020204030204" pitchFamily="49" charset="0"/>
+              </a:rPr>
+              <a:t>    </a:t>
+            </a:r>
+            <a:r>
+              <a:rPr lang="en-US" altLang="ko-KR" sz="1200" b="0">
+                <a:solidFill>
+                  <a:srgbClr val="569CD6"/>
+                </a:solidFill>
+                <a:effectLst/>
+                <a:latin typeface="Consolas" panose="020B0609020204030204" pitchFamily="49" charset="0"/>
+              </a:rPr>
+              <a:t>public</a:t>
+            </a:r>
+            <a:r>
+              <a:rPr lang="en-US" altLang="ko-KR" sz="1200" b="0">
+                <a:solidFill>
+                  <a:srgbClr val="BBBEBF"/>
+                </a:solidFill>
+                <a:effectLst/>
+                <a:latin typeface="Consolas" panose="020B0609020204030204" pitchFamily="49" charset="0"/>
+              </a:rPr>
+              <a:t> </a:t>
+            </a:r>
+            <a:r>
+              <a:rPr lang="en-US" altLang="ko-KR" sz="1200" b="0">
+                <a:solidFill>
+                  <a:srgbClr val="4EC9B0"/>
+                </a:solidFill>
+                <a:effectLst/>
+                <a:latin typeface="Consolas" panose="020B0609020204030204" pitchFamily="49" charset="0"/>
+              </a:rPr>
+              <a:t>ResponseEntity</a:t>
+            </a:r>
+            <a:r>
+              <a:rPr lang="en-US" altLang="ko-KR" sz="1200" b="0">
+                <a:solidFill>
+                  <a:srgbClr val="BBBEBF"/>
+                </a:solidFill>
+                <a:effectLst/>
+                <a:latin typeface="Consolas" panose="020B0609020204030204" pitchFamily="49" charset="0"/>
+              </a:rPr>
+              <a:t>&lt;</a:t>
+            </a:r>
+            <a:r>
+              <a:rPr lang="en-US" altLang="ko-KR" sz="1200" b="0">
+                <a:solidFill>
+                  <a:srgbClr val="4EC9B0"/>
+                </a:solidFill>
+                <a:effectLst/>
+                <a:latin typeface="Consolas" panose="020B0609020204030204" pitchFamily="49" charset="0"/>
+              </a:rPr>
+              <a:t>String</a:t>
+            </a:r>
+            <a:r>
+              <a:rPr lang="en-US" altLang="ko-KR" sz="1200" b="0">
+                <a:solidFill>
+                  <a:srgbClr val="BBBEBF"/>
+                </a:solidFill>
+                <a:effectLst/>
+                <a:latin typeface="Consolas" panose="020B0609020204030204" pitchFamily="49" charset="0"/>
+              </a:rPr>
+              <a:t>&gt; </a:t>
+            </a:r>
+            <a:r>
+              <a:rPr lang="en-US" altLang="ko-KR" sz="1200" b="0">
+                <a:solidFill>
+                  <a:srgbClr val="D2A8FF"/>
+                </a:solidFill>
+                <a:effectLst/>
+                <a:latin typeface="Consolas" panose="020B0609020204030204" pitchFamily="49" charset="0"/>
+              </a:rPr>
+              <a:t>sendEmail</a:t>
+            </a:r>
+            <a:r>
+              <a:rPr lang="en-US" altLang="ko-KR" sz="1200" b="0">
+                <a:solidFill>
+                  <a:srgbClr val="BBBEBF"/>
+                </a:solidFill>
+                <a:effectLst/>
+                <a:latin typeface="Consolas" panose="020B0609020204030204" pitchFamily="49" charset="0"/>
+              </a:rPr>
+              <a:t>(</a:t>
+            </a:r>
+          </a:p>
+          <a:p>
+            <a:pPr>
+              <a:lnSpc>
+                <a:spcPts val="1425"/>
+              </a:lnSpc>
+              <a:buNone/>
+            </a:pPr>
+            <a:r>
+              <a:rPr lang="en-US" altLang="ko-KR" sz="1200" b="0">
+                <a:solidFill>
+                  <a:srgbClr val="BBBEBF"/>
+                </a:solidFill>
+                <a:effectLst/>
+                <a:latin typeface="Consolas" panose="020B0609020204030204" pitchFamily="49" charset="0"/>
+              </a:rPr>
+              <a:t>        @</a:t>
+            </a:r>
+            <a:r>
+              <a:rPr lang="en-US" altLang="ko-KR" sz="1200" b="0">
+                <a:solidFill>
+                  <a:srgbClr val="4EC9B0"/>
+                </a:solidFill>
+                <a:effectLst/>
+                <a:latin typeface="Consolas" panose="020B0609020204030204" pitchFamily="49" charset="0"/>
+              </a:rPr>
+              <a:t>RequestBody</a:t>
+            </a:r>
+            <a:r>
+              <a:rPr lang="en-US" altLang="ko-KR" sz="1200" b="0">
+                <a:solidFill>
+                  <a:srgbClr val="BBBEBF"/>
+                </a:solidFill>
+                <a:effectLst/>
+                <a:latin typeface="Consolas" panose="020B0609020204030204" pitchFamily="49" charset="0"/>
+              </a:rPr>
+              <a:t> </a:t>
+            </a:r>
+            <a:r>
+              <a:rPr lang="en-US" altLang="ko-KR" sz="1200" b="0">
+                <a:solidFill>
+                  <a:srgbClr val="4EC9B0"/>
+                </a:solidFill>
+                <a:effectLst/>
+                <a:latin typeface="Consolas" panose="020B0609020204030204" pitchFamily="49" charset="0"/>
+              </a:rPr>
+              <a:t>SendEmailRequestDto</a:t>
+            </a:r>
+            <a:r>
+              <a:rPr lang="en-US" altLang="ko-KR" sz="1200" b="0">
+                <a:solidFill>
+                  <a:srgbClr val="BBBEBF"/>
+                </a:solidFill>
+                <a:effectLst/>
+                <a:latin typeface="Consolas" panose="020B0609020204030204" pitchFamily="49" charset="0"/>
+              </a:rPr>
+              <a:t> </a:t>
+            </a:r>
+            <a:r>
+              <a:rPr lang="en-US" altLang="ko-KR" sz="1200" b="0">
+                <a:solidFill>
+                  <a:srgbClr val="FFA657"/>
+                </a:solidFill>
+                <a:effectLst/>
+                <a:latin typeface="Consolas" panose="020B0609020204030204" pitchFamily="49" charset="0"/>
+              </a:rPr>
+              <a:t>sendemailRequestDto</a:t>
+            </a:r>
+            <a:endParaRPr lang="en-US" altLang="ko-KR" sz="1200" b="0">
+              <a:solidFill>
+                <a:srgbClr val="BBBEBF"/>
+              </a:solidFill>
+              <a:effectLst/>
+              <a:latin typeface="Consolas" panose="020B0609020204030204" pitchFamily="49" charset="0"/>
+            </a:endParaRPr>
+          </a:p>
+          <a:p>
+            <a:pPr>
+              <a:lnSpc>
+                <a:spcPts val="1425"/>
+              </a:lnSpc>
+              <a:buNone/>
+            </a:pPr>
+            <a:r>
+              <a:rPr lang="en-US" altLang="ko-KR" sz="1200" b="0">
+                <a:solidFill>
+                  <a:srgbClr val="BBBEBF"/>
+                </a:solidFill>
+                <a:effectLst/>
+                <a:latin typeface="Consolas" panose="020B0609020204030204" pitchFamily="49" charset="0"/>
+              </a:rPr>
+              <a:t>    ){</a:t>
+            </a:r>
+          </a:p>
+          <a:p>
+            <a:pPr>
+              <a:lnSpc>
+                <a:spcPts val="1425"/>
+              </a:lnSpc>
+              <a:buNone/>
+            </a:pPr>
+            <a:r>
+              <a:rPr lang="en-US" altLang="ko-KR" sz="1200" b="0">
+                <a:solidFill>
+                  <a:srgbClr val="BBBEBF"/>
+                </a:solidFill>
+                <a:effectLst/>
+                <a:latin typeface="Consolas" panose="020B0609020204030204" pitchFamily="49" charset="0"/>
+              </a:rPr>
+              <a:t>        </a:t>
+            </a:r>
+            <a:r>
+              <a:rPr lang="en-US" altLang="ko-KR" sz="1200" b="0">
+                <a:solidFill>
+                  <a:srgbClr val="79C0FF"/>
+                </a:solidFill>
+                <a:effectLst/>
+                <a:latin typeface="Consolas" panose="020B0609020204030204" pitchFamily="49" charset="0"/>
+              </a:rPr>
+              <a:t>emailService</a:t>
+            </a:r>
+            <a:r>
+              <a:rPr lang="en-US" altLang="ko-KR" sz="1200" b="0">
+                <a:solidFill>
+                  <a:srgbClr val="BBBEBF"/>
+                </a:solidFill>
+                <a:effectLst/>
+                <a:latin typeface="Consolas" panose="020B0609020204030204" pitchFamily="49" charset="0"/>
+              </a:rPr>
+              <a:t>.</a:t>
+            </a:r>
+            <a:r>
+              <a:rPr lang="en-US" altLang="ko-KR" sz="1200" b="0">
+                <a:solidFill>
+                  <a:srgbClr val="D2A8FF"/>
+                </a:solidFill>
+                <a:effectLst/>
+                <a:latin typeface="Consolas" panose="020B0609020204030204" pitchFamily="49" charset="0"/>
+              </a:rPr>
+              <a:t>sendEmail</a:t>
+            </a:r>
+            <a:r>
+              <a:rPr lang="en-US" altLang="ko-KR" sz="1200" b="0">
+                <a:solidFill>
+                  <a:srgbClr val="BBBEBF"/>
+                </a:solidFill>
+                <a:effectLst/>
+                <a:latin typeface="Consolas" panose="020B0609020204030204" pitchFamily="49" charset="0"/>
+              </a:rPr>
+              <a:t>(</a:t>
+            </a:r>
+            <a:r>
+              <a:rPr lang="en-US" altLang="ko-KR" sz="1200" b="0">
+                <a:solidFill>
+                  <a:srgbClr val="FFA657"/>
+                </a:solidFill>
+                <a:effectLst/>
+                <a:latin typeface="Consolas" panose="020B0609020204030204" pitchFamily="49" charset="0"/>
+              </a:rPr>
+              <a:t>sendemailRequestDto</a:t>
+            </a:r>
+            <a:r>
+              <a:rPr lang="en-US" altLang="ko-KR" sz="1200" b="0">
+                <a:solidFill>
+                  <a:srgbClr val="BBBEBF"/>
+                </a:solidFill>
+                <a:effectLst/>
+                <a:latin typeface="Consolas" panose="020B0609020204030204" pitchFamily="49" charset="0"/>
+              </a:rPr>
+              <a:t>);</a:t>
+            </a:r>
+          </a:p>
+          <a:p>
+            <a:pPr>
+              <a:lnSpc>
+                <a:spcPts val="1425"/>
+              </a:lnSpc>
+              <a:buNone/>
+            </a:pPr>
+            <a:r>
+              <a:rPr lang="en-US" altLang="ko-KR" sz="1200" b="0">
+                <a:solidFill>
+                  <a:srgbClr val="BBBEBF"/>
+                </a:solidFill>
+                <a:effectLst/>
+                <a:latin typeface="Consolas" panose="020B0609020204030204" pitchFamily="49" charset="0"/>
+              </a:rPr>
+              <a:t>        </a:t>
+            </a:r>
+            <a:r>
+              <a:rPr lang="en-US" altLang="ko-KR" sz="1200" b="0">
+                <a:solidFill>
+                  <a:srgbClr val="C586C0"/>
+                </a:solidFill>
+                <a:effectLst/>
+                <a:latin typeface="Consolas" panose="020B0609020204030204" pitchFamily="49" charset="0"/>
+              </a:rPr>
+              <a:t>return</a:t>
+            </a:r>
+            <a:r>
+              <a:rPr lang="en-US" altLang="ko-KR" sz="1200" b="0">
+                <a:solidFill>
+                  <a:srgbClr val="BBBEBF"/>
+                </a:solidFill>
+                <a:effectLst/>
+                <a:latin typeface="Consolas" panose="020B0609020204030204" pitchFamily="49" charset="0"/>
+              </a:rPr>
+              <a:t> </a:t>
+            </a:r>
+            <a:r>
+              <a:rPr lang="en-US" altLang="ko-KR" sz="1200" b="0">
+                <a:solidFill>
+                  <a:srgbClr val="4EC9B0"/>
+                </a:solidFill>
+                <a:effectLst/>
+                <a:latin typeface="Consolas" panose="020B0609020204030204" pitchFamily="49" charset="0"/>
+              </a:rPr>
+              <a:t>ResponseEntity</a:t>
+            </a:r>
+            <a:r>
+              <a:rPr lang="en-US" altLang="ko-KR" sz="1200" b="0">
+                <a:solidFill>
+                  <a:srgbClr val="BBBEBF"/>
+                </a:solidFill>
+                <a:effectLst/>
+                <a:latin typeface="Consolas" panose="020B0609020204030204" pitchFamily="49" charset="0"/>
+              </a:rPr>
+              <a:t>.</a:t>
+            </a:r>
+            <a:r>
+              <a:rPr lang="en-US" altLang="ko-KR" sz="1200" b="0">
+                <a:solidFill>
+                  <a:srgbClr val="D2A8FF"/>
+                </a:solidFill>
+                <a:effectLst/>
+                <a:latin typeface="Consolas" panose="020B0609020204030204" pitchFamily="49" charset="0"/>
+              </a:rPr>
+              <a:t>ok</a:t>
+            </a:r>
+            <a:r>
+              <a:rPr lang="en-US" altLang="ko-KR" sz="1200" b="0">
+                <a:solidFill>
+                  <a:srgbClr val="BBBEBF"/>
+                </a:solidFill>
+                <a:effectLst/>
+                <a:latin typeface="Consolas" panose="020B0609020204030204" pitchFamily="49" charset="0"/>
+              </a:rPr>
+              <a:t>(</a:t>
+            </a:r>
+            <a:r>
+              <a:rPr lang="en-US" altLang="ko-KR" sz="1200" b="0">
+                <a:solidFill>
+                  <a:srgbClr val="A5D6FF"/>
+                </a:solidFill>
+                <a:effectLst/>
+                <a:latin typeface="Consolas" panose="020B0609020204030204" pitchFamily="49" charset="0"/>
+              </a:rPr>
+              <a:t>"</a:t>
+            </a:r>
+            <a:r>
+              <a:rPr lang="ko-KR" altLang="en-US" sz="1200" b="0">
+                <a:solidFill>
+                  <a:srgbClr val="A5D6FF"/>
+                </a:solidFill>
+                <a:effectLst/>
+                <a:latin typeface="Consolas" panose="020B0609020204030204" pitchFamily="49" charset="0"/>
+              </a:rPr>
+              <a:t>이메일 발송 요청 완료</a:t>
+            </a:r>
+            <a:r>
+              <a:rPr lang="en-US" altLang="ko-KR" sz="1200" b="0">
+                <a:solidFill>
+                  <a:srgbClr val="A5D6FF"/>
+                </a:solidFill>
+                <a:effectLst/>
+                <a:latin typeface="Consolas" panose="020B0609020204030204" pitchFamily="49" charset="0"/>
+              </a:rPr>
+              <a:t>"</a:t>
+            </a:r>
+            <a:r>
+              <a:rPr lang="en-US" altLang="ko-KR" sz="1200" b="0">
+                <a:solidFill>
+                  <a:srgbClr val="BBBEBF"/>
+                </a:solidFill>
+                <a:effectLst/>
+                <a:latin typeface="Consolas" panose="020B0609020204030204" pitchFamily="49" charset="0"/>
+              </a:rPr>
+              <a:t>);</a:t>
+            </a:r>
+          </a:p>
+          <a:p>
+            <a:pPr>
+              <a:lnSpc>
+                <a:spcPts val="1425"/>
+              </a:lnSpc>
+              <a:buNone/>
+            </a:pPr>
+            <a:r>
+              <a:rPr lang="en-US" altLang="ko-KR" sz="1200" b="0">
+                <a:solidFill>
+                  <a:srgbClr val="BBBEBF"/>
+                </a:solidFill>
+                <a:effectLst/>
+                <a:latin typeface="Consolas" panose="020B0609020204030204" pitchFamily="49" charset="0"/>
+              </a:rPr>
+              <a:t>    }</a:t>
+            </a:r>
+          </a:p>
+          <a:p>
+            <a:pPr>
+              <a:lnSpc>
+                <a:spcPts val="1425"/>
+              </a:lnSpc>
+              <a:buNone/>
+            </a:pPr>
+            <a:br>
+              <a:rPr lang="en-US" altLang="ko-KR" sz="1200" b="0">
+                <a:solidFill>
+                  <a:srgbClr val="BBBEBF"/>
+                </a:solidFill>
+                <a:effectLst/>
+                <a:latin typeface="Consolas" panose="020B0609020204030204" pitchFamily="49" charset="0"/>
+              </a:rPr>
+            </a:br>
+            <a:endParaRPr lang="en-US" altLang="ko-KR" sz="1200" b="0">
+              <a:solidFill>
+                <a:srgbClr val="BBBEBF"/>
+              </a:solidFill>
+              <a:effectLst/>
+              <a:latin typeface="Consolas" panose="020B0609020204030204" pitchFamily="49" charset="0"/>
+            </a:endParaRPr>
+          </a:p>
+          <a:p>
+            <a:pPr>
+              <a:lnSpc>
+                <a:spcPts val="1425"/>
+              </a:lnSpc>
+              <a:buNone/>
+            </a:pPr>
+            <a:r>
+              <a:rPr lang="en-US" altLang="ko-KR" sz="1200" b="0">
+                <a:solidFill>
+                  <a:srgbClr val="BBBEBF"/>
+                </a:solidFill>
+                <a:effectLst/>
+                <a:latin typeface="Consolas" panose="020B0609020204030204" pitchFamily="49" charset="0"/>
+              </a:rPr>
+              <a:t>}</a:t>
+            </a:r>
+          </a:p>
+        </p:txBody>
+      </p:sp>
+      <p:grpSp>
+        <p:nvGrpSpPr>
+          <p:cNvPr id="8" name="그룹 7">
+            <a:extLst>
+              <a:ext uri="{FF2B5EF4-FFF2-40B4-BE49-F238E27FC236}">
+                <a16:creationId xmlns:a16="http://schemas.microsoft.com/office/drawing/2014/main" id="{383B956A-72F8-E9A2-8D5B-39DE6B02AC68}"/>
+              </a:ext>
+            </a:extLst>
+          </p:cNvPr>
+          <p:cNvGrpSpPr/>
+          <p:nvPr/>
+        </p:nvGrpSpPr>
+        <p:grpSpPr>
+          <a:xfrm>
+            <a:off x="1386078" y="1996720"/>
+            <a:ext cx="2772162" cy="3848637"/>
+            <a:chOff x="1386078" y="1996720"/>
+            <a:chExt cx="2772162" cy="3848637"/>
+          </a:xfrm>
+        </p:grpSpPr>
+        <p:pic>
+          <p:nvPicPr>
+            <p:cNvPr id="6" name="그림 5">
+              <a:extLst>
+                <a:ext uri="{FF2B5EF4-FFF2-40B4-BE49-F238E27FC236}">
+                  <a16:creationId xmlns:a16="http://schemas.microsoft.com/office/drawing/2014/main" id="{75B60D73-CBC4-ADCB-2FC8-F18211BE1B99}"/>
+                </a:ext>
+              </a:extLst>
+            </p:cNvPr>
+            <p:cNvPicPr>
+              <a:picLocks noChangeAspect="1"/>
+            </p:cNvPicPr>
+            <p:nvPr/>
+          </p:nvPicPr>
+          <p:blipFill>
+            <a:blip r:embed="rId2"/>
+            <a:stretch>
+              <a:fillRect/>
+            </a:stretch>
+          </p:blipFill>
+          <p:spPr>
+            <a:xfrm>
+              <a:off x="1386078" y="1996720"/>
+              <a:ext cx="2772162" cy="3848637"/>
+            </a:xfrm>
+            <a:prstGeom prst="rect">
+              <a:avLst/>
+            </a:prstGeom>
+          </p:spPr>
+        </p:pic>
+        <p:sp>
+          <p:nvSpPr>
+            <p:cNvPr id="7" name="직사각형 6">
+              <a:extLst>
+                <a:ext uri="{FF2B5EF4-FFF2-40B4-BE49-F238E27FC236}">
+                  <a16:creationId xmlns:a16="http://schemas.microsoft.com/office/drawing/2014/main" id="{AC3EB8AE-EF54-FE66-0834-7E35DF219386}"/>
+                </a:ext>
+              </a:extLst>
+            </p:cNvPr>
+            <p:cNvSpPr/>
+            <p:nvPr/>
+          </p:nvSpPr>
+          <p:spPr>
+            <a:xfrm>
+              <a:off x="1655064" y="3921038"/>
+              <a:ext cx="1563624" cy="193762"/>
+            </a:xfrm>
+            <a:prstGeom prst="rect">
+              <a:avLst/>
+            </a:prstGeom>
+            <a:noFill/>
+            <a:ln>
+              <a:solidFill>
+                <a:srgbClr val="FF0000"/>
+              </a:solidFill>
+            </a:ln>
+          </p:spPr>
+          <p:style>
+            <a:lnRef idx="2">
+              <a:schemeClr val="accent1">
+                <a:shade val="15000"/>
+              </a:schemeClr>
+            </a:lnRef>
+            <a:fillRef idx="1">
+              <a:schemeClr val="accent1"/>
+            </a:fillRef>
+            <a:effectRef idx="0">
+              <a:schemeClr val="accent1"/>
+            </a:effectRef>
+            <a:fontRef idx="minor">
+              <a:schemeClr val="lt1"/>
+            </a:fontRef>
+          </p:style>
+          <p:txBody>
+            <a:bodyPr rtlCol="0" anchor="ctr"/>
+            <a:lstStyle/>
+            <a:p>
+              <a:pPr algn="ctr"/>
+              <a:endParaRPr lang="ko-KR" altLang="en-US"/>
+            </a:p>
+          </p:txBody>
+        </p:sp>
+      </p:grpSp>
+    </p:spTree>
+    <p:extLst>
+      <p:ext uri="{BB962C8B-B14F-4D97-AF65-F5344CB8AC3E}">
+        <p14:creationId xmlns:p14="http://schemas.microsoft.com/office/powerpoint/2010/main" val="1421950932"/>
+      </p:ext>
+    </p:extLst>
+  </p:cSld>
+  <p:clrMapOvr>
+    <a:masterClrMapping/>
+  </p:clrMapOvr>
+</p:sld>
+</file>
+
+<file path=ppt/slides/slide18.xml><?xml version="1.0" encoding="utf-8"?>
+<p:sld xmlns:a="http://schemas.openxmlformats.org/drawingml/2006/main" xmlns:r="http://schemas.openxmlformats.org/officeDocument/2006/relationships" xmlns:p="http://schemas.openxmlformats.org/presentationml/2006/main">
+  <p:cSld>
+    <p:spTree>
+      <p:nvGrpSpPr>
+        <p:cNvPr id="1" name=""/>
+        <p:cNvGrpSpPr/>
+        <p:nvPr/>
+      </p:nvGrpSpPr>
+      <p:grpSpPr>
+        <a:xfrm>
+          <a:off x="0" y="0"/>
+          <a:ext cx="0" cy="0"/>
+          <a:chOff x="0" y="0"/>
+          <a:chExt cx="0" cy="0"/>
+        </a:xfrm>
+      </p:grpSpPr>
+      <p:sp>
+        <p:nvSpPr>
+          <p:cNvPr id="2" name="제목 1">
+            <a:extLst>
+              <a:ext uri="{FF2B5EF4-FFF2-40B4-BE49-F238E27FC236}">
+                <a16:creationId xmlns:a16="http://schemas.microsoft.com/office/drawing/2014/main" id="{DF78D7C8-77B8-1609-9C7C-56D9D679F61A}"/>
+              </a:ext>
+            </a:extLst>
+          </p:cNvPr>
+          <p:cNvSpPr>
+            <a:spLocks noGrp="1"/>
+          </p:cNvSpPr>
+          <p:nvPr>
+            <p:ph type="title"/>
+          </p:nvPr>
+        </p:nvSpPr>
+        <p:spPr/>
+        <p:txBody>
+          <a:bodyPr>
+            <a:noAutofit/>
+          </a:bodyPr>
+          <a:lstStyle/>
+          <a:p>
+            <a:r>
+              <a:rPr lang="ko-KR" altLang="en-US" sz="3600"/>
+              <a:t>요청 </a:t>
+            </a:r>
+            <a:r>
+              <a:rPr lang="en-US" altLang="ko-KR" sz="3600"/>
+              <a:t>DTO </a:t>
+            </a:r>
+            <a:r>
+              <a:rPr lang="ko-KR" altLang="en-US" sz="3600"/>
+              <a:t>작성</a:t>
+            </a:r>
+            <a:r>
+              <a:rPr lang="en-US" altLang="ko-KR" sz="3600"/>
+              <a:t>(SendEmailRequestDto)</a:t>
+            </a:r>
+            <a:endParaRPr lang="ko-KR" altLang="en-US" sz="3600"/>
+          </a:p>
+        </p:txBody>
+      </p:sp>
+      <p:grpSp>
+        <p:nvGrpSpPr>
+          <p:cNvPr id="8" name="그룹 7">
+            <a:extLst>
+              <a:ext uri="{FF2B5EF4-FFF2-40B4-BE49-F238E27FC236}">
+                <a16:creationId xmlns:a16="http://schemas.microsoft.com/office/drawing/2014/main" id="{3B38BBF7-1C64-D432-B3F5-1EF8B0C3CFF1}"/>
+              </a:ext>
+            </a:extLst>
+          </p:cNvPr>
+          <p:cNvGrpSpPr/>
+          <p:nvPr/>
+        </p:nvGrpSpPr>
+        <p:grpSpPr>
+          <a:xfrm>
+            <a:off x="1241109" y="1847960"/>
+            <a:ext cx="2705478" cy="4277322"/>
+            <a:chOff x="1241109" y="1847960"/>
+            <a:chExt cx="2705478" cy="4277322"/>
+          </a:xfrm>
+        </p:grpSpPr>
+        <p:pic>
+          <p:nvPicPr>
+            <p:cNvPr id="6" name="그림 5">
+              <a:extLst>
+                <a:ext uri="{FF2B5EF4-FFF2-40B4-BE49-F238E27FC236}">
+                  <a16:creationId xmlns:a16="http://schemas.microsoft.com/office/drawing/2014/main" id="{F1596417-EF6F-E901-B122-3C0CCA6DC53A}"/>
+                </a:ext>
+              </a:extLst>
+            </p:cNvPr>
+            <p:cNvPicPr>
+              <a:picLocks noChangeAspect="1"/>
+            </p:cNvPicPr>
+            <p:nvPr/>
+          </p:nvPicPr>
+          <p:blipFill>
+            <a:blip r:embed="rId2"/>
+            <a:stretch>
+              <a:fillRect/>
+            </a:stretch>
+          </p:blipFill>
+          <p:spPr>
+            <a:xfrm>
+              <a:off x="1241109" y="1847960"/>
+              <a:ext cx="2705478" cy="4277322"/>
+            </a:xfrm>
+            <a:prstGeom prst="rect">
+              <a:avLst/>
+            </a:prstGeom>
+          </p:spPr>
+        </p:pic>
+        <p:sp>
+          <p:nvSpPr>
+            <p:cNvPr id="7" name="직사각형 6">
+              <a:extLst>
+                <a:ext uri="{FF2B5EF4-FFF2-40B4-BE49-F238E27FC236}">
+                  <a16:creationId xmlns:a16="http://schemas.microsoft.com/office/drawing/2014/main" id="{B78337EA-4F53-0278-13F5-5488A321CA07}"/>
+                </a:ext>
+              </a:extLst>
+            </p:cNvPr>
+            <p:cNvSpPr/>
+            <p:nvPr/>
+          </p:nvSpPr>
+          <p:spPr>
+            <a:xfrm>
+              <a:off x="1481328" y="3300984"/>
+              <a:ext cx="1792224" cy="274320"/>
+            </a:xfrm>
+            <a:prstGeom prst="rect">
+              <a:avLst/>
+            </a:prstGeom>
+            <a:noFill/>
+            <a:ln>
+              <a:solidFill>
+                <a:srgbClr val="FF0000"/>
+              </a:solidFill>
+            </a:ln>
+          </p:spPr>
+          <p:style>
+            <a:lnRef idx="2">
+              <a:schemeClr val="accent1">
+                <a:shade val="15000"/>
+              </a:schemeClr>
+            </a:lnRef>
+            <a:fillRef idx="1">
+              <a:schemeClr val="accent1"/>
+            </a:fillRef>
+            <a:effectRef idx="0">
+              <a:schemeClr val="accent1"/>
+            </a:effectRef>
+            <a:fontRef idx="minor">
+              <a:schemeClr val="lt1"/>
+            </a:fontRef>
+          </p:style>
+          <p:txBody>
+            <a:bodyPr rtlCol="0" anchor="ctr"/>
+            <a:lstStyle/>
+            <a:p>
+              <a:pPr algn="ctr"/>
+              <a:endParaRPr lang="ko-KR" altLang="en-US"/>
+            </a:p>
+          </p:txBody>
+        </p:sp>
+      </p:grpSp>
+      <p:sp>
+        <p:nvSpPr>
+          <p:cNvPr id="10" name="TextBox 9">
+            <a:extLst>
+              <a:ext uri="{FF2B5EF4-FFF2-40B4-BE49-F238E27FC236}">
+                <a16:creationId xmlns:a16="http://schemas.microsoft.com/office/drawing/2014/main" id="{07005507-E86F-B00B-94E4-71E61908AB6A}"/>
+              </a:ext>
+            </a:extLst>
+          </p:cNvPr>
+          <p:cNvSpPr txBox="1"/>
+          <p:nvPr/>
+        </p:nvSpPr>
+        <p:spPr>
+          <a:xfrm>
+            <a:off x="4186806" y="1875152"/>
+            <a:ext cx="3573018" cy="3125984"/>
+          </a:xfrm>
+          <a:prstGeom prst="rect">
+            <a:avLst/>
+          </a:prstGeom>
+          <a:solidFill>
+            <a:schemeClr val="tx1"/>
+          </a:solidFill>
+        </p:spPr>
+        <p:txBody>
+          <a:bodyPr wrap="square">
+            <a:spAutoFit/>
+          </a:bodyPr>
+          <a:lstStyle/>
+          <a:p>
+            <a:pPr>
+              <a:lnSpc>
+                <a:spcPts val="1425"/>
+              </a:lnSpc>
+              <a:buNone/>
+            </a:pPr>
+            <a:r>
+              <a:rPr lang="en-US" altLang="ko-KR" sz="800" b="0">
+                <a:solidFill>
+                  <a:srgbClr val="569CD6"/>
+                </a:solidFill>
+                <a:effectLst/>
+                <a:latin typeface="Consolas" panose="020B0609020204030204" pitchFamily="49" charset="0"/>
+              </a:rPr>
+              <a:t>public</a:t>
+            </a:r>
+            <a:r>
+              <a:rPr lang="en-US" altLang="ko-KR" sz="800" b="0">
+                <a:solidFill>
+                  <a:srgbClr val="BBBEBF"/>
+                </a:solidFill>
+                <a:effectLst/>
+                <a:latin typeface="Consolas" panose="020B0609020204030204" pitchFamily="49" charset="0"/>
+              </a:rPr>
+              <a:t> </a:t>
+            </a:r>
+            <a:r>
+              <a:rPr lang="en-US" altLang="ko-KR" sz="800" b="0">
+                <a:solidFill>
+                  <a:srgbClr val="569CD6"/>
+                </a:solidFill>
+                <a:effectLst/>
+                <a:latin typeface="Consolas" panose="020B0609020204030204" pitchFamily="49" charset="0"/>
+              </a:rPr>
+              <a:t>class</a:t>
+            </a:r>
+            <a:r>
+              <a:rPr lang="en-US" altLang="ko-KR" sz="800" b="0">
+                <a:solidFill>
+                  <a:srgbClr val="BBBEBF"/>
+                </a:solidFill>
+                <a:effectLst/>
+                <a:latin typeface="Consolas" panose="020B0609020204030204" pitchFamily="49" charset="0"/>
+              </a:rPr>
+              <a:t> </a:t>
+            </a:r>
+            <a:r>
+              <a:rPr lang="en-US" altLang="ko-KR" sz="800" b="0">
+                <a:solidFill>
+                  <a:srgbClr val="4EC9B0"/>
+                </a:solidFill>
+                <a:effectLst/>
+                <a:latin typeface="Consolas" panose="020B0609020204030204" pitchFamily="49" charset="0"/>
+              </a:rPr>
+              <a:t>SendEmailRequestDto</a:t>
+            </a:r>
+            <a:r>
+              <a:rPr lang="en-US" altLang="ko-KR" sz="800" b="0">
+                <a:solidFill>
+                  <a:srgbClr val="BBBEBF"/>
+                </a:solidFill>
+                <a:effectLst/>
+                <a:latin typeface="Consolas" panose="020B0609020204030204" pitchFamily="49" charset="0"/>
+              </a:rPr>
+              <a:t> {</a:t>
+            </a:r>
+          </a:p>
+          <a:p>
+            <a:pPr>
+              <a:lnSpc>
+                <a:spcPts val="1425"/>
+              </a:lnSpc>
+              <a:buNone/>
+            </a:pPr>
+            <a:r>
+              <a:rPr lang="en-US" altLang="ko-KR" sz="800" b="0">
+                <a:solidFill>
+                  <a:srgbClr val="BBBEBF"/>
+                </a:solidFill>
+                <a:effectLst/>
+                <a:latin typeface="Consolas" panose="020B0609020204030204" pitchFamily="49" charset="0"/>
+              </a:rPr>
+              <a:t>    </a:t>
+            </a:r>
+            <a:r>
+              <a:rPr lang="en-US" altLang="ko-KR" sz="800" b="0">
+                <a:solidFill>
+                  <a:srgbClr val="569CD6"/>
+                </a:solidFill>
+                <a:effectLst/>
+                <a:latin typeface="Consolas" panose="020B0609020204030204" pitchFamily="49" charset="0"/>
+              </a:rPr>
+              <a:t>private</a:t>
+            </a:r>
+            <a:r>
+              <a:rPr lang="en-US" altLang="ko-KR" sz="800" b="0">
+                <a:solidFill>
+                  <a:srgbClr val="BBBEBF"/>
+                </a:solidFill>
+                <a:effectLst/>
+                <a:latin typeface="Consolas" panose="020B0609020204030204" pitchFamily="49" charset="0"/>
+              </a:rPr>
+              <a:t> </a:t>
+            </a:r>
+            <a:r>
+              <a:rPr lang="en-US" altLang="ko-KR" sz="800" b="0">
+                <a:solidFill>
+                  <a:srgbClr val="4EC9B0"/>
+                </a:solidFill>
+                <a:effectLst/>
+                <a:latin typeface="Consolas" panose="020B0609020204030204" pitchFamily="49" charset="0"/>
+              </a:rPr>
+              <a:t>String</a:t>
+            </a:r>
+            <a:r>
+              <a:rPr lang="en-US" altLang="ko-KR" sz="800" b="0">
+                <a:solidFill>
+                  <a:srgbClr val="FFA657"/>
+                </a:solidFill>
+                <a:effectLst/>
+                <a:latin typeface="Consolas" panose="020B0609020204030204" pitchFamily="49" charset="0"/>
+              </a:rPr>
+              <a:t> </a:t>
+            </a:r>
+            <a:r>
+              <a:rPr lang="en-US" altLang="ko-KR" sz="800" b="0">
+                <a:solidFill>
+                  <a:srgbClr val="C9D1D9"/>
+                </a:solidFill>
+                <a:effectLst/>
+                <a:latin typeface="Consolas" panose="020B0609020204030204" pitchFamily="49" charset="0"/>
+              </a:rPr>
+              <a:t>from</a:t>
+            </a:r>
+            <a:r>
+              <a:rPr lang="en-US" altLang="ko-KR" sz="800" b="0">
+                <a:solidFill>
+                  <a:srgbClr val="BBBEBF"/>
+                </a:solidFill>
+                <a:effectLst/>
+                <a:latin typeface="Consolas" panose="020B0609020204030204" pitchFamily="49" charset="0"/>
+              </a:rPr>
+              <a:t>; </a:t>
+            </a:r>
+            <a:r>
+              <a:rPr lang="en-US" altLang="ko-KR" sz="800" b="0">
+                <a:solidFill>
+                  <a:srgbClr val="8B949E"/>
+                </a:solidFill>
+                <a:effectLst/>
+                <a:latin typeface="Consolas" panose="020B0609020204030204" pitchFamily="49" charset="0"/>
+              </a:rPr>
+              <a:t>// </a:t>
+            </a:r>
+            <a:r>
+              <a:rPr lang="ko-KR" altLang="en-US" sz="800" b="0">
+                <a:solidFill>
+                  <a:srgbClr val="8B949E"/>
+                </a:solidFill>
+                <a:effectLst/>
+                <a:latin typeface="Consolas" panose="020B0609020204030204" pitchFamily="49" charset="0"/>
+              </a:rPr>
+              <a:t>누구로 부터 왔는지 </a:t>
+            </a:r>
+            <a:r>
+              <a:rPr lang="en-US" altLang="ko-KR" sz="800" b="0">
+                <a:solidFill>
+                  <a:srgbClr val="8B949E"/>
+                </a:solidFill>
+                <a:effectLst/>
+                <a:latin typeface="Consolas" panose="020B0609020204030204" pitchFamily="49" charset="0"/>
+              </a:rPr>
+              <a:t>(</a:t>
+            </a:r>
+            <a:r>
+              <a:rPr lang="ko-KR" altLang="en-US" sz="800" b="0">
+                <a:solidFill>
+                  <a:srgbClr val="8B949E"/>
+                </a:solidFill>
+                <a:effectLst/>
+                <a:latin typeface="Consolas" panose="020B0609020204030204" pitchFamily="49" charset="0"/>
+              </a:rPr>
+              <a:t>발신자</a:t>
+            </a:r>
+            <a:r>
+              <a:rPr lang="en-US" altLang="ko-KR" sz="800" b="0">
+                <a:solidFill>
+                  <a:srgbClr val="8B949E"/>
+                </a:solidFill>
+                <a:effectLst/>
+                <a:latin typeface="Consolas" panose="020B0609020204030204" pitchFamily="49" charset="0"/>
+              </a:rPr>
+              <a:t>)</a:t>
+            </a:r>
+            <a:endParaRPr lang="ko-KR" altLang="en-US" sz="800" b="0">
+              <a:solidFill>
+                <a:srgbClr val="BBBEBF"/>
+              </a:solidFill>
+              <a:effectLst/>
+              <a:latin typeface="Consolas" panose="020B0609020204030204" pitchFamily="49" charset="0"/>
+            </a:endParaRPr>
+          </a:p>
+          <a:p>
+            <a:pPr>
+              <a:lnSpc>
+                <a:spcPts val="1425"/>
+              </a:lnSpc>
+              <a:buNone/>
+            </a:pPr>
+            <a:r>
+              <a:rPr lang="ko-KR" altLang="en-US" sz="800" b="0">
+                <a:solidFill>
+                  <a:srgbClr val="BBBEBF"/>
+                </a:solidFill>
+                <a:effectLst/>
+                <a:latin typeface="Consolas" panose="020B0609020204030204" pitchFamily="49" charset="0"/>
+              </a:rPr>
+              <a:t>    </a:t>
+            </a:r>
+            <a:r>
+              <a:rPr lang="en-US" altLang="ko-KR" sz="800" b="0">
+                <a:solidFill>
+                  <a:srgbClr val="569CD6"/>
+                </a:solidFill>
+                <a:effectLst/>
+                <a:latin typeface="Consolas" panose="020B0609020204030204" pitchFamily="49" charset="0"/>
+              </a:rPr>
+              <a:t>private</a:t>
+            </a:r>
+            <a:r>
+              <a:rPr lang="en-US" altLang="ko-KR" sz="800" b="0">
+                <a:solidFill>
+                  <a:srgbClr val="BBBEBF"/>
+                </a:solidFill>
+                <a:effectLst/>
+                <a:latin typeface="Consolas" panose="020B0609020204030204" pitchFamily="49" charset="0"/>
+              </a:rPr>
+              <a:t> </a:t>
+            </a:r>
+            <a:r>
+              <a:rPr lang="en-US" altLang="ko-KR" sz="800" b="0">
+                <a:solidFill>
+                  <a:srgbClr val="4EC9B0"/>
+                </a:solidFill>
+                <a:effectLst/>
+                <a:latin typeface="Consolas" panose="020B0609020204030204" pitchFamily="49" charset="0"/>
+              </a:rPr>
+              <a:t>String</a:t>
+            </a:r>
+            <a:r>
+              <a:rPr lang="en-US" altLang="ko-KR" sz="800" b="0">
+                <a:solidFill>
+                  <a:srgbClr val="FFA657"/>
+                </a:solidFill>
+                <a:effectLst/>
+                <a:latin typeface="Consolas" panose="020B0609020204030204" pitchFamily="49" charset="0"/>
+              </a:rPr>
+              <a:t> </a:t>
+            </a:r>
+            <a:r>
+              <a:rPr lang="en-US" altLang="ko-KR" sz="800" b="0">
+                <a:solidFill>
+                  <a:srgbClr val="C9D1D9"/>
+                </a:solidFill>
+                <a:effectLst/>
+                <a:latin typeface="Consolas" panose="020B0609020204030204" pitchFamily="49" charset="0"/>
+              </a:rPr>
+              <a:t>to</a:t>
+            </a:r>
+            <a:r>
+              <a:rPr lang="en-US" altLang="ko-KR" sz="800" b="0">
+                <a:solidFill>
+                  <a:srgbClr val="BBBEBF"/>
+                </a:solidFill>
+                <a:effectLst/>
+                <a:latin typeface="Consolas" panose="020B0609020204030204" pitchFamily="49" charset="0"/>
+              </a:rPr>
+              <a:t>; </a:t>
+            </a:r>
+            <a:r>
+              <a:rPr lang="en-US" altLang="ko-KR" sz="800" b="0">
+                <a:solidFill>
+                  <a:srgbClr val="8B949E"/>
+                </a:solidFill>
+                <a:effectLst/>
+                <a:latin typeface="Consolas" panose="020B0609020204030204" pitchFamily="49" charset="0"/>
+              </a:rPr>
+              <a:t>// </a:t>
+            </a:r>
+            <a:r>
+              <a:rPr lang="ko-KR" altLang="en-US" sz="800" b="0">
+                <a:solidFill>
+                  <a:srgbClr val="8B949E"/>
+                </a:solidFill>
+                <a:effectLst/>
+                <a:latin typeface="Consolas" panose="020B0609020204030204" pitchFamily="49" charset="0"/>
+              </a:rPr>
+              <a:t>누구에게 보내는지 </a:t>
+            </a:r>
+            <a:r>
+              <a:rPr lang="en-US" altLang="ko-KR" sz="800" b="0">
+                <a:solidFill>
+                  <a:srgbClr val="8B949E"/>
+                </a:solidFill>
+                <a:effectLst/>
+                <a:latin typeface="Consolas" panose="020B0609020204030204" pitchFamily="49" charset="0"/>
+              </a:rPr>
+              <a:t>(</a:t>
+            </a:r>
+            <a:r>
+              <a:rPr lang="ko-KR" altLang="en-US" sz="800" b="0">
+                <a:solidFill>
+                  <a:srgbClr val="8B949E"/>
+                </a:solidFill>
+                <a:effectLst/>
+                <a:latin typeface="Consolas" panose="020B0609020204030204" pitchFamily="49" charset="0"/>
+              </a:rPr>
+              <a:t>수신자</a:t>
+            </a:r>
+            <a:r>
+              <a:rPr lang="en-US" altLang="ko-KR" sz="800" b="0">
+                <a:solidFill>
+                  <a:srgbClr val="8B949E"/>
+                </a:solidFill>
+                <a:effectLst/>
+                <a:latin typeface="Consolas" panose="020B0609020204030204" pitchFamily="49" charset="0"/>
+              </a:rPr>
+              <a:t>)</a:t>
+            </a:r>
+            <a:endParaRPr lang="ko-KR" altLang="en-US" sz="800" b="0">
+              <a:solidFill>
+                <a:srgbClr val="BBBEBF"/>
+              </a:solidFill>
+              <a:effectLst/>
+              <a:latin typeface="Consolas" panose="020B0609020204030204" pitchFamily="49" charset="0"/>
+            </a:endParaRPr>
+          </a:p>
+          <a:p>
+            <a:pPr>
+              <a:lnSpc>
+                <a:spcPts val="1425"/>
+              </a:lnSpc>
+              <a:buNone/>
+            </a:pPr>
+            <a:r>
+              <a:rPr lang="ko-KR" altLang="en-US" sz="800" b="0">
+                <a:solidFill>
+                  <a:srgbClr val="BBBEBF"/>
+                </a:solidFill>
+                <a:effectLst/>
+                <a:latin typeface="Consolas" panose="020B0609020204030204" pitchFamily="49" charset="0"/>
+              </a:rPr>
+              <a:t>    </a:t>
+            </a:r>
+            <a:r>
+              <a:rPr lang="en-US" altLang="ko-KR" sz="800" b="0">
+                <a:solidFill>
+                  <a:srgbClr val="569CD6"/>
+                </a:solidFill>
+                <a:effectLst/>
+                <a:latin typeface="Consolas" panose="020B0609020204030204" pitchFamily="49" charset="0"/>
+              </a:rPr>
+              <a:t>private</a:t>
+            </a:r>
+            <a:r>
+              <a:rPr lang="en-US" altLang="ko-KR" sz="800" b="0">
+                <a:solidFill>
+                  <a:srgbClr val="BBBEBF"/>
+                </a:solidFill>
+                <a:effectLst/>
+                <a:latin typeface="Consolas" panose="020B0609020204030204" pitchFamily="49" charset="0"/>
+              </a:rPr>
+              <a:t> </a:t>
+            </a:r>
+            <a:r>
+              <a:rPr lang="en-US" altLang="ko-KR" sz="800" b="0">
+                <a:solidFill>
+                  <a:srgbClr val="4EC9B0"/>
+                </a:solidFill>
+                <a:effectLst/>
+                <a:latin typeface="Consolas" panose="020B0609020204030204" pitchFamily="49" charset="0"/>
+              </a:rPr>
+              <a:t>String</a:t>
+            </a:r>
+            <a:r>
+              <a:rPr lang="en-US" altLang="ko-KR" sz="800" b="0">
+                <a:solidFill>
+                  <a:srgbClr val="FFA657"/>
+                </a:solidFill>
+                <a:effectLst/>
+                <a:latin typeface="Consolas" panose="020B0609020204030204" pitchFamily="49" charset="0"/>
+              </a:rPr>
+              <a:t> </a:t>
+            </a:r>
+            <a:r>
+              <a:rPr lang="en-US" altLang="ko-KR" sz="800" b="0">
+                <a:solidFill>
+                  <a:srgbClr val="C9D1D9"/>
+                </a:solidFill>
+                <a:effectLst/>
+                <a:latin typeface="Consolas" panose="020B0609020204030204" pitchFamily="49" charset="0"/>
+              </a:rPr>
+              <a:t>subject</a:t>
+            </a:r>
+            <a:r>
+              <a:rPr lang="en-US" altLang="ko-KR" sz="800" b="0">
+                <a:solidFill>
+                  <a:srgbClr val="BBBEBF"/>
+                </a:solidFill>
+                <a:effectLst/>
+                <a:latin typeface="Consolas" panose="020B0609020204030204" pitchFamily="49" charset="0"/>
+              </a:rPr>
+              <a:t>; </a:t>
+            </a:r>
+            <a:r>
+              <a:rPr lang="en-US" altLang="ko-KR" sz="800" b="0">
+                <a:solidFill>
+                  <a:srgbClr val="8B949E"/>
+                </a:solidFill>
+                <a:effectLst/>
+                <a:latin typeface="Consolas" panose="020B0609020204030204" pitchFamily="49" charset="0"/>
+              </a:rPr>
+              <a:t>// </a:t>
+            </a:r>
+            <a:r>
+              <a:rPr lang="ko-KR" altLang="en-US" sz="800" b="0">
+                <a:solidFill>
+                  <a:srgbClr val="8B949E"/>
+                </a:solidFill>
+                <a:effectLst/>
+                <a:latin typeface="Consolas" panose="020B0609020204030204" pitchFamily="49" charset="0"/>
+              </a:rPr>
+              <a:t>제목</a:t>
+            </a:r>
+            <a:endParaRPr lang="ko-KR" altLang="en-US" sz="800" b="0">
+              <a:solidFill>
+                <a:srgbClr val="BBBEBF"/>
+              </a:solidFill>
+              <a:effectLst/>
+              <a:latin typeface="Consolas" panose="020B0609020204030204" pitchFamily="49" charset="0"/>
+            </a:endParaRPr>
+          </a:p>
+          <a:p>
+            <a:pPr>
+              <a:lnSpc>
+                <a:spcPts val="1425"/>
+              </a:lnSpc>
+              <a:buNone/>
+            </a:pPr>
+            <a:r>
+              <a:rPr lang="ko-KR" altLang="en-US" sz="800" b="0">
+                <a:solidFill>
+                  <a:srgbClr val="BBBEBF"/>
+                </a:solidFill>
+                <a:effectLst/>
+                <a:latin typeface="Consolas" panose="020B0609020204030204" pitchFamily="49" charset="0"/>
+              </a:rPr>
+              <a:t>    </a:t>
+            </a:r>
+            <a:r>
+              <a:rPr lang="en-US" altLang="ko-KR" sz="800" b="0">
+                <a:solidFill>
+                  <a:srgbClr val="569CD6"/>
+                </a:solidFill>
+                <a:effectLst/>
+                <a:latin typeface="Consolas" panose="020B0609020204030204" pitchFamily="49" charset="0"/>
+              </a:rPr>
+              <a:t>private</a:t>
+            </a:r>
+            <a:r>
+              <a:rPr lang="en-US" altLang="ko-KR" sz="800" b="0">
+                <a:solidFill>
+                  <a:srgbClr val="BBBEBF"/>
+                </a:solidFill>
+                <a:effectLst/>
+                <a:latin typeface="Consolas" panose="020B0609020204030204" pitchFamily="49" charset="0"/>
+              </a:rPr>
+              <a:t> </a:t>
+            </a:r>
+            <a:r>
+              <a:rPr lang="en-US" altLang="ko-KR" sz="800" b="0">
+                <a:solidFill>
+                  <a:srgbClr val="4EC9B0"/>
+                </a:solidFill>
+                <a:effectLst/>
+                <a:latin typeface="Consolas" panose="020B0609020204030204" pitchFamily="49" charset="0"/>
+              </a:rPr>
+              <a:t>String</a:t>
+            </a:r>
+            <a:r>
+              <a:rPr lang="en-US" altLang="ko-KR" sz="800" b="0">
+                <a:solidFill>
+                  <a:srgbClr val="FFA657"/>
+                </a:solidFill>
+                <a:effectLst/>
+                <a:latin typeface="Consolas" panose="020B0609020204030204" pitchFamily="49" charset="0"/>
+              </a:rPr>
+              <a:t> </a:t>
+            </a:r>
+            <a:r>
+              <a:rPr lang="en-US" altLang="ko-KR" sz="800" b="0">
+                <a:solidFill>
+                  <a:srgbClr val="C9D1D9"/>
+                </a:solidFill>
+                <a:effectLst/>
+                <a:latin typeface="Consolas" panose="020B0609020204030204" pitchFamily="49" charset="0"/>
+              </a:rPr>
+              <a:t>body</a:t>
+            </a:r>
+            <a:r>
+              <a:rPr lang="en-US" altLang="ko-KR" sz="800" b="0">
+                <a:solidFill>
+                  <a:srgbClr val="BBBEBF"/>
+                </a:solidFill>
+                <a:effectLst/>
+                <a:latin typeface="Consolas" panose="020B0609020204030204" pitchFamily="49" charset="0"/>
+              </a:rPr>
+              <a:t>; </a:t>
+            </a:r>
+            <a:r>
+              <a:rPr lang="en-US" altLang="ko-KR" sz="800" b="0">
+                <a:solidFill>
+                  <a:srgbClr val="8B949E"/>
+                </a:solidFill>
+                <a:effectLst/>
+                <a:latin typeface="Consolas" panose="020B0609020204030204" pitchFamily="49" charset="0"/>
+              </a:rPr>
+              <a:t>// </a:t>
+            </a:r>
+            <a:r>
+              <a:rPr lang="ko-KR" altLang="en-US" sz="800" b="0">
+                <a:solidFill>
+                  <a:srgbClr val="8B949E"/>
+                </a:solidFill>
+                <a:effectLst/>
+                <a:latin typeface="Consolas" panose="020B0609020204030204" pitchFamily="49" charset="0"/>
+              </a:rPr>
+              <a:t>본문</a:t>
+            </a:r>
+            <a:endParaRPr lang="ko-KR" altLang="en-US" sz="800" b="0">
+              <a:solidFill>
+                <a:srgbClr val="BBBEBF"/>
+              </a:solidFill>
+              <a:effectLst/>
+              <a:latin typeface="Consolas" panose="020B0609020204030204" pitchFamily="49" charset="0"/>
+            </a:endParaRPr>
+          </a:p>
+          <a:p>
+            <a:pPr>
+              <a:lnSpc>
+                <a:spcPts val="1425"/>
+              </a:lnSpc>
+              <a:buNone/>
+            </a:pPr>
+            <a:r>
+              <a:rPr lang="ko-KR" altLang="en-US" sz="800" b="0">
+                <a:solidFill>
+                  <a:srgbClr val="BBBEBF"/>
+                </a:solidFill>
+                <a:effectLst/>
+                <a:latin typeface="Consolas" panose="020B0609020204030204" pitchFamily="49" charset="0"/>
+              </a:rPr>
+              <a:t>    </a:t>
+            </a:r>
+            <a:r>
+              <a:rPr lang="en-US" altLang="ko-KR" sz="800" b="0">
+                <a:solidFill>
+                  <a:srgbClr val="BBBEBF"/>
+                </a:solidFill>
+                <a:effectLst/>
+                <a:latin typeface="Consolas" panose="020B0609020204030204" pitchFamily="49" charset="0"/>
+              </a:rPr>
+              <a:t>@</a:t>
+            </a:r>
+            <a:r>
+              <a:rPr lang="en-US" altLang="ko-KR" sz="800" b="0">
+                <a:solidFill>
+                  <a:srgbClr val="4EC9B0"/>
+                </a:solidFill>
+                <a:effectLst/>
+                <a:latin typeface="Consolas" panose="020B0609020204030204" pitchFamily="49" charset="0"/>
+              </a:rPr>
+              <a:t>JsonCreator</a:t>
+            </a:r>
+            <a:endParaRPr lang="en-US" altLang="ko-KR" sz="800" b="0">
+              <a:solidFill>
+                <a:srgbClr val="BBBEBF"/>
+              </a:solidFill>
+              <a:effectLst/>
+              <a:latin typeface="Consolas" panose="020B0609020204030204" pitchFamily="49" charset="0"/>
+            </a:endParaRPr>
+          </a:p>
+          <a:p>
+            <a:pPr>
+              <a:lnSpc>
+                <a:spcPts val="1425"/>
+              </a:lnSpc>
+              <a:buNone/>
+            </a:pPr>
+            <a:r>
+              <a:rPr lang="en-US" altLang="ko-KR" sz="800" b="0">
+                <a:solidFill>
+                  <a:srgbClr val="BBBEBF"/>
+                </a:solidFill>
+                <a:effectLst/>
+                <a:latin typeface="Consolas" panose="020B0609020204030204" pitchFamily="49" charset="0"/>
+              </a:rPr>
+              <a:t>    </a:t>
+            </a:r>
+            <a:r>
+              <a:rPr lang="en-US" altLang="ko-KR" sz="800" b="0">
+                <a:solidFill>
+                  <a:srgbClr val="569CD6"/>
+                </a:solidFill>
+                <a:effectLst/>
+                <a:latin typeface="Consolas" panose="020B0609020204030204" pitchFamily="49" charset="0"/>
+              </a:rPr>
+              <a:t>public</a:t>
+            </a:r>
+            <a:r>
+              <a:rPr lang="en-US" altLang="ko-KR" sz="800" b="0">
+                <a:solidFill>
+                  <a:srgbClr val="BBBEBF"/>
+                </a:solidFill>
+                <a:effectLst/>
+                <a:latin typeface="Consolas" panose="020B0609020204030204" pitchFamily="49" charset="0"/>
+              </a:rPr>
+              <a:t> </a:t>
+            </a:r>
+            <a:r>
+              <a:rPr lang="en-US" altLang="ko-KR" sz="800" b="0">
+                <a:solidFill>
+                  <a:srgbClr val="D2A8FF"/>
+                </a:solidFill>
+                <a:effectLst/>
+                <a:latin typeface="Consolas" panose="020B0609020204030204" pitchFamily="49" charset="0"/>
+              </a:rPr>
+              <a:t>SendEmailRequestDto</a:t>
+            </a:r>
+            <a:r>
+              <a:rPr lang="en-US" altLang="ko-KR" sz="800" b="0">
+                <a:solidFill>
+                  <a:srgbClr val="BBBEBF"/>
+                </a:solidFill>
+                <a:effectLst/>
+                <a:latin typeface="Consolas" panose="020B0609020204030204" pitchFamily="49" charset="0"/>
+              </a:rPr>
+              <a:t>(</a:t>
+            </a:r>
+          </a:p>
+          <a:p>
+            <a:pPr>
+              <a:lnSpc>
+                <a:spcPts val="1425"/>
+              </a:lnSpc>
+              <a:buNone/>
+            </a:pPr>
+            <a:r>
+              <a:rPr lang="en-US" altLang="ko-KR" sz="800" b="0">
+                <a:solidFill>
+                  <a:srgbClr val="BBBEBF"/>
+                </a:solidFill>
+                <a:effectLst/>
+                <a:latin typeface="Consolas" panose="020B0609020204030204" pitchFamily="49" charset="0"/>
+              </a:rPr>
+              <a:t>        @</a:t>
+            </a:r>
+            <a:r>
+              <a:rPr lang="en-US" altLang="ko-KR" sz="800" b="0">
+                <a:solidFill>
+                  <a:srgbClr val="4EC9B0"/>
+                </a:solidFill>
+                <a:effectLst/>
+                <a:latin typeface="Consolas" panose="020B0609020204030204" pitchFamily="49" charset="0"/>
+              </a:rPr>
+              <a:t>JsonProperty</a:t>
+            </a:r>
+            <a:r>
+              <a:rPr lang="en-US" altLang="ko-KR" sz="800" b="0">
+                <a:solidFill>
+                  <a:srgbClr val="BBBEBF"/>
+                </a:solidFill>
+                <a:effectLst/>
+                <a:latin typeface="Consolas" panose="020B0609020204030204" pitchFamily="49" charset="0"/>
+              </a:rPr>
+              <a:t>(</a:t>
+            </a:r>
+            <a:r>
+              <a:rPr lang="en-US" altLang="ko-KR" sz="800" b="0">
+                <a:solidFill>
+                  <a:srgbClr val="A5D6FF"/>
+                </a:solidFill>
+                <a:effectLst/>
+                <a:latin typeface="Consolas" panose="020B0609020204030204" pitchFamily="49" charset="0"/>
+              </a:rPr>
+              <a:t>"from"</a:t>
+            </a:r>
+            <a:r>
+              <a:rPr lang="en-US" altLang="ko-KR" sz="800" b="0">
+                <a:solidFill>
+                  <a:srgbClr val="BBBEBF"/>
+                </a:solidFill>
+                <a:effectLst/>
+                <a:latin typeface="Consolas" panose="020B0609020204030204" pitchFamily="49" charset="0"/>
+              </a:rPr>
+              <a:t>) </a:t>
+            </a:r>
+            <a:r>
+              <a:rPr lang="en-US" altLang="ko-KR" sz="800" b="0">
+                <a:solidFill>
+                  <a:srgbClr val="4EC9B0"/>
+                </a:solidFill>
+                <a:effectLst/>
+                <a:latin typeface="Consolas" panose="020B0609020204030204" pitchFamily="49" charset="0"/>
+              </a:rPr>
+              <a:t>String</a:t>
+            </a:r>
+            <a:r>
+              <a:rPr lang="en-US" altLang="ko-KR" sz="800" b="0">
+                <a:solidFill>
+                  <a:srgbClr val="BBBEBF"/>
+                </a:solidFill>
+                <a:effectLst/>
+                <a:latin typeface="Consolas" panose="020B0609020204030204" pitchFamily="49" charset="0"/>
+              </a:rPr>
+              <a:t> </a:t>
+            </a:r>
+            <a:r>
+              <a:rPr lang="en-US" altLang="ko-KR" sz="800" b="0">
+                <a:solidFill>
+                  <a:srgbClr val="FFA657"/>
+                </a:solidFill>
+                <a:effectLst/>
+                <a:latin typeface="Consolas" panose="020B0609020204030204" pitchFamily="49" charset="0"/>
+              </a:rPr>
+              <a:t>from</a:t>
+            </a:r>
+            <a:r>
+              <a:rPr lang="en-US" altLang="ko-KR" sz="800" b="0">
+                <a:solidFill>
+                  <a:srgbClr val="BBBEBF"/>
+                </a:solidFill>
+                <a:effectLst/>
+                <a:latin typeface="Consolas" panose="020B0609020204030204" pitchFamily="49" charset="0"/>
+              </a:rPr>
+              <a:t>,</a:t>
+            </a:r>
+          </a:p>
+          <a:p>
+            <a:pPr>
+              <a:lnSpc>
+                <a:spcPts val="1425"/>
+              </a:lnSpc>
+              <a:buNone/>
+            </a:pPr>
+            <a:r>
+              <a:rPr lang="en-US" altLang="ko-KR" sz="800" b="0">
+                <a:solidFill>
+                  <a:srgbClr val="BBBEBF"/>
+                </a:solidFill>
+                <a:effectLst/>
+                <a:latin typeface="Consolas" panose="020B0609020204030204" pitchFamily="49" charset="0"/>
+              </a:rPr>
+              <a:t>        @</a:t>
+            </a:r>
+            <a:r>
+              <a:rPr lang="en-US" altLang="ko-KR" sz="800" b="0">
+                <a:solidFill>
+                  <a:srgbClr val="4EC9B0"/>
+                </a:solidFill>
+                <a:effectLst/>
+                <a:latin typeface="Consolas" panose="020B0609020204030204" pitchFamily="49" charset="0"/>
+              </a:rPr>
+              <a:t>JsonProperty</a:t>
+            </a:r>
+            <a:r>
+              <a:rPr lang="en-US" altLang="ko-KR" sz="800" b="0">
+                <a:solidFill>
+                  <a:srgbClr val="BBBEBF"/>
+                </a:solidFill>
+                <a:effectLst/>
+                <a:latin typeface="Consolas" panose="020B0609020204030204" pitchFamily="49" charset="0"/>
+              </a:rPr>
+              <a:t>(</a:t>
+            </a:r>
+            <a:r>
+              <a:rPr lang="en-US" altLang="ko-KR" sz="800" b="0">
+                <a:solidFill>
+                  <a:srgbClr val="A5D6FF"/>
+                </a:solidFill>
+                <a:effectLst/>
+                <a:latin typeface="Consolas" panose="020B0609020204030204" pitchFamily="49" charset="0"/>
+              </a:rPr>
+              <a:t>"to"</a:t>
+            </a:r>
+            <a:r>
+              <a:rPr lang="en-US" altLang="ko-KR" sz="800" b="0">
+                <a:solidFill>
+                  <a:srgbClr val="BBBEBF"/>
+                </a:solidFill>
+                <a:effectLst/>
+                <a:latin typeface="Consolas" panose="020B0609020204030204" pitchFamily="49" charset="0"/>
+              </a:rPr>
+              <a:t>) </a:t>
+            </a:r>
+            <a:r>
+              <a:rPr lang="en-US" altLang="ko-KR" sz="800" b="0">
+                <a:solidFill>
+                  <a:srgbClr val="4EC9B0"/>
+                </a:solidFill>
+                <a:effectLst/>
+                <a:latin typeface="Consolas" panose="020B0609020204030204" pitchFamily="49" charset="0"/>
+              </a:rPr>
+              <a:t>String</a:t>
+            </a:r>
+            <a:r>
+              <a:rPr lang="en-US" altLang="ko-KR" sz="800" b="0">
+                <a:solidFill>
+                  <a:srgbClr val="BBBEBF"/>
+                </a:solidFill>
+                <a:effectLst/>
+                <a:latin typeface="Consolas" panose="020B0609020204030204" pitchFamily="49" charset="0"/>
+              </a:rPr>
+              <a:t> </a:t>
+            </a:r>
+            <a:r>
+              <a:rPr lang="en-US" altLang="ko-KR" sz="800" b="0">
+                <a:solidFill>
+                  <a:srgbClr val="FFA657"/>
+                </a:solidFill>
+                <a:effectLst/>
+                <a:latin typeface="Consolas" panose="020B0609020204030204" pitchFamily="49" charset="0"/>
+              </a:rPr>
+              <a:t>to</a:t>
+            </a:r>
+            <a:r>
+              <a:rPr lang="en-US" altLang="ko-KR" sz="800" b="0">
+                <a:solidFill>
+                  <a:srgbClr val="BBBEBF"/>
+                </a:solidFill>
+                <a:effectLst/>
+                <a:latin typeface="Consolas" panose="020B0609020204030204" pitchFamily="49" charset="0"/>
+              </a:rPr>
+              <a:t>,</a:t>
+            </a:r>
+          </a:p>
+          <a:p>
+            <a:pPr>
+              <a:lnSpc>
+                <a:spcPts val="1425"/>
+              </a:lnSpc>
+              <a:buNone/>
+            </a:pPr>
+            <a:r>
+              <a:rPr lang="en-US" altLang="ko-KR" sz="800" b="0">
+                <a:solidFill>
+                  <a:srgbClr val="BBBEBF"/>
+                </a:solidFill>
+                <a:effectLst/>
+                <a:latin typeface="Consolas" panose="020B0609020204030204" pitchFamily="49" charset="0"/>
+              </a:rPr>
+              <a:t>        @</a:t>
+            </a:r>
+            <a:r>
+              <a:rPr lang="en-US" altLang="ko-KR" sz="800" b="0">
+                <a:solidFill>
+                  <a:srgbClr val="4EC9B0"/>
+                </a:solidFill>
+                <a:effectLst/>
+                <a:latin typeface="Consolas" panose="020B0609020204030204" pitchFamily="49" charset="0"/>
+              </a:rPr>
+              <a:t>JsonProperty</a:t>
+            </a:r>
+            <a:r>
+              <a:rPr lang="en-US" altLang="ko-KR" sz="800" b="0">
+                <a:solidFill>
+                  <a:srgbClr val="BBBEBF"/>
+                </a:solidFill>
+                <a:effectLst/>
+                <a:latin typeface="Consolas" panose="020B0609020204030204" pitchFamily="49" charset="0"/>
+              </a:rPr>
+              <a:t>(</a:t>
+            </a:r>
+            <a:r>
+              <a:rPr lang="en-US" altLang="ko-KR" sz="800" b="0">
+                <a:solidFill>
+                  <a:srgbClr val="A5D6FF"/>
+                </a:solidFill>
+                <a:effectLst/>
+                <a:latin typeface="Consolas" panose="020B0609020204030204" pitchFamily="49" charset="0"/>
+              </a:rPr>
+              <a:t>"subject"</a:t>
+            </a:r>
+            <a:r>
+              <a:rPr lang="en-US" altLang="ko-KR" sz="800" b="0">
+                <a:solidFill>
+                  <a:srgbClr val="BBBEBF"/>
+                </a:solidFill>
+                <a:effectLst/>
+                <a:latin typeface="Consolas" panose="020B0609020204030204" pitchFamily="49" charset="0"/>
+              </a:rPr>
+              <a:t>) </a:t>
+            </a:r>
+            <a:r>
+              <a:rPr lang="en-US" altLang="ko-KR" sz="800" b="0">
+                <a:solidFill>
+                  <a:srgbClr val="4EC9B0"/>
+                </a:solidFill>
+                <a:effectLst/>
+                <a:latin typeface="Consolas" panose="020B0609020204030204" pitchFamily="49" charset="0"/>
+              </a:rPr>
+              <a:t>String</a:t>
+            </a:r>
+            <a:r>
+              <a:rPr lang="en-US" altLang="ko-KR" sz="800" b="0">
+                <a:solidFill>
+                  <a:srgbClr val="BBBEBF"/>
+                </a:solidFill>
+                <a:effectLst/>
+                <a:latin typeface="Consolas" panose="020B0609020204030204" pitchFamily="49" charset="0"/>
+              </a:rPr>
+              <a:t> </a:t>
+            </a:r>
+            <a:r>
+              <a:rPr lang="en-US" altLang="ko-KR" sz="800" b="0">
+                <a:solidFill>
+                  <a:srgbClr val="FFA657"/>
+                </a:solidFill>
+                <a:effectLst/>
+                <a:latin typeface="Consolas" panose="020B0609020204030204" pitchFamily="49" charset="0"/>
+              </a:rPr>
+              <a:t>subject</a:t>
+            </a:r>
+            <a:r>
+              <a:rPr lang="en-US" altLang="ko-KR" sz="800" b="0">
+                <a:solidFill>
+                  <a:srgbClr val="BBBEBF"/>
+                </a:solidFill>
+                <a:effectLst/>
+                <a:latin typeface="Consolas" panose="020B0609020204030204" pitchFamily="49" charset="0"/>
+              </a:rPr>
+              <a:t>,</a:t>
+            </a:r>
+          </a:p>
+          <a:p>
+            <a:pPr>
+              <a:lnSpc>
+                <a:spcPts val="1425"/>
+              </a:lnSpc>
+              <a:buNone/>
+            </a:pPr>
+            <a:r>
+              <a:rPr lang="en-US" altLang="ko-KR" sz="800" b="0">
+                <a:solidFill>
+                  <a:srgbClr val="BBBEBF"/>
+                </a:solidFill>
+                <a:effectLst/>
+                <a:latin typeface="Consolas" panose="020B0609020204030204" pitchFamily="49" charset="0"/>
+              </a:rPr>
+              <a:t>        @</a:t>
+            </a:r>
+            <a:r>
+              <a:rPr lang="en-US" altLang="ko-KR" sz="800" b="0">
+                <a:solidFill>
+                  <a:srgbClr val="4EC9B0"/>
+                </a:solidFill>
+                <a:effectLst/>
+                <a:latin typeface="Consolas" panose="020B0609020204030204" pitchFamily="49" charset="0"/>
+              </a:rPr>
+              <a:t>JsonProperty</a:t>
+            </a:r>
+            <a:r>
+              <a:rPr lang="en-US" altLang="ko-KR" sz="800" b="0">
+                <a:solidFill>
+                  <a:srgbClr val="BBBEBF"/>
+                </a:solidFill>
+                <a:effectLst/>
+                <a:latin typeface="Consolas" panose="020B0609020204030204" pitchFamily="49" charset="0"/>
+              </a:rPr>
+              <a:t>(</a:t>
+            </a:r>
+            <a:r>
+              <a:rPr lang="en-US" altLang="ko-KR" sz="800" b="0">
+                <a:solidFill>
+                  <a:srgbClr val="A5D6FF"/>
+                </a:solidFill>
+                <a:effectLst/>
+                <a:latin typeface="Consolas" panose="020B0609020204030204" pitchFamily="49" charset="0"/>
+              </a:rPr>
+              <a:t>"body"</a:t>
+            </a:r>
+            <a:r>
+              <a:rPr lang="en-US" altLang="ko-KR" sz="800" b="0">
+                <a:solidFill>
+                  <a:srgbClr val="BBBEBF"/>
+                </a:solidFill>
+                <a:effectLst/>
+                <a:latin typeface="Consolas" panose="020B0609020204030204" pitchFamily="49" charset="0"/>
+              </a:rPr>
+              <a:t>) </a:t>
+            </a:r>
+            <a:r>
+              <a:rPr lang="en-US" altLang="ko-KR" sz="800" b="0">
+                <a:solidFill>
+                  <a:srgbClr val="4EC9B0"/>
+                </a:solidFill>
+                <a:effectLst/>
+                <a:latin typeface="Consolas" panose="020B0609020204030204" pitchFamily="49" charset="0"/>
+              </a:rPr>
+              <a:t>String</a:t>
+            </a:r>
+            <a:r>
+              <a:rPr lang="en-US" altLang="ko-KR" sz="800" b="0">
+                <a:solidFill>
+                  <a:srgbClr val="BBBEBF"/>
+                </a:solidFill>
+                <a:effectLst/>
+                <a:latin typeface="Consolas" panose="020B0609020204030204" pitchFamily="49" charset="0"/>
+              </a:rPr>
+              <a:t> </a:t>
+            </a:r>
+            <a:r>
+              <a:rPr lang="en-US" altLang="ko-KR" sz="800" b="0">
+                <a:solidFill>
+                  <a:srgbClr val="FFA657"/>
+                </a:solidFill>
+                <a:effectLst/>
+                <a:latin typeface="Consolas" panose="020B0609020204030204" pitchFamily="49" charset="0"/>
+              </a:rPr>
+              <a:t>body</a:t>
+            </a:r>
+            <a:endParaRPr lang="en-US" altLang="ko-KR" sz="800" b="0">
+              <a:solidFill>
+                <a:srgbClr val="BBBEBF"/>
+              </a:solidFill>
+              <a:effectLst/>
+              <a:latin typeface="Consolas" panose="020B0609020204030204" pitchFamily="49" charset="0"/>
+            </a:endParaRPr>
+          </a:p>
+          <a:p>
+            <a:pPr>
+              <a:lnSpc>
+                <a:spcPts val="1425"/>
+              </a:lnSpc>
+              <a:buNone/>
+            </a:pPr>
+            <a:r>
+              <a:rPr lang="en-US" altLang="ko-KR" sz="800" b="0">
+                <a:solidFill>
+                  <a:srgbClr val="BBBEBF"/>
+                </a:solidFill>
+                <a:effectLst/>
+                <a:latin typeface="Consolas" panose="020B0609020204030204" pitchFamily="49" charset="0"/>
+              </a:rPr>
+              <a:t>    ) {</a:t>
+            </a:r>
+          </a:p>
+          <a:p>
+            <a:pPr>
+              <a:lnSpc>
+                <a:spcPts val="1425"/>
+              </a:lnSpc>
+              <a:buNone/>
+            </a:pPr>
+            <a:r>
+              <a:rPr lang="en-US" altLang="ko-KR" sz="800" b="0">
+                <a:solidFill>
+                  <a:srgbClr val="BBBEBF"/>
+                </a:solidFill>
+                <a:effectLst/>
+                <a:latin typeface="Consolas" panose="020B0609020204030204" pitchFamily="49" charset="0"/>
+              </a:rPr>
+              <a:t>        </a:t>
+            </a:r>
+            <a:r>
+              <a:rPr lang="en-US" altLang="ko-KR" sz="800" b="0">
+                <a:solidFill>
+                  <a:srgbClr val="79C0FF"/>
+                </a:solidFill>
+                <a:effectLst/>
+                <a:latin typeface="Consolas" panose="020B0609020204030204" pitchFamily="49" charset="0"/>
+              </a:rPr>
+              <a:t>this</a:t>
+            </a:r>
+            <a:r>
+              <a:rPr lang="en-US" altLang="ko-KR" sz="800" b="0">
+                <a:solidFill>
+                  <a:srgbClr val="BBBEBF"/>
+                </a:solidFill>
+                <a:effectLst/>
+                <a:latin typeface="Consolas" panose="020B0609020204030204" pitchFamily="49" charset="0"/>
+              </a:rPr>
+              <a:t>.</a:t>
+            </a:r>
+            <a:r>
+              <a:rPr lang="en-US" altLang="ko-KR" sz="800" b="0">
+                <a:solidFill>
+                  <a:srgbClr val="C9D1D9"/>
+                </a:solidFill>
+                <a:effectLst/>
+                <a:latin typeface="Consolas" panose="020B0609020204030204" pitchFamily="49" charset="0"/>
+              </a:rPr>
+              <a:t>from</a:t>
+            </a:r>
+            <a:r>
+              <a:rPr lang="en-US" altLang="ko-KR" sz="800" b="0">
+                <a:solidFill>
+                  <a:srgbClr val="BBBEBF"/>
+                </a:solidFill>
+                <a:effectLst/>
+                <a:latin typeface="Consolas" panose="020B0609020204030204" pitchFamily="49" charset="0"/>
+              </a:rPr>
+              <a:t> </a:t>
+            </a:r>
+            <a:r>
+              <a:rPr lang="en-US" altLang="ko-KR" sz="800" b="0">
+                <a:solidFill>
+                  <a:srgbClr val="D4D4D4"/>
+                </a:solidFill>
+                <a:effectLst/>
+                <a:latin typeface="Consolas" panose="020B0609020204030204" pitchFamily="49" charset="0"/>
+              </a:rPr>
+              <a:t>=</a:t>
+            </a:r>
+            <a:r>
+              <a:rPr lang="en-US" altLang="ko-KR" sz="800" b="0">
+                <a:solidFill>
+                  <a:srgbClr val="BBBEBF"/>
+                </a:solidFill>
+                <a:effectLst/>
+                <a:latin typeface="Consolas" panose="020B0609020204030204" pitchFamily="49" charset="0"/>
+              </a:rPr>
+              <a:t> </a:t>
+            </a:r>
+            <a:r>
+              <a:rPr lang="en-US" altLang="ko-KR" sz="800" b="0">
+                <a:solidFill>
+                  <a:srgbClr val="FFA657"/>
+                </a:solidFill>
+                <a:effectLst/>
+                <a:latin typeface="Consolas" panose="020B0609020204030204" pitchFamily="49" charset="0"/>
+              </a:rPr>
+              <a:t>from</a:t>
+            </a:r>
+            <a:r>
+              <a:rPr lang="en-US" altLang="ko-KR" sz="800" b="0">
+                <a:solidFill>
+                  <a:srgbClr val="BBBEBF"/>
+                </a:solidFill>
+                <a:effectLst/>
+                <a:latin typeface="Consolas" panose="020B0609020204030204" pitchFamily="49" charset="0"/>
+              </a:rPr>
+              <a:t>;</a:t>
+            </a:r>
+          </a:p>
+          <a:p>
+            <a:pPr>
+              <a:lnSpc>
+                <a:spcPts val="1425"/>
+              </a:lnSpc>
+              <a:buNone/>
+            </a:pPr>
+            <a:r>
+              <a:rPr lang="en-US" altLang="ko-KR" sz="800" b="0">
+                <a:solidFill>
+                  <a:srgbClr val="BBBEBF"/>
+                </a:solidFill>
+                <a:effectLst/>
+                <a:latin typeface="Consolas" panose="020B0609020204030204" pitchFamily="49" charset="0"/>
+              </a:rPr>
+              <a:t>        </a:t>
+            </a:r>
+            <a:r>
+              <a:rPr lang="en-US" altLang="ko-KR" sz="800" b="0">
+                <a:solidFill>
+                  <a:srgbClr val="79C0FF"/>
+                </a:solidFill>
+                <a:effectLst/>
+                <a:latin typeface="Consolas" panose="020B0609020204030204" pitchFamily="49" charset="0"/>
+              </a:rPr>
+              <a:t>this</a:t>
+            </a:r>
+            <a:r>
+              <a:rPr lang="en-US" altLang="ko-KR" sz="800" b="0">
+                <a:solidFill>
+                  <a:srgbClr val="BBBEBF"/>
+                </a:solidFill>
+                <a:effectLst/>
+                <a:latin typeface="Consolas" panose="020B0609020204030204" pitchFamily="49" charset="0"/>
+              </a:rPr>
+              <a:t>.</a:t>
+            </a:r>
+            <a:r>
+              <a:rPr lang="en-US" altLang="ko-KR" sz="800" b="0">
+                <a:solidFill>
+                  <a:srgbClr val="C9D1D9"/>
+                </a:solidFill>
+                <a:effectLst/>
+                <a:latin typeface="Consolas" panose="020B0609020204030204" pitchFamily="49" charset="0"/>
+              </a:rPr>
+              <a:t>to</a:t>
+            </a:r>
+            <a:r>
+              <a:rPr lang="en-US" altLang="ko-KR" sz="800" b="0">
+                <a:solidFill>
+                  <a:srgbClr val="BBBEBF"/>
+                </a:solidFill>
+                <a:effectLst/>
+                <a:latin typeface="Consolas" panose="020B0609020204030204" pitchFamily="49" charset="0"/>
+              </a:rPr>
+              <a:t> </a:t>
+            </a:r>
+            <a:r>
+              <a:rPr lang="en-US" altLang="ko-KR" sz="800" b="0">
+                <a:solidFill>
+                  <a:srgbClr val="D4D4D4"/>
+                </a:solidFill>
+                <a:effectLst/>
+                <a:latin typeface="Consolas" panose="020B0609020204030204" pitchFamily="49" charset="0"/>
+              </a:rPr>
+              <a:t>=</a:t>
+            </a:r>
+            <a:r>
+              <a:rPr lang="en-US" altLang="ko-KR" sz="800" b="0">
+                <a:solidFill>
+                  <a:srgbClr val="BBBEBF"/>
+                </a:solidFill>
+                <a:effectLst/>
+                <a:latin typeface="Consolas" panose="020B0609020204030204" pitchFamily="49" charset="0"/>
+              </a:rPr>
+              <a:t> </a:t>
+            </a:r>
+            <a:r>
+              <a:rPr lang="en-US" altLang="ko-KR" sz="800" b="0">
+                <a:solidFill>
+                  <a:srgbClr val="FFA657"/>
+                </a:solidFill>
+                <a:effectLst/>
+                <a:latin typeface="Consolas" panose="020B0609020204030204" pitchFamily="49" charset="0"/>
+              </a:rPr>
+              <a:t>to</a:t>
+            </a:r>
+            <a:r>
+              <a:rPr lang="en-US" altLang="ko-KR" sz="800" b="0">
+                <a:solidFill>
+                  <a:srgbClr val="BBBEBF"/>
+                </a:solidFill>
+                <a:effectLst/>
+                <a:latin typeface="Consolas" panose="020B0609020204030204" pitchFamily="49" charset="0"/>
+              </a:rPr>
+              <a:t>;</a:t>
+            </a:r>
+          </a:p>
+          <a:p>
+            <a:pPr>
+              <a:lnSpc>
+                <a:spcPts val="1425"/>
+              </a:lnSpc>
+              <a:buNone/>
+            </a:pPr>
+            <a:r>
+              <a:rPr lang="en-US" altLang="ko-KR" sz="800" b="0">
+                <a:solidFill>
+                  <a:srgbClr val="BBBEBF"/>
+                </a:solidFill>
+                <a:effectLst/>
+                <a:latin typeface="Consolas" panose="020B0609020204030204" pitchFamily="49" charset="0"/>
+              </a:rPr>
+              <a:t>        </a:t>
+            </a:r>
+            <a:r>
+              <a:rPr lang="en-US" altLang="ko-KR" sz="800" b="0">
+                <a:solidFill>
+                  <a:srgbClr val="79C0FF"/>
+                </a:solidFill>
+                <a:effectLst/>
+                <a:latin typeface="Consolas" panose="020B0609020204030204" pitchFamily="49" charset="0"/>
+              </a:rPr>
+              <a:t>this</a:t>
+            </a:r>
+            <a:r>
+              <a:rPr lang="en-US" altLang="ko-KR" sz="800" b="0">
+                <a:solidFill>
+                  <a:srgbClr val="BBBEBF"/>
+                </a:solidFill>
+                <a:effectLst/>
+                <a:latin typeface="Consolas" panose="020B0609020204030204" pitchFamily="49" charset="0"/>
+              </a:rPr>
+              <a:t>.</a:t>
+            </a:r>
+            <a:r>
+              <a:rPr lang="en-US" altLang="ko-KR" sz="800" b="0">
+                <a:solidFill>
+                  <a:srgbClr val="C9D1D9"/>
+                </a:solidFill>
+                <a:effectLst/>
+                <a:latin typeface="Consolas" panose="020B0609020204030204" pitchFamily="49" charset="0"/>
+              </a:rPr>
+              <a:t>subject</a:t>
+            </a:r>
+            <a:r>
+              <a:rPr lang="en-US" altLang="ko-KR" sz="800" b="0">
+                <a:solidFill>
+                  <a:srgbClr val="BBBEBF"/>
+                </a:solidFill>
+                <a:effectLst/>
+                <a:latin typeface="Consolas" panose="020B0609020204030204" pitchFamily="49" charset="0"/>
+              </a:rPr>
+              <a:t> </a:t>
+            </a:r>
+            <a:r>
+              <a:rPr lang="en-US" altLang="ko-KR" sz="800" b="0">
+                <a:solidFill>
+                  <a:srgbClr val="D4D4D4"/>
+                </a:solidFill>
+                <a:effectLst/>
+                <a:latin typeface="Consolas" panose="020B0609020204030204" pitchFamily="49" charset="0"/>
+              </a:rPr>
+              <a:t>=</a:t>
+            </a:r>
+            <a:r>
+              <a:rPr lang="en-US" altLang="ko-KR" sz="800" b="0">
+                <a:solidFill>
+                  <a:srgbClr val="BBBEBF"/>
+                </a:solidFill>
+                <a:effectLst/>
+                <a:latin typeface="Consolas" panose="020B0609020204030204" pitchFamily="49" charset="0"/>
+              </a:rPr>
+              <a:t> </a:t>
+            </a:r>
+            <a:r>
+              <a:rPr lang="en-US" altLang="ko-KR" sz="800" b="0">
+                <a:solidFill>
+                  <a:srgbClr val="FFA657"/>
+                </a:solidFill>
+                <a:effectLst/>
+                <a:latin typeface="Consolas" panose="020B0609020204030204" pitchFamily="49" charset="0"/>
+              </a:rPr>
+              <a:t>subject</a:t>
+            </a:r>
+            <a:r>
+              <a:rPr lang="en-US" altLang="ko-KR" sz="800" b="0">
+                <a:solidFill>
+                  <a:srgbClr val="BBBEBF"/>
+                </a:solidFill>
+                <a:effectLst/>
+                <a:latin typeface="Consolas" panose="020B0609020204030204" pitchFamily="49" charset="0"/>
+              </a:rPr>
+              <a:t>;</a:t>
+            </a:r>
+          </a:p>
+          <a:p>
+            <a:pPr>
+              <a:lnSpc>
+                <a:spcPts val="1425"/>
+              </a:lnSpc>
+              <a:buNone/>
+            </a:pPr>
+            <a:r>
+              <a:rPr lang="en-US" altLang="ko-KR" sz="800" b="0">
+                <a:solidFill>
+                  <a:srgbClr val="BBBEBF"/>
+                </a:solidFill>
+                <a:effectLst/>
+                <a:latin typeface="Consolas" panose="020B0609020204030204" pitchFamily="49" charset="0"/>
+              </a:rPr>
+              <a:t>        </a:t>
+            </a:r>
+            <a:r>
+              <a:rPr lang="en-US" altLang="ko-KR" sz="800" b="0">
+                <a:solidFill>
+                  <a:srgbClr val="79C0FF"/>
+                </a:solidFill>
+                <a:effectLst/>
+                <a:latin typeface="Consolas" panose="020B0609020204030204" pitchFamily="49" charset="0"/>
+              </a:rPr>
+              <a:t>this</a:t>
+            </a:r>
+            <a:r>
+              <a:rPr lang="en-US" altLang="ko-KR" sz="800" b="0">
+                <a:solidFill>
+                  <a:srgbClr val="BBBEBF"/>
+                </a:solidFill>
+                <a:effectLst/>
+                <a:latin typeface="Consolas" panose="020B0609020204030204" pitchFamily="49" charset="0"/>
+              </a:rPr>
+              <a:t>.</a:t>
+            </a:r>
+            <a:r>
+              <a:rPr lang="en-US" altLang="ko-KR" sz="800" b="0">
+                <a:solidFill>
+                  <a:srgbClr val="C9D1D9"/>
+                </a:solidFill>
+                <a:effectLst/>
+                <a:latin typeface="Consolas" panose="020B0609020204030204" pitchFamily="49" charset="0"/>
+              </a:rPr>
+              <a:t>body</a:t>
+            </a:r>
+            <a:r>
+              <a:rPr lang="en-US" altLang="ko-KR" sz="800" b="0">
+                <a:solidFill>
+                  <a:srgbClr val="BBBEBF"/>
+                </a:solidFill>
+                <a:effectLst/>
+                <a:latin typeface="Consolas" panose="020B0609020204030204" pitchFamily="49" charset="0"/>
+              </a:rPr>
+              <a:t> </a:t>
+            </a:r>
+            <a:r>
+              <a:rPr lang="en-US" altLang="ko-KR" sz="800" b="0">
+                <a:solidFill>
+                  <a:srgbClr val="D4D4D4"/>
+                </a:solidFill>
+                <a:effectLst/>
+                <a:latin typeface="Consolas" panose="020B0609020204030204" pitchFamily="49" charset="0"/>
+              </a:rPr>
+              <a:t>=</a:t>
+            </a:r>
+            <a:r>
+              <a:rPr lang="en-US" altLang="ko-KR" sz="800" b="0">
+                <a:solidFill>
+                  <a:srgbClr val="BBBEBF"/>
+                </a:solidFill>
+                <a:effectLst/>
+                <a:latin typeface="Consolas" panose="020B0609020204030204" pitchFamily="49" charset="0"/>
+              </a:rPr>
+              <a:t> </a:t>
+            </a:r>
+            <a:r>
+              <a:rPr lang="en-US" altLang="ko-KR" sz="800" b="0">
+                <a:solidFill>
+                  <a:srgbClr val="FFA657"/>
+                </a:solidFill>
+                <a:effectLst/>
+                <a:latin typeface="Consolas" panose="020B0609020204030204" pitchFamily="49" charset="0"/>
+              </a:rPr>
+              <a:t>body</a:t>
+            </a:r>
+            <a:r>
+              <a:rPr lang="en-US" altLang="ko-KR" sz="800" b="0">
+                <a:solidFill>
+                  <a:srgbClr val="BBBEBF"/>
+                </a:solidFill>
+                <a:effectLst/>
+                <a:latin typeface="Consolas" panose="020B0609020204030204" pitchFamily="49" charset="0"/>
+              </a:rPr>
+              <a:t>;</a:t>
+            </a:r>
+          </a:p>
+          <a:p>
+            <a:pPr>
+              <a:lnSpc>
+                <a:spcPts val="1425"/>
+              </a:lnSpc>
+              <a:buNone/>
+            </a:pPr>
+            <a:r>
+              <a:rPr lang="en-US" altLang="ko-KR" sz="800" b="0">
+                <a:solidFill>
+                  <a:srgbClr val="BBBEBF"/>
+                </a:solidFill>
+                <a:effectLst/>
+                <a:latin typeface="Consolas" panose="020B0609020204030204" pitchFamily="49" charset="0"/>
+              </a:rPr>
+              <a:t>    }</a:t>
+            </a:r>
+          </a:p>
+        </p:txBody>
+      </p:sp>
+      <p:sp>
+        <p:nvSpPr>
+          <p:cNvPr id="12" name="TextBox 11">
+            <a:extLst>
+              <a:ext uri="{FF2B5EF4-FFF2-40B4-BE49-F238E27FC236}">
+                <a16:creationId xmlns:a16="http://schemas.microsoft.com/office/drawing/2014/main" id="{85F08F2F-8452-1073-91D3-CA38DF81D286}"/>
+              </a:ext>
+            </a:extLst>
+          </p:cNvPr>
+          <p:cNvSpPr txBox="1"/>
+          <p:nvPr/>
+        </p:nvSpPr>
+        <p:spPr>
+          <a:xfrm>
+            <a:off x="8000043" y="1875152"/>
+            <a:ext cx="2521458" cy="2440796"/>
+          </a:xfrm>
+          <a:prstGeom prst="rect">
+            <a:avLst/>
+          </a:prstGeom>
+          <a:solidFill>
+            <a:schemeClr val="tx1"/>
+          </a:solidFill>
+        </p:spPr>
+        <p:txBody>
+          <a:bodyPr wrap="square">
+            <a:spAutoFit/>
+          </a:bodyPr>
+          <a:lstStyle/>
+          <a:p>
+            <a:pPr>
+              <a:lnSpc>
+                <a:spcPts val="1425"/>
+              </a:lnSpc>
+              <a:buNone/>
+            </a:pPr>
+            <a:r>
+              <a:rPr lang="en-US" altLang="ko-KR" sz="900" b="0">
+                <a:solidFill>
+                  <a:srgbClr val="BBBEBF"/>
+                </a:solidFill>
+                <a:effectLst/>
+                <a:latin typeface="Consolas" panose="020B0609020204030204" pitchFamily="49" charset="0"/>
+              </a:rPr>
+              <a:t>    </a:t>
+            </a:r>
+            <a:r>
+              <a:rPr lang="en-US" altLang="ko-KR" sz="900" b="0">
+                <a:solidFill>
+                  <a:srgbClr val="569CD6"/>
+                </a:solidFill>
+                <a:effectLst/>
+                <a:latin typeface="Consolas" panose="020B0609020204030204" pitchFamily="49" charset="0"/>
+              </a:rPr>
+              <a:t>public</a:t>
+            </a:r>
+            <a:r>
+              <a:rPr lang="en-US" altLang="ko-KR" sz="900" b="0">
+                <a:solidFill>
+                  <a:srgbClr val="BBBEBF"/>
+                </a:solidFill>
+                <a:effectLst/>
+                <a:latin typeface="Consolas" panose="020B0609020204030204" pitchFamily="49" charset="0"/>
+              </a:rPr>
+              <a:t> </a:t>
+            </a:r>
+            <a:r>
+              <a:rPr lang="en-US" altLang="ko-KR" sz="900" b="0">
+                <a:solidFill>
+                  <a:srgbClr val="4EC9B0"/>
+                </a:solidFill>
+                <a:effectLst/>
+                <a:latin typeface="Consolas" panose="020B0609020204030204" pitchFamily="49" charset="0"/>
+              </a:rPr>
+              <a:t>String</a:t>
+            </a:r>
+            <a:r>
+              <a:rPr lang="en-US" altLang="ko-KR" sz="900" b="0">
+                <a:solidFill>
+                  <a:srgbClr val="BBBEBF"/>
+                </a:solidFill>
+                <a:effectLst/>
+                <a:latin typeface="Consolas" panose="020B0609020204030204" pitchFamily="49" charset="0"/>
+              </a:rPr>
+              <a:t> </a:t>
+            </a:r>
+            <a:r>
+              <a:rPr lang="en-US" altLang="ko-KR" sz="900" b="0">
+                <a:solidFill>
+                  <a:srgbClr val="D2A8FF"/>
+                </a:solidFill>
+                <a:effectLst/>
+                <a:latin typeface="Consolas" panose="020B0609020204030204" pitchFamily="49" charset="0"/>
+              </a:rPr>
+              <a:t>getFrom</a:t>
+            </a:r>
+            <a:r>
+              <a:rPr lang="en-US" altLang="ko-KR" sz="900" b="0">
+                <a:solidFill>
+                  <a:srgbClr val="BBBEBF"/>
+                </a:solidFill>
+                <a:effectLst/>
+                <a:latin typeface="Consolas" panose="020B0609020204030204" pitchFamily="49" charset="0"/>
+              </a:rPr>
+              <a:t>() {</a:t>
+            </a:r>
+          </a:p>
+          <a:p>
+            <a:pPr>
+              <a:lnSpc>
+                <a:spcPts val="1425"/>
+              </a:lnSpc>
+              <a:buNone/>
+            </a:pPr>
+            <a:r>
+              <a:rPr lang="en-US" altLang="ko-KR" sz="900" b="0">
+                <a:solidFill>
+                  <a:srgbClr val="BBBEBF"/>
+                </a:solidFill>
+                <a:effectLst/>
+                <a:latin typeface="Consolas" panose="020B0609020204030204" pitchFamily="49" charset="0"/>
+              </a:rPr>
+              <a:t>        </a:t>
+            </a:r>
+            <a:r>
+              <a:rPr lang="en-US" altLang="ko-KR" sz="900" b="0">
+                <a:solidFill>
+                  <a:srgbClr val="C586C0"/>
+                </a:solidFill>
+                <a:effectLst/>
+                <a:latin typeface="Consolas" panose="020B0609020204030204" pitchFamily="49" charset="0"/>
+              </a:rPr>
+              <a:t>return</a:t>
+            </a:r>
+            <a:r>
+              <a:rPr lang="en-US" altLang="ko-KR" sz="900" b="0">
+                <a:solidFill>
+                  <a:srgbClr val="BBBEBF"/>
+                </a:solidFill>
+                <a:effectLst/>
+                <a:latin typeface="Consolas" panose="020B0609020204030204" pitchFamily="49" charset="0"/>
+              </a:rPr>
+              <a:t> </a:t>
+            </a:r>
+            <a:r>
+              <a:rPr lang="en-US" altLang="ko-KR" sz="900" b="0">
+                <a:solidFill>
+                  <a:srgbClr val="C9D1D9"/>
+                </a:solidFill>
+                <a:effectLst/>
+                <a:latin typeface="Consolas" panose="020B0609020204030204" pitchFamily="49" charset="0"/>
+              </a:rPr>
+              <a:t>from</a:t>
+            </a:r>
+            <a:r>
+              <a:rPr lang="en-US" altLang="ko-KR" sz="900" b="0">
+                <a:solidFill>
+                  <a:srgbClr val="BBBEBF"/>
+                </a:solidFill>
+                <a:effectLst/>
+                <a:latin typeface="Consolas" panose="020B0609020204030204" pitchFamily="49" charset="0"/>
+              </a:rPr>
+              <a:t>;</a:t>
+            </a:r>
+          </a:p>
+          <a:p>
+            <a:pPr>
+              <a:lnSpc>
+                <a:spcPts val="1425"/>
+              </a:lnSpc>
+              <a:buNone/>
+            </a:pPr>
+            <a:r>
+              <a:rPr lang="en-US" altLang="ko-KR" sz="900" b="0">
+                <a:solidFill>
+                  <a:srgbClr val="BBBEBF"/>
+                </a:solidFill>
+                <a:effectLst/>
+                <a:latin typeface="Consolas" panose="020B0609020204030204" pitchFamily="49" charset="0"/>
+              </a:rPr>
+              <a:t>    }</a:t>
+            </a:r>
+          </a:p>
+          <a:p>
+            <a:pPr>
+              <a:lnSpc>
+                <a:spcPts val="1425"/>
+              </a:lnSpc>
+              <a:buNone/>
+            </a:pPr>
+            <a:r>
+              <a:rPr lang="en-US" altLang="ko-KR" sz="900" b="0">
+                <a:solidFill>
+                  <a:srgbClr val="BBBEBF"/>
+                </a:solidFill>
+                <a:effectLst/>
+                <a:latin typeface="Consolas" panose="020B0609020204030204" pitchFamily="49" charset="0"/>
+              </a:rPr>
+              <a:t>    </a:t>
+            </a:r>
+            <a:r>
+              <a:rPr lang="en-US" altLang="ko-KR" sz="900" b="0">
+                <a:solidFill>
+                  <a:srgbClr val="569CD6"/>
+                </a:solidFill>
+                <a:effectLst/>
+                <a:latin typeface="Consolas" panose="020B0609020204030204" pitchFamily="49" charset="0"/>
+              </a:rPr>
+              <a:t>public</a:t>
+            </a:r>
+            <a:r>
+              <a:rPr lang="en-US" altLang="ko-KR" sz="900" b="0">
+                <a:solidFill>
+                  <a:srgbClr val="BBBEBF"/>
+                </a:solidFill>
+                <a:effectLst/>
+                <a:latin typeface="Consolas" panose="020B0609020204030204" pitchFamily="49" charset="0"/>
+              </a:rPr>
+              <a:t> </a:t>
+            </a:r>
+            <a:r>
+              <a:rPr lang="en-US" altLang="ko-KR" sz="900" b="0">
+                <a:solidFill>
+                  <a:srgbClr val="4EC9B0"/>
+                </a:solidFill>
+                <a:effectLst/>
+                <a:latin typeface="Consolas" panose="020B0609020204030204" pitchFamily="49" charset="0"/>
+              </a:rPr>
+              <a:t>String</a:t>
+            </a:r>
+            <a:r>
+              <a:rPr lang="en-US" altLang="ko-KR" sz="900" b="0">
+                <a:solidFill>
+                  <a:srgbClr val="BBBEBF"/>
+                </a:solidFill>
+                <a:effectLst/>
+                <a:latin typeface="Consolas" panose="020B0609020204030204" pitchFamily="49" charset="0"/>
+              </a:rPr>
+              <a:t> </a:t>
+            </a:r>
+            <a:r>
+              <a:rPr lang="en-US" altLang="ko-KR" sz="900" b="0">
+                <a:solidFill>
+                  <a:srgbClr val="D2A8FF"/>
+                </a:solidFill>
+                <a:effectLst/>
+                <a:latin typeface="Consolas" panose="020B0609020204030204" pitchFamily="49" charset="0"/>
+              </a:rPr>
+              <a:t>getTo</a:t>
+            </a:r>
+            <a:r>
+              <a:rPr lang="en-US" altLang="ko-KR" sz="900" b="0">
+                <a:solidFill>
+                  <a:srgbClr val="BBBEBF"/>
+                </a:solidFill>
+                <a:effectLst/>
+                <a:latin typeface="Consolas" panose="020B0609020204030204" pitchFamily="49" charset="0"/>
+              </a:rPr>
+              <a:t>() {</a:t>
+            </a:r>
+          </a:p>
+          <a:p>
+            <a:pPr>
+              <a:lnSpc>
+                <a:spcPts val="1425"/>
+              </a:lnSpc>
+              <a:buNone/>
+            </a:pPr>
+            <a:r>
+              <a:rPr lang="en-US" altLang="ko-KR" sz="900" b="0">
+                <a:solidFill>
+                  <a:srgbClr val="BBBEBF"/>
+                </a:solidFill>
+                <a:effectLst/>
+                <a:latin typeface="Consolas" panose="020B0609020204030204" pitchFamily="49" charset="0"/>
+              </a:rPr>
+              <a:t>        </a:t>
+            </a:r>
+            <a:r>
+              <a:rPr lang="en-US" altLang="ko-KR" sz="900" b="0">
+                <a:solidFill>
+                  <a:srgbClr val="C586C0"/>
+                </a:solidFill>
+                <a:effectLst/>
+                <a:latin typeface="Consolas" panose="020B0609020204030204" pitchFamily="49" charset="0"/>
+              </a:rPr>
+              <a:t>return</a:t>
+            </a:r>
+            <a:r>
+              <a:rPr lang="en-US" altLang="ko-KR" sz="900" b="0">
+                <a:solidFill>
+                  <a:srgbClr val="BBBEBF"/>
+                </a:solidFill>
+                <a:effectLst/>
+                <a:latin typeface="Consolas" panose="020B0609020204030204" pitchFamily="49" charset="0"/>
+              </a:rPr>
+              <a:t> </a:t>
+            </a:r>
+            <a:r>
+              <a:rPr lang="en-US" altLang="ko-KR" sz="900" b="0">
+                <a:solidFill>
+                  <a:srgbClr val="C9D1D9"/>
+                </a:solidFill>
+                <a:effectLst/>
+                <a:latin typeface="Consolas" panose="020B0609020204030204" pitchFamily="49" charset="0"/>
+              </a:rPr>
+              <a:t>to</a:t>
+            </a:r>
+            <a:r>
+              <a:rPr lang="en-US" altLang="ko-KR" sz="900" b="0">
+                <a:solidFill>
+                  <a:srgbClr val="BBBEBF"/>
+                </a:solidFill>
+                <a:effectLst/>
+                <a:latin typeface="Consolas" panose="020B0609020204030204" pitchFamily="49" charset="0"/>
+              </a:rPr>
+              <a:t>;</a:t>
+            </a:r>
+          </a:p>
+          <a:p>
+            <a:pPr>
+              <a:lnSpc>
+                <a:spcPts val="1425"/>
+              </a:lnSpc>
+              <a:buNone/>
+            </a:pPr>
+            <a:r>
+              <a:rPr lang="en-US" altLang="ko-KR" sz="900" b="0">
+                <a:solidFill>
+                  <a:srgbClr val="BBBEBF"/>
+                </a:solidFill>
+                <a:effectLst/>
+                <a:latin typeface="Consolas" panose="020B0609020204030204" pitchFamily="49" charset="0"/>
+              </a:rPr>
+              <a:t>    }</a:t>
+            </a:r>
+          </a:p>
+          <a:p>
+            <a:pPr>
+              <a:lnSpc>
+                <a:spcPts val="1425"/>
+              </a:lnSpc>
+              <a:buNone/>
+            </a:pPr>
+            <a:r>
+              <a:rPr lang="en-US" altLang="ko-KR" sz="900" b="0">
+                <a:solidFill>
+                  <a:srgbClr val="BBBEBF"/>
+                </a:solidFill>
+                <a:effectLst/>
+                <a:latin typeface="Consolas" panose="020B0609020204030204" pitchFamily="49" charset="0"/>
+              </a:rPr>
+              <a:t>    </a:t>
+            </a:r>
+            <a:r>
+              <a:rPr lang="en-US" altLang="ko-KR" sz="900" b="0">
+                <a:solidFill>
+                  <a:srgbClr val="569CD6"/>
+                </a:solidFill>
+                <a:effectLst/>
+                <a:latin typeface="Consolas" panose="020B0609020204030204" pitchFamily="49" charset="0"/>
+              </a:rPr>
+              <a:t>public</a:t>
+            </a:r>
+            <a:r>
+              <a:rPr lang="en-US" altLang="ko-KR" sz="900" b="0">
+                <a:solidFill>
+                  <a:srgbClr val="BBBEBF"/>
+                </a:solidFill>
+                <a:effectLst/>
+                <a:latin typeface="Consolas" panose="020B0609020204030204" pitchFamily="49" charset="0"/>
+              </a:rPr>
+              <a:t> </a:t>
+            </a:r>
+            <a:r>
+              <a:rPr lang="en-US" altLang="ko-KR" sz="900" b="0">
+                <a:solidFill>
+                  <a:srgbClr val="4EC9B0"/>
+                </a:solidFill>
+                <a:effectLst/>
+                <a:latin typeface="Consolas" panose="020B0609020204030204" pitchFamily="49" charset="0"/>
+              </a:rPr>
+              <a:t>String</a:t>
+            </a:r>
+            <a:r>
+              <a:rPr lang="en-US" altLang="ko-KR" sz="900" b="0">
+                <a:solidFill>
+                  <a:srgbClr val="BBBEBF"/>
+                </a:solidFill>
+                <a:effectLst/>
+                <a:latin typeface="Consolas" panose="020B0609020204030204" pitchFamily="49" charset="0"/>
+              </a:rPr>
+              <a:t> </a:t>
+            </a:r>
+            <a:r>
+              <a:rPr lang="en-US" altLang="ko-KR" sz="900" b="0">
+                <a:solidFill>
+                  <a:srgbClr val="D2A8FF"/>
+                </a:solidFill>
+                <a:effectLst/>
+                <a:latin typeface="Consolas" panose="020B0609020204030204" pitchFamily="49" charset="0"/>
+              </a:rPr>
+              <a:t>getSubject</a:t>
+            </a:r>
+            <a:r>
+              <a:rPr lang="en-US" altLang="ko-KR" sz="900" b="0">
+                <a:solidFill>
+                  <a:srgbClr val="BBBEBF"/>
+                </a:solidFill>
+                <a:effectLst/>
+                <a:latin typeface="Consolas" panose="020B0609020204030204" pitchFamily="49" charset="0"/>
+              </a:rPr>
+              <a:t>() {</a:t>
+            </a:r>
+          </a:p>
+          <a:p>
+            <a:pPr>
+              <a:lnSpc>
+                <a:spcPts val="1425"/>
+              </a:lnSpc>
+              <a:buNone/>
+            </a:pPr>
+            <a:r>
+              <a:rPr lang="en-US" altLang="ko-KR" sz="900" b="0">
+                <a:solidFill>
+                  <a:srgbClr val="BBBEBF"/>
+                </a:solidFill>
+                <a:effectLst/>
+                <a:latin typeface="Consolas" panose="020B0609020204030204" pitchFamily="49" charset="0"/>
+              </a:rPr>
+              <a:t>        </a:t>
+            </a:r>
+            <a:r>
+              <a:rPr lang="en-US" altLang="ko-KR" sz="900" b="0">
+                <a:solidFill>
+                  <a:srgbClr val="C586C0"/>
+                </a:solidFill>
+                <a:effectLst/>
+                <a:latin typeface="Consolas" panose="020B0609020204030204" pitchFamily="49" charset="0"/>
+              </a:rPr>
+              <a:t>return</a:t>
+            </a:r>
+            <a:r>
+              <a:rPr lang="en-US" altLang="ko-KR" sz="900" b="0">
+                <a:solidFill>
+                  <a:srgbClr val="BBBEBF"/>
+                </a:solidFill>
+                <a:effectLst/>
+                <a:latin typeface="Consolas" panose="020B0609020204030204" pitchFamily="49" charset="0"/>
+              </a:rPr>
+              <a:t> </a:t>
+            </a:r>
+            <a:r>
+              <a:rPr lang="en-US" altLang="ko-KR" sz="900" b="0">
+                <a:solidFill>
+                  <a:srgbClr val="C9D1D9"/>
+                </a:solidFill>
+                <a:effectLst/>
+                <a:latin typeface="Consolas" panose="020B0609020204030204" pitchFamily="49" charset="0"/>
+              </a:rPr>
+              <a:t>subject</a:t>
+            </a:r>
+            <a:r>
+              <a:rPr lang="en-US" altLang="ko-KR" sz="900" b="0">
+                <a:solidFill>
+                  <a:srgbClr val="BBBEBF"/>
+                </a:solidFill>
+                <a:effectLst/>
+                <a:latin typeface="Consolas" panose="020B0609020204030204" pitchFamily="49" charset="0"/>
+              </a:rPr>
+              <a:t>;</a:t>
+            </a:r>
+          </a:p>
+          <a:p>
+            <a:pPr>
+              <a:lnSpc>
+                <a:spcPts val="1425"/>
+              </a:lnSpc>
+              <a:buNone/>
+            </a:pPr>
+            <a:r>
+              <a:rPr lang="en-US" altLang="ko-KR" sz="900" b="0">
+                <a:solidFill>
+                  <a:srgbClr val="BBBEBF"/>
+                </a:solidFill>
+                <a:effectLst/>
+                <a:latin typeface="Consolas" panose="020B0609020204030204" pitchFamily="49" charset="0"/>
+              </a:rPr>
+              <a:t>    }</a:t>
+            </a:r>
+          </a:p>
+          <a:p>
+            <a:pPr>
+              <a:lnSpc>
+                <a:spcPts val="1425"/>
+              </a:lnSpc>
+              <a:buNone/>
+            </a:pPr>
+            <a:r>
+              <a:rPr lang="en-US" altLang="ko-KR" sz="900" b="0">
+                <a:solidFill>
+                  <a:srgbClr val="BBBEBF"/>
+                </a:solidFill>
+                <a:effectLst/>
+                <a:latin typeface="Consolas" panose="020B0609020204030204" pitchFamily="49" charset="0"/>
+              </a:rPr>
+              <a:t>    </a:t>
+            </a:r>
+            <a:r>
+              <a:rPr lang="en-US" altLang="ko-KR" sz="900" b="0">
+                <a:solidFill>
+                  <a:srgbClr val="569CD6"/>
+                </a:solidFill>
+                <a:effectLst/>
+                <a:latin typeface="Consolas" panose="020B0609020204030204" pitchFamily="49" charset="0"/>
+              </a:rPr>
+              <a:t>public</a:t>
+            </a:r>
+            <a:r>
+              <a:rPr lang="en-US" altLang="ko-KR" sz="900" b="0">
+                <a:solidFill>
+                  <a:srgbClr val="BBBEBF"/>
+                </a:solidFill>
+                <a:effectLst/>
+                <a:latin typeface="Consolas" panose="020B0609020204030204" pitchFamily="49" charset="0"/>
+              </a:rPr>
+              <a:t> </a:t>
+            </a:r>
+            <a:r>
+              <a:rPr lang="en-US" altLang="ko-KR" sz="900" b="0">
+                <a:solidFill>
+                  <a:srgbClr val="4EC9B0"/>
+                </a:solidFill>
+                <a:effectLst/>
+                <a:latin typeface="Consolas" panose="020B0609020204030204" pitchFamily="49" charset="0"/>
+              </a:rPr>
+              <a:t>String</a:t>
+            </a:r>
+            <a:r>
+              <a:rPr lang="en-US" altLang="ko-KR" sz="900" b="0">
+                <a:solidFill>
+                  <a:srgbClr val="BBBEBF"/>
+                </a:solidFill>
+                <a:effectLst/>
+                <a:latin typeface="Consolas" panose="020B0609020204030204" pitchFamily="49" charset="0"/>
+              </a:rPr>
+              <a:t> </a:t>
+            </a:r>
+            <a:r>
+              <a:rPr lang="en-US" altLang="ko-KR" sz="900" b="0">
+                <a:solidFill>
+                  <a:srgbClr val="D2A8FF"/>
+                </a:solidFill>
+                <a:effectLst/>
+                <a:latin typeface="Consolas" panose="020B0609020204030204" pitchFamily="49" charset="0"/>
+              </a:rPr>
+              <a:t>getBody</a:t>
+            </a:r>
+            <a:r>
+              <a:rPr lang="en-US" altLang="ko-KR" sz="900" b="0">
+                <a:solidFill>
+                  <a:srgbClr val="BBBEBF"/>
+                </a:solidFill>
+                <a:effectLst/>
+                <a:latin typeface="Consolas" panose="020B0609020204030204" pitchFamily="49" charset="0"/>
+              </a:rPr>
+              <a:t>() {</a:t>
+            </a:r>
+          </a:p>
+          <a:p>
+            <a:pPr>
+              <a:lnSpc>
+                <a:spcPts val="1425"/>
+              </a:lnSpc>
+              <a:buNone/>
+            </a:pPr>
+            <a:r>
+              <a:rPr lang="en-US" altLang="ko-KR" sz="900" b="0">
+                <a:solidFill>
+                  <a:srgbClr val="BBBEBF"/>
+                </a:solidFill>
+                <a:effectLst/>
+                <a:latin typeface="Consolas" panose="020B0609020204030204" pitchFamily="49" charset="0"/>
+              </a:rPr>
+              <a:t>        </a:t>
+            </a:r>
+            <a:r>
+              <a:rPr lang="en-US" altLang="ko-KR" sz="900" b="0">
+                <a:solidFill>
+                  <a:srgbClr val="C586C0"/>
+                </a:solidFill>
+                <a:effectLst/>
+                <a:latin typeface="Consolas" panose="020B0609020204030204" pitchFamily="49" charset="0"/>
+              </a:rPr>
+              <a:t>return</a:t>
+            </a:r>
+            <a:r>
+              <a:rPr lang="en-US" altLang="ko-KR" sz="900" b="0">
+                <a:solidFill>
+                  <a:srgbClr val="BBBEBF"/>
+                </a:solidFill>
+                <a:effectLst/>
+                <a:latin typeface="Consolas" panose="020B0609020204030204" pitchFamily="49" charset="0"/>
+              </a:rPr>
+              <a:t> </a:t>
+            </a:r>
+            <a:r>
+              <a:rPr lang="en-US" altLang="ko-KR" sz="900" b="0">
+                <a:solidFill>
+                  <a:srgbClr val="C9D1D9"/>
+                </a:solidFill>
+                <a:effectLst/>
+                <a:latin typeface="Consolas" panose="020B0609020204030204" pitchFamily="49" charset="0"/>
+              </a:rPr>
+              <a:t>body</a:t>
+            </a:r>
+            <a:r>
+              <a:rPr lang="en-US" altLang="ko-KR" sz="900" b="0">
+                <a:solidFill>
+                  <a:srgbClr val="BBBEBF"/>
+                </a:solidFill>
+                <a:effectLst/>
+                <a:latin typeface="Consolas" panose="020B0609020204030204" pitchFamily="49" charset="0"/>
+              </a:rPr>
+              <a:t>;</a:t>
+            </a:r>
+          </a:p>
+          <a:p>
+            <a:pPr>
+              <a:lnSpc>
+                <a:spcPts val="1425"/>
+              </a:lnSpc>
+              <a:buNone/>
+            </a:pPr>
+            <a:r>
+              <a:rPr lang="en-US" altLang="ko-KR" sz="900" b="0">
+                <a:solidFill>
+                  <a:srgbClr val="BBBEBF"/>
+                </a:solidFill>
+                <a:effectLst/>
+                <a:latin typeface="Consolas" panose="020B0609020204030204" pitchFamily="49" charset="0"/>
+              </a:rPr>
+              <a:t>    }</a:t>
+            </a:r>
+          </a:p>
+          <a:p>
+            <a:pPr>
+              <a:lnSpc>
+                <a:spcPts val="1425"/>
+              </a:lnSpc>
+              <a:buNone/>
+            </a:pPr>
+            <a:r>
+              <a:rPr lang="en-US" altLang="ko-KR" sz="900" b="0">
+                <a:solidFill>
+                  <a:srgbClr val="BBBEBF"/>
+                </a:solidFill>
+                <a:effectLst/>
+                <a:latin typeface="Consolas" panose="020B0609020204030204" pitchFamily="49" charset="0"/>
+              </a:rPr>
+              <a:t>}</a:t>
+            </a:r>
+          </a:p>
+        </p:txBody>
+      </p:sp>
+      <p:sp>
+        <p:nvSpPr>
+          <p:cNvPr id="13" name="TextBox 12">
+            <a:extLst>
+              <a:ext uri="{FF2B5EF4-FFF2-40B4-BE49-F238E27FC236}">
+                <a16:creationId xmlns:a16="http://schemas.microsoft.com/office/drawing/2014/main" id="{2FAC4368-0918-4C7C-B077-4E1445EEC7C8}"/>
+              </a:ext>
+            </a:extLst>
+          </p:cNvPr>
+          <p:cNvSpPr txBox="1"/>
+          <p:nvPr/>
+        </p:nvSpPr>
+        <p:spPr>
+          <a:xfrm>
+            <a:off x="4114800" y="5184648"/>
+            <a:ext cx="7955280" cy="1169551"/>
+          </a:xfrm>
+          <a:prstGeom prst="rect">
+            <a:avLst/>
+          </a:prstGeom>
+          <a:noFill/>
+        </p:spPr>
+        <p:txBody>
+          <a:bodyPr wrap="square" rtlCol="0">
+            <a:spAutoFit/>
+          </a:bodyPr>
+          <a:lstStyle/>
+          <a:p>
+            <a:r>
+              <a:rPr lang="ko-KR" altLang="en-US" sz="1400" b="1">
+                <a:solidFill>
+                  <a:srgbClr val="FF0000"/>
+                </a:solidFill>
+              </a:rPr>
+              <a:t>기본 생성자가 없으면</a:t>
+            </a:r>
+            <a:r>
+              <a:rPr lang="en-US" altLang="ko-KR" sz="1400" b="1">
+                <a:solidFill>
+                  <a:srgbClr val="FF0000"/>
+                </a:solidFill>
+              </a:rPr>
+              <a:t>( public SendEmailRequestDto(){} )</a:t>
+            </a:r>
+            <a:r>
+              <a:rPr lang="ko-KR" altLang="en-US" sz="1400" b="1">
+                <a:solidFill>
+                  <a:srgbClr val="FF0000"/>
+                </a:solidFill>
+              </a:rPr>
+              <a:t> 역직렬화 시 에러 발생</a:t>
+            </a:r>
+            <a:endParaRPr lang="en-US" altLang="ko-KR" sz="1400" b="1">
+              <a:solidFill>
+                <a:srgbClr val="FF0000"/>
+              </a:solidFill>
+            </a:endParaRPr>
+          </a:p>
+          <a:p>
+            <a:r>
+              <a:rPr lang="en-US" altLang="ko-KR" sz="1400"/>
+              <a:t>1. </a:t>
+            </a:r>
+            <a:r>
+              <a:rPr lang="ko-KR" altLang="en-US" sz="1400"/>
+              <a:t>기본 생성자 없이 역직렬화 생성자를 제공하는 방법 </a:t>
+            </a:r>
+            <a:r>
+              <a:rPr lang="en-US" altLang="ko-KR" sz="1400"/>
+              <a:t>- @JsonCreator</a:t>
+            </a:r>
+          </a:p>
+          <a:p>
+            <a:r>
+              <a:rPr lang="en-US" altLang="ko-KR" sz="1400"/>
+              <a:t>2. </a:t>
+            </a:r>
+            <a:r>
+              <a:rPr lang="ko-KR" altLang="en-US" sz="1400"/>
+              <a:t>역직렬화 대상 속성 제공 </a:t>
+            </a:r>
+            <a:r>
+              <a:rPr lang="en-US" altLang="ko-KR" sz="1400"/>
+              <a:t>- @JsonProperty(“</a:t>
+            </a:r>
+            <a:r>
+              <a:rPr lang="ko-KR" altLang="en-US" sz="1400"/>
+              <a:t>요청파람</a:t>
+            </a:r>
+            <a:r>
+              <a:rPr lang="en-US" altLang="ko-KR" sz="1400"/>
+              <a:t>”)</a:t>
+            </a:r>
+          </a:p>
+          <a:p>
+            <a:endParaRPr lang="en-US" altLang="ko-KR" sz="1400"/>
+          </a:p>
+          <a:p>
+            <a:r>
+              <a:rPr lang="ko-KR" altLang="en-US" sz="1400"/>
+              <a:t>★ 그냥 기본생성자를 생성하면 이런일 없음</a:t>
+            </a:r>
+            <a:r>
+              <a:rPr lang="en-US" altLang="ko-KR" sz="1400"/>
+              <a:t>.</a:t>
+            </a:r>
+            <a:endParaRPr lang="ko-KR" altLang="en-US" sz="1400"/>
+          </a:p>
+        </p:txBody>
+      </p:sp>
+    </p:spTree>
+    <p:extLst>
+      <p:ext uri="{BB962C8B-B14F-4D97-AF65-F5344CB8AC3E}">
+        <p14:creationId xmlns:p14="http://schemas.microsoft.com/office/powerpoint/2010/main" val="3048760990"/>
+      </p:ext>
+    </p:extLst>
+  </p:cSld>
+  <p:clrMapOvr>
+    <a:masterClrMapping/>
+  </p:clrMapOvr>
+</p:sld>
+</file>
+
+<file path=ppt/slides/slide19.xml><?xml version="1.0" encoding="utf-8"?>
+<p:sld xmlns:a="http://schemas.openxmlformats.org/drawingml/2006/main" xmlns:r="http://schemas.openxmlformats.org/officeDocument/2006/relationships" xmlns:p="http://schemas.openxmlformats.org/presentationml/2006/main">
+  <p:cSld>
+    <p:spTree>
+      <p:nvGrpSpPr>
+        <p:cNvPr id="1" name=""/>
+        <p:cNvGrpSpPr/>
+        <p:nvPr/>
+      </p:nvGrpSpPr>
+      <p:grpSpPr>
+        <a:xfrm>
+          <a:off x="0" y="0"/>
+          <a:ext cx="0" cy="0"/>
+          <a:chOff x="0" y="0"/>
+          <a:chExt cx="0" cy="0"/>
+        </a:xfrm>
+      </p:grpSpPr>
+      <p:sp>
+        <p:nvSpPr>
+          <p:cNvPr id="2" name="제목 1">
+            <a:extLst>
+              <a:ext uri="{FF2B5EF4-FFF2-40B4-BE49-F238E27FC236}">
+                <a16:creationId xmlns:a16="http://schemas.microsoft.com/office/drawing/2014/main" id="{E3D3636A-FD39-359D-330A-1C41457DEA97}"/>
+              </a:ext>
+            </a:extLst>
+          </p:cNvPr>
+          <p:cNvSpPr>
+            <a:spLocks noGrp="1"/>
+          </p:cNvSpPr>
+          <p:nvPr>
+            <p:ph type="title"/>
+          </p:nvPr>
+        </p:nvSpPr>
+        <p:spPr/>
+        <p:txBody>
+          <a:bodyPr>
+            <a:noAutofit/>
+          </a:bodyPr>
+          <a:lstStyle/>
+          <a:p>
+            <a:r>
+              <a:rPr lang="en-US" altLang="ko-KR" sz="4000"/>
+              <a:t>SpringBoot</a:t>
+            </a:r>
+            <a:r>
+              <a:rPr lang="ko-KR" altLang="en-US" sz="4000"/>
+              <a:t>로 </a:t>
+            </a:r>
+            <a:r>
+              <a:rPr lang="en-US" altLang="ko-KR" sz="4000"/>
+              <a:t>Kafka</a:t>
+            </a:r>
+            <a:r>
+              <a:rPr lang="ko-KR" altLang="en-US" sz="4000"/>
+              <a:t>에 메시지 넣는 코드 작성</a:t>
+            </a:r>
+            <a:br>
+              <a:rPr lang="en-US" altLang="ko-KR" sz="4000"/>
+            </a:br>
+            <a:r>
+              <a:rPr lang="en-US" altLang="ko-KR" sz="4000"/>
+              <a:t>(Service)</a:t>
+            </a:r>
+            <a:endParaRPr lang="ko-KR" altLang="en-US" sz="4000"/>
+          </a:p>
+        </p:txBody>
+      </p:sp>
+      <p:grpSp>
+        <p:nvGrpSpPr>
+          <p:cNvPr id="5" name="그룹 4">
+            <a:extLst>
+              <a:ext uri="{FF2B5EF4-FFF2-40B4-BE49-F238E27FC236}">
+                <a16:creationId xmlns:a16="http://schemas.microsoft.com/office/drawing/2014/main" id="{EF616F79-E3CC-8896-D084-8AE45E702B1D}"/>
+              </a:ext>
+            </a:extLst>
+          </p:cNvPr>
+          <p:cNvGrpSpPr/>
+          <p:nvPr/>
+        </p:nvGrpSpPr>
+        <p:grpSpPr>
+          <a:xfrm>
+            <a:off x="1250253" y="1847960"/>
+            <a:ext cx="2705478" cy="4277322"/>
+            <a:chOff x="1241109" y="1847960"/>
+            <a:chExt cx="2705478" cy="4277322"/>
+          </a:xfrm>
+        </p:grpSpPr>
+        <p:pic>
+          <p:nvPicPr>
+            <p:cNvPr id="3" name="그림 2">
+              <a:extLst>
+                <a:ext uri="{FF2B5EF4-FFF2-40B4-BE49-F238E27FC236}">
+                  <a16:creationId xmlns:a16="http://schemas.microsoft.com/office/drawing/2014/main" id="{139C51E3-8400-757C-7271-B32F145B8CD2}"/>
+                </a:ext>
+              </a:extLst>
+            </p:cNvPr>
+            <p:cNvPicPr>
+              <a:picLocks noChangeAspect="1"/>
+            </p:cNvPicPr>
+            <p:nvPr/>
+          </p:nvPicPr>
+          <p:blipFill>
+            <a:blip r:embed="rId2"/>
+            <a:stretch>
+              <a:fillRect/>
+            </a:stretch>
+          </p:blipFill>
+          <p:spPr>
+            <a:xfrm>
+              <a:off x="1241109" y="1847960"/>
+              <a:ext cx="2705478" cy="4277322"/>
+            </a:xfrm>
+            <a:prstGeom prst="rect">
+              <a:avLst/>
+            </a:prstGeom>
+          </p:spPr>
+        </p:pic>
+        <p:sp>
+          <p:nvSpPr>
+            <p:cNvPr id="4" name="직사각형 3">
+              <a:extLst>
+                <a:ext uri="{FF2B5EF4-FFF2-40B4-BE49-F238E27FC236}">
+                  <a16:creationId xmlns:a16="http://schemas.microsoft.com/office/drawing/2014/main" id="{23141629-E60E-E721-EE41-0BBF61957ACF}"/>
+                </a:ext>
+              </a:extLst>
+            </p:cNvPr>
+            <p:cNvSpPr/>
+            <p:nvPr/>
+          </p:nvSpPr>
+          <p:spPr>
+            <a:xfrm>
+              <a:off x="1453896" y="3081528"/>
+              <a:ext cx="1335024" cy="347472"/>
+            </a:xfrm>
+            <a:prstGeom prst="rect">
+              <a:avLst/>
+            </a:prstGeom>
+            <a:noFill/>
+            <a:ln>
+              <a:solidFill>
+                <a:srgbClr val="FF0000"/>
+              </a:solidFill>
+            </a:ln>
+          </p:spPr>
+          <p:style>
+            <a:lnRef idx="2">
+              <a:schemeClr val="accent1">
+                <a:shade val="15000"/>
+              </a:schemeClr>
+            </a:lnRef>
+            <a:fillRef idx="1">
+              <a:schemeClr val="accent1"/>
+            </a:fillRef>
+            <a:effectRef idx="0">
+              <a:schemeClr val="accent1"/>
+            </a:effectRef>
+            <a:fontRef idx="minor">
+              <a:schemeClr val="lt1"/>
+            </a:fontRef>
+          </p:style>
+          <p:txBody>
+            <a:bodyPr rtlCol="0" anchor="ctr"/>
+            <a:lstStyle/>
+            <a:p>
+              <a:pPr algn="ctr"/>
+              <a:endParaRPr lang="ko-KR" altLang="en-US"/>
+            </a:p>
+          </p:txBody>
+        </p:sp>
+      </p:grpSp>
+      <p:sp>
+        <p:nvSpPr>
+          <p:cNvPr id="7" name="TextBox 6">
+            <a:extLst>
+              <a:ext uri="{FF2B5EF4-FFF2-40B4-BE49-F238E27FC236}">
+                <a16:creationId xmlns:a16="http://schemas.microsoft.com/office/drawing/2014/main" id="{15F2C099-6D77-76E1-6A0F-640A26A2ECB7}"/>
+              </a:ext>
+            </a:extLst>
+          </p:cNvPr>
+          <p:cNvSpPr txBox="1"/>
+          <p:nvPr/>
+        </p:nvSpPr>
+        <p:spPr>
+          <a:xfrm>
+            <a:off x="4237101" y="1847960"/>
+            <a:ext cx="7439788" cy="4924618"/>
+          </a:xfrm>
+          <a:prstGeom prst="rect">
+            <a:avLst/>
+          </a:prstGeom>
+          <a:solidFill>
+            <a:schemeClr val="tx1"/>
+          </a:solidFill>
+        </p:spPr>
+        <p:txBody>
+          <a:bodyPr wrap="square">
+            <a:spAutoFit/>
+          </a:bodyPr>
+          <a:lstStyle/>
+          <a:p>
+            <a:pPr>
+              <a:lnSpc>
+                <a:spcPts val="1425"/>
+              </a:lnSpc>
+              <a:buNone/>
+            </a:pPr>
+            <a:r>
+              <a:rPr lang="en-US" altLang="ko-KR" sz="900" b="0">
+                <a:solidFill>
+                  <a:srgbClr val="BBBEBF"/>
+                </a:solidFill>
+                <a:effectLst/>
+                <a:latin typeface="Consolas" panose="020B0609020204030204" pitchFamily="49" charset="0"/>
+              </a:rPr>
+              <a:t>@</a:t>
+            </a:r>
+            <a:r>
+              <a:rPr lang="en-US" altLang="ko-KR" sz="900" b="0">
+                <a:solidFill>
+                  <a:srgbClr val="4EC9B0"/>
+                </a:solidFill>
+                <a:effectLst/>
+                <a:latin typeface="Consolas" panose="020B0609020204030204" pitchFamily="49" charset="0"/>
+              </a:rPr>
+              <a:t>Service</a:t>
+            </a:r>
+            <a:endParaRPr lang="en-US" altLang="ko-KR" sz="900" b="0">
+              <a:solidFill>
+                <a:srgbClr val="BBBEBF"/>
+              </a:solidFill>
+              <a:effectLst/>
+              <a:latin typeface="Consolas" panose="020B0609020204030204" pitchFamily="49" charset="0"/>
+            </a:endParaRPr>
+          </a:p>
+          <a:p>
+            <a:pPr>
+              <a:lnSpc>
+                <a:spcPts val="1425"/>
+              </a:lnSpc>
+              <a:buNone/>
+            </a:pPr>
+            <a:r>
+              <a:rPr lang="en-US" altLang="ko-KR" sz="900" b="0">
+                <a:solidFill>
+                  <a:srgbClr val="569CD6"/>
+                </a:solidFill>
+                <a:effectLst/>
+                <a:latin typeface="Consolas" panose="020B0609020204030204" pitchFamily="49" charset="0"/>
+              </a:rPr>
+              <a:t>public</a:t>
+            </a:r>
+            <a:r>
+              <a:rPr lang="en-US" altLang="ko-KR" sz="900" b="0">
+                <a:solidFill>
+                  <a:srgbClr val="BBBEBF"/>
+                </a:solidFill>
+                <a:effectLst/>
+                <a:latin typeface="Consolas" panose="020B0609020204030204" pitchFamily="49" charset="0"/>
+              </a:rPr>
+              <a:t> </a:t>
+            </a:r>
+            <a:r>
+              <a:rPr lang="en-US" altLang="ko-KR" sz="900" b="0">
+                <a:solidFill>
+                  <a:srgbClr val="569CD6"/>
+                </a:solidFill>
+                <a:effectLst/>
+                <a:latin typeface="Consolas" panose="020B0609020204030204" pitchFamily="49" charset="0"/>
+              </a:rPr>
+              <a:t>class</a:t>
+            </a:r>
+            <a:r>
+              <a:rPr lang="en-US" altLang="ko-KR" sz="900" b="0">
+                <a:solidFill>
+                  <a:srgbClr val="BBBEBF"/>
+                </a:solidFill>
+                <a:effectLst/>
+                <a:latin typeface="Consolas" panose="020B0609020204030204" pitchFamily="49" charset="0"/>
+              </a:rPr>
+              <a:t> </a:t>
+            </a:r>
+            <a:r>
+              <a:rPr lang="en-US" altLang="ko-KR" sz="900" b="0">
+                <a:solidFill>
+                  <a:srgbClr val="4EC9B0"/>
+                </a:solidFill>
+                <a:effectLst/>
+                <a:latin typeface="Consolas" panose="020B0609020204030204" pitchFamily="49" charset="0"/>
+              </a:rPr>
+              <a:t>EmailService</a:t>
+            </a:r>
+            <a:r>
+              <a:rPr lang="en-US" altLang="ko-KR" sz="900" b="0">
+                <a:solidFill>
+                  <a:srgbClr val="BBBEBF"/>
+                </a:solidFill>
+                <a:effectLst/>
+                <a:latin typeface="Consolas" panose="020B0609020204030204" pitchFamily="49" charset="0"/>
+              </a:rPr>
+              <a:t> {</a:t>
+            </a:r>
+          </a:p>
+          <a:p>
+            <a:pPr>
+              <a:lnSpc>
+                <a:spcPts val="1425"/>
+              </a:lnSpc>
+              <a:buNone/>
+            </a:pPr>
+            <a:r>
+              <a:rPr lang="en-US" altLang="ko-KR" sz="900" b="0">
+                <a:solidFill>
+                  <a:srgbClr val="BBBEBF"/>
+                </a:solidFill>
+                <a:effectLst/>
+                <a:latin typeface="Consolas" panose="020B0609020204030204" pitchFamily="49" charset="0"/>
+              </a:rPr>
+              <a:t>    </a:t>
+            </a:r>
+            <a:r>
+              <a:rPr lang="en-US" altLang="ko-KR" sz="900" b="0">
+                <a:solidFill>
+                  <a:srgbClr val="569CD6"/>
+                </a:solidFill>
+                <a:effectLst/>
+                <a:latin typeface="Consolas" panose="020B0609020204030204" pitchFamily="49" charset="0"/>
+              </a:rPr>
+              <a:t>private</a:t>
+            </a:r>
+            <a:r>
+              <a:rPr lang="en-US" altLang="ko-KR" sz="900" b="0">
+                <a:solidFill>
+                  <a:srgbClr val="BBBEBF"/>
+                </a:solidFill>
+                <a:effectLst/>
+                <a:latin typeface="Consolas" panose="020B0609020204030204" pitchFamily="49" charset="0"/>
+              </a:rPr>
+              <a:t> </a:t>
+            </a:r>
+            <a:r>
+              <a:rPr lang="en-US" altLang="ko-KR" sz="900" b="0">
+                <a:solidFill>
+                  <a:srgbClr val="569CD6"/>
+                </a:solidFill>
+                <a:effectLst/>
+                <a:latin typeface="Consolas" panose="020B0609020204030204" pitchFamily="49" charset="0"/>
+              </a:rPr>
+              <a:t>final</a:t>
+            </a:r>
+            <a:r>
+              <a:rPr lang="en-US" altLang="ko-KR" sz="900" b="0">
+                <a:solidFill>
+                  <a:srgbClr val="BBBEBF"/>
+                </a:solidFill>
+                <a:effectLst/>
+                <a:latin typeface="Consolas" panose="020B0609020204030204" pitchFamily="49" charset="0"/>
+              </a:rPr>
+              <a:t> </a:t>
+            </a:r>
+            <a:r>
+              <a:rPr lang="en-US" altLang="ko-KR" sz="900" b="0">
+                <a:solidFill>
+                  <a:srgbClr val="4EC9B0"/>
+                </a:solidFill>
+                <a:effectLst/>
+                <a:latin typeface="Consolas" panose="020B0609020204030204" pitchFamily="49" charset="0"/>
+              </a:rPr>
+              <a:t>EmailController</a:t>
+            </a:r>
+            <a:r>
+              <a:rPr lang="en-US" altLang="ko-KR" sz="900" b="0">
+                <a:solidFill>
+                  <a:srgbClr val="FFA657"/>
+                </a:solidFill>
+                <a:effectLst/>
+                <a:latin typeface="Consolas" panose="020B0609020204030204" pitchFamily="49" charset="0"/>
+              </a:rPr>
+              <a:t> </a:t>
+            </a:r>
+            <a:r>
+              <a:rPr lang="en-US" altLang="ko-KR" sz="900" b="0">
+                <a:solidFill>
+                  <a:srgbClr val="79C0FF"/>
+                </a:solidFill>
+                <a:effectLst/>
+                <a:latin typeface="Consolas" panose="020B0609020204030204" pitchFamily="49" charset="0"/>
+              </a:rPr>
+              <a:t>emailController</a:t>
+            </a:r>
+            <a:r>
+              <a:rPr lang="en-US" altLang="ko-KR" sz="900" b="0">
+                <a:solidFill>
+                  <a:srgbClr val="BBBEBF"/>
+                </a:solidFill>
+                <a:effectLst/>
+                <a:latin typeface="Consolas" panose="020B0609020204030204" pitchFamily="49" charset="0"/>
+              </a:rPr>
+              <a:t>;</a:t>
+            </a:r>
+          </a:p>
+          <a:p>
+            <a:pPr>
+              <a:lnSpc>
+                <a:spcPts val="1425"/>
+              </a:lnSpc>
+              <a:buNone/>
+            </a:pPr>
+            <a:r>
+              <a:rPr lang="en-US" altLang="ko-KR" sz="900" b="0">
+                <a:solidFill>
+                  <a:srgbClr val="BBBEBF"/>
+                </a:solidFill>
+                <a:effectLst/>
+                <a:latin typeface="Consolas" panose="020B0609020204030204" pitchFamily="49" charset="0"/>
+              </a:rPr>
+              <a:t>    </a:t>
+            </a:r>
+            <a:r>
+              <a:rPr lang="en-US" altLang="ko-KR" sz="900" b="0">
+                <a:solidFill>
+                  <a:srgbClr val="569CD6"/>
+                </a:solidFill>
+                <a:effectLst/>
+                <a:latin typeface="Consolas" panose="020B0609020204030204" pitchFamily="49" charset="0"/>
+              </a:rPr>
+              <a:t>private</a:t>
+            </a:r>
+            <a:r>
+              <a:rPr lang="en-US" altLang="ko-KR" sz="900" b="0">
+                <a:solidFill>
+                  <a:srgbClr val="BBBEBF"/>
+                </a:solidFill>
+                <a:effectLst/>
+                <a:latin typeface="Consolas" panose="020B0609020204030204" pitchFamily="49" charset="0"/>
+              </a:rPr>
+              <a:t> </a:t>
+            </a:r>
+            <a:r>
+              <a:rPr lang="en-US" altLang="ko-KR" sz="900" b="0">
+                <a:solidFill>
+                  <a:srgbClr val="569CD6"/>
+                </a:solidFill>
+                <a:effectLst/>
+                <a:latin typeface="Consolas" panose="020B0609020204030204" pitchFamily="49" charset="0"/>
+              </a:rPr>
+              <a:t>final</a:t>
+            </a:r>
+            <a:r>
+              <a:rPr lang="en-US" altLang="ko-KR" sz="900" b="0">
+                <a:solidFill>
+                  <a:srgbClr val="BBBEBF"/>
+                </a:solidFill>
+                <a:effectLst/>
+                <a:latin typeface="Consolas" panose="020B0609020204030204" pitchFamily="49" charset="0"/>
+              </a:rPr>
+              <a:t> </a:t>
+            </a:r>
+            <a:r>
+              <a:rPr lang="en-US" altLang="ko-KR" sz="900" b="0">
+                <a:solidFill>
+                  <a:srgbClr val="4EC9B0"/>
+                </a:solidFill>
+                <a:effectLst/>
+                <a:latin typeface="Consolas" panose="020B0609020204030204" pitchFamily="49" charset="0"/>
+              </a:rPr>
+              <a:t>KafkaTemplate</a:t>
+            </a:r>
+            <a:r>
+              <a:rPr lang="en-US" altLang="ko-KR" sz="900" b="0">
+                <a:solidFill>
+                  <a:srgbClr val="FFA657"/>
+                </a:solidFill>
+                <a:effectLst/>
+                <a:latin typeface="Consolas" panose="020B0609020204030204" pitchFamily="49" charset="0"/>
+              </a:rPr>
+              <a:t>&lt;</a:t>
+            </a:r>
+            <a:r>
+              <a:rPr lang="en-US" altLang="ko-KR" sz="900" b="0">
+                <a:solidFill>
+                  <a:srgbClr val="4EC9B0"/>
+                </a:solidFill>
+                <a:effectLst/>
+                <a:latin typeface="Consolas" panose="020B0609020204030204" pitchFamily="49" charset="0"/>
+              </a:rPr>
+              <a:t>String</a:t>
+            </a:r>
+            <a:r>
+              <a:rPr lang="en-US" altLang="ko-KR" sz="900" b="0">
+                <a:solidFill>
+                  <a:srgbClr val="FFA657"/>
+                </a:solidFill>
+                <a:effectLst/>
+                <a:latin typeface="Consolas" panose="020B0609020204030204" pitchFamily="49" charset="0"/>
+              </a:rPr>
+              <a:t>, </a:t>
+            </a:r>
+            <a:r>
+              <a:rPr lang="en-US" altLang="ko-KR" sz="900" b="0">
+                <a:solidFill>
+                  <a:srgbClr val="4EC9B0"/>
+                </a:solidFill>
+                <a:effectLst/>
+                <a:latin typeface="Consolas" panose="020B0609020204030204" pitchFamily="49" charset="0"/>
+              </a:rPr>
+              <a:t>String</a:t>
+            </a:r>
+            <a:r>
+              <a:rPr lang="en-US" altLang="ko-KR" sz="900" b="0">
+                <a:solidFill>
+                  <a:srgbClr val="FFA657"/>
+                </a:solidFill>
+                <a:effectLst/>
+                <a:latin typeface="Consolas" panose="020B0609020204030204" pitchFamily="49" charset="0"/>
+              </a:rPr>
+              <a:t>&gt; </a:t>
+            </a:r>
+            <a:r>
+              <a:rPr lang="en-US" altLang="ko-KR" sz="900" b="0">
+                <a:solidFill>
+                  <a:srgbClr val="79C0FF"/>
+                </a:solidFill>
+                <a:effectLst/>
+                <a:latin typeface="Consolas" panose="020B0609020204030204" pitchFamily="49" charset="0"/>
+              </a:rPr>
+              <a:t>kafkaTemplate</a:t>
+            </a:r>
+            <a:r>
+              <a:rPr lang="en-US" altLang="ko-KR" sz="900" b="0">
+                <a:solidFill>
+                  <a:srgbClr val="BBBEBF"/>
+                </a:solidFill>
+                <a:effectLst/>
+                <a:latin typeface="Consolas" panose="020B0609020204030204" pitchFamily="49" charset="0"/>
+              </a:rPr>
+              <a:t>;</a:t>
+            </a:r>
+          </a:p>
+          <a:p>
+            <a:pPr>
+              <a:lnSpc>
+                <a:spcPts val="1425"/>
+              </a:lnSpc>
+              <a:buNone/>
+            </a:pPr>
+            <a:r>
+              <a:rPr lang="en-US" altLang="ko-KR" sz="900" b="0">
+                <a:solidFill>
+                  <a:srgbClr val="BBBEBF"/>
+                </a:solidFill>
+                <a:effectLst/>
+                <a:latin typeface="Consolas" panose="020B0609020204030204" pitchFamily="49" charset="0"/>
+              </a:rPr>
+              <a:t>    </a:t>
+            </a:r>
+            <a:r>
+              <a:rPr lang="en-US" altLang="ko-KR" sz="900" b="0">
+                <a:solidFill>
+                  <a:srgbClr val="569CD6"/>
+                </a:solidFill>
+                <a:effectLst/>
+                <a:latin typeface="Consolas" panose="020B0609020204030204" pitchFamily="49" charset="0"/>
+              </a:rPr>
+              <a:t>public</a:t>
+            </a:r>
+            <a:r>
+              <a:rPr lang="en-US" altLang="ko-KR" sz="900" b="0">
+                <a:solidFill>
+                  <a:srgbClr val="BBBEBF"/>
+                </a:solidFill>
+                <a:effectLst/>
+                <a:latin typeface="Consolas" panose="020B0609020204030204" pitchFamily="49" charset="0"/>
+              </a:rPr>
+              <a:t> </a:t>
+            </a:r>
+            <a:r>
+              <a:rPr lang="en-US" altLang="ko-KR" sz="900" b="0">
+                <a:solidFill>
+                  <a:srgbClr val="D2A8FF"/>
+                </a:solidFill>
+                <a:effectLst/>
+                <a:latin typeface="Consolas" panose="020B0609020204030204" pitchFamily="49" charset="0"/>
+              </a:rPr>
+              <a:t>EmailService</a:t>
+            </a:r>
+            <a:r>
+              <a:rPr lang="en-US" altLang="ko-KR" sz="900" b="0">
+                <a:solidFill>
+                  <a:srgbClr val="BBBEBF"/>
+                </a:solidFill>
+                <a:effectLst/>
+                <a:latin typeface="Consolas" panose="020B0609020204030204" pitchFamily="49" charset="0"/>
+              </a:rPr>
+              <a:t>(</a:t>
+            </a:r>
+            <a:r>
+              <a:rPr lang="en-US" altLang="ko-KR" sz="900" b="0">
+                <a:solidFill>
+                  <a:srgbClr val="4EC9B0"/>
+                </a:solidFill>
+                <a:effectLst/>
+                <a:latin typeface="Consolas" panose="020B0609020204030204" pitchFamily="49" charset="0"/>
+              </a:rPr>
+              <a:t>KafkaTemplate</a:t>
+            </a:r>
+            <a:r>
+              <a:rPr lang="en-US" altLang="ko-KR" sz="900" b="0">
+                <a:solidFill>
+                  <a:srgbClr val="BBBEBF"/>
+                </a:solidFill>
+                <a:effectLst/>
+                <a:latin typeface="Consolas" panose="020B0609020204030204" pitchFamily="49" charset="0"/>
+              </a:rPr>
+              <a:t> </a:t>
+            </a:r>
+            <a:r>
+              <a:rPr lang="en-US" altLang="ko-KR" sz="900" b="0">
+                <a:solidFill>
+                  <a:srgbClr val="FFA657"/>
+                </a:solidFill>
+                <a:effectLst/>
+                <a:latin typeface="Consolas" panose="020B0609020204030204" pitchFamily="49" charset="0"/>
+              </a:rPr>
+              <a:t>kafkaTemplate</a:t>
+            </a:r>
+            <a:r>
+              <a:rPr lang="en-US" altLang="ko-KR" sz="900" b="0">
+                <a:solidFill>
+                  <a:srgbClr val="BBBEBF"/>
+                </a:solidFill>
+                <a:effectLst/>
+                <a:latin typeface="Consolas" panose="020B0609020204030204" pitchFamily="49" charset="0"/>
+              </a:rPr>
+              <a:t>){</a:t>
+            </a:r>
+          </a:p>
+          <a:p>
+            <a:pPr>
+              <a:lnSpc>
+                <a:spcPts val="1425"/>
+              </a:lnSpc>
+              <a:buNone/>
+            </a:pPr>
+            <a:r>
+              <a:rPr lang="en-US" altLang="ko-KR" sz="900" b="0">
+                <a:solidFill>
+                  <a:srgbClr val="BBBEBF"/>
+                </a:solidFill>
+                <a:effectLst/>
+                <a:latin typeface="Consolas" panose="020B0609020204030204" pitchFamily="49" charset="0"/>
+              </a:rPr>
+              <a:t>        </a:t>
+            </a:r>
+            <a:r>
+              <a:rPr lang="en-US" altLang="ko-KR" sz="900" b="0">
+                <a:solidFill>
+                  <a:srgbClr val="79C0FF"/>
+                </a:solidFill>
+                <a:effectLst/>
+                <a:latin typeface="Consolas" panose="020B0609020204030204" pitchFamily="49" charset="0"/>
+              </a:rPr>
+              <a:t>this</a:t>
+            </a:r>
+            <a:r>
+              <a:rPr lang="en-US" altLang="ko-KR" sz="900" b="0">
+                <a:solidFill>
+                  <a:srgbClr val="BBBEBF"/>
+                </a:solidFill>
+                <a:effectLst/>
+                <a:latin typeface="Consolas" panose="020B0609020204030204" pitchFamily="49" charset="0"/>
+              </a:rPr>
+              <a:t>.</a:t>
+            </a:r>
+            <a:r>
+              <a:rPr lang="en-US" altLang="ko-KR" sz="900" b="0">
+                <a:solidFill>
+                  <a:srgbClr val="79C0FF"/>
+                </a:solidFill>
+                <a:effectLst/>
+                <a:latin typeface="Consolas" panose="020B0609020204030204" pitchFamily="49" charset="0"/>
+              </a:rPr>
+              <a:t>kafkaTemplate</a:t>
+            </a:r>
+            <a:r>
+              <a:rPr lang="en-US" altLang="ko-KR" sz="900" b="0">
+                <a:solidFill>
+                  <a:srgbClr val="BBBEBF"/>
+                </a:solidFill>
+                <a:effectLst/>
+                <a:latin typeface="Consolas" panose="020B0609020204030204" pitchFamily="49" charset="0"/>
+              </a:rPr>
+              <a:t> </a:t>
+            </a:r>
+            <a:r>
+              <a:rPr lang="en-US" altLang="ko-KR" sz="900" b="0">
+                <a:solidFill>
+                  <a:srgbClr val="D4D4D4"/>
+                </a:solidFill>
+                <a:effectLst/>
+                <a:latin typeface="Consolas" panose="020B0609020204030204" pitchFamily="49" charset="0"/>
+              </a:rPr>
+              <a:t>=</a:t>
+            </a:r>
+            <a:r>
+              <a:rPr lang="en-US" altLang="ko-KR" sz="900" b="0">
+                <a:solidFill>
+                  <a:srgbClr val="BBBEBF"/>
+                </a:solidFill>
+                <a:effectLst/>
+                <a:latin typeface="Consolas" panose="020B0609020204030204" pitchFamily="49" charset="0"/>
+              </a:rPr>
+              <a:t> </a:t>
+            </a:r>
+            <a:r>
+              <a:rPr lang="en-US" altLang="ko-KR" sz="900" b="0">
+                <a:solidFill>
+                  <a:srgbClr val="FFA657"/>
+                </a:solidFill>
+                <a:effectLst/>
+                <a:latin typeface="Consolas" panose="020B0609020204030204" pitchFamily="49" charset="0"/>
+              </a:rPr>
+              <a:t>kafkaTemplate</a:t>
+            </a:r>
+            <a:r>
+              <a:rPr lang="en-US" altLang="ko-KR" sz="900" b="0">
+                <a:solidFill>
+                  <a:srgbClr val="BBBEBF"/>
+                </a:solidFill>
+                <a:effectLst/>
+                <a:latin typeface="Consolas" panose="020B0609020204030204" pitchFamily="49" charset="0"/>
+              </a:rPr>
+              <a:t>;</a:t>
+            </a:r>
+          </a:p>
+          <a:p>
+            <a:pPr>
+              <a:lnSpc>
+                <a:spcPts val="1425"/>
+              </a:lnSpc>
+              <a:buNone/>
+            </a:pPr>
+            <a:r>
+              <a:rPr lang="en-US" altLang="ko-KR" sz="900" b="0">
+                <a:solidFill>
+                  <a:srgbClr val="BBBEBF"/>
+                </a:solidFill>
+                <a:effectLst/>
+                <a:latin typeface="Consolas" panose="020B0609020204030204" pitchFamily="49" charset="0"/>
+              </a:rPr>
+              <a:t>        </a:t>
+            </a:r>
+            <a:r>
+              <a:rPr lang="en-US" altLang="ko-KR" sz="900" b="0">
+                <a:solidFill>
+                  <a:srgbClr val="79C0FF"/>
+                </a:solidFill>
+                <a:effectLst/>
+                <a:latin typeface="Consolas" panose="020B0609020204030204" pitchFamily="49" charset="0"/>
+              </a:rPr>
+              <a:t>this</a:t>
+            </a:r>
+            <a:r>
+              <a:rPr lang="en-US" altLang="ko-KR" sz="900" b="0">
+                <a:solidFill>
+                  <a:srgbClr val="BBBEBF"/>
+                </a:solidFill>
+                <a:effectLst/>
+                <a:latin typeface="Consolas" panose="020B0609020204030204" pitchFamily="49" charset="0"/>
+              </a:rPr>
+              <a:t>.</a:t>
+            </a:r>
+            <a:r>
+              <a:rPr lang="en-US" altLang="ko-KR" sz="900" b="0">
+                <a:solidFill>
+                  <a:srgbClr val="79C0FF"/>
+                </a:solidFill>
+                <a:effectLst/>
+                <a:latin typeface="Consolas" panose="020B0609020204030204" pitchFamily="49" charset="0"/>
+              </a:rPr>
+              <a:t>emailController</a:t>
+            </a:r>
+            <a:r>
+              <a:rPr lang="en-US" altLang="ko-KR" sz="900" b="0">
+                <a:solidFill>
+                  <a:srgbClr val="BBBEBF"/>
+                </a:solidFill>
+                <a:effectLst/>
+                <a:latin typeface="Consolas" panose="020B0609020204030204" pitchFamily="49" charset="0"/>
+              </a:rPr>
+              <a:t> </a:t>
+            </a:r>
+            <a:r>
+              <a:rPr lang="en-US" altLang="ko-KR" sz="900" b="0">
+                <a:solidFill>
+                  <a:srgbClr val="D4D4D4"/>
+                </a:solidFill>
+                <a:effectLst/>
+                <a:latin typeface="Consolas" panose="020B0609020204030204" pitchFamily="49" charset="0"/>
+              </a:rPr>
+              <a:t>=</a:t>
+            </a:r>
+            <a:r>
+              <a:rPr lang="en-US" altLang="ko-KR" sz="900" b="0">
+                <a:solidFill>
+                  <a:srgbClr val="BBBEBF"/>
+                </a:solidFill>
+                <a:effectLst/>
+                <a:latin typeface="Consolas" panose="020B0609020204030204" pitchFamily="49" charset="0"/>
+              </a:rPr>
+              <a:t> </a:t>
+            </a:r>
+            <a:r>
+              <a:rPr lang="en-US" altLang="ko-KR" sz="900" b="0">
+                <a:solidFill>
+                  <a:srgbClr val="FFA657"/>
+                </a:solidFill>
+                <a:effectLst/>
+                <a:latin typeface="Consolas" panose="020B0609020204030204" pitchFamily="49" charset="0"/>
+              </a:rPr>
+              <a:t>emailController</a:t>
+            </a:r>
+            <a:r>
+              <a:rPr lang="en-US" altLang="ko-KR" sz="900" b="0">
+                <a:solidFill>
+                  <a:srgbClr val="BBBEBF"/>
+                </a:solidFill>
+                <a:effectLst/>
+                <a:latin typeface="Consolas" panose="020B0609020204030204" pitchFamily="49" charset="0"/>
+              </a:rPr>
+              <a:t>;</a:t>
+            </a:r>
+          </a:p>
+          <a:p>
+            <a:pPr>
+              <a:lnSpc>
+                <a:spcPts val="1425"/>
+              </a:lnSpc>
+              <a:buNone/>
+            </a:pPr>
+            <a:r>
+              <a:rPr lang="en-US" altLang="ko-KR" sz="900" b="0">
+                <a:solidFill>
+                  <a:srgbClr val="BBBEBF"/>
+                </a:solidFill>
+                <a:effectLst/>
+                <a:latin typeface="Consolas" panose="020B0609020204030204" pitchFamily="49" charset="0"/>
+              </a:rPr>
+              <a:t>    }</a:t>
+            </a:r>
+          </a:p>
+          <a:p>
+            <a:pPr>
+              <a:lnSpc>
+                <a:spcPts val="1425"/>
+              </a:lnSpc>
+              <a:buNone/>
+            </a:pPr>
+            <a:r>
+              <a:rPr lang="en-US" altLang="ko-KR" sz="900" b="0">
+                <a:solidFill>
+                  <a:srgbClr val="BBBEBF"/>
+                </a:solidFill>
+                <a:effectLst/>
+                <a:latin typeface="Consolas" panose="020B0609020204030204" pitchFamily="49" charset="0"/>
+              </a:rPr>
+              <a:t>    </a:t>
+            </a:r>
+            <a:r>
+              <a:rPr lang="en-US" altLang="ko-KR" sz="900" b="0">
+                <a:solidFill>
+                  <a:srgbClr val="569CD6"/>
+                </a:solidFill>
+                <a:effectLst/>
+                <a:latin typeface="Consolas" panose="020B0609020204030204" pitchFamily="49" charset="0"/>
+              </a:rPr>
+              <a:t>public</a:t>
+            </a:r>
+            <a:r>
+              <a:rPr lang="en-US" altLang="ko-KR" sz="900" b="0">
+                <a:solidFill>
+                  <a:srgbClr val="BBBEBF"/>
+                </a:solidFill>
+                <a:effectLst/>
+                <a:latin typeface="Consolas" panose="020B0609020204030204" pitchFamily="49" charset="0"/>
+              </a:rPr>
+              <a:t> </a:t>
+            </a:r>
+            <a:r>
+              <a:rPr lang="en-US" altLang="ko-KR" sz="900" b="0">
+                <a:solidFill>
+                  <a:srgbClr val="4EC9B0"/>
+                </a:solidFill>
+                <a:effectLst/>
+                <a:latin typeface="Consolas" panose="020B0609020204030204" pitchFamily="49" charset="0"/>
+              </a:rPr>
+              <a:t>void</a:t>
+            </a:r>
+            <a:r>
+              <a:rPr lang="en-US" altLang="ko-KR" sz="900" b="0">
+                <a:solidFill>
+                  <a:srgbClr val="BBBEBF"/>
+                </a:solidFill>
+                <a:effectLst/>
+                <a:latin typeface="Consolas" panose="020B0609020204030204" pitchFamily="49" charset="0"/>
+              </a:rPr>
+              <a:t> </a:t>
+            </a:r>
+            <a:r>
+              <a:rPr lang="en-US" altLang="ko-KR" sz="900" b="0">
+                <a:solidFill>
+                  <a:srgbClr val="D2A8FF"/>
+                </a:solidFill>
+                <a:effectLst/>
+                <a:latin typeface="Consolas" panose="020B0609020204030204" pitchFamily="49" charset="0"/>
+              </a:rPr>
+              <a:t>sendEmail</a:t>
+            </a:r>
+            <a:r>
+              <a:rPr lang="en-US" altLang="ko-KR" sz="900" b="0">
+                <a:solidFill>
+                  <a:srgbClr val="BBBEBF"/>
+                </a:solidFill>
+                <a:effectLst/>
+                <a:latin typeface="Consolas" panose="020B0609020204030204" pitchFamily="49" charset="0"/>
+              </a:rPr>
+              <a:t>(</a:t>
+            </a:r>
+            <a:r>
+              <a:rPr lang="en-US" altLang="ko-KR" sz="900" b="0">
+                <a:solidFill>
+                  <a:srgbClr val="4EC9B0"/>
+                </a:solidFill>
+                <a:effectLst/>
+                <a:latin typeface="Consolas" panose="020B0609020204030204" pitchFamily="49" charset="0"/>
+              </a:rPr>
+              <a:t>SendEmailRequestDto</a:t>
+            </a:r>
+            <a:r>
+              <a:rPr lang="en-US" altLang="ko-KR" sz="900" b="0">
+                <a:solidFill>
+                  <a:srgbClr val="BBBEBF"/>
+                </a:solidFill>
+                <a:effectLst/>
+                <a:latin typeface="Consolas" panose="020B0609020204030204" pitchFamily="49" charset="0"/>
+              </a:rPr>
+              <a:t> </a:t>
+            </a:r>
+            <a:r>
+              <a:rPr lang="en-US" altLang="ko-KR" sz="900" b="0">
+                <a:solidFill>
+                  <a:srgbClr val="FFA657"/>
+                </a:solidFill>
+                <a:effectLst/>
+                <a:latin typeface="Consolas" panose="020B0609020204030204" pitchFamily="49" charset="0"/>
+              </a:rPr>
+              <a:t>request</a:t>
+            </a:r>
+            <a:r>
+              <a:rPr lang="en-US" altLang="ko-KR" sz="900" b="0">
+                <a:solidFill>
+                  <a:srgbClr val="BBBEBF"/>
+                </a:solidFill>
+                <a:effectLst/>
+                <a:latin typeface="Consolas" panose="020B0609020204030204" pitchFamily="49" charset="0"/>
+              </a:rPr>
+              <a:t>){</a:t>
+            </a:r>
+          </a:p>
+          <a:p>
+            <a:pPr>
+              <a:lnSpc>
+                <a:spcPts val="1425"/>
+              </a:lnSpc>
+              <a:buNone/>
+            </a:pPr>
+            <a:r>
+              <a:rPr lang="en-US" altLang="ko-KR" sz="900" b="0">
+                <a:solidFill>
+                  <a:srgbClr val="BBBEBF"/>
+                </a:solidFill>
+                <a:effectLst/>
+                <a:latin typeface="Consolas" panose="020B0609020204030204" pitchFamily="49" charset="0"/>
+              </a:rPr>
+              <a:t>        </a:t>
+            </a:r>
+            <a:r>
+              <a:rPr lang="en-US" altLang="ko-KR" sz="900" b="0">
+                <a:solidFill>
+                  <a:srgbClr val="4EC9B0"/>
+                </a:solidFill>
+                <a:effectLst/>
+                <a:latin typeface="Consolas" panose="020B0609020204030204" pitchFamily="49" charset="0"/>
+              </a:rPr>
+              <a:t>EmailSendMessage</a:t>
+            </a:r>
+            <a:r>
+              <a:rPr lang="en-US" altLang="ko-KR" sz="900" b="0">
+                <a:solidFill>
+                  <a:srgbClr val="FFA657"/>
+                </a:solidFill>
+                <a:effectLst/>
+                <a:latin typeface="Consolas" panose="020B0609020204030204" pitchFamily="49" charset="0"/>
+              </a:rPr>
+              <a:t> </a:t>
+            </a:r>
+            <a:r>
+              <a:rPr lang="en-US" altLang="ko-KR" sz="900" b="0">
+                <a:solidFill>
+                  <a:srgbClr val="C9D1D9"/>
+                </a:solidFill>
+                <a:effectLst/>
+                <a:latin typeface="Consolas" panose="020B0609020204030204" pitchFamily="49" charset="0"/>
+              </a:rPr>
+              <a:t>emailSendMessage</a:t>
+            </a:r>
+            <a:r>
+              <a:rPr lang="en-US" altLang="ko-KR" sz="900" b="0">
+                <a:solidFill>
+                  <a:srgbClr val="FFA657"/>
+                </a:solidFill>
+                <a:effectLst/>
+                <a:latin typeface="Consolas" panose="020B0609020204030204" pitchFamily="49" charset="0"/>
+              </a:rPr>
+              <a:t> </a:t>
+            </a:r>
+            <a:r>
+              <a:rPr lang="en-US" altLang="ko-KR" sz="900" b="0">
+                <a:solidFill>
+                  <a:srgbClr val="D4D4D4"/>
+                </a:solidFill>
+                <a:effectLst/>
+                <a:latin typeface="Consolas" panose="020B0609020204030204" pitchFamily="49" charset="0"/>
+              </a:rPr>
+              <a:t>=</a:t>
+            </a:r>
+            <a:r>
+              <a:rPr lang="en-US" altLang="ko-KR" sz="900" b="0">
+                <a:solidFill>
+                  <a:srgbClr val="BBBEBF"/>
+                </a:solidFill>
+                <a:effectLst/>
+                <a:latin typeface="Consolas" panose="020B0609020204030204" pitchFamily="49" charset="0"/>
+              </a:rPr>
+              <a:t> </a:t>
+            </a:r>
+            <a:r>
+              <a:rPr lang="en-US" altLang="ko-KR" sz="900" b="0">
+                <a:solidFill>
+                  <a:srgbClr val="C586C0"/>
+                </a:solidFill>
+                <a:effectLst/>
+                <a:latin typeface="Consolas" panose="020B0609020204030204" pitchFamily="49" charset="0"/>
+              </a:rPr>
+              <a:t>new</a:t>
+            </a:r>
+            <a:r>
+              <a:rPr lang="en-US" altLang="ko-KR" sz="900" b="0">
+                <a:solidFill>
+                  <a:srgbClr val="BBBEBF"/>
+                </a:solidFill>
+                <a:effectLst/>
+                <a:latin typeface="Consolas" panose="020B0609020204030204" pitchFamily="49" charset="0"/>
+              </a:rPr>
+              <a:t> </a:t>
+            </a:r>
+            <a:r>
+              <a:rPr lang="en-US" altLang="ko-KR" sz="900" b="0">
+                <a:solidFill>
+                  <a:srgbClr val="D2A8FF"/>
+                </a:solidFill>
+                <a:effectLst/>
+                <a:latin typeface="Consolas" panose="020B0609020204030204" pitchFamily="49" charset="0"/>
+              </a:rPr>
+              <a:t>EmailSendMessage</a:t>
+            </a:r>
+            <a:r>
+              <a:rPr lang="en-US" altLang="ko-KR" sz="900" b="0">
+                <a:solidFill>
+                  <a:srgbClr val="BBBEBF"/>
+                </a:solidFill>
+                <a:effectLst/>
+                <a:latin typeface="Consolas" panose="020B0609020204030204" pitchFamily="49" charset="0"/>
+              </a:rPr>
+              <a:t>(</a:t>
+            </a:r>
+          </a:p>
+          <a:p>
+            <a:pPr>
+              <a:lnSpc>
+                <a:spcPts val="1425"/>
+              </a:lnSpc>
+              <a:buNone/>
+            </a:pPr>
+            <a:r>
+              <a:rPr lang="en-US" altLang="ko-KR" sz="900" b="0">
+                <a:solidFill>
+                  <a:srgbClr val="BBBEBF"/>
+                </a:solidFill>
+                <a:effectLst/>
+                <a:latin typeface="Consolas" panose="020B0609020204030204" pitchFamily="49" charset="0"/>
+              </a:rPr>
+              <a:t>            </a:t>
+            </a:r>
+            <a:r>
+              <a:rPr lang="en-US" altLang="ko-KR" sz="900" b="0">
+                <a:solidFill>
+                  <a:srgbClr val="FFA657"/>
+                </a:solidFill>
+                <a:effectLst/>
+                <a:latin typeface="Consolas" panose="020B0609020204030204" pitchFamily="49" charset="0"/>
+              </a:rPr>
+              <a:t>request</a:t>
+            </a:r>
+            <a:r>
+              <a:rPr lang="en-US" altLang="ko-KR" sz="900" b="0">
+                <a:solidFill>
+                  <a:srgbClr val="BBBEBF"/>
+                </a:solidFill>
+                <a:effectLst/>
+                <a:latin typeface="Consolas" panose="020B0609020204030204" pitchFamily="49" charset="0"/>
+              </a:rPr>
+              <a:t>.</a:t>
+            </a:r>
+            <a:r>
+              <a:rPr lang="en-US" altLang="ko-KR" sz="900" b="0">
+                <a:solidFill>
+                  <a:srgbClr val="D2A8FF"/>
+                </a:solidFill>
+                <a:effectLst/>
+                <a:latin typeface="Consolas" panose="020B0609020204030204" pitchFamily="49" charset="0"/>
+              </a:rPr>
+              <a:t>getFrom</a:t>
+            </a:r>
+            <a:r>
+              <a:rPr lang="en-US" altLang="ko-KR" sz="900" b="0">
+                <a:solidFill>
+                  <a:srgbClr val="BBBEBF"/>
+                </a:solidFill>
+                <a:effectLst/>
+                <a:latin typeface="Consolas" panose="020B0609020204030204" pitchFamily="49" charset="0"/>
+              </a:rPr>
+              <a:t>(),</a:t>
+            </a:r>
+          </a:p>
+          <a:p>
+            <a:pPr>
+              <a:lnSpc>
+                <a:spcPts val="1425"/>
+              </a:lnSpc>
+              <a:buNone/>
+            </a:pPr>
+            <a:r>
+              <a:rPr lang="en-US" altLang="ko-KR" sz="900" b="0">
+                <a:solidFill>
+                  <a:srgbClr val="BBBEBF"/>
+                </a:solidFill>
+                <a:effectLst/>
+                <a:latin typeface="Consolas" panose="020B0609020204030204" pitchFamily="49" charset="0"/>
+              </a:rPr>
+              <a:t>            </a:t>
+            </a:r>
+            <a:r>
+              <a:rPr lang="en-US" altLang="ko-KR" sz="900" b="0">
+                <a:solidFill>
+                  <a:srgbClr val="FFA657"/>
+                </a:solidFill>
+                <a:effectLst/>
+                <a:latin typeface="Consolas" panose="020B0609020204030204" pitchFamily="49" charset="0"/>
+              </a:rPr>
+              <a:t>request</a:t>
+            </a:r>
+            <a:r>
+              <a:rPr lang="en-US" altLang="ko-KR" sz="900" b="0">
+                <a:solidFill>
+                  <a:srgbClr val="BBBEBF"/>
+                </a:solidFill>
+                <a:effectLst/>
+                <a:latin typeface="Consolas" panose="020B0609020204030204" pitchFamily="49" charset="0"/>
+              </a:rPr>
+              <a:t>.</a:t>
+            </a:r>
+            <a:r>
+              <a:rPr lang="en-US" altLang="ko-KR" sz="900" b="0">
+                <a:solidFill>
+                  <a:srgbClr val="D2A8FF"/>
+                </a:solidFill>
+                <a:effectLst/>
+                <a:latin typeface="Consolas" panose="020B0609020204030204" pitchFamily="49" charset="0"/>
+              </a:rPr>
+              <a:t>getTo</a:t>
+            </a:r>
+            <a:r>
+              <a:rPr lang="en-US" altLang="ko-KR" sz="900" b="0">
+                <a:solidFill>
+                  <a:srgbClr val="BBBEBF"/>
+                </a:solidFill>
+                <a:effectLst/>
+                <a:latin typeface="Consolas" panose="020B0609020204030204" pitchFamily="49" charset="0"/>
+              </a:rPr>
+              <a:t>(),</a:t>
+            </a:r>
+          </a:p>
+          <a:p>
+            <a:pPr>
+              <a:lnSpc>
+                <a:spcPts val="1425"/>
+              </a:lnSpc>
+              <a:buNone/>
+            </a:pPr>
+            <a:r>
+              <a:rPr lang="en-US" altLang="ko-KR" sz="900" b="0">
+                <a:solidFill>
+                  <a:srgbClr val="BBBEBF"/>
+                </a:solidFill>
+                <a:effectLst/>
+                <a:latin typeface="Consolas" panose="020B0609020204030204" pitchFamily="49" charset="0"/>
+              </a:rPr>
+              <a:t>            </a:t>
+            </a:r>
+            <a:r>
+              <a:rPr lang="en-US" altLang="ko-KR" sz="900" b="0">
+                <a:solidFill>
+                  <a:srgbClr val="FFA657"/>
+                </a:solidFill>
+                <a:effectLst/>
+                <a:latin typeface="Consolas" panose="020B0609020204030204" pitchFamily="49" charset="0"/>
+              </a:rPr>
+              <a:t>request</a:t>
+            </a:r>
+            <a:r>
+              <a:rPr lang="en-US" altLang="ko-KR" sz="900" b="0">
+                <a:solidFill>
+                  <a:srgbClr val="BBBEBF"/>
+                </a:solidFill>
+                <a:effectLst/>
+                <a:latin typeface="Consolas" panose="020B0609020204030204" pitchFamily="49" charset="0"/>
+              </a:rPr>
+              <a:t>.</a:t>
+            </a:r>
+            <a:r>
+              <a:rPr lang="en-US" altLang="ko-KR" sz="900" b="0">
+                <a:solidFill>
+                  <a:srgbClr val="D2A8FF"/>
+                </a:solidFill>
+                <a:effectLst/>
+                <a:latin typeface="Consolas" panose="020B0609020204030204" pitchFamily="49" charset="0"/>
+              </a:rPr>
+              <a:t>getSubject</a:t>
+            </a:r>
+            <a:r>
+              <a:rPr lang="en-US" altLang="ko-KR" sz="900" b="0">
+                <a:solidFill>
+                  <a:srgbClr val="BBBEBF"/>
+                </a:solidFill>
+                <a:effectLst/>
+                <a:latin typeface="Consolas" panose="020B0609020204030204" pitchFamily="49" charset="0"/>
+              </a:rPr>
+              <a:t>(),</a:t>
+            </a:r>
+          </a:p>
+          <a:p>
+            <a:pPr>
+              <a:lnSpc>
+                <a:spcPts val="1425"/>
+              </a:lnSpc>
+              <a:buNone/>
+            </a:pPr>
+            <a:r>
+              <a:rPr lang="en-US" altLang="ko-KR" sz="900" b="0">
+                <a:solidFill>
+                  <a:srgbClr val="BBBEBF"/>
+                </a:solidFill>
+                <a:effectLst/>
+                <a:latin typeface="Consolas" panose="020B0609020204030204" pitchFamily="49" charset="0"/>
+              </a:rPr>
+              <a:t>            </a:t>
+            </a:r>
+            <a:r>
+              <a:rPr lang="en-US" altLang="ko-KR" sz="900" b="0">
+                <a:solidFill>
+                  <a:srgbClr val="FFA657"/>
+                </a:solidFill>
+                <a:effectLst/>
+                <a:latin typeface="Consolas" panose="020B0609020204030204" pitchFamily="49" charset="0"/>
+              </a:rPr>
+              <a:t>request</a:t>
+            </a:r>
+            <a:r>
+              <a:rPr lang="en-US" altLang="ko-KR" sz="900" b="0">
+                <a:solidFill>
+                  <a:srgbClr val="BBBEBF"/>
+                </a:solidFill>
+                <a:effectLst/>
+                <a:latin typeface="Consolas" panose="020B0609020204030204" pitchFamily="49" charset="0"/>
+              </a:rPr>
+              <a:t>.</a:t>
+            </a:r>
+            <a:r>
+              <a:rPr lang="en-US" altLang="ko-KR" sz="900" b="0">
+                <a:solidFill>
+                  <a:srgbClr val="D2A8FF"/>
+                </a:solidFill>
+                <a:effectLst/>
+                <a:latin typeface="Consolas" panose="020B0609020204030204" pitchFamily="49" charset="0"/>
+              </a:rPr>
+              <a:t>getBody</a:t>
+            </a:r>
+            <a:r>
+              <a:rPr lang="en-US" altLang="ko-KR" sz="900" b="0">
+                <a:solidFill>
+                  <a:srgbClr val="BBBEBF"/>
+                </a:solidFill>
+                <a:effectLst/>
+                <a:latin typeface="Consolas" panose="020B0609020204030204" pitchFamily="49" charset="0"/>
+              </a:rPr>
+              <a:t>()</a:t>
+            </a:r>
+          </a:p>
+          <a:p>
+            <a:pPr>
+              <a:lnSpc>
+                <a:spcPts val="1425"/>
+              </a:lnSpc>
+              <a:buNone/>
+            </a:pPr>
+            <a:r>
+              <a:rPr lang="en-US" altLang="ko-KR" sz="900" b="0">
+                <a:solidFill>
+                  <a:srgbClr val="BBBEBF"/>
+                </a:solidFill>
+                <a:effectLst/>
+                <a:latin typeface="Consolas" panose="020B0609020204030204" pitchFamily="49" charset="0"/>
+              </a:rPr>
+              <a:t>        );</a:t>
+            </a:r>
+          </a:p>
+          <a:p>
+            <a:pPr>
+              <a:lnSpc>
+                <a:spcPts val="1425"/>
+              </a:lnSpc>
+              <a:buNone/>
+            </a:pPr>
+            <a:r>
+              <a:rPr lang="en-US" altLang="ko-KR" sz="900" b="0">
+                <a:solidFill>
+                  <a:srgbClr val="BBBEBF"/>
+                </a:solidFill>
+                <a:effectLst/>
+                <a:latin typeface="Consolas" panose="020B0609020204030204" pitchFamily="49" charset="0"/>
+              </a:rPr>
+              <a:t>        </a:t>
+            </a:r>
+            <a:r>
+              <a:rPr lang="en-US" altLang="ko-KR" sz="900" b="0">
+                <a:solidFill>
+                  <a:srgbClr val="79C0FF"/>
+                </a:solidFill>
+                <a:effectLst/>
+                <a:latin typeface="Consolas" panose="020B0609020204030204" pitchFamily="49" charset="0"/>
+              </a:rPr>
+              <a:t>this</a:t>
+            </a:r>
+            <a:r>
+              <a:rPr lang="en-US" altLang="ko-KR" sz="900" b="0">
+                <a:solidFill>
+                  <a:srgbClr val="BBBEBF"/>
+                </a:solidFill>
+                <a:effectLst/>
+                <a:latin typeface="Consolas" panose="020B0609020204030204" pitchFamily="49" charset="0"/>
+              </a:rPr>
+              <a:t>.</a:t>
+            </a:r>
+            <a:r>
+              <a:rPr lang="en-US" altLang="ko-KR" sz="900" b="0">
+                <a:solidFill>
+                  <a:srgbClr val="79C0FF"/>
+                </a:solidFill>
+                <a:effectLst/>
+                <a:latin typeface="Consolas" panose="020B0609020204030204" pitchFamily="49" charset="0"/>
+              </a:rPr>
+              <a:t>kafkaTemplate</a:t>
+            </a:r>
+            <a:r>
+              <a:rPr lang="en-US" altLang="ko-KR" sz="900" b="0">
+                <a:solidFill>
+                  <a:srgbClr val="BBBEBF"/>
+                </a:solidFill>
+                <a:effectLst/>
+                <a:latin typeface="Consolas" panose="020B0609020204030204" pitchFamily="49" charset="0"/>
+              </a:rPr>
+              <a:t>.</a:t>
+            </a:r>
+            <a:r>
+              <a:rPr lang="en-US" altLang="ko-KR" sz="900" b="0">
+                <a:solidFill>
+                  <a:srgbClr val="D2A8FF"/>
+                </a:solidFill>
+                <a:effectLst/>
+                <a:latin typeface="Consolas" panose="020B0609020204030204" pitchFamily="49" charset="0"/>
+              </a:rPr>
+              <a:t>send</a:t>
+            </a:r>
+            <a:r>
+              <a:rPr lang="en-US" altLang="ko-KR" sz="900" b="0">
+                <a:solidFill>
+                  <a:srgbClr val="BBBEBF"/>
+                </a:solidFill>
+                <a:effectLst/>
+                <a:latin typeface="Consolas" panose="020B0609020204030204" pitchFamily="49" charset="0"/>
+              </a:rPr>
+              <a:t>(</a:t>
+            </a:r>
+            <a:r>
+              <a:rPr lang="en-US" altLang="ko-KR" sz="900" b="0">
+                <a:solidFill>
+                  <a:srgbClr val="A5D6FF"/>
+                </a:solidFill>
+                <a:effectLst/>
+                <a:latin typeface="Consolas" panose="020B0609020204030204" pitchFamily="49" charset="0"/>
+              </a:rPr>
+              <a:t>"email.send"</a:t>
+            </a:r>
+            <a:r>
+              <a:rPr lang="en-US" altLang="ko-KR" sz="900" b="0">
+                <a:solidFill>
+                  <a:srgbClr val="BBBEBF"/>
+                </a:solidFill>
+                <a:effectLst/>
+                <a:latin typeface="Consolas" panose="020B0609020204030204" pitchFamily="49" charset="0"/>
+              </a:rPr>
+              <a:t>, </a:t>
+            </a:r>
+            <a:r>
+              <a:rPr lang="en-US" altLang="ko-KR" sz="900" b="0">
+                <a:solidFill>
+                  <a:srgbClr val="D2A8FF"/>
+                </a:solidFill>
+                <a:effectLst/>
+                <a:latin typeface="Consolas" panose="020B0609020204030204" pitchFamily="49" charset="0"/>
+              </a:rPr>
+              <a:t>toJsonString</a:t>
+            </a:r>
+            <a:r>
+              <a:rPr lang="en-US" altLang="ko-KR" sz="900" b="0">
+                <a:solidFill>
+                  <a:srgbClr val="BBBEBF"/>
+                </a:solidFill>
+                <a:effectLst/>
+                <a:latin typeface="Consolas" panose="020B0609020204030204" pitchFamily="49" charset="0"/>
+              </a:rPr>
+              <a:t>(</a:t>
+            </a:r>
+            <a:r>
+              <a:rPr lang="en-US" altLang="ko-KR" sz="900" b="0">
+                <a:solidFill>
+                  <a:srgbClr val="C9D1D9"/>
+                </a:solidFill>
+                <a:effectLst/>
+                <a:latin typeface="Consolas" panose="020B0609020204030204" pitchFamily="49" charset="0"/>
+              </a:rPr>
+              <a:t>emailSendMessage</a:t>
+            </a:r>
+            <a:r>
+              <a:rPr lang="en-US" altLang="ko-KR" sz="900" b="0">
+                <a:solidFill>
+                  <a:srgbClr val="BBBEBF"/>
+                </a:solidFill>
+                <a:effectLst/>
+                <a:latin typeface="Consolas" panose="020B0609020204030204" pitchFamily="49" charset="0"/>
+              </a:rPr>
+              <a:t>));</a:t>
+            </a:r>
+          </a:p>
+          <a:p>
+            <a:pPr>
+              <a:lnSpc>
+                <a:spcPts val="1425"/>
+              </a:lnSpc>
+              <a:buNone/>
+            </a:pPr>
+            <a:r>
+              <a:rPr lang="en-US" altLang="ko-KR" sz="900" b="0">
+                <a:solidFill>
+                  <a:srgbClr val="BBBEBF"/>
+                </a:solidFill>
+                <a:effectLst/>
+                <a:latin typeface="Consolas" panose="020B0609020204030204" pitchFamily="49" charset="0"/>
+              </a:rPr>
+              <a:t>    }</a:t>
+            </a:r>
+          </a:p>
+          <a:p>
+            <a:pPr>
+              <a:lnSpc>
+                <a:spcPts val="1425"/>
+              </a:lnSpc>
+              <a:buNone/>
+            </a:pPr>
+            <a:r>
+              <a:rPr lang="en-US" altLang="ko-KR" sz="900" b="0">
+                <a:solidFill>
+                  <a:srgbClr val="BBBEBF"/>
+                </a:solidFill>
+                <a:effectLst/>
+                <a:latin typeface="Consolas" panose="020B0609020204030204" pitchFamily="49" charset="0"/>
+              </a:rPr>
+              <a:t>    </a:t>
+            </a:r>
+            <a:r>
+              <a:rPr lang="en-US" altLang="ko-KR" sz="900" b="0">
+                <a:solidFill>
+                  <a:srgbClr val="569CD6"/>
+                </a:solidFill>
+                <a:effectLst/>
+                <a:latin typeface="Consolas" panose="020B0609020204030204" pitchFamily="49" charset="0"/>
+              </a:rPr>
+              <a:t>private</a:t>
+            </a:r>
+            <a:r>
+              <a:rPr lang="en-US" altLang="ko-KR" sz="900" b="0">
+                <a:solidFill>
+                  <a:srgbClr val="BBBEBF"/>
+                </a:solidFill>
+                <a:effectLst/>
+                <a:latin typeface="Consolas" panose="020B0609020204030204" pitchFamily="49" charset="0"/>
+              </a:rPr>
+              <a:t> </a:t>
+            </a:r>
+            <a:r>
+              <a:rPr lang="en-US" altLang="ko-KR" sz="900" b="0">
+                <a:solidFill>
+                  <a:srgbClr val="4EC9B0"/>
+                </a:solidFill>
+                <a:effectLst/>
+                <a:latin typeface="Consolas" panose="020B0609020204030204" pitchFamily="49" charset="0"/>
+              </a:rPr>
+              <a:t>String</a:t>
+            </a:r>
+            <a:r>
+              <a:rPr lang="en-US" altLang="ko-KR" sz="900" b="0">
+                <a:solidFill>
+                  <a:srgbClr val="BBBEBF"/>
+                </a:solidFill>
+                <a:effectLst/>
+                <a:latin typeface="Consolas" panose="020B0609020204030204" pitchFamily="49" charset="0"/>
+              </a:rPr>
+              <a:t> </a:t>
+            </a:r>
+            <a:r>
+              <a:rPr lang="en-US" altLang="ko-KR" sz="900" b="0">
+                <a:solidFill>
+                  <a:srgbClr val="D2A8FF"/>
+                </a:solidFill>
+                <a:effectLst/>
+                <a:latin typeface="Consolas" panose="020B0609020204030204" pitchFamily="49" charset="0"/>
+              </a:rPr>
+              <a:t>toJsonString</a:t>
+            </a:r>
+            <a:r>
+              <a:rPr lang="en-US" altLang="ko-KR" sz="900" b="0">
+                <a:solidFill>
+                  <a:srgbClr val="BBBEBF"/>
+                </a:solidFill>
+                <a:effectLst/>
+                <a:latin typeface="Consolas" panose="020B0609020204030204" pitchFamily="49" charset="0"/>
+              </a:rPr>
+              <a:t>(</a:t>
+            </a:r>
+            <a:r>
+              <a:rPr lang="en-US" altLang="ko-KR" sz="900" b="0">
+                <a:solidFill>
+                  <a:srgbClr val="4EC9B0"/>
+                </a:solidFill>
+                <a:effectLst/>
+                <a:latin typeface="Consolas" panose="020B0609020204030204" pitchFamily="49" charset="0"/>
+              </a:rPr>
+              <a:t>Object</a:t>
+            </a:r>
+            <a:r>
+              <a:rPr lang="en-US" altLang="ko-KR" sz="900" b="0">
+                <a:solidFill>
+                  <a:srgbClr val="BBBEBF"/>
+                </a:solidFill>
+                <a:effectLst/>
+                <a:latin typeface="Consolas" panose="020B0609020204030204" pitchFamily="49" charset="0"/>
+              </a:rPr>
+              <a:t> </a:t>
+            </a:r>
+            <a:r>
+              <a:rPr lang="en-US" altLang="ko-KR" sz="900" b="0">
+                <a:solidFill>
+                  <a:srgbClr val="FFA657"/>
+                </a:solidFill>
+                <a:effectLst/>
+                <a:latin typeface="Consolas" panose="020B0609020204030204" pitchFamily="49" charset="0"/>
+              </a:rPr>
+              <a:t>object</a:t>
+            </a:r>
+            <a:r>
+              <a:rPr lang="en-US" altLang="ko-KR" sz="900" b="0">
+                <a:solidFill>
+                  <a:srgbClr val="BBBEBF"/>
+                </a:solidFill>
+                <a:effectLst/>
+                <a:latin typeface="Consolas" panose="020B0609020204030204" pitchFamily="49" charset="0"/>
+              </a:rPr>
+              <a:t>){</a:t>
+            </a:r>
+          </a:p>
+          <a:p>
+            <a:pPr>
+              <a:lnSpc>
+                <a:spcPts val="1425"/>
+              </a:lnSpc>
+              <a:buNone/>
+            </a:pPr>
+            <a:r>
+              <a:rPr lang="en-US" altLang="ko-KR" sz="900" b="0">
+                <a:solidFill>
+                  <a:srgbClr val="BBBEBF"/>
+                </a:solidFill>
+                <a:effectLst/>
+                <a:latin typeface="Consolas" panose="020B0609020204030204" pitchFamily="49" charset="0"/>
+              </a:rPr>
+              <a:t>        </a:t>
+            </a:r>
+            <a:r>
+              <a:rPr lang="en-US" altLang="ko-KR" sz="900" b="0">
+                <a:solidFill>
+                  <a:srgbClr val="4EC9B0"/>
+                </a:solidFill>
+                <a:effectLst/>
+                <a:latin typeface="Consolas" panose="020B0609020204030204" pitchFamily="49" charset="0"/>
+              </a:rPr>
+              <a:t>ObjectMapper</a:t>
+            </a:r>
+            <a:r>
+              <a:rPr lang="en-US" altLang="ko-KR" sz="900" b="0">
+                <a:solidFill>
+                  <a:srgbClr val="FFA657"/>
+                </a:solidFill>
+                <a:effectLst/>
+                <a:latin typeface="Consolas" panose="020B0609020204030204" pitchFamily="49" charset="0"/>
+              </a:rPr>
+              <a:t> </a:t>
+            </a:r>
+            <a:r>
+              <a:rPr lang="en-US" altLang="ko-KR" sz="900" b="0">
+                <a:solidFill>
+                  <a:srgbClr val="C9D1D9"/>
+                </a:solidFill>
+                <a:effectLst/>
+                <a:latin typeface="Consolas" panose="020B0609020204030204" pitchFamily="49" charset="0"/>
+              </a:rPr>
+              <a:t>objectMapper</a:t>
+            </a:r>
+            <a:r>
+              <a:rPr lang="en-US" altLang="ko-KR" sz="900" b="0">
+                <a:solidFill>
+                  <a:srgbClr val="D4D4D4"/>
+                </a:solidFill>
+                <a:effectLst/>
+                <a:latin typeface="Consolas" panose="020B0609020204030204" pitchFamily="49" charset="0"/>
+              </a:rPr>
+              <a:t>=</a:t>
+            </a:r>
+            <a:r>
+              <a:rPr lang="en-US" altLang="ko-KR" sz="900" b="0">
+                <a:solidFill>
+                  <a:srgbClr val="BBBEBF"/>
+                </a:solidFill>
+                <a:effectLst/>
+                <a:latin typeface="Consolas" panose="020B0609020204030204" pitchFamily="49" charset="0"/>
+              </a:rPr>
+              <a:t> </a:t>
+            </a:r>
+            <a:r>
+              <a:rPr lang="en-US" altLang="ko-KR" sz="900" b="0">
+                <a:solidFill>
+                  <a:srgbClr val="C586C0"/>
+                </a:solidFill>
+                <a:effectLst/>
+                <a:latin typeface="Consolas" panose="020B0609020204030204" pitchFamily="49" charset="0"/>
+              </a:rPr>
+              <a:t>new</a:t>
+            </a:r>
+            <a:r>
+              <a:rPr lang="en-US" altLang="ko-KR" sz="900" b="0">
+                <a:solidFill>
+                  <a:srgbClr val="BBBEBF"/>
+                </a:solidFill>
+                <a:effectLst/>
+                <a:latin typeface="Consolas" panose="020B0609020204030204" pitchFamily="49" charset="0"/>
+              </a:rPr>
+              <a:t> </a:t>
+            </a:r>
+            <a:r>
+              <a:rPr lang="en-US" altLang="ko-KR" sz="900" b="0">
+                <a:solidFill>
+                  <a:srgbClr val="D2A8FF"/>
+                </a:solidFill>
+                <a:effectLst/>
+                <a:latin typeface="Consolas" panose="020B0609020204030204" pitchFamily="49" charset="0"/>
+              </a:rPr>
+              <a:t>ObjectMapper</a:t>
+            </a:r>
+            <a:r>
+              <a:rPr lang="en-US" altLang="ko-KR" sz="900" b="0">
+                <a:solidFill>
+                  <a:srgbClr val="BBBEBF"/>
+                </a:solidFill>
+                <a:effectLst/>
+                <a:latin typeface="Consolas" panose="020B0609020204030204" pitchFamily="49" charset="0"/>
+              </a:rPr>
+              <a:t>();</a:t>
+            </a:r>
+          </a:p>
+          <a:p>
+            <a:pPr>
+              <a:lnSpc>
+                <a:spcPts val="1425"/>
+              </a:lnSpc>
+              <a:buNone/>
+            </a:pPr>
+            <a:r>
+              <a:rPr lang="en-US" altLang="ko-KR" sz="900" b="0">
+                <a:solidFill>
+                  <a:srgbClr val="BBBEBF"/>
+                </a:solidFill>
+                <a:effectLst/>
+                <a:latin typeface="Consolas" panose="020B0609020204030204" pitchFamily="49" charset="0"/>
+              </a:rPr>
+              <a:t>        </a:t>
+            </a:r>
+            <a:r>
+              <a:rPr lang="en-US" altLang="ko-KR" sz="900" b="0">
+                <a:solidFill>
+                  <a:srgbClr val="C586C0"/>
+                </a:solidFill>
+                <a:effectLst/>
+                <a:latin typeface="Consolas" panose="020B0609020204030204" pitchFamily="49" charset="0"/>
+              </a:rPr>
+              <a:t>try</a:t>
+            </a:r>
+            <a:r>
+              <a:rPr lang="en-US" altLang="ko-KR" sz="900" b="0">
+                <a:solidFill>
+                  <a:srgbClr val="BBBEBF"/>
+                </a:solidFill>
+                <a:effectLst/>
+                <a:latin typeface="Consolas" panose="020B0609020204030204" pitchFamily="49" charset="0"/>
+              </a:rPr>
+              <a:t>{</a:t>
+            </a:r>
+          </a:p>
+          <a:p>
+            <a:pPr>
+              <a:lnSpc>
+                <a:spcPts val="1425"/>
+              </a:lnSpc>
+              <a:buNone/>
+            </a:pPr>
+            <a:r>
+              <a:rPr lang="en-US" altLang="ko-KR" sz="900" b="0">
+                <a:solidFill>
+                  <a:srgbClr val="BBBEBF"/>
+                </a:solidFill>
+                <a:effectLst/>
+                <a:latin typeface="Consolas" panose="020B0609020204030204" pitchFamily="49" charset="0"/>
+              </a:rPr>
+              <a:t>            </a:t>
+            </a:r>
+            <a:r>
+              <a:rPr lang="en-US" altLang="ko-KR" sz="900" b="0">
+                <a:solidFill>
+                  <a:srgbClr val="4EC9B0"/>
+                </a:solidFill>
+                <a:effectLst/>
+                <a:latin typeface="Consolas" panose="020B0609020204030204" pitchFamily="49" charset="0"/>
+              </a:rPr>
+              <a:t>String</a:t>
+            </a:r>
+            <a:r>
+              <a:rPr lang="en-US" altLang="ko-KR" sz="900" b="0">
+                <a:solidFill>
+                  <a:srgbClr val="FFA657"/>
+                </a:solidFill>
+                <a:effectLst/>
+                <a:latin typeface="Consolas" panose="020B0609020204030204" pitchFamily="49" charset="0"/>
+              </a:rPr>
+              <a:t> </a:t>
+            </a:r>
+            <a:r>
+              <a:rPr lang="en-US" altLang="ko-KR" sz="900" b="0">
+                <a:solidFill>
+                  <a:srgbClr val="C9D1D9"/>
+                </a:solidFill>
+                <a:effectLst/>
+                <a:latin typeface="Consolas" panose="020B0609020204030204" pitchFamily="49" charset="0"/>
+              </a:rPr>
+              <a:t>message</a:t>
+            </a:r>
+            <a:r>
+              <a:rPr lang="en-US" altLang="ko-KR" sz="900" b="0">
+                <a:solidFill>
+                  <a:srgbClr val="FFA657"/>
+                </a:solidFill>
+                <a:effectLst/>
+                <a:latin typeface="Consolas" panose="020B0609020204030204" pitchFamily="49" charset="0"/>
+              </a:rPr>
+              <a:t> </a:t>
+            </a:r>
+            <a:r>
+              <a:rPr lang="en-US" altLang="ko-KR" sz="900" b="0">
+                <a:solidFill>
+                  <a:srgbClr val="D4D4D4"/>
+                </a:solidFill>
+                <a:effectLst/>
+                <a:latin typeface="Consolas" panose="020B0609020204030204" pitchFamily="49" charset="0"/>
+              </a:rPr>
+              <a:t>=</a:t>
+            </a:r>
+            <a:r>
+              <a:rPr lang="en-US" altLang="ko-KR" sz="900" b="0">
+                <a:solidFill>
+                  <a:srgbClr val="BBBEBF"/>
+                </a:solidFill>
+                <a:effectLst/>
+                <a:latin typeface="Consolas" panose="020B0609020204030204" pitchFamily="49" charset="0"/>
+              </a:rPr>
+              <a:t> </a:t>
+            </a:r>
+            <a:r>
+              <a:rPr lang="en-US" altLang="ko-KR" sz="900" b="0">
+                <a:solidFill>
+                  <a:srgbClr val="C9D1D9"/>
+                </a:solidFill>
+                <a:effectLst/>
+                <a:latin typeface="Consolas" panose="020B0609020204030204" pitchFamily="49" charset="0"/>
+              </a:rPr>
+              <a:t>objectMapper</a:t>
+            </a:r>
+            <a:r>
+              <a:rPr lang="en-US" altLang="ko-KR" sz="900" b="0">
+                <a:solidFill>
+                  <a:srgbClr val="BBBEBF"/>
+                </a:solidFill>
+                <a:effectLst/>
+                <a:latin typeface="Consolas" panose="020B0609020204030204" pitchFamily="49" charset="0"/>
+              </a:rPr>
+              <a:t>.</a:t>
+            </a:r>
+            <a:r>
+              <a:rPr lang="en-US" altLang="ko-KR" sz="900" b="0">
+                <a:solidFill>
+                  <a:srgbClr val="D2A8FF"/>
+                </a:solidFill>
+                <a:effectLst/>
+                <a:latin typeface="Consolas" panose="020B0609020204030204" pitchFamily="49" charset="0"/>
+              </a:rPr>
+              <a:t>writeValueAsString</a:t>
+            </a:r>
+            <a:r>
+              <a:rPr lang="en-US" altLang="ko-KR" sz="900" b="0">
+                <a:solidFill>
+                  <a:srgbClr val="BBBEBF"/>
+                </a:solidFill>
+                <a:effectLst/>
+                <a:latin typeface="Consolas" panose="020B0609020204030204" pitchFamily="49" charset="0"/>
+              </a:rPr>
+              <a:t>(</a:t>
+            </a:r>
+            <a:r>
+              <a:rPr lang="en-US" altLang="ko-KR" sz="900" b="0">
+                <a:solidFill>
+                  <a:srgbClr val="FFA657"/>
+                </a:solidFill>
+                <a:effectLst/>
+                <a:latin typeface="Consolas" panose="020B0609020204030204" pitchFamily="49" charset="0"/>
+              </a:rPr>
+              <a:t>object</a:t>
+            </a:r>
+            <a:r>
+              <a:rPr lang="en-US" altLang="ko-KR" sz="900" b="0">
+                <a:solidFill>
+                  <a:srgbClr val="BBBEBF"/>
+                </a:solidFill>
+                <a:effectLst/>
+                <a:latin typeface="Consolas" panose="020B0609020204030204" pitchFamily="49" charset="0"/>
+              </a:rPr>
+              <a:t>);</a:t>
+            </a:r>
+          </a:p>
+          <a:p>
+            <a:pPr>
+              <a:lnSpc>
+                <a:spcPts val="1425"/>
+              </a:lnSpc>
+              <a:buNone/>
+            </a:pPr>
+            <a:r>
+              <a:rPr lang="en-US" altLang="ko-KR" sz="900" b="0">
+                <a:solidFill>
+                  <a:srgbClr val="BBBEBF"/>
+                </a:solidFill>
+                <a:effectLst/>
+                <a:latin typeface="Consolas" panose="020B0609020204030204" pitchFamily="49" charset="0"/>
+              </a:rPr>
+              <a:t>            </a:t>
+            </a:r>
+            <a:r>
+              <a:rPr lang="en-US" altLang="ko-KR" sz="900" b="0">
+                <a:solidFill>
+                  <a:srgbClr val="C586C0"/>
+                </a:solidFill>
+                <a:effectLst/>
+                <a:latin typeface="Consolas" panose="020B0609020204030204" pitchFamily="49" charset="0"/>
+              </a:rPr>
+              <a:t>return</a:t>
+            </a:r>
+            <a:r>
+              <a:rPr lang="en-US" altLang="ko-KR" sz="900" b="0">
+                <a:solidFill>
+                  <a:srgbClr val="BBBEBF"/>
+                </a:solidFill>
+                <a:effectLst/>
+                <a:latin typeface="Consolas" panose="020B0609020204030204" pitchFamily="49" charset="0"/>
+              </a:rPr>
+              <a:t> </a:t>
+            </a:r>
+            <a:r>
+              <a:rPr lang="en-US" altLang="ko-KR" sz="900" b="0">
+                <a:solidFill>
+                  <a:srgbClr val="C9D1D9"/>
+                </a:solidFill>
+                <a:effectLst/>
+                <a:latin typeface="Consolas" panose="020B0609020204030204" pitchFamily="49" charset="0"/>
+              </a:rPr>
+              <a:t>message</a:t>
+            </a:r>
+            <a:r>
+              <a:rPr lang="en-US" altLang="ko-KR" sz="900" b="0">
+                <a:solidFill>
+                  <a:srgbClr val="BBBEBF"/>
+                </a:solidFill>
+                <a:effectLst/>
+                <a:latin typeface="Consolas" panose="020B0609020204030204" pitchFamily="49" charset="0"/>
+              </a:rPr>
+              <a:t>;</a:t>
+            </a:r>
+          </a:p>
+          <a:p>
+            <a:pPr>
+              <a:lnSpc>
+                <a:spcPts val="1425"/>
+              </a:lnSpc>
+              <a:buNone/>
+            </a:pPr>
+            <a:r>
+              <a:rPr lang="en-US" altLang="ko-KR" sz="900" b="0">
+                <a:solidFill>
+                  <a:srgbClr val="BBBEBF"/>
+                </a:solidFill>
+                <a:effectLst/>
+                <a:latin typeface="Consolas" panose="020B0609020204030204" pitchFamily="49" charset="0"/>
+              </a:rPr>
+              <a:t>        }</a:t>
+            </a:r>
+            <a:r>
+              <a:rPr lang="en-US" altLang="ko-KR" sz="900" b="0">
+                <a:solidFill>
+                  <a:srgbClr val="C586C0"/>
+                </a:solidFill>
+                <a:effectLst/>
+                <a:latin typeface="Consolas" panose="020B0609020204030204" pitchFamily="49" charset="0"/>
+              </a:rPr>
+              <a:t>catch</a:t>
+            </a:r>
+            <a:r>
+              <a:rPr lang="en-US" altLang="ko-KR" sz="900" b="0">
+                <a:solidFill>
+                  <a:srgbClr val="BBBEBF"/>
+                </a:solidFill>
+                <a:effectLst/>
+                <a:latin typeface="Consolas" panose="020B0609020204030204" pitchFamily="49" charset="0"/>
+              </a:rPr>
+              <a:t>(</a:t>
+            </a:r>
+            <a:r>
+              <a:rPr lang="en-US" altLang="ko-KR" sz="900" b="0">
+                <a:solidFill>
+                  <a:srgbClr val="4EC9B0"/>
+                </a:solidFill>
+                <a:effectLst/>
+                <a:latin typeface="Consolas" panose="020B0609020204030204" pitchFamily="49" charset="0"/>
+              </a:rPr>
+              <a:t>JacksonException</a:t>
+            </a:r>
+            <a:r>
+              <a:rPr lang="en-US" altLang="ko-KR" sz="900" b="0">
+                <a:solidFill>
+                  <a:srgbClr val="BBBEBF"/>
+                </a:solidFill>
+                <a:effectLst/>
+                <a:latin typeface="Consolas" panose="020B0609020204030204" pitchFamily="49" charset="0"/>
+              </a:rPr>
+              <a:t> </a:t>
+            </a:r>
+            <a:r>
+              <a:rPr lang="en-US" altLang="ko-KR" sz="900" b="0">
+                <a:solidFill>
+                  <a:srgbClr val="C9D1D9"/>
+                </a:solidFill>
+                <a:effectLst/>
+                <a:latin typeface="Consolas" panose="020B0609020204030204" pitchFamily="49" charset="0"/>
+              </a:rPr>
+              <a:t>e</a:t>
+            </a:r>
+            <a:r>
+              <a:rPr lang="en-US" altLang="ko-KR" sz="900" b="0">
+                <a:solidFill>
+                  <a:srgbClr val="BBBEBF"/>
+                </a:solidFill>
+                <a:effectLst/>
+                <a:latin typeface="Consolas" panose="020B0609020204030204" pitchFamily="49" charset="0"/>
+              </a:rPr>
+              <a:t>){</a:t>
+            </a:r>
+          </a:p>
+          <a:p>
+            <a:pPr>
+              <a:lnSpc>
+                <a:spcPts val="1425"/>
+              </a:lnSpc>
+              <a:buNone/>
+            </a:pPr>
+            <a:r>
+              <a:rPr lang="en-US" altLang="ko-KR" sz="900" b="0">
+                <a:solidFill>
+                  <a:srgbClr val="BBBEBF"/>
+                </a:solidFill>
+                <a:effectLst/>
+                <a:latin typeface="Consolas" panose="020B0609020204030204" pitchFamily="49" charset="0"/>
+              </a:rPr>
+              <a:t>            </a:t>
+            </a:r>
+            <a:r>
+              <a:rPr lang="en-US" altLang="ko-KR" sz="900" b="0">
+                <a:solidFill>
+                  <a:srgbClr val="C586C0"/>
+                </a:solidFill>
+                <a:effectLst/>
+                <a:latin typeface="Consolas" panose="020B0609020204030204" pitchFamily="49" charset="0"/>
+              </a:rPr>
+              <a:t>throw</a:t>
+            </a:r>
+            <a:r>
+              <a:rPr lang="en-US" altLang="ko-KR" sz="900" b="0">
+                <a:solidFill>
+                  <a:srgbClr val="BBBEBF"/>
+                </a:solidFill>
+                <a:effectLst/>
+                <a:latin typeface="Consolas" panose="020B0609020204030204" pitchFamily="49" charset="0"/>
+              </a:rPr>
+              <a:t> </a:t>
+            </a:r>
+            <a:r>
+              <a:rPr lang="en-US" altLang="ko-KR" sz="900" b="0">
+                <a:solidFill>
+                  <a:srgbClr val="C586C0"/>
+                </a:solidFill>
+                <a:effectLst/>
+                <a:latin typeface="Consolas" panose="020B0609020204030204" pitchFamily="49" charset="0"/>
+              </a:rPr>
+              <a:t>new</a:t>
+            </a:r>
+            <a:r>
+              <a:rPr lang="en-US" altLang="ko-KR" sz="900" b="0">
+                <a:solidFill>
+                  <a:srgbClr val="BBBEBF"/>
+                </a:solidFill>
+                <a:effectLst/>
+                <a:latin typeface="Consolas" panose="020B0609020204030204" pitchFamily="49" charset="0"/>
+              </a:rPr>
+              <a:t> </a:t>
+            </a:r>
+            <a:r>
+              <a:rPr lang="en-US" altLang="ko-KR" sz="900" b="0">
+                <a:solidFill>
+                  <a:srgbClr val="D2A8FF"/>
+                </a:solidFill>
+                <a:effectLst/>
+                <a:latin typeface="Consolas" panose="020B0609020204030204" pitchFamily="49" charset="0"/>
+              </a:rPr>
+              <a:t>RuntimeException</a:t>
+            </a:r>
+            <a:r>
+              <a:rPr lang="en-US" altLang="ko-KR" sz="900" b="0">
+                <a:solidFill>
+                  <a:srgbClr val="BBBEBF"/>
+                </a:solidFill>
+                <a:effectLst/>
+                <a:latin typeface="Consolas" panose="020B0609020204030204" pitchFamily="49" charset="0"/>
+              </a:rPr>
+              <a:t>(</a:t>
+            </a:r>
+            <a:r>
+              <a:rPr lang="en-US" altLang="ko-KR" sz="900" b="0">
+                <a:solidFill>
+                  <a:srgbClr val="A5D6FF"/>
+                </a:solidFill>
+                <a:effectLst/>
+                <a:latin typeface="Consolas" panose="020B0609020204030204" pitchFamily="49" charset="0"/>
+              </a:rPr>
+              <a:t>"Json </a:t>
+            </a:r>
+            <a:r>
+              <a:rPr lang="ko-KR" altLang="en-US" sz="900" b="0">
+                <a:solidFill>
+                  <a:srgbClr val="A5D6FF"/>
+                </a:solidFill>
+                <a:effectLst/>
+                <a:latin typeface="Consolas" panose="020B0609020204030204" pitchFamily="49" charset="0"/>
+              </a:rPr>
+              <a:t>직렬화 실패</a:t>
+            </a:r>
+            <a:r>
+              <a:rPr lang="en-US" altLang="ko-KR" sz="900" b="0">
+                <a:solidFill>
+                  <a:srgbClr val="A5D6FF"/>
+                </a:solidFill>
+                <a:effectLst/>
+                <a:latin typeface="Consolas" panose="020B0609020204030204" pitchFamily="49" charset="0"/>
+              </a:rPr>
+              <a:t>"</a:t>
+            </a:r>
+            <a:r>
+              <a:rPr lang="en-US" altLang="ko-KR" sz="900" b="0">
+                <a:solidFill>
+                  <a:srgbClr val="BBBEBF"/>
+                </a:solidFill>
+                <a:effectLst/>
+                <a:latin typeface="Consolas" panose="020B0609020204030204" pitchFamily="49" charset="0"/>
+              </a:rPr>
+              <a:t>);</a:t>
+            </a:r>
+          </a:p>
+          <a:p>
+            <a:pPr>
+              <a:lnSpc>
+                <a:spcPts val="1425"/>
+              </a:lnSpc>
+              <a:buNone/>
+            </a:pPr>
+            <a:r>
+              <a:rPr lang="en-US" altLang="ko-KR" sz="900" b="0">
+                <a:solidFill>
+                  <a:srgbClr val="BBBEBF"/>
+                </a:solidFill>
+                <a:effectLst/>
+                <a:latin typeface="Consolas" panose="020B0609020204030204" pitchFamily="49" charset="0"/>
+              </a:rPr>
+              <a:t>        }</a:t>
+            </a:r>
+          </a:p>
+          <a:p>
+            <a:pPr>
+              <a:lnSpc>
+                <a:spcPts val="1425"/>
+              </a:lnSpc>
+              <a:buNone/>
+            </a:pPr>
+            <a:r>
+              <a:rPr lang="en-US" altLang="ko-KR" sz="900" b="0">
+                <a:solidFill>
+                  <a:srgbClr val="BBBEBF"/>
+                </a:solidFill>
+                <a:effectLst/>
+                <a:latin typeface="Consolas" panose="020B0609020204030204" pitchFamily="49" charset="0"/>
+              </a:rPr>
+              <a:t>    }</a:t>
+            </a:r>
+          </a:p>
+          <a:p>
+            <a:pPr>
+              <a:lnSpc>
+                <a:spcPts val="1425"/>
+              </a:lnSpc>
+              <a:buNone/>
+            </a:pPr>
+            <a:r>
+              <a:rPr lang="en-US" altLang="ko-KR" sz="900" b="0">
+                <a:solidFill>
+                  <a:srgbClr val="BBBEBF"/>
+                </a:solidFill>
+                <a:effectLst/>
+                <a:latin typeface="Consolas" panose="020B0609020204030204" pitchFamily="49" charset="0"/>
+              </a:rPr>
+              <a:t>}</a:t>
+            </a:r>
+          </a:p>
+        </p:txBody>
+      </p:sp>
+      <p:sp>
+        <p:nvSpPr>
+          <p:cNvPr id="8" name="직사각형 7">
+            <a:extLst>
+              <a:ext uri="{FF2B5EF4-FFF2-40B4-BE49-F238E27FC236}">
+                <a16:creationId xmlns:a16="http://schemas.microsoft.com/office/drawing/2014/main" id="{19810C91-A06F-2405-D73E-652B33E92DA2}"/>
+              </a:ext>
+            </a:extLst>
+          </p:cNvPr>
+          <p:cNvSpPr/>
+          <p:nvPr/>
+        </p:nvSpPr>
+        <p:spPr>
+          <a:xfrm>
+            <a:off x="4471416" y="4928616"/>
+            <a:ext cx="4352544" cy="1642781"/>
+          </a:xfrm>
+          <a:prstGeom prst="rect">
+            <a:avLst/>
+          </a:prstGeom>
+          <a:noFill/>
+          <a:ln>
+            <a:solidFill>
+              <a:srgbClr val="FF0000"/>
+            </a:solidFill>
+          </a:ln>
+        </p:spPr>
+        <p:style>
+          <a:lnRef idx="2">
+            <a:schemeClr val="accent1">
+              <a:shade val="15000"/>
+            </a:schemeClr>
+          </a:lnRef>
+          <a:fillRef idx="1">
+            <a:schemeClr val="accent1"/>
+          </a:fillRef>
+          <a:effectRef idx="0">
+            <a:schemeClr val="accent1"/>
+          </a:effectRef>
+          <a:fontRef idx="minor">
+            <a:schemeClr val="lt1"/>
+          </a:fontRef>
+        </p:style>
+        <p:txBody>
+          <a:bodyPr rtlCol="0" anchor="ctr"/>
+          <a:lstStyle/>
+          <a:p>
+            <a:pPr algn="ctr"/>
+            <a:endParaRPr lang="ko-KR" altLang="en-US"/>
+          </a:p>
+        </p:txBody>
+      </p:sp>
+      <p:sp>
+        <p:nvSpPr>
+          <p:cNvPr id="9" name="TextBox 8">
+            <a:extLst>
+              <a:ext uri="{FF2B5EF4-FFF2-40B4-BE49-F238E27FC236}">
+                <a16:creationId xmlns:a16="http://schemas.microsoft.com/office/drawing/2014/main" id="{5E4783A2-D697-1958-C68F-7E80C7C8EE9A}"/>
+              </a:ext>
+            </a:extLst>
+          </p:cNvPr>
+          <p:cNvSpPr txBox="1"/>
+          <p:nvPr/>
+        </p:nvSpPr>
+        <p:spPr>
+          <a:xfrm>
+            <a:off x="8970264" y="4846319"/>
+            <a:ext cx="2523744" cy="1384995"/>
+          </a:xfrm>
+          <a:prstGeom prst="rect">
+            <a:avLst/>
+          </a:prstGeom>
+          <a:solidFill>
+            <a:schemeClr val="bg1"/>
+          </a:solidFill>
+        </p:spPr>
+        <p:txBody>
+          <a:bodyPr wrap="square" rtlCol="0">
+            <a:spAutoFit/>
+          </a:bodyPr>
+          <a:lstStyle/>
+          <a:p>
+            <a:r>
+              <a:rPr lang="en-US" altLang="ko-KR" sz="1200"/>
+              <a:t>1. ObjectMapper</a:t>
+            </a:r>
+            <a:r>
+              <a:rPr lang="ko-KR" altLang="en-US" sz="1200"/>
+              <a:t>의 </a:t>
+            </a:r>
+            <a:br>
+              <a:rPr lang="en-US" altLang="ko-KR" sz="1200"/>
+            </a:br>
+            <a:r>
+              <a:rPr lang="en-US" altLang="ko-KR" sz="1200"/>
+              <a:t>writeValueAsString</a:t>
+            </a:r>
+            <a:r>
+              <a:rPr lang="ko-KR" altLang="en-US" sz="1200"/>
+              <a:t>은 객체를 </a:t>
+            </a:r>
+            <a:r>
+              <a:rPr lang="en-US" altLang="ko-KR" sz="1200"/>
+              <a:t>Json </a:t>
+            </a:r>
+            <a:r>
+              <a:rPr lang="ko-KR" altLang="en-US" sz="1200"/>
+              <a:t>문자열로 직렬화 할 때 자주 사용됨으로 알아두자</a:t>
+            </a:r>
+            <a:endParaRPr lang="en-US" altLang="ko-KR" sz="1200"/>
+          </a:p>
+          <a:p>
+            <a:endParaRPr lang="en-US" altLang="ko-KR" sz="1200"/>
+          </a:p>
+          <a:p>
+            <a:r>
+              <a:rPr lang="en-US" altLang="ko-KR" sz="1200"/>
+              <a:t>2. </a:t>
+            </a:r>
+            <a:r>
+              <a:rPr lang="ko-KR" altLang="en-US" sz="1200"/>
+              <a:t>직렬화 시에 예외처리로 감싸주어야 경고표시가 안뜬다</a:t>
+            </a:r>
+            <a:r>
+              <a:rPr lang="en-US" altLang="ko-KR" sz="1200"/>
+              <a:t>.</a:t>
+            </a:r>
+            <a:endParaRPr lang="ko-KR" altLang="en-US" sz="1200"/>
+          </a:p>
+        </p:txBody>
+      </p:sp>
+    </p:spTree>
+    <p:extLst>
+      <p:ext uri="{BB962C8B-B14F-4D97-AF65-F5344CB8AC3E}">
+        <p14:creationId xmlns:p14="http://schemas.microsoft.com/office/powerpoint/2010/main" val="3216773063"/>
+      </p:ext>
+    </p:extLst>
+  </p:cSld>
+  <p:clrMapOvr>
+    <a:masterClrMapping/>
+  </p:clrMapOvr>
+</p:sld>
+</file>
+
 <file path=ppt/slides/slide2.xml><?xml version="1.0" encoding="utf-8"?>
 <p:sld xmlns:a="http://schemas.openxmlformats.org/drawingml/2006/main" xmlns:r="http://schemas.openxmlformats.org/officeDocument/2006/relationships" xmlns:p="http://schemas.openxmlformats.org/presentationml/2006/main">
   <p:cSld>
@@ -5552,6 +12308,2399 @@
     <p:extLst>
       <p:ext uri="{BB962C8B-B14F-4D97-AF65-F5344CB8AC3E}">
         <p14:creationId xmlns:p14="http://schemas.microsoft.com/office/powerpoint/2010/main" val="4086052076"/>
+      </p:ext>
+    </p:extLst>
+  </p:cSld>
+  <p:clrMapOvr>
+    <a:masterClrMapping/>
+  </p:clrMapOvr>
+</p:sld>
+</file>
+
+<file path=ppt/slides/slide20.xml><?xml version="1.0" encoding="utf-8"?>
+<p:sld xmlns:a="http://schemas.openxmlformats.org/drawingml/2006/main" xmlns:r="http://schemas.openxmlformats.org/officeDocument/2006/relationships" xmlns:p="http://schemas.openxmlformats.org/presentationml/2006/main">
+  <p:cSld>
+    <p:spTree>
+      <p:nvGrpSpPr>
+        <p:cNvPr id="1" name=""/>
+        <p:cNvGrpSpPr/>
+        <p:nvPr/>
+      </p:nvGrpSpPr>
+      <p:grpSpPr>
+        <a:xfrm>
+          <a:off x="0" y="0"/>
+          <a:ext cx="0" cy="0"/>
+          <a:chOff x="0" y="0"/>
+          <a:chExt cx="0" cy="0"/>
+        </a:xfrm>
+      </p:grpSpPr>
+      <p:sp>
+        <p:nvSpPr>
+          <p:cNvPr id="2" name="제목 1">
+            <a:extLst>
+              <a:ext uri="{FF2B5EF4-FFF2-40B4-BE49-F238E27FC236}">
+                <a16:creationId xmlns:a16="http://schemas.microsoft.com/office/drawing/2014/main" id="{7F660A84-3712-ABD2-FFAE-964B1DE422EE}"/>
+              </a:ext>
+            </a:extLst>
+          </p:cNvPr>
+          <p:cNvSpPr>
+            <a:spLocks noGrp="1"/>
+          </p:cNvSpPr>
+          <p:nvPr>
+            <p:ph type="title"/>
+          </p:nvPr>
+        </p:nvSpPr>
+        <p:spPr/>
+        <p:txBody>
+          <a:bodyPr>
+            <a:normAutofit/>
+          </a:bodyPr>
+          <a:lstStyle/>
+          <a:p>
+            <a:r>
+              <a:rPr lang="en-US" altLang="ko-KR" sz="3600"/>
+              <a:t>EmailService</a:t>
+            </a:r>
+            <a:r>
+              <a:rPr lang="ko-KR" altLang="en-US" sz="3600"/>
+              <a:t>에서 </a:t>
+            </a:r>
+            <a:r>
+              <a:rPr lang="en-US" altLang="ko-KR" sz="3600"/>
+              <a:t>Kafka </a:t>
+            </a:r>
+            <a:r>
+              <a:rPr lang="ko-KR" altLang="en-US" sz="3600"/>
+              <a:t>메시지 큐로 보낼 </a:t>
+            </a:r>
+            <a:br>
+              <a:rPr lang="en-US" altLang="ko-KR" sz="3600"/>
+            </a:br>
+            <a:r>
+              <a:rPr lang="en-US" altLang="ko-KR" sz="3600"/>
+              <a:t>DTO(EmailSendMessage) </a:t>
+            </a:r>
+            <a:r>
+              <a:rPr lang="ko-KR" altLang="en-US" sz="3600"/>
+              <a:t>작성</a:t>
+            </a:r>
+          </a:p>
+        </p:txBody>
+      </p:sp>
+      <p:sp>
+        <p:nvSpPr>
+          <p:cNvPr id="4" name="TextBox 3">
+            <a:extLst>
+              <a:ext uri="{FF2B5EF4-FFF2-40B4-BE49-F238E27FC236}">
+                <a16:creationId xmlns:a16="http://schemas.microsoft.com/office/drawing/2014/main" id="{2731E55E-B09F-7F9D-7F15-A4BE417737B9}"/>
+              </a:ext>
+            </a:extLst>
+          </p:cNvPr>
+          <p:cNvSpPr txBox="1"/>
+          <p:nvPr/>
+        </p:nvSpPr>
+        <p:spPr>
+          <a:xfrm>
+            <a:off x="3778758" y="1821379"/>
+            <a:ext cx="6599682" cy="4390946"/>
+          </a:xfrm>
+          <a:prstGeom prst="rect">
+            <a:avLst/>
+          </a:prstGeom>
+          <a:solidFill>
+            <a:schemeClr val="tx1"/>
+          </a:solidFill>
+        </p:spPr>
+        <p:txBody>
+          <a:bodyPr wrap="square">
+            <a:spAutoFit/>
+          </a:bodyPr>
+          <a:lstStyle/>
+          <a:p>
+            <a:pPr>
+              <a:lnSpc>
+                <a:spcPts val="1425"/>
+              </a:lnSpc>
+              <a:buNone/>
+            </a:pPr>
+            <a:r>
+              <a:rPr lang="en-US" altLang="ko-KR" sz="1050" b="0">
+                <a:solidFill>
+                  <a:srgbClr val="569CD6"/>
+                </a:solidFill>
+                <a:effectLst/>
+                <a:latin typeface="Consolas" panose="020B0609020204030204" pitchFamily="49" charset="0"/>
+              </a:rPr>
+              <a:t>public</a:t>
+            </a:r>
+            <a:r>
+              <a:rPr lang="en-US" altLang="ko-KR" sz="1050" b="0">
+                <a:solidFill>
+                  <a:srgbClr val="BBBEBF"/>
+                </a:solidFill>
+                <a:effectLst/>
+                <a:latin typeface="Consolas" panose="020B0609020204030204" pitchFamily="49" charset="0"/>
+              </a:rPr>
+              <a:t> </a:t>
+            </a:r>
+            <a:r>
+              <a:rPr lang="en-US" altLang="ko-KR" sz="1050" b="0">
+                <a:solidFill>
+                  <a:srgbClr val="569CD6"/>
+                </a:solidFill>
+                <a:effectLst/>
+                <a:latin typeface="Consolas" panose="020B0609020204030204" pitchFamily="49" charset="0"/>
+              </a:rPr>
+              <a:t>class</a:t>
+            </a:r>
+            <a:r>
+              <a:rPr lang="en-US" altLang="ko-KR" sz="1050" b="0">
+                <a:solidFill>
+                  <a:srgbClr val="BBBEBF"/>
+                </a:solidFill>
+                <a:effectLst/>
+                <a:latin typeface="Consolas" panose="020B0609020204030204" pitchFamily="49" charset="0"/>
+              </a:rPr>
+              <a:t> </a:t>
+            </a:r>
+            <a:r>
+              <a:rPr lang="en-US" altLang="ko-KR" sz="1050" b="0">
+                <a:solidFill>
+                  <a:srgbClr val="4EC9B0"/>
+                </a:solidFill>
+                <a:effectLst/>
+                <a:latin typeface="Consolas" panose="020B0609020204030204" pitchFamily="49" charset="0"/>
+              </a:rPr>
+              <a:t>SendEmailRequestDto</a:t>
+            </a:r>
+            <a:r>
+              <a:rPr lang="en-US" altLang="ko-KR" sz="1050" b="0">
+                <a:solidFill>
+                  <a:srgbClr val="BBBEBF"/>
+                </a:solidFill>
+                <a:effectLst/>
+                <a:latin typeface="Consolas" panose="020B0609020204030204" pitchFamily="49" charset="0"/>
+              </a:rPr>
+              <a:t> {</a:t>
+            </a:r>
+          </a:p>
+          <a:p>
+            <a:pPr>
+              <a:lnSpc>
+                <a:spcPts val="1425"/>
+              </a:lnSpc>
+              <a:buNone/>
+            </a:pPr>
+            <a:r>
+              <a:rPr lang="en-US" altLang="ko-KR" sz="1050" b="0">
+                <a:solidFill>
+                  <a:srgbClr val="BBBEBF"/>
+                </a:solidFill>
+                <a:effectLst/>
+                <a:latin typeface="Consolas" panose="020B0609020204030204" pitchFamily="49" charset="0"/>
+              </a:rPr>
+              <a:t>    </a:t>
+            </a:r>
+            <a:r>
+              <a:rPr lang="en-US" altLang="ko-KR" sz="1050" b="0">
+                <a:solidFill>
+                  <a:srgbClr val="569CD6"/>
+                </a:solidFill>
+                <a:effectLst/>
+                <a:latin typeface="Consolas" panose="020B0609020204030204" pitchFamily="49" charset="0"/>
+              </a:rPr>
+              <a:t>private</a:t>
+            </a:r>
+            <a:r>
+              <a:rPr lang="en-US" altLang="ko-KR" sz="1050" b="0">
+                <a:solidFill>
+                  <a:srgbClr val="BBBEBF"/>
+                </a:solidFill>
+                <a:effectLst/>
+                <a:latin typeface="Consolas" panose="020B0609020204030204" pitchFamily="49" charset="0"/>
+              </a:rPr>
+              <a:t> </a:t>
+            </a:r>
+            <a:r>
+              <a:rPr lang="en-US" altLang="ko-KR" sz="1050" b="0">
+                <a:solidFill>
+                  <a:srgbClr val="4EC9B0"/>
+                </a:solidFill>
+                <a:effectLst/>
+                <a:latin typeface="Consolas" panose="020B0609020204030204" pitchFamily="49" charset="0"/>
+              </a:rPr>
+              <a:t>String</a:t>
+            </a:r>
+            <a:r>
+              <a:rPr lang="en-US" altLang="ko-KR" sz="1050" b="0">
+                <a:solidFill>
+                  <a:srgbClr val="FFA657"/>
+                </a:solidFill>
+                <a:effectLst/>
+                <a:latin typeface="Consolas" panose="020B0609020204030204" pitchFamily="49" charset="0"/>
+              </a:rPr>
+              <a:t> </a:t>
+            </a:r>
+            <a:r>
+              <a:rPr lang="en-US" altLang="ko-KR" sz="1050" b="0">
+                <a:solidFill>
+                  <a:srgbClr val="C9D1D9"/>
+                </a:solidFill>
+                <a:effectLst/>
+                <a:latin typeface="Consolas" panose="020B0609020204030204" pitchFamily="49" charset="0"/>
+              </a:rPr>
+              <a:t>from</a:t>
+            </a:r>
+            <a:r>
+              <a:rPr lang="en-US" altLang="ko-KR" sz="1050" b="0">
+                <a:solidFill>
+                  <a:srgbClr val="BBBEBF"/>
+                </a:solidFill>
+                <a:effectLst/>
+                <a:latin typeface="Consolas" panose="020B0609020204030204" pitchFamily="49" charset="0"/>
+              </a:rPr>
+              <a:t>; </a:t>
+            </a:r>
+            <a:r>
+              <a:rPr lang="en-US" altLang="ko-KR" sz="1050" b="0">
+                <a:solidFill>
+                  <a:srgbClr val="8B949E"/>
+                </a:solidFill>
+                <a:effectLst/>
+                <a:latin typeface="Consolas" panose="020B0609020204030204" pitchFamily="49" charset="0"/>
+              </a:rPr>
+              <a:t>// </a:t>
+            </a:r>
+            <a:r>
+              <a:rPr lang="ko-KR" altLang="en-US" sz="1050" b="0">
+                <a:solidFill>
+                  <a:srgbClr val="8B949E"/>
+                </a:solidFill>
+                <a:effectLst/>
+                <a:latin typeface="Consolas" panose="020B0609020204030204" pitchFamily="49" charset="0"/>
+              </a:rPr>
+              <a:t>누구로 부터 왔는지 </a:t>
+            </a:r>
+            <a:r>
+              <a:rPr lang="en-US" altLang="ko-KR" sz="1050" b="0">
+                <a:solidFill>
+                  <a:srgbClr val="8B949E"/>
+                </a:solidFill>
+                <a:effectLst/>
+                <a:latin typeface="Consolas" panose="020B0609020204030204" pitchFamily="49" charset="0"/>
+              </a:rPr>
+              <a:t>(</a:t>
+            </a:r>
+            <a:r>
+              <a:rPr lang="ko-KR" altLang="en-US" sz="1050" b="0">
+                <a:solidFill>
+                  <a:srgbClr val="8B949E"/>
+                </a:solidFill>
+                <a:effectLst/>
+                <a:latin typeface="Consolas" panose="020B0609020204030204" pitchFamily="49" charset="0"/>
+              </a:rPr>
+              <a:t>발신자</a:t>
+            </a:r>
+            <a:r>
+              <a:rPr lang="en-US" altLang="ko-KR" sz="1050" b="0">
+                <a:solidFill>
+                  <a:srgbClr val="8B949E"/>
+                </a:solidFill>
+                <a:effectLst/>
+                <a:latin typeface="Consolas" panose="020B0609020204030204" pitchFamily="49" charset="0"/>
+              </a:rPr>
+              <a:t>)</a:t>
+            </a:r>
+            <a:endParaRPr lang="ko-KR" altLang="en-US" sz="1050" b="0">
+              <a:solidFill>
+                <a:srgbClr val="BBBEBF"/>
+              </a:solidFill>
+              <a:effectLst/>
+              <a:latin typeface="Consolas" panose="020B0609020204030204" pitchFamily="49" charset="0"/>
+            </a:endParaRPr>
+          </a:p>
+          <a:p>
+            <a:pPr>
+              <a:lnSpc>
+                <a:spcPts val="1425"/>
+              </a:lnSpc>
+              <a:buNone/>
+            </a:pPr>
+            <a:r>
+              <a:rPr lang="ko-KR" altLang="en-US" sz="1050" b="0">
+                <a:solidFill>
+                  <a:srgbClr val="BBBEBF"/>
+                </a:solidFill>
+                <a:effectLst/>
+                <a:latin typeface="Consolas" panose="020B0609020204030204" pitchFamily="49" charset="0"/>
+              </a:rPr>
+              <a:t>    </a:t>
+            </a:r>
+            <a:r>
+              <a:rPr lang="en-US" altLang="ko-KR" sz="1050" b="0">
+                <a:solidFill>
+                  <a:srgbClr val="569CD6"/>
+                </a:solidFill>
+                <a:effectLst/>
+                <a:latin typeface="Consolas" panose="020B0609020204030204" pitchFamily="49" charset="0"/>
+              </a:rPr>
+              <a:t>private</a:t>
+            </a:r>
+            <a:r>
+              <a:rPr lang="en-US" altLang="ko-KR" sz="1050" b="0">
+                <a:solidFill>
+                  <a:srgbClr val="BBBEBF"/>
+                </a:solidFill>
+                <a:effectLst/>
+                <a:latin typeface="Consolas" panose="020B0609020204030204" pitchFamily="49" charset="0"/>
+              </a:rPr>
+              <a:t> </a:t>
+            </a:r>
+            <a:r>
+              <a:rPr lang="en-US" altLang="ko-KR" sz="1050" b="0">
+                <a:solidFill>
+                  <a:srgbClr val="4EC9B0"/>
+                </a:solidFill>
+                <a:effectLst/>
+                <a:latin typeface="Consolas" panose="020B0609020204030204" pitchFamily="49" charset="0"/>
+              </a:rPr>
+              <a:t>String</a:t>
+            </a:r>
+            <a:r>
+              <a:rPr lang="en-US" altLang="ko-KR" sz="1050" b="0">
+                <a:solidFill>
+                  <a:srgbClr val="FFA657"/>
+                </a:solidFill>
+                <a:effectLst/>
+                <a:latin typeface="Consolas" panose="020B0609020204030204" pitchFamily="49" charset="0"/>
+              </a:rPr>
+              <a:t> </a:t>
+            </a:r>
+            <a:r>
+              <a:rPr lang="en-US" altLang="ko-KR" sz="1050" b="0">
+                <a:solidFill>
+                  <a:srgbClr val="C9D1D9"/>
+                </a:solidFill>
+                <a:effectLst/>
+                <a:latin typeface="Consolas" panose="020B0609020204030204" pitchFamily="49" charset="0"/>
+              </a:rPr>
+              <a:t>to</a:t>
+            </a:r>
+            <a:r>
+              <a:rPr lang="en-US" altLang="ko-KR" sz="1050" b="0">
+                <a:solidFill>
+                  <a:srgbClr val="BBBEBF"/>
+                </a:solidFill>
+                <a:effectLst/>
+                <a:latin typeface="Consolas" panose="020B0609020204030204" pitchFamily="49" charset="0"/>
+              </a:rPr>
+              <a:t>; </a:t>
+            </a:r>
+            <a:r>
+              <a:rPr lang="en-US" altLang="ko-KR" sz="1050" b="0">
+                <a:solidFill>
+                  <a:srgbClr val="8B949E"/>
+                </a:solidFill>
+                <a:effectLst/>
+                <a:latin typeface="Consolas" panose="020B0609020204030204" pitchFamily="49" charset="0"/>
+              </a:rPr>
+              <a:t>// </a:t>
+            </a:r>
+            <a:r>
+              <a:rPr lang="ko-KR" altLang="en-US" sz="1050" b="0">
+                <a:solidFill>
+                  <a:srgbClr val="8B949E"/>
+                </a:solidFill>
+                <a:effectLst/>
+                <a:latin typeface="Consolas" panose="020B0609020204030204" pitchFamily="49" charset="0"/>
+              </a:rPr>
+              <a:t>누구에게 보내는지 </a:t>
+            </a:r>
+            <a:r>
+              <a:rPr lang="en-US" altLang="ko-KR" sz="1050" b="0">
+                <a:solidFill>
+                  <a:srgbClr val="8B949E"/>
+                </a:solidFill>
+                <a:effectLst/>
+                <a:latin typeface="Consolas" panose="020B0609020204030204" pitchFamily="49" charset="0"/>
+              </a:rPr>
+              <a:t>(</a:t>
+            </a:r>
+            <a:r>
+              <a:rPr lang="ko-KR" altLang="en-US" sz="1050" b="0">
+                <a:solidFill>
+                  <a:srgbClr val="8B949E"/>
+                </a:solidFill>
+                <a:effectLst/>
+                <a:latin typeface="Consolas" panose="020B0609020204030204" pitchFamily="49" charset="0"/>
+              </a:rPr>
+              <a:t>수신자</a:t>
+            </a:r>
+            <a:r>
+              <a:rPr lang="en-US" altLang="ko-KR" sz="1050" b="0">
+                <a:solidFill>
+                  <a:srgbClr val="8B949E"/>
+                </a:solidFill>
+                <a:effectLst/>
+                <a:latin typeface="Consolas" panose="020B0609020204030204" pitchFamily="49" charset="0"/>
+              </a:rPr>
+              <a:t>)</a:t>
+            </a:r>
+            <a:endParaRPr lang="ko-KR" altLang="en-US" sz="1050" b="0">
+              <a:solidFill>
+                <a:srgbClr val="BBBEBF"/>
+              </a:solidFill>
+              <a:effectLst/>
+              <a:latin typeface="Consolas" panose="020B0609020204030204" pitchFamily="49" charset="0"/>
+            </a:endParaRPr>
+          </a:p>
+          <a:p>
+            <a:pPr>
+              <a:lnSpc>
+                <a:spcPts val="1425"/>
+              </a:lnSpc>
+              <a:buNone/>
+            </a:pPr>
+            <a:r>
+              <a:rPr lang="ko-KR" altLang="en-US" sz="1050" b="0">
+                <a:solidFill>
+                  <a:srgbClr val="BBBEBF"/>
+                </a:solidFill>
+                <a:effectLst/>
+                <a:latin typeface="Consolas" panose="020B0609020204030204" pitchFamily="49" charset="0"/>
+              </a:rPr>
+              <a:t>    </a:t>
+            </a:r>
+            <a:r>
+              <a:rPr lang="en-US" altLang="ko-KR" sz="1050" b="0">
+                <a:solidFill>
+                  <a:srgbClr val="569CD6"/>
+                </a:solidFill>
+                <a:effectLst/>
+                <a:latin typeface="Consolas" panose="020B0609020204030204" pitchFamily="49" charset="0"/>
+              </a:rPr>
+              <a:t>private</a:t>
+            </a:r>
+            <a:r>
+              <a:rPr lang="en-US" altLang="ko-KR" sz="1050" b="0">
+                <a:solidFill>
+                  <a:srgbClr val="BBBEBF"/>
+                </a:solidFill>
+                <a:effectLst/>
+                <a:latin typeface="Consolas" panose="020B0609020204030204" pitchFamily="49" charset="0"/>
+              </a:rPr>
+              <a:t> </a:t>
+            </a:r>
+            <a:r>
+              <a:rPr lang="en-US" altLang="ko-KR" sz="1050" b="0">
+                <a:solidFill>
+                  <a:srgbClr val="4EC9B0"/>
+                </a:solidFill>
+                <a:effectLst/>
+                <a:latin typeface="Consolas" panose="020B0609020204030204" pitchFamily="49" charset="0"/>
+              </a:rPr>
+              <a:t>String</a:t>
+            </a:r>
+            <a:r>
+              <a:rPr lang="en-US" altLang="ko-KR" sz="1050" b="0">
+                <a:solidFill>
+                  <a:srgbClr val="FFA657"/>
+                </a:solidFill>
+                <a:effectLst/>
+                <a:latin typeface="Consolas" panose="020B0609020204030204" pitchFamily="49" charset="0"/>
+              </a:rPr>
+              <a:t> </a:t>
+            </a:r>
+            <a:r>
+              <a:rPr lang="en-US" altLang="ko-KR" sz="1050" b="0">
+                <a:solidFill>
+                  <a:srgbClr val="C9D1D9"/>
+                </a:solidFill>
+                <a:effectLst/>
+                <a:latin typeface="Consolas" panose="020B0609020204030204" pitchFamily="49" charset="0"/>
+              </a:rPr>
+              <a:t>subject</a:t>
+            </a:r>
+            <a:r>
+              <a:rPr lang="en-US" altLang="ko-KR" sz="1050" b="0">
+                <a:solidFill>
+                  <a:srgbClr val="BBBEBF"/>
+                </a:solidFill>
+                <a:effectLst/>
+                <a:latin typeface="Consolas" panose="020B0609020204030204" pitchFamily="49" charset="0"/>
+              </a:rPr>
+              <a:t>; </a:t>
+            </a:r>
+            <a:r>
+              <a:rPr lang="en-US" altLang="ko-KR" sz="1050" b="0">
+                <a:solidFill>
+                  <a:srgbClr val="8B949E"/>
+                </a:solidFill>
+                <a:effectLst/>
+                <a:latin typeface="Consolas" panose="020B0609020204030204" pitchFamily="49" charset="0"/>
+              </a:rPr>
+              <a:t>// </a:t>
+            </a:r>
+            <a:r>
+              <a:rPr lang="ko-KR" altLang="en-US" sz="1050" b="0">
+                <a:solidFill>
+                  <a:srgbClr val="8B949E"/>
+                </a:solidFill>
+                <a:effectLst/>
+                <a:latin typeface="Consolas" panose="020B0609020204030204" pitchFamily="49" charset="0"/>
+              </a:rPr>
+              <a:t>제목</a:t>
+            </a:r>
+            <a:endParaRPr lang="ko-KR" altLang="en-US" sz="1050" b="0">
+              <a:solidFill>
+                <a:srgbClr val="BBBEBF"/>
+              </a:solidFill>
+              <a:effectLst/>
+              <a:latin typeface="Consolas" panose="020B0609020204030204" pitchFamily="49" charset="0"/>
+            </a:endParaRPr>
+          </a:p>
+          <a:p>
+            <a:pPr>
+              <a:lnSpc>
+                <a:spcPts val="1425"/>
+              </a:lnSpc>
+              <a:buNone/>
+            </a:pPr>
+            <a:r>
+              <a:rPr lang="ko-KR" altLang="en-US" sz="1050" b="0">
+                <a:solidFill>
+                  <a:srgbClr val="BBBEBF"/>
+                </a:solidFill>
+                <a:effectLst/>
+                <a:latin typeface="Consolas" panose="020B0609020204030204" pitchFamily="49" charset="0"/>
+              </a:rPr>
+              <a:t>    </a:t>
+            </a:r>
+            <a:r>
+              <a:rPr lang="en-US" altLang="ko-KR" sz="1050" b="0">
+                <a:solidFill>
+                  <a:srgbClr val="569CD6"/>
+                </a:solidFill>
+                <a:effectLst/>
+                <a:latin typeface="Consolas" panose="020B0609020204030204" pitchFamily="49" charset="0"/>
+              </a:rPr>
+              <a:t>private</a:t>
+            </a:r>
+            <a:r>
+              <a:rPr lang="en-US" altLang="ko-KR" sz="1050" b="0">
+                <a:solidFill>
+                  <a:srgbClr val="BBBEBF"/>
+                </a:solidFill>
+                <a:effectLst/>
+                <a:latin typeface="Consolas" panose="020B0609020204030204" pitchFamily="49" charset="0"/>
+              </a:rPr>
+              <a:t> </a:t>
+            </a:r>
+            <a:r>
+              <a:rPr lang="en-US" altLang="ko-KR" sz="1050" b="0">
+                <a:solidFill>
+                  <a:srgbClr val="4EC9B0"/>
+                </a:solidFill>
+                <a:effectLst/>
+                <a:latin typeface="Consolas" panose="020B0609020204030204" pitchFamily="49" charset="0"/>
+              </a:rPr>
+              <a:t>String</a:t>
+            </a:r>
+            <a:r>
+              <a:rPr lang="en-US" altLang="ko-KR" sz="1050" b="0">
+                <a:solidFill>
+                  <a:srgbClr val="FFA657"/>
+                </a:solidFill>
+                <a:effectLst/>
+                <a:latin typeface="Consolas" panose="020B0609020204030204" pitchFamily="49" charset="0"/>
+              </a:rPr>
+              <a:t> </a:t>
+            </a:r>
+            <a:r>
+              <a:rPr lang="en-US" altLang="ko-KR" sz="1050" b="0">
+                <a:solidFill>
+                  <a:srgbClr val="C9D1D9"/>
+                </a:solidFill>
+                <a:effectLst/>
+                <a:latin typeface="Consolas" panose="020B0609020204030204" pitchFamily="49" charset="0"/>
+              </a:rPr>
+              <a:t>body</a:t>
+            </a:r>
+            <a:r>
+              <a:rPr lang="en-US" altLang="ko-KR" sz="1050" b="0">
+                <a:solidFill>
+                  <a:srgbClr val="BBBEBF"/>
+                </a:solidFill>
+                <a:effectLst/>
+                <a:latin typeface="Consolas" panose="020B0609020204030204" pitchFamily="49" charset="0"/>
+              </a:rPr>
+              <a:t>; </a:t>
+            </a:r>
+            <a:r>
+              <a:rPr lang="en-US" altLang="ko-KR" sz="1050" b="0">
+                <a:solidFill>
+                  <a:srgbClr val="8B949E"/>
+                </a:solidFill>
+                <a:effectLst/>
+                <a:latin typeface="Consolas" panose="020B0609020204030204" pitchFamily="49" charset="0"/>
+              </a:rPr>
+              <a:t>// </a:t>
+            </a:r>
+            <a:r>
+              <a:rPr lang="ko-KR" altLang="en-US" sz="1050" b="0">
+                <a:solidFill>
+                  <a:srgbClr val="8B949E"/>
+                </a:solidFill>
+                <a:effectLst/>
+                <a:latin typeface="Consolas" panose="020B0609020204030204" pitchFamily="49" charset="0"/>
+              </a:rPr>
+              <a:t>본문</a:t>
+            </a:r>
+            <a:endParaRPr lang="ko-KR" altLang="en-US" sz="1050" b="0">
+              <a:solidFill>
+                <a:srgbClr val="BBBEBF"/>
+              </a:solidFill>
+              <a:effectLst/>
+              <a:latin typeface="Consolas" panose="020B0609020204030204" pitchFamily="49" charset="0"/>
+            </a:endParaRPr>
+          </a:p>
+          <a:p>
+            <a:pPr>
+              <a:lnSpc>
+                <a:spcPts val="1425"/>
+              </a:lnSpc>
+              <a:buNone/>
+            </a:pPr>
+            <a:r>
+              <a:rPr lang="ko-KR" altLang="en-US" sz="1050" b="0">
+                <a:solidFill>
+                  <a:srgbClr val="BBBEBF"/>
+                </a:solidFill>
+                <a:effectLst/>
+                <a:latin typeface="Consolas" panose="020B0609020204030204" pitchFamily="49" charset="0"/>
+              </a:rPr>
+              <a:t>    </a:t>
+            </a:r>
+            <a:r>
+              <a:rPr lang="en-US" altLang="ko-KR" sz="1050" b="0">
+                <a:solidFill>
+                  <a:srgbClr val="569CD6"/>
+                </a:solidFill>
+                <a:effectLst/>
+                <a:latin typeface="Consolas" panose="020B0609020204030204" pitchFamily="49" charset="0"/>
+              </a:rPr>
+              <a:t>public</a:t>
+            </a:r>
+            <a:r>
+              <a:rPr lang="en-US" altLang="ko-KR" sz="1050" b="0">
+                <a:solidFill>
+                  <a:srgbClr val="BBBEBF"/>
+                </a:solidFill>
+                <a:effectLst/>
+                <a:latin typeface="Consolas" panose="020B0609020204030204" pitchFamily="49" charset="0"/>
+              </a:rPr>
+              <a:t> </a:t>
+            </a:r>
+            <a:r>
+              <a:rPr lang="en-US" altLang="ko-KR" sz="1050" b="0">
+                <a:solidFill>
+                  <a:srgbClr val="D2A8FF"/>
+                </a:solidFill>
+                <a:effectLst/>
+                <a:latin typeface="Consolas" panose="020B0609020204030204" pitchFamily="49" charset="0"/>
+              </a:rPr>
+              <a:t>SendEmailRequestDto</a:t>
+            </a:r>
+            <a:r>
+              <a:rPr lang="en-US" altLang="ko-KR" sz="1050" b="0">
+                <a:solidFill>
+                  <a:srgbClr val="BBBEBF"/>
+                </a:solidFill>
+                <a:effectLst/>
+                <a:latin typeface="Consolas" panose="020B0609020204030204" pitchFamily="49" charset="0"/>
+              </a:rPr>
+              <a:t>(</a:t>
+            </a:r>
+            <a:r>
+              <a:rPr lang="en-US" altLang="ko-KR" sz="1050" b="0">
+                <a:solidFill>
+                  <a:srgbClr val="4EC9B0"/>
+                </a:solidFill>
+                <a:effectLst/>
+                <a:latin typeface="Consolas" panose="020B0609020204030204" pitchFamily="49" charset="0"/>
+              </a:rPr>
+              <a:t>String</a:t>
+            </a:r>
+            <a:r>
+              <a:rPr lang="en-US" altLang="ko-KR" sz="1050" b="0">
+                <a:solidFill>
+                  <a:srgbClr val="BBBEBF"/>
+                </a:solidFill>
+                <a:effectLst/>
+                <a:latin typeface="Consolas" panose="020B0609020204030204" pitchFamily="49" charset="0"/>
+              </a:rPr>
+              <a:t> </a:t>
+            </a:r>
+            <a:r>
+              <a:rPr lang="en-US" altLang="ko-KR" sz="1050" b="0">
+                <a:solidFill>
+                  <a:srgbClr val="FFA657"/>
+                </a:solidFill>
+                <a:effectLst/>
+                <a:latin typeface="Consolas" panose="020B0609020204030204" pitchFamily="49" charset="0"/>
+              </a:rPr>
+              <a:t>from</a:t>
+            </a:r>
+            <a:r>
+              <a:rPr lang="en-US" altLang="ko-KR" sz="1050" b="0">
+                <a:solidFill>
+                  <a:srgbClr val="BBBEBF"/>
+                </a:solidFill>
+                <a:effectLst/>
+                <a:latin typeface="Consolas" panose="020B0609020204030204" pitchFamily="49" charset="0"/>
+              </a:rPr>
+              <a:t>, </a:t>
+            </a:r>
+            <a:r>
+              <a:rPr lang="en-US" altLang="ko-KR" sz="1050" b="0">
+                <a:solidFill>
+                  <a:srgbClr val="4EC9B0"/>
+                </a:solidFill>
+                <a:effectLst/>
+                <a:latin typeface="Consolas" panose="020B0609020204030204" pitchFamily="49" charset="0"/>
+              </a:rPr>
+              <a:t>String</a:t>
+            </a:r>
+            <a:r>
+              <a:rPr lang="en-US" altLang="ko-KR" sz="1050" b="0">
+                <a:solidFill>
+                  <a:srgbClr val="BBBEBF"/>
+                </a:solidFill>
+                <a:effectLst/>
+                <a:latin typeface="Consolas" panose="020B0609020204030204" pitchFamily="49" charset="0"/>
+              </a:rPr>
+              <a:t> </a:t>
+            </a:r>
+            <a:r>
+              <a:rPr lang="en-US" altLang="ko-KR" sz="1050" b="0">
+                <a:solidFill>
+                  <a:srgbClr val="FFA657"/>
+                </a:solidFill>
+                <a:effectLst/>
+                <a:latin typeface="Consolas" panose="020B0609020204030204" pitchFamily="49" charset="0"/>
+              </a:rPr>
+              <a:t>to</a:t>
+            </a:r>
+            <a:r>
+              <a:rPr lang="en-US" altLang="ko-KR" sz="1050" b="0">
+                <a:solidFill>
+                  <a:srgbClr val="BBBEBF"/>
+                </a:solidFill>
+                <a:effectLst/>
+                <a:latin typeface="Consolas" panose="020B0609020204030204" pitchFamily="49" charset="0"/>
+              </a:rPr>
+              <a:t>, </a:t>
+            </a:r>
+            <a:r>
+              <a:rPr lang="en-US" altLang="ko-KR" sz="1050" b="0">
+                <a:solidFill>
+                  <a:srgbClr val="4EC9B0"/>
+                </a:solidFill>
+                <a:effectLst/>
+                <a:latin typeface="Consolas" panose="020B0609020204030204" pitchFamily="49" charset="0"/>
+              </a:rPr>
+              <a:t>String</a:t>
+            </a:r>
+            <a:r>
+              <a:rPr lang="en-US" altLang="ko-KR" sz="1050" b="0">
+                <a:solidFill>
+                  <a:srgbClr val="BBBEBF"/>
+                </a:solidFill>
+                <a:effectLst/>
+                <a:latin typeface="Consolas" panose="020B0609020204030204" pitchFamily="49" charset="0"/>
+              </a:rPr>
+              <a:t> </a:t>
+            </a:r>
+            <a:r>
+              <a:rPr lang="en-US" altLang="ko-KR" sz="1050" b="0">
+                <a:solidFill>
+                  <a:srgbClr val="FFA657"/>
+                </a:solidFill>
+                <a:effectLst/>
+                <a:latin typeface="Consolas" panose="020B0609020204030204" pitchFamily="49" charset="0"/>
+              </a:rPr>
+              <a:t>subject</a:t>
+            </a:r>
+            <a:r>
+              <a:rPr lang="en-US" altLang="ko-KR" sz="1050" b="0">
+                <a:solidFill>
+                  <a:srgbClr val="BBBEBF"/>
+                </a:solidFill>
+                <a:effectLst/>
+                <a:latin typeface="Consolas" panose="020B0609020204030204" pitchFamily="49" charset="0"/>
+              </a:rPr>
+              <a:t>, </a:t>
+            </a:r>
+            <a:r>
+              <a:rPr lang="en-US" altLang="ko-KR" sz="1050" b="0">
+                <a:solidFill>
+                  <a:srgbClr val="4EC9B0"/>
+                </a:solidFill>
+                <a:effectLst/>
+                <a:latin typeface="Consolas" panose="020B0609020204030204" pitchFamily="49" charset="0"/>
+              </a:rPr>
+              <a:t>String</a:t>
+            </a:r>
+            <a:r>
+              <a:rPr lang="en-US" altLang="ko-KR" sz="1050" b="0">
+                <a:solidFill>
+                  <a:srgbClr val="BBBEBF"/>
+                </a:solidFill>
+                <a:effectLst/>
+                <a:latin typeface="Consolas" panose="020B0609020204030204" pitchFamily="49" charset="0"/>
+              </a:rPr>
+              <a:t> </a:t>
+            </a:r>
+            <a:r>
+              <a:rPr lang="en-US" altLang="ko-KR" sz="1050" b="0">
+                <a:solidFill>
+                  <a:srgbClr val="FFA657"/>
+                </a:solidFill>
+                <a:effectLst/>
+                <a:latin typeface="Consolas" panose="020B0609020204030204" pitchFamily="49" charset="0"/>
+              </a:rPr>
+              <a:t>body</a:t>
+            </a:r>
+            <a:r>
+              <a:rPr lang="en-US" altLang="ko-KR" sz="1050" b="0">
+                <a:solidFill>
+                  <a:srgbClr val="BBBEBF"/>
+                </a:solidFill>
+                <a:effectLst/>
+                <a:latin typeface="Consolas" panose="020B0609020204030204" pitchFamily="49" charset="0"/>
+              </a:rPr>
+              <a:t>) {</a:t>
+            </a:r>
+          </a:p>
+          <a:p>
+            <a:pPr>
+              <a:lnSpc>
+                <a:spcPts val="1425"/>
+              </a:lnSpc>
+              <a:buNone/>
+            </a:pPr>
+            <a:r>
+              <a:rPr lang="en-US" altLang="ko-KR" sz="1050" b="0">
+                <a:solidFill>
+                  <a:srgbClr val="BBBEBF"/>
+                </a:solidFill>
+                <a:effectLst/>
+                <a:latin typeface="Consolas" panose="020B0609020204030204" pitchFamily="49" charset="0"/>
+              </a:rPr>
+              <a:t>        </a:t>
+            </a:r>
+            <a:r>
+              <a:rPr lang="en-US" altLang="ko-KR" sz="1050" b="0">
+                <a:solidFill>
+                  <a:srgbClr val="79C0FF"/>
+                </a:solidFill>
+                <a:effectLst/>
+                <a:latin typeface="Consolas" panose="020B0609020204030204" pitchFamily="49" charset="0"/>
+              </a:rPr>
+              <a:t>this</a:t>
+            </a:r>
+            <a:r>
+              <a:rPr lang="en-US" altLang="ko-KR" sz="1050" b="0">
+                <a:solidFill>
+                  <a:srgbClr val="BBBEBF"/>
+                </a:solidFill>
+                <a:effectLst/>
+                <a:latin typeface="Consolas" panose="020B0609020204030204" pitchFamily="49" charset="0"/>
+              </a:rPr>
+              <a:t>.</a:t>
+            </a:r>
+            <a:r>
+              <a:rPr lang="en-US" altLang="ko-KR" sz="1050" b="0">
+                <a:solidFill>
+                  <a:srgbClr val="C9D1D9"/>
+                </a:solidFill>
+                <a:effectLst/>
+                <a:latin typeface="Consolas" panose="020B0609020204030204" pitchFamily="49" charset="0"/>
+              </a:rPr>
+              <a:t>from</a:t>
+            </a:r>
+            <a:r>
+              <a:rPr lang="en-US" altLang="ko-KR" sz="1050" b="0">
+                <a:solidFill>
+                  <a:srgbClr val="BBBEBF"/>
+                </a:solidFill>
+                <a:effectLst/>
+                <a:latin typeface="Consolas" panose="020B0609020204030204" pitchFamily="49" charset="0"/>
+              </a:rPr>
+              <a:t> </a:t>
+            </a:r>
+            <a:r>
+              <a:rPr lang="en-US" altLang="ko-KR" sz="1050" b="0">
+                <a:solidFill>
+                  <a:srgbClr val="D4D4D4"/>
+                </a:solidFill>
+                <a:effectLst/>
+                <a:latin typeface="Consolas" panose="020B0609020204030204" pitchFamily="49" charset="0"/>
+              </a:rPr>
+              <a:t>=</a:t>
+            </a:r>
+            <a:r>
+              <a:rPr lang="en-US" altLang="ko-KR" sz="1050" b="0">
+                <a:solidFill>
+                  <a:srgbClr val="BBBEBF"/>
+                </a:solidFill>
+                <a:effectLst/>
+                <a:latin typeface="Consolas" panose="020B0609020204030204" pitchFamily="49" charset="0"/>
+              </a:rPr>
+              <a:t> </a:t>
+            </a:r>
+            <a:r>
+              <a:rPr lang="en-US" altLang="ko-KR" sz="1050" b="0">
+                <a:solidFill>
+                  <a:srgbClr val="FFA657"/>
+                </a:solidFill>
+                <a:effectLst/>
+                <a:latin typeface="Consolas" panose="020B0609020204030204" pitchFamily="49" charset="0"/>
+              </a:rPr>
+              <a:t>from</a:t>
+            </a:r>
+            <a:r>
+              <a:rPr lang="en-US" altLang="ko-KR" sz="1050" b="0">
+                <a:solidFill>
+                  <a:srgbClr val="BBBEBF"/>
+                </a:solidFill>
+                <a:effectLst/>
+                <a:latin typeface="Consolas" panose="020B0609020204030204" pitchFamily="49" charset="0"/>
+              </a:rPr>
+              <a:t>;</a:t>
+            </a:r>
+          </a:p>
+          <a:p>
+            <a:pPr>
+              <a:lnSpc>
+                <a:spcPts val="1425"/>
+              </a:lnSpc>
+              <a:buNone/>
+            </a:pPr>
+            <a:r>
+              <a:rPr lang="en-US" altLang="ko-KR" sz="1050" b="0">
+                <a:solidFill>
+                  <a:srgbClr val="BBBEBF"/>
+                </a:solidFill>
+                <a:effectLst/>
+                <a:latin typeface="Consolas" panose="020B0609020204030204" pitchFamily="49" charset="0"/>
+              </a:rPr>
+              <a:t>        </a:t>
+            </a:r>
+            <a:r>
+              <a:rPr lang="en-US" altLang="ko-KR" sz="1050" b="0">
+                <a:solidFill>
+                  <a:srgbClr val="79C0FF"/>
+                </a:solidFill>
+                <a:effectLst/>
+                <a:latin typeface="Consolas" panose="020B0609020204030204" pitchFamily="49" charset="0"/>
+              </a:rPr>
+              <a:t>this</a:t>
+            </a:r>
+            <a:r>
+              <a:rPr lang="en-US" altLang="ko-KR" sz="1050" b="0">
+                <a:solidFill>
+                  <a:srgbClr val="BBBEBF"/>
+                </a:solidFill>
+                <a:effectLst/>
+                <a:latin typeface="Consolas" panose="020B0609020204030204" pitchFamily="49" charset="0"/>
+              </a:rPr>
+              <a:t>.</a:t>
+            </a:r>
+            <a:r>
+              <a:rPr lang="en-US" altLang="ko-KR" sz="1050" b="0">
+                <a:solidFill>
+                  <a:srgbClr val="C9D1D9"/>
+                </a:solidFill>
+                <a:effectLst/>
+                <a:latin typeface="Consolas" panose="020B0609020204030204" pitchFamily="49" charset="0"/>
+              </a:rPr>
+              <a:t>to</a:t>
+            </a:r>
+            <a:r>
+              <a:rPr lang="en-US" altLang="ko-KR" sz="1050" b="0">
+                <a:solidFill>
+                  <a:srgbClr val="BBBEBF"/>
+                </a:solidFill>
+                <a:effectLst/>
+                <a:latin typeface="Consolas" panose="020B0609020204030204" pitchFamily="49" charset="0"/>
+              </a:rPr>
+              <a:t> </a:t>
+            </a:r>
+            <a:r>
+              <a:rPr lang="en-US" altLang="ko-KR" sz="1050" b="0">
+                <a:solidFill>
+                  <a:srgbClr val="D4D4D4"/>
+                </a:solidFill>
+                <a:effectLst/>
+                <a:latin typeface="Consolas" panose="020B0609020204030204" pitchFamily="49" charset="0"/>
+              </a:rPr>
+              <a:t>=</a:t>
+            </a:r>
+            <a:r>
+              <a:rPr lang="en-US" altLang="ko-KR" sz="1050" b="0">
+                <a:solidFill>
+                  <a:srgbClr val="BBBEBF"/>
+                </a:solidFill>
+                <a:effectLst/>
+                <a:latin typeface="Consolas" panose="020B0609020204030204" pitchFamily="49" charset="0"/>
+              </a:rPr>
+              <a:t> </a:t>
+            </a:r>
+            <a:r>
+              <a:rPr lang="en-US" altLang="ko-KR" sz="1050" b="0">
+                <a:solidFill>
+                  <a:srgbClr val="FFA657"/>
+                </a:solidFill>
+                <a:effectLst/>
+                <a:latin typeface="Consolas" panose="020B0609020204030204" pitchFamily="49" charset="0"/>
+              </a:rPr>
+              <a:t>to</a:t>
+            </a:r>
+            <a:r>
+              <a:rPr lang="en-US" altLang="ko-KR" sz="1050" b="0">
+                <a:solidFill>
+                  <a:srgbClr val="BBBEBF"/>
+                </a:solidFill>
+                <a:effectLst/>
+                <a:latin typeface="Consolas" panose="020B0609020204030204" pitchFamily="49" charset="0"/>
+              </a:rPr>
+              <a:t>;</a:t>
+            </a:r>
+          </a:p>
+          <a:p>
+            <a:pPr>
+              <a:lnSpc>
+                <a:spcPts val="1425"/>
+              </a:lnSpc>
+              <a:buNone/>
+            </a:pPr>
+            <a:r>
+              <a:rPr lang="en-US" altLang="ko-KR" sz="1050" b="0">
+                <a:solidFill>
+                  <a:srgbClr val="BBBEBF"/>
+                </a:solidFill>
+                <a:effectLst/>
+                <a:latin typeface="Consolas" panose="020B0609020204030204" pitchFamily="49" charset="0"/>
+              </a:rPr>
+              <a:t>        </a:t>
+            </a:r>
+            <a:r>
+              <a:rPr lang="en-US" altLang="ko-KR" sz="1050" b="0">
+                <a:solidFill>
+                  <a:srgbClr val="79C0FF"/>
+                </a:solidFill>
+                <a:effectLst/>
+                <a:latin typeface="Consolas" panose="020B0609020204030204" pitchFamily="49" charset="0"/>
+              </a:rPr>
+              <a:t>this</a:t>
+            </a:r>
+            <a:r>
+              <a:rPr lang="en-US" altLang="ko-KR" sz="1050" b="0">
+                <a:solidFill>
+                  <a:srgbClr val="BBBEBF"/>
+                </a:solidFill>
+                <a:effectLst/>
+                <a:latin typeface="Consolas" panose="020B0609020204030204" pitchFamily="49" charset="0"/>
+              </a:rPr>
+              <a:t>.</a:t>
+            </a:r>
+            <a:r>
+              <a:rPr lang="en-US" altLang="ko-KR" sz="1050" b="0">
+                <a:solidFill>
+                  <a:srgbClr val="C9D1D9"/>
+                </a:solidFill>
+                <a:effectLst/>
+                <a:latin typeface="Consolas" panose="020B0609020204030204" pitchFamily="49" charset="0"/>
+              </a:rPr>
+              <a:t>subject</a:t>
+            </a:r>
+            <a:r>
+              <a:rPr lang="en-US" altLang="ko-KR" sz="1050" b="0">
+                <a:solidFill>
+                  <a:srgbClr val="BBBEBF"/>
+                </a:solidFill>
+                <a:effectLst/>
+                <a:latin typeface="Consolas" panose="020B0609020204030204" pitchFamily="49" charset="0"/>
+              </a:rPr>
+              <a:t> </a:t>
+            </a:r>
+            <a:r>
+              <a:rPr lang="en-US" altLang="ko-KR" sz="1050" b="0">
+                <a:solidFill>
+                  <a:srgbClr val="D4D4D4"/>
+                </a:solidFill>
+                <a:effectLst/>
+                <a:latin typeface="Consolas" panose="020B0609020204030204" pitchFamily="49" charset="0"/>
+              </a:rPr>
+              <a:t>=</a:t>
+            </a:r>
+            <a:r>
+              <a:rPr lang="en-US" altLang="ko-KR" sz="1050" b="0">
+                <a:solidFill>
+                  <a:srgbClr val="BBBEBF"/>
+                </a:solidFill>
+                <a:effectLst/>
+                <a:latin typeface="Consolas" panose="020B0609020204030204" pitchFamily="49" charset="0"/>
+              </a:rPr>
+              <a:t> </a:t>
+            </a:r>
+            <a:r>
+              <a:rPr lang="en-US" altLang="ko-KR" sz="1050" b="0">
+                <a:solidFill>
+                  <a:srgbClr val="FFA657"/>
+                </a:solidFill>
+                <a:effectLst/>
+                <a:latin typeface="Consolas" panose="020B0609020204030204" pitchFamily="49" charset="0"/>
+              </a:rPr>
+              <a:t>subject</a:t>
+            </a:r>
+            <a:r>
+              <a:rPr lang="en-US" altLang="ko-KR" sz="1050" b="0">
+                <a:solidFill>
+                  <a:srgbClr val="BBBEBF"/>
+                </a:solidFill>
+                <a:effectLst/>
+                <a:latin typeface="Consolas" panose="020B0609020204030204" pitchFamily="49" charset="0"/>
+              </a:rPr>
+              <a:t>;</a:t>
+            </a:r>
+          </a:p>
+          <a:p>
+            <a:pPr>
+              <a:lnSpc>
+                <a:spcPts val="1425"/>
+              </a:lnSpc>
+              <a:buNone/>
+            </a:pPr>
+            <a:r>
+              <a:rPr lang="en-US" altLang="ko-KR" sz="1050" b="0">
+                <a:solidFill>
+                  <a:srgbClr val="BBBEBF"/>
+                </a:solidFill>
+                <a:effectLst/>
+                <a:latin typeface="Consolas" panose="020B0609020204030204" pitchFamily="49" charset="0"/>
+              </a:rPr>
+              <a:t>        </a:t>
+            </a:r>
+            <a:r>
+              <a:rPr lang="en-US" altLang="ko-KR" sz="1050" b="0">
+                <a:solidFill>
+                  <a:srgbClr val="79C0FF"/>
+                </a:solidFill>
+                <a:effectLst/>
+                <a:latin typeface="Consolas" panose="020B0609020204030204" pitchFamily="49" charset="0"/>
+              </a:rPr>
+              <a:t>this</a:t>
+            </a:r>
+            <a:r>
+              <a:rPr lang="en-US" altLang="ko-KR" sz="1050" b="0">
+                <a:solidFill>
+                  <a:srgbClr val="BBBEBF"/>
+                </a:solidFill>
+                <a:effectLst/>
+                <a:latin typeface="Consolas" panose="020B0609020204030204" pitchFamily="49" charset="0"/>
+              </a:rPr>
+              <a:t>.</a:t>
+            </a:r>
+            <a:r>
+              <a:rPr lang="en-US" altLang="ko-KR" sz="1050" b="0">
+                <a:solidFill>
+                  <a:srgbClr val="C9D1D9"/>
+                </a:solidFill>
+                <a:effectLst/>
+                <a:latin typeface="Consolas" panose="020B0609020204030204" pitchFamily="49" charset="0"/>
+              </a:rPr>
+              <a:t>body</a:t>
+            </a:r>
+            <a:r>
+              <a:rPr lang="en-US" altLang="ko-KR" sz="1050" b="0">
+                <a:solidFill>
+                  <a:srgbClr val="BBBEBF"/>
+                </a:solidFill>
+                <a:effectLst/>
+                <a:latin typeface="Consolas" panose="020B0609020204030204" pitchFamily="49" charset="0"/>
+              </a:rPr>
+              <a:t> </a:t>
+            </a:r>
+            <a:r>
+              <a:rPr lang="en-US" altLang="ko-KR" sz="1050" b="0">
+                <a:solidFill>
+                  <a:srgbClr val="D4D4D4"/>
+                </a:solidFill>
+                <a:effectLst/>
+                <a:latin typeface="Consolas" panose="020B0609020204030204" pitchFamily="49" charset="0"/>
+              </a:rPr>
+              <a:t>=</a:t>
+            </a:r>
+            <a:r>
+              <a:rPr lang="en-US" altLang="ko-KR" sz="1050" b="0">
+                <a:solidFill>
+                  <a:srgbClr val="BBBEBF"/>
+                </a:solidFill>
+                <a:effectLst/>
+                <a:latin typeface="Consolas" panose="020B0609020204030204" pitchFamily="49" charset="0"/>
+              </a:rPr>
+              <a:t> </a:t>
+            </a:r>
+            <a:r>
+              <a:rPr lang="en-US" altLang="ko-KR" sz="1050" b="0">
+                <a:solidFill>
+                  <a:srgbClr val="FFA657"/>
+                </a:solidFill>
+                <a:effectLst/>
+                <a:latin typeface="Consolas" panose="020B0609020204030204" pitchFamily="49" charset="0"/>
+              </a:rPr>
+              <a:t>body</a:t>
+            </a:r>
+            <a:r>
+              <a:rPr lang="en-US" altLang="ko-KR" sz="1050" b="0">
+                <a:solidFill>
+                  <a:srgbClr val="BBBEBF"/>
+                </a:solidFill>
+                <a:effectLst/>
+                <a:latin typeface="Consolas" panose="020B0609020204030204" pitchFamily="49" charset="0"/>
+              </a:rPr>
+              <a:t>;</a:t>
+            </a:r>
+          </a:p>
+          <a:p>
+            <a:pPr>
+              <a:lnSpc>
+                <a:spcPts val="1425"/>
+              </a:lnSpc>
+              <a:buNone/>
+            </a:pPr>
+            <a:r>
+              <a:rPr lang="en-US" altLang="ko-KR" sz="1050" b="0">
+                <a:solidFill>
+                  <a:srgbClr val="BBBEBF"/>
+                </a:solidFill>
+                <a:effectLst/>
+                <a:latin typeface="Consolas" panose="020B0609020204030204" pitchFamily="49" charset="0"/>
+              </a:rPr>
+              <a:t>    }</a:t>
+            </a:r>
+          </a:p>
+          <a:p>
+            <a:pPr>
+              <a:lnSpc>
+                <a:spcPts val="1425"/>
+              </a:lnSpc>
+              <a:buNone/>
+            </a:pPr>
+            <a:r>
+              <a:rPr lang="en-US" altLang="ko-KR" sz="1050" b="0">
+                <a:solidFill>
+                  <a:srgbClr val="BBBEBF"/>
+                </a:solidFill>
+                <a:effectLst/>
+                <a:latin typeface="Consolas" panose="020B0609020204030204" pitchFamily="49" charset="0"/>
+              </a:rPr>
+              <a:t>    </a:t>
+            </a:r>
+            <a:r>
+              <a:rPr lang="en-US" altLang="ko-KR" sz="1050" b="0">
+                <a:solidFill>
+                  <a:srgbClr val="569CD6"/>
+                </a:solidFill>
+                <a:effectLst/>
+                <a:latin typeface="Consolas" panose="020B0609020204030204" pitchFamily="49" charset="0"/>
+              </a:rPr>
+              <a:t>public</a:t>
+            </a:r>
+            <a:r>
+              <a:rPr lang="en-US" altLang="ko-KR" sz="1050" b="0">
+                <a:solidFill>
+                  <a:srgbClr val="BBBEBF"/>
+                </a:solidFill>
+                <a:effectLst/>
+                <a:latin typeface="Consolas" panose="020B0609020204030204" pitchFamily="49" charset="0"/>
+              </a:rPr>
+              <a:t> </a:t>
+            </a:r>
+            <a:r>
+              <a:rPr lang="en-US" altLang="ko-KR" sz="1050" b="0">
+                <a:solidFill>
+                  <a:srgbClr val="4EC9B0"/>
+                </a:solidFill>
+                <a:effectLst/>
+                <a:latin typeface="Consolas" panose="020B0609020204030204" pitchFamily="49" charset="0"/>
+              </a:rPr>
+              <a:t>String</a:t>
+            </a:r>
+            <a:r>
+              <a:rPr lang="en-US" altLang="ko-KR" sz="1050" b="0">
+                <a:solidFill>
+                  <a:srgbClr val="BBBEBF"/>
+                </a:solidFill>
+                <a:effectLst/>
+                <a:latin typeface="Consolas" panose="020B0609020204030204" pitchFamily="49" charset="0"/>
+              </a:rPr>
+              <a:t> </a:t>
+            </a:r>
+            <a:r>
+              <a:rPr lang="en-US" altLang="ko-KR" sz="1050" b="0">
+                <a:solidFill>
+                  <a:srgbClr val="D2A8FF"/>
+                </a:solidFill>
+                <a:effectLst/>
+                <a:latin typeface="Consolas" panose="020B0609020204030204" pitchFamily="49" charset="0"/>
+              </a:rPr>
+              <a:t>getFrom</a:t>
+            </a:r>
+            <a:r>
+              <a:rPr lang="en-US" altLang="ko-KR" sz="1050" b="0">
+                <a:solidFill>
+                  <a:srgbClr val="BBBEBF"/>
+                </a:solidFill>
+                <a:effectLst/>
+                <a:latin typeface="Consolas" panose="020B0609020204030204" pitchFamily="49" charset="0"/>
+              </a:rPr>
+              <a:t>() {</a:t>
+            </a:r>
+          </a:p>
+          <a:p>
+            <a:pPr>
+              <a:lnSpc>
+                <a:spcPts val="1425"/>
+              </a:lnSpc>
+              <a:buNone/>
+            </a:pPr>
+            <a:r>
+              <a:rPr lang="en-US" altLang="ko-KR" sz="1050" b="0">
+                <a:solidFill>
+                  <a:srgbClr val="BBBEBF"/>
+                </a:solidFill>
+                <a:effectLst/>
+                <a:latin typeface="Consolas" panose="020B0609020204030204" pitchFamily="49" charset="0"/>
+              </a:rPr>
+              <a:t>        </a:t>
+            </a:r>
+            <a:r>
+              <a:rPr lang="en-US" altLang="ko-KR" sz="1050" b="0">
+                <a:solidFill>
+                  <a:srgbClr val="C586C0"/>
+                </a:solidFill>
+                <a:effectLst/>
+                <a:latin typeface="Consolas" panose="020B0609020204030204" pitchFamily="49" charset="0"/>
+              </a:rPr>
+              <a:t>return</a:t>
+            </a:r>
+            <a:r>
+              <a:rPr lang="en-US" altLang="ko-KR" sz="1050" b="0">
+                <a:solidFill>
+                  <a:srgbClr val="BBBEBF"/>
+                </a:solidFill>
+                <a:effectLst/>
+                <a:latin typeface="Consolas" panose="020B0609020204030204" pitchFamily="49" charset="0"/>
+              </a:rPr>
+              <a:t> </a:t>
+            </a:r>
+            <a:r>
+              <a:rPr lang="en-US" altLang="ko-KR" sz="1050" b="0">
+                <a:solidFill>
+                  <a:srgbClr val="C9D1D9"/>
+                </a:solidFill>
+                <a:effectLst/>
+                <a:latin typeface="Consolas" panose="020B0609020204030204" pitchFamily="49" charset="0"/>
+              </a:rPr>
+              <a:t>from</a:t>
+            </a:r>
+            <a:r>
+              <a:rPr lang="en-US" altLang="ko-KR" sz="1050" b="0">
+                <a:solidFill>
+                  <a:srgbClr val="BBBEBF"/>
+                </a:solidFill>
+                <a:effectLst/>
+                <a:latin typeface="Consolas" panose="020B0609020204030204" pitchFamily="49" charset="0"/>
+              </a:rPr>
+              <a:t>;</a:t>
+            </a:r>
+          </a:p>
+          <a:p>
+            <a:pPr>
+              <a:lnSpc>
+                <a:spcPts val="1425"/>
+              </a:lnSpc>
+              <a:buNone/>
+            </a:pPr>
+            <a:r>
+              <a:rPr lang="en-US" altLang="ko-KR" sz="1050" b="0">
+                <a:solidFill>
+                  <a:srgbClr val="BBBEBF"/>
+                </a:solidFill>
+                <a:effectLst/>
+                <a:latin typeface="Consolas" panose="020B0609020204030204" pitchFamily="49" charset="0"/>
+              </a:rPr>
+              <a:t>    }</a:t>
+            </a:r>
+          </a:p>
+          <a:p>
+            <a:pPr>
+              <a:lnSpc>
+                <a:spcPts val="1425"/>
+              </a:lnSpc>
+              <a:buNone/>
+            </a:pPr>
+            <a:r>
+              <a:rPr lang="en-US" altLang="ko-KR" sz="1050" b="0">
+                <a:solidFill>
+                  <a:srgbClr val="BBBEBF"/>
+                </a:solidFill>
+                <a:effectLst/>
+                <a:latin typeface="Consolas" panose="020B0609020204030204" pitchFamily="49" charset="0"/>
+              </a:rPr>
+              <a:t>    </a:t>
+            </a:r>
+            <a:r>
+              <a:rPr lang="en-US" altLang="ko-KR" sz="1050" b="0">
+                <a:solidFill>
+                  <a:srgbClr val="569CD6"/>
+                </a:solidFill>
+                <a:effectLst/>
+                <a:latin typeface="Consolas" panose="020B0609020204030204" pitchFamily="49" charset="0"/>
+              </a:rPr>
+              <a:t>public</a:t>
+            </a:r>
+            <a:r>
+              <a:rPr lang="en-US" altLang="ko-KR" sz="1050" b="0">
+                <a:solidFill>
+                  <a:srgbClr val="BBBEBF"/>
+                </a:solidFill>
+                <a:effectLst/>
+                <a:latin typeface="Consolas" panose="020B0609020204030204" pitchFamily="49" charset="0"/>
+              </a:rPr>
+              <a:t> </a:t>
+            </a:r>
+            <a:r>
+              <a:rPr lang="en-US" altLang="ko-KR" sz="1050" b="0">
+                <a:solidFill>
+                  <a:srgbClr val="4EC9B0"/>
+                </a:solidFill>
+                <a:effectLst/>
+                <a:latin typeface="Consolas" panose="020B0609020204030204" pitchFamily="49" charset="0"/>
+              </a:rPr>
+              <a:t>String</a:t>
+            </a:r>
+            <a:r>
+              <a:rPr lang="en-US" altLang="ko-KR" sz="1050" b="0">
+                <a:solidFill>
+                  <a:srgbClr val="BBBEBF"/>
+                </a:solidFill>
+                <a:effectLst/>
+                <a:latin typeface="Consolas" panose="020B0609020204030204" pitchFamily="49" charset="0"/>
+              </a:rPr>
+              <a:t> </a:t>
+            </a:r>
+            <a:r>
+              <a:rPr lang="en-US" altLang="ko-KR" sz="1050" b="0">
+                <a:solidFill>
+                  <a:srgbClr val="D2A8FF"/>
+                </a:solidFill>
+                <a:effectLst/>
+                <a:latin typeface="Consolas" panose="020B0609020204030204" pitchFamily="49" charset="0"/>
+              </a:rPr>
+              <a:t>getTo</a:t>
+            </a:r>
+            <a:r>
+              <a:rPr lang="en-US" altLang="ko-KR" sz="1050" b="0">
+                <a:solidFill>
+                  <a:srgbClr val="BBBEBF"/>
+                </a:solidFill>
+                <a:effectLst/>
+                <a:latin typeface="Consolas" panose="020B0609020204030204" pitchFamily="49" charset="0"/>
+              </a:rPr>
+              <a:t>() {</a:t>
+            </a:r>
+          </a:p>
+          <a:p>
+            <a:pPr>
+              <a:lnSpc>
+                <a:spcPts val="1425"/>
+              </a:lnSpc>
+              <a:buNone/>
+            </a:pPr>
+            <a:r>
+              <a:rPr lang="en-US" altLang="ko-KR" sz="1050" b="0">
+                <a:solidFill>
+                  <a:srgbClr val="BBBEBF"/>
+                </a:solidFill>
+                <a:effectLst/>
+                <a:latin typeface="Consolas" panose="020B0609020204030204" pitchFamily="49" charset="0"/>
+              </a:rPr>
+              <a:t>        </a:t>
+            </a:r>
+            <a:r>
+              <a:rPr lang="en-US" altLang="ko-KR" sz="1050" b="0">
+                <a:solidFill>
+                  <a:srgbClr val="C586C0"/>
+                </a:solidFill>
+                <a:effectLst/>
+                <a:latin typeface="Consolas" panose="020B0609020204030204" pitchFamily="49" charset="0"/>
+              </a:rPr>
+              <a:t>return</a:t>
+            </a:r>
+            <a:r>
+              <a:rPr lang="en-US" altLang="ko-KR" sz="1050" b="0">
+                <a:solidFill>
+                  <a:srgbClr val="BBBEBF"/>
+                </a:solidFill>
+                <a:effectLst/>
+                <a:latin typeface="Consolas" panose="020B0609020204030204" pitchFamily="49" charset="0"/>
+              </a:rPr>
+              <a:t> </a:t>
+            </a:r>
+            <a:r>
+              <a:rPr lang="en-US" altLang="ko-KR" sz="1050" b="0">
+                <a:solidFill>
+                  <a:srgbClr val="C9D1D9"/>
+                </a:solidFill>
+                <a:effectLst/>
+                <a:latin typeface="Consolas" panose="020B0609020204030204" pitchFamily="49" charset="0"/>
+              </a:rPr>
+              <a:t>to</a:t>
+            </a:r>
+            <a:r>
+              <a:rPr lang="en-US" altLang="ko-KR" sz="1050" b="0">
+                <a:solidFill>
+                  <a:srgbClr val="BBBEBF"/>
+                </a:solidFill>
+                <a:effectLst/>
+                <a:latin typeface="Consolas" panose="020B0609020204030204" pitchFamily="49" charset="0"/>
+              </a:rPr>
+              <a:t>;</a:t>
+            </a:r>
+          </a:p>
+          <a:p>
+            <a:pPr>
+              <a:lnSpc>
+                <a:spcPts val="1425"/>
+              </a:lnSpc>
+              <a:buNone/>
+            </a:pPr>
+            <a:r>
+              <a:rPr lang="en-US" altLang="ko-KR" sz="1050" b="0">
+                <a:solidFill>
+                  <a:srgbClr val="BBBEBF"/>
+                </a:solidFill>
+                <a:effectLst/>
+                <a:latin typeface="Consolas" panose="020B0609020204030204" pitchFamily="49" charset="0"/>
+              </a:rPr>
+              <a:t>    }</a:t>
+            </a:r>
+          </a:p>
+          <a:p>
+            <a:pPr>
+              <a:lnSpc>
+                <a:spcPts val="1425"/>
+              </a:lnSpc>
+              <a:buNone/>
+            </a:pPr>
+            <a:r>
+              <a:rPr lang="en-US" altLang="ko-KR" sz="1050" b="0">
+                <a:solidFill>
+                  <a:srgbClr val="BBBEBF"/>
+                </a:solidFill>
+                <a:effectLst/>
+                <a:latin typeface="Consolas" panose="020B0609020204030204" pitchFamily="49" charset="0"/>
+              </a:rPr>
+              <a:t>    </a:t>
+            </a:r>
+            <a:r>
+              <a:rPr lang="en-US" altLang="ko-KR" sz="1050" b="0">
+                <a:solidFill>
+                  <a:srgbClr val="569CD6"/>
+                </a:solidFill>
+                <a:effectLst/>
+                <a:latin typeface="Consolas" panose="020B0609020204030204" pitchFamily="49" charset="0"/>
+              </a:rPr>
+              <a:t>public</a:t>
+            </a:r>
+            <a:r>
+              <a:rPr lang="en-US" altLang="ko-KR" sz="1050" b="0">
+                <a:solidFill>
+                  <a:srgbClr val="BBBEBF"/>
+                </a:solidFill>
+                <a:effectLst/>
+                <a:latin typeface="Consolas" panose="020B0609020204030204" pitchFamily="49" charset="0"/>
+              </a:rPr>
+              <a:t> </a:t>
+            </a:r>
+            <a:r>
+              <a:rPr lang="en-US" altLang="ko-KR" sz="1050" b="0">
+                <a:solidFill>
+                  <a:srgbClr val="4EC9B0"/>
+                </a:solidFill>
+                <a:effectLst/>
+                <a:latin typeface="Consolas" panose="020B0609020204030204" pitchFamily="49" charset="0"/>
+              </a:rPr>
+              <a:t>String</a:t>
+            </a:r>
+            <a:r>
+              <a:rPr lang="en-US" altLang="ko-KR" sz="1050" b="0">
+                <a:solidFill>
+                  <a:srgbClr val="BBBEBF"/>
+                </a:solidFill>
+                <a:effectLst/>
+                <a:latin typeface="Consolas" panose="020B0609020204030204" pitchFamily="49" charset="0"/>
+              </a:rPr>
+              <a:t> </a:t>
+            </a:r>
+            <a:r>
+              <a:rPr lang="en-US" altLang="ko-KR" sz="1050" b="0">
+                <a:solidFill>
+                  <a:srgbClr val="D2A8FF"/>
+                </a:solidFill>
+                <a:effectLst/>
+                <a:latin typeface="Consolas" panose="020B0609020204030204" pitchFamily="49" charset="0"/>
+              </a:rPr>
+              <a:t>getSubject</a:t>
+            </a:r>
+            <a:r>
+              <a:rPr lang="en-US" altLang="ko-KR" sz="1050" b="0">
+                <a:solidFill>
+                  <a:srgbClr val="BBBEBF"/>
+                </a:solidFill>
+                <a:effectLst/>
+                <a:latin typeface="Consolas" panose="020B0609020204030204" pitchFamily="49" charset="0"/>
+              </a:rPr>
+              <a:t>() {</a:t>
+            </a:r>
+          </a:p>
+          <a:p>
+            <a:pPr>
+              <a:lnSpc>
+                <a:spcPts val="1425"/>
+              </a:lnSpc>
+              <a:buNone/>
+            </a:pPr>
+            <a:r>
+              <a:rPr lang="en-US" altLang="ko-KR" sz="1050" b="0">
+                <a:solidFill>
+                  <a:srgbClr val="BBBEBF"/>
+                </a:solidFill>
+                <a:effectLst/>
+                <a:latin typeface="Consolas" panose="020B0609020204030204" pitchFamily="49" charset="0"/>
+              </a:rPr>
+              <a:t>        </a:t>
+            </a:r>
+            <a:r>
+              <a:rPr lang="en-US" altLang="ko-KR" sz="1050" b="0">
+                <a:solidFill>
+                  <a:srgbClr val="C586C0"/>
+                </a:solidFill>
+                <a:effectLst/>
+                <a:latin typeface="Consolas" panose="020B0609020204030204" pitchFamily="49" charset="0"/>
+              </a:rPr>
+              <a:t>return</a:t>
+            </a:r>
+            <a:r>
+              <a:rPr lang="en-US" altLang="ko-KR" sz="1050" b="0">
+                <a:solidFill>
+                  <a:srgbClr val="BBBEBF"/>
+                </a:solidFill>
+                <a:effectLst/>
+                <a:latin typeface="Consolas" panose="020B0609020204030204" pitchFamily="49" charset="0"/>
+              </a:rPr>
+              <a:t> </a:t>
+            </a:r>
+            <a:r>
+              <a:rPr lang="en-US" altLang="ko-KR" sz="1050" b="0">
+                <a:solidFill>
+                  <a:srgbClr val="C9D1D9"/>
+                </a:solidFill>
+                <a:effectLst/>
+                <a:latin typeface="Consolas" panose="020B0609020204030204" pitchFamily="49" charset="0"/>
+              </a:rPr>
+              <a:t>subject</a:t>
+            </a:r>
+            <a:r>
+              <a:rPr lang="en-US" altLang="ko-KR" sz="1050" b="0">
+                <a:solidFill>
+                  <a:srgbClr val="BBBEBF"/>
+                </a:solidFill>
+                <a:effectLst/>
+                <a:latin typeface="Consolas" panose="020B0609020204030204" pitchFamily="49" charset="0"/>
+              </a:rPr>
+              <a:t>;</a:t>
+            </a:r>
+          </a:p>
+          <a:p>
+            <a:pPr>
+              <a:lnSpc>
+                <a:spcPts val="1425"/>
+              </a:lnSpc>
+              <a:buNone/>
+            </a:pPr>
+            <a:r>
+              <a:rPr lang="en-US" altLang="ko-KR" sz="1050" b="0">
+                <a:solidFill>
+                  <a:srgbClr val="BBBEBF"/>
+                </a:solidFill>
+                <a:effectLst/>
+                <a:latin typeface="Consolas" panose="020B0609020204030204" pitchFamily="49" charset="0"/>
+              </a:rPr>
+              <a:t>    }</a:t>
+            </a:r>
+          </a:p>
+          <a:p>
+            <a:pPr>
+              <a:lnSpc>
+                <a:spcPts val="1425"/>
+              </a:lnSpc>
+              <a:buNone/>
+            </a:pPr>
+            <a:r>
+              <a:rPr lang="en-US" altLang="ko-KR" sz="1050" b="0">
+                <a:solidFill>
+                  <a:srgbClr val="BBBEBF"/>
+                </a:solidFill>
+                <a:effectLst/>
+                <a:latin typeface="Consolas" panose="020B0609020204030204" pitchFamily="49" charset="0"/>
+              </a:rPr>
+              <a:t>    </a:t>
+            </a:r>
+            <a:r>
+              <a:rPr lang="en-US" altLang="ko-KR" sz="1050" b="0">
+                <a:solidFill>
+                  <a:srgbClr val="569CD6"/>
+                </a:solidFill>
+                <a:effectLst/>
+                <a:latin typeface="Consolas" panose="020B0609020204030204" pitchFamily="49" charset="0"/>
+              </a:rPr>
+              <a:t>public</a:t>
+            </a:r>
+            <a:r>
+              <a:rPr lang="en-US" altLang="ko-KR" sz="1050" b="0">
+                <a:solidFill>
+                  <a:srgbClr val="BBBEBF"/>
+                </a:solidFill>
+                <a:effectLst/>
+                <a:latin typeface="Consolas" panose="020B0609020204030204" pitchFamily="49" charset="0"/>
+              </a:rPr>
+              <a:t> </a:t>
+            </a:r>
+            <a:r>
+              <a:rPr lang="en-US" altLang="ko-KR" sz="1050" b="0">
+                <a:solidFill>
+                  <a:srgbClr val="4EC9B0"/>
+                </a:solidFill>
+                <a:effectLst/>
+                <a:latin typeface="Consolas" panose="020B0609020204030204" pitchFamily="49" charset="0"/>
+              </a:rPr>
+              <a:t>String</a:t>
+            </a:r>
+            <a:r>
+              <a:rPr lang="en-US" altLang="ko-KR" sz="1050" b="0">
+                <a:solidFill>
+                  <a:srgbClr val="BBBEBF"/>
+                </a:solidFill>
+                <a:effectLst/>
+                <a:latin typeface="Consolas" panose="020B0609020204030204" pitchFamily="49" charset="0"/>
+              </a:rPr>
+              <a:t> </a:t>
+            </a:r>
+            <a:r>
+              <a:rPr lang="en-US" altLang="ko-KR" sz="1050" b="0">
+                <a:solidFill>
+                  <a:srgbClr val="D2A8FF"/>
+                </a:solidFill>
+                <a:effectLst/>
+                <a:latin typeface="Consolas" panose="020B0609020204030204" pitchFamily="49" charset="0"/>
+              </a:rPr>
+              <a:t>getBody</a:t>
+            </a:r>
+            <a:r>
+              <a:rPr lang="en-US" altLang="ko-KR" sz="1050" b="0">
+                <a:solidFill>
+                  <a:srgbClr val="BBBEBF"/>
+                </a:solidFill>
+                <a:effectLst/>
+                <a:latin typeface="Consolas" panose="020B0609020204030204" pitchFamily="49" charset="0"/>
+              </a:rPr>
+              <a:t>() {</a:t>
+            </a:r>
+          </a:p>
+          <a:p>
+            <a:pPr>
+              <a:lnSpc>
+                <a:spcPts val="1425"/>
+              </a:lnSpc>
+              <a:buNone/>
+            </a:pPr>
+            <a:r>
+              <a:rPr lang="en-US" altLang="ko-KR" sz="1050" b="0">
+                <a:solidFill>
+                  <a:srgbClr val="BBBEBF"/>
+                </a:solidFill>
+                <a:effectLst/>
+                <a:latin typeface="Consolas" panose="020B0609020204030204" pitchFamily="49" charset="0"/>
+              </a:rPr>
+              <a:t>        </a:t>
+            </a:r>
+            <a:r>
+              <a:rPr lang="en-US" altLang="ko-KR" sz="1050" b="0">
+                <a:solidFill>
+                  <a:srgbClr val="C586C0"/>
+                </a:solidFill>
+                <a:effectLst/>
+                <a:latin typeface="Consolas" panose="020B0609020204030204" pitchFamily="49" charset="0"/>
+              </a:rPr>
+              <a:t>return</a:t>
+            </a:r>
+            <a:r>
+              <a:rPr lang="en-US" altLang="ko-KR" sz="1050" b="0">
+                <a:solidFill>
+                  <a:srgbClr val="BBBEBF"/>
+                </a:solidFill>
+                <a:effectLst/>
+                <a:latin typeface="Consolas" panose="020B0609020204030204" pitchFamily="49" charset="0"/>
+              </a:rPr>
+              <a:t> </a:t>
+            </a:r>
+            <a:r>
+              <a:rPr lang="en-US" altLang="ko-KR" sz="1050" b="0">
+                <a:solidFill>
+                  <a:srgbClr val="C9D1D9"/>
+                </a:solidFill>
+                <a:effectLst/>
+                <a:latin typeface="Consolas" panose="020B0609020204030204" pitchFamily="49" charset="0"/>
+              </a:rPr>
+              <a:t>body</a:t>
+            </a:r>
+            <a:r>
+              <a:rPr lang="en-US" altLang="ko-KR" sz="1050" b="0">
+                <a:solidFill>
+                  <a:srgbClr val="BBBEBF"/>
+                </a:solidFill>
+                <a:effectLst/>
+                <a:latin typeface="Consolas" panose="020B0609020204030204" pitchFamily="49" charset="0"/>
+              </a:rPr>
+              <a:t>;</a:t>
+            </a:r>
+          </a:p>
+          <a:p>
+            <a:pPr>
+              <a:lnSpc>
+                <a:spcPts val="1425"/>
+              </a:lnSpc>
+              <a:buNone/>
+            </a:pPr>
+            <a:r>
+              <a:rPr lang="en-US" altLang="ko-KR" sz="1050" b="0">
+                <a:solidFill>
+                  <a:srgbClr val="BBBEBF"/>
+                </a:solidFill>
+                <a:effectLst/>
+                <a:latin typeface="Consolas" panose="020B0609020204030204" pitchFamily="49" charset="0"/>
+              </a:rPr>
+              <a:t>    }</a:t>
+            </a:r>
+          </a:p>
+          <a:p>
+            <a:pPr>
+              <a:lnSpc>
+                <a:spcPts val="1425"/>
+              </a:lnSpc>
+              <a:buNone/>
+            </a:pPr>
+            <a:r>
+              <a:rPr lang="en-US" altLang="ko-KR" sz="1050" b="0">
+                <a:solidFill>
+                  <a:srgbClr val="BBBEBF"/>
+                </a:solidFill>
+                <a:effectLst/>
+                <a:latin typeface="Consolas" panose="020B0609020204030204" pitchFamily="49" charset="0"/>
+              </a:rPr>
+              <a:t>}</a:t>
+            </a:r>
+          </a:p>
+        </p:txBody>
+      </p:sp>
+      <p:grpSp>
+        <p:nvGrpSpPr>
+          <p:cNvPr id="5" name="그룹 4">
+            <a:extLst>
+              <a:ext uri="{FF2B5EF4-FFF2-40B4-BE49-F238E27FC236}">
+                <a16:creationId xmlns:a16="http://schemas.microsoft.com/office/drawing/2014/main" id="{1B0396D9-1D2E-B30C-BDD3-854751F04003}"/>
+              </a:ext>
+            </a:extLst>
+          </p:cNvPr>
+          <p:cNvGrpSpPr/>
+          <p:nvPr/>
+        </p:nvGrpSpPr>
+        <p:grpSpPr>
+          <a:xfrm>
+            <a:off x="966027" y="1821379"/>
+            <a:ext cx="2705478" cy="4277322"/>
+            <a:chOff x="1241109" y="1847960"/>
+            <a:chExt cx="2705478" cy="4277322"/>
+          </a:xfrm>
+        </p:grpSpPr>
+        <p:pic>
+          <p:nvPicPr>
+            <p:cNvPr id="6" name="그림 5">
+              <a:extLst>
+                <a:ext uri="{FF2B5EF4-FFF2-40B4-BE49-F238E27FC236}">
+                  <a16:creationId xmlns:a16="http://schemas.microsoft.com/office/drawing/2014/main" id="{B668D8C3-0F3C-B787-1FD7-322065190C70}"/>
+                </a:ext>
+              </a:extLst>
+            </p:cNvPr>
+            <p:cNvPicPr>
+              <a:picLocks noChangeAspect="1"/>
+            </p:cNvPicPr>
+            <p:nvPr/>
+          </p:nvPicPr>
+          <p:blipFill>
+            <a:blip r:embed="rId2"/>
+            <a:stretch>
+              <a:fillRect/>
+            </a:stretch>
+          </p:blipFill>
+          <p:spPr>
+            <a:xfrm>
+              <a:off x="1241109" y="1847960"/>
+              <a:ext cx="2705478" cy="4277322"/>
+            </a:xfrm>
+            <a:prstGeom prst="rect">
+              <a:avLst/>
+            </a:prstGeom>
+          </p:spPr>
+        </p:pic>
+        <p:sp>
+          <p:nvSpPr>
+            <p:cNvPr id="7" name="직사각형 6">
+              <a:extLst>
+                <a:ext uri="{FF2B5EF4-FFF2-40B4-BE49-F238E27FC236}">
+                  <a16:creationId xmlns:a16="http://schemas.microsoft.com/office/drawing/2014/main" id="{7EC7F278-2CDA-8578-7B09-5B9F8AD27041}"/>
+                </a:ext>
+              </a:extLst>
+            </p:cNvPr>
+            <p:cNvSpPr/>
+            <p:nvPr/>
+          </p:nvSpPr>
+          <p:spPr>
+            <a:xfrm>
+              <a:off x="1527048" y="2715768"/>
+              <a:ext cx="1546098" cy="273469"/>
+            </a:xfrm>
+            <a:prstGeom prst="rect">
+              <a:avLst/>
+            </a:prstGeom>
+            <a:noFill/>
+            <a:ln>
+              <a:solidFill>
+                <a:srgbClr val="FF0000"/>
+              </a:solidFill>
+            </a:ln>
+          </p:spPr>
+          <p:style>
+            <a:lnRef idx="2">
+              <a:schemeClr val="accent1">
+                <a:shade val="15000"/>
+              </a:schemeClr>
+            </a:lnRef>
+            <a:fillRef idx="1">
+              <a:schemeClr val="accent1"/>
+            </a:fillRef>
+            <a:effectRef idx="0">
+              <a:schemeClr val="accent1"/>
+            </a:effectRef>
+            <a:fontRef idx="minor">
+              <a:schemeClr val="lt1"/>
+            </a:fontRef>
+          </p:style>
+          <p:txBody>
+            <a:bodyPr rtlCol="0" anchor="ctr"/>
+            <a:lstStyle/>
+            <a:p>
+              <a:pPr algn="ctr"/>
+              <a:endParaRPr lang="ko-KR" altLang="en-US"/>
+            </a:p>
+          </p:txBody>
+        </p:sp>
+      </p:grpSp>
+    </p:spTree>
+    <p:extLst>
+      <p:ext uri="{BB962C8B-B14F-4D97-AF65-F5344CB8AC3E}">
+        <p14:creationId xmlns:p14="http://schemas.microsoft.com/office/powerpoint/2010/main" val="3161791249"/>
+      </p:ext>
+    </p:extLst>
+  </p:cSld>
+  <p:clrMapOvr>
+    <a:masterClrMapping/>
+  </p:clrMapOvr>
+</p:sld>
+</file>
+
+<file path=ppt/slides/slide21.xml><?xml version="1.0" encoding="utf-8"?>
+<p:sld xmlns:a="http://schemas.openxmlformats.org/drawingml/2006/main" xmlns:r="http://schemas.openxmlformats.org/officeDocument/2006/relationships" xmlns:p="http://schemas.openxmlformats.org/presentationml/2006/main">
+  <p:cSld>
+    <p:spTree>
+      <p:nvGrpSpPr>
+        <p:cNvPr id="1" name=""/>
+        <p:cNvGrpSpPr/>
+        <p:nvPr/>
+      </p:nvGrpSpPr>
+      <p:grpSpPr>
+        <a:xfrm>
+          <a:off x="0" y="0"/>
+          <a:ext cx="0" cy="0"/>
+          <a:chOff x="0" y="0"/>
+          <a:chExt cx="0" cy="0"/>
+        </a:xfrm>
+      </p:grpSpPr>
+      <p:sp>
+        <p:nvSpPr>
+          <p:cNvPr id="2" name="제목 1">
+            <a:extLst>
+              <a:ext uri="{FF2B5EF4-FFF2-40B4-BE49-F238E27FC236}">
+                <a16:creationId xmlns:a16="http://schemas.microsoft.com/office/drawing/2014/main" id="{0E06BF7B-6D4B-FB0E-9212-ECEA2F029AE8}"/>
+              </a:ext>
+            </a:extLst>
+          </p:cNvPr>
+          <p:cNvSpPr>
+            <a:spLocks noGrp="1"/>
+          </p:cNvSpPr>
+          <p:nvPr>
+            <p:ph type="title"/>
+          </p:nvPr>
+        </p:nvSpPr>
+        <p:spPr/>
+        <p:txBody>
+          <a:bodyPr/>
+          <a:lstStyle/>
+          <a:p>
+            <a:r>
+              <a:rPr lang="en-US" altLang="ko-KR"/>
+              <a:t>kafka</a:t>
+            </a:r>
+            <a:r>
+              <a:rPr lang="ko-KR" altLang="en-US"/>
+              <a:t> 데이터 상태 초기화</a:t>
+            </a:r>
+          </a:p>
+        </p:txBody>
+      </p:sp>
+      <p:sp>
+        <p:nvSpPr>
+          <p:cNvPr id="3" name="TextBox 2">
+            <a:extLst>
+              <a:ext uri="{FF2B5EF4-FFF2-40B4-BE49-F238E27FC236}">
+                <a16:creationId xmlns:a16="http://schemas.microsoft.com/office/drawing/2014/main" id="{A63089C4-9CA4-502C-0034-F37B8DDDD874}"/>
+              </a:ext>
+            </a:extLst>
+          </p:cNvPr>
+          <p:cNvSpPr txBox="1"/>
+          <p:nvPr/>
+        </p:nvSpPr>
+        <p:spPr>
+          <a:xfrm>
+            <a:off x="1225296" y="1865376"/>
+            <a:ext cx="9930384" cy="2462213"/>
+          </a:xfrm>
+          <a:prstGeom prst="rect">
+            <a:avLst/>
+          </a:prstGeom>
+          <a:noFill/>
+        </p:spPr>
+        <p:txBody>
+          <a:bodyPr wrap="square" rtlCol="0">
+            <a:spAutoFit/>
+          </a:bodyPr>
+          <a:lstStyle/>
+          <a:p>
+            <a:r>
+              <a:rPr lang="en-US" altLang="ko-KR" sz="1400"/>
+              <a:t>1. CLI</a:t>
+            </a:r>
+            <a:r>
+              <a:rPr lang="ko-KR" altLang="en-US" sz="1400"/>
+              <a:t>로 등록했던 </a:t>
+            </a:r>
+            <a:r>
+              <a:rPr lang="en-US" altLang="ko-KR" sz="1400"/>
+              <a:t>email.send  Topic </a:t>
+            </a:r>
+            <a:r>
+              <a:rPr lang="ko-KR" altLang="en-US" sz="1400"/>
+              <a:t>삭제</a:t>
+            </a:r>
+            <a:endParaRPr lang="en-US" altLang="ko-KR" sz="1400"/>
+          </a:p>
+          <a:p>
+            <a:r>
+              <a:rPr lang="en-US" altLang="ko-KR" sz="1400"/>
+              <a:t>~kafka</a:t>
+            </a:r>
+            <a:r>
+              <a:rPr lang="ko-KR" altLang="en-US" sz="1400"/>
+              <a:t>폴더 </a:t>
+            </a:r>
+            <a:r>
+              <a:rPr lang="en-US" altLang="ko-KR" sz="1400"/>
+              <a:t>&gt; bin/kafka-topic.sh --bootstrap-server localhost:9092 --delete --topic email.send</a:t>
+            </a:r>
+          </a:p>
+          <a:p>
+            <a:r>
+              <a:rPr lang="en-US" altLang="ko-KR" sz="1400"/>
+              <a:t>2. CLI</a:t>
+            </a:r>
+            <a:r>
+              <a:rPr lang="ko-KR" altLang="en-US" sz="1400"/>
+              <a:t>로 등록했던 </a:t>
+            </a:r>
+            <a:r>
+              <a:rPr lang="en-US" altLang="ko-KR" sz="1400"/>
+              <a:t>email-send-group </a:t>
+            </a:r>
+            <a:r>
+              <a:rPr lang="ko-KR" altLang="en-US" sz="1400"/>
+              <a:t>삭제</a:t>
+            </a:r>
+            <a:endParaRPr lang="en-US" altLang="ko-KR" sz="1400"/>
+          </a:p>
+          <a:p>
+            <a:r>
+              <a:rPr lang="en-US" altLang="ko-KR" sz="1400"/>
+              <a:t>~kafka</a:t>
+            </a:r>
+            <a:r>
+              <a:rPr lang="ko-KR" altLang="en-US" sz="1400"/>
+              <a:t>폴더 </a:t>
+            </a:r>
+            <a:r>
+              <a:rPr lang="en-US" altLang="ko-KR" sz="1400"/>
+              <a:t>&gt; bin/kafka-consumer-group.sh --bootstrap-server localhost:9092 --delete --group email-send-group</a:t>
+            </a:r>
+          </a:p>
+          <a:p>
+            <a:r>
+              <a:rPr lang="en-US" altLang="ko-KR" sz="1400"/>
+              <a:t>3. topic </a:t>
+            </a:r>
+            <a:r>
+              <a:rPr lang="ko-KR" altLang="en-US" sz="1400"/>
+              <a:t>확인</a:t>
+            </a:r>
+            <a:endParaRPr lang="en-US" altLang="ko-KR" sz="1400"/>
+          </a:p>
+          <a:p>
+            <a:r>
+              <a:rPr lang="en-US" altLang="ko-KR" sz="1400"/>
+              <a:t>~kafka</a:t>
+            </a:r>
+            <a:r>
+              <a:rPr lang="ko-KR" altLang="en-US" sz="1400"/>
+              <a:t>폴더 </a:t>
+            </a:r>
+            <a:r>
+              <a:rPr lang="en-US" altLang="ko-KR" sz="1400"/>
+              <a:t>&gt; bin/kafka-topic.sh --bootstrap-service localhost:9092 --list</a:t>
+            </a:r>
+          </a:p>
+          <a:p>
+            <a:r>
+              <a:rPr lang="en-US" altLang="ko-KR" sz="1400"/>
+              <a:t>4. group </a:t>
+            </a:r>
+            <a:r>
+              <a:rPr lang="ko-KR" altLang="en-US" sz="1400"/>
+              <a:t>확인</a:t>
+            </a:r>
+            <a:endParaRPr lang="en-US" altLang="ko-KR" sz="1400"/>
+          </a:p>
+          <a:p>
+            <a:r>
+              <a:rPr lang="en-US" altLang="ko-KR" sz="1400"/>
+              <a:t>~kafka</a:t>
+            </a:r>
+            <a:r>
+              <a:rPr lang="ko-KR" altLang="en-US" sz="1400"/>
+              <a:t>폴더 </a:t>
+            </a:r>
+            <a:r>
+              <a:rPr lang="en-US" altLang="ko-KR" sz="1400"/>
+              <a:t>&gt; bin/kafka-consumer-group.sh --bootstrap-server localhost:9092 --list</a:t>
+            </a:r>
+          </a:p>
+          <a:p>
+            <a:endParaRPr lang="en-US" altLang="ko-KR" sz="1400"/>
+          </a:p>
+          <a:p>
+            <a:r>
+              <a:rPr lang="en-US" altLang="ko-KR" sz="1400"/>
+              <a:t>5. </a:t>
+            </a:r>
+            <a:r>
+              <a:rPr lang="ko-KR" altLang="en-US" sz="1400"/>
+              <a:t>다시 </a:t>
+            </a:r>
+            <a:r>
+              <a:rPr lang="en-US" altLang="ko-KR" sz="1400"/>
+              <a:t>email.send </a:t>
+            </a:r>
+            <a:r>
+              <a:rPr lang="ko-KR" altLang="en-US" sz="1400"/>
+              <a:t>토픽 생성</a:t>
+            </a:r>
+            <a:endParaRPr lang="en-US" altLang="ko-KR" sz="1400"/>
+          </a:p>
+          <a:p>
+            <a:r>
+              <a:rPr lang="en-US" altLang="ko-KR" sz="1400"/>
+              <a:t>~kafka</a:t>
+            </a:r>
+            <a:r>
+              <a:rPr lang="ko-KR" altLang="en-US" sz="1400"/>
+              <a:t>폴더 </a:t>
+            </a:r>
+            <a:r>
+              <a:rPr lang="en-US" altLang="ko-KR" sz="1400"/>
+              <a:t>&gt; bin/kafka-topic.sh --bootstrap-service localhost:9092 --create --topic email.send</a:t>
+            </a:r>
+            <a:endParaRPr lang="ko-KR" altLang="en-US" sz="1400"/>
+          </a:p>
+        </p:txBody>
+      </p:sp>
+    </p:spTree>
+    <p:extLst>
+      <p:ext uri="{BB962C8B-B14F-4D97-AF65-F5344CB8AC3E}">
+        <p14:creationId xmlns:p14="http://schemas.microsoft.com/office/powerpoint/2010/main" val="1894183946"/>
+      </p:ext>
+    </p:extLst>
+  </p:cSld>
+  <p:clrMapOvr>
+    <a:masterClrMapping/>
+  </p:clrMapOvr>
+</p:sld>
+</file>
+
+<file path=ppt/slides/slide22.xml><?xml version="1.0" encoding="utf-8"?>
+<p:sld xmlns:a="http://schemas.openxmlformats.org/drawingml/2006/main" xmlns:r="http://schemas.openxmlformats.org/officeDocument/2006/relationships" xmlns:p="http://schemas.openxmlformats.org/presentationml/2006/main">
+  <p:cSld>
+    <p:spTree>
+      <p:nvGrpSpPr>
+        <p:cNvPr id="1" name=""/>
+        <p:cNvGrpSpPr/>
+        <p:nvPr/>
+      </p:nvGrpSpPr>
+      <p:grpSpPr>
+        <a:xfrm>
+          <a:off x="0" y="0"/>
+          <a:ext cx="0" cy="0"/>
+          <a:chOff x="0" y="0"/>
+          <a:chExt cx="0" cy="0"/>
+        </a:xfrm>
+      </p:grpSpPr>
+      <p:sp>
+        <p:nvSpPr>
+          <p:cNvPr id="2" name="제목 1">
+            <a:extLst>
+              <a:ext uri="{FF2B5EF4-FFF2-40B4-BE49-F238E27FC236}">
+                <a16:creationId xmlns:a16="http://schemas.microsoft.com/office/drawing/2014/main" id="{65C90849-99A4-F348-80FA-223221BA66E1}"/>
+              </a:ext>
+            </a:extLst>
+          </p:cNvPr>
+          <p:cNvSpPr>
+            <a:spLocks noGrp="1"/>
+          </p:cNvSpPr>
+          <p:nvPr>
+            <p:ph type="title"/>
+          </p:nvPr>
+        </p:nvSpPr>
+        <p:spPr/>
+        <p:txBody>
+          <a:bodyPr/>
+          <a:lstStyle/>
+          <a:p>
+            <a:r>
+              <a:rPr lang="en-US" altLang="ko-KR"/>
+              <a:t>sendEmail </a:t>
+            </a:r>
+            <a:r>
+              <a:rPr lang="ko-KR" altLang="en-US"/>
+              <a:t>요청 전송</a:t>
+            </a:r>
+          </a:p>
+        </p:txBody>
+      </p:sp>
+      <p:pic>
+        <p:nvPicPr>
+          <p:cNvPr id="4" name="그림 3">
+            <a:extLst>
+              <a:ext uri="{FF2B5EF4-FFF2-40B4-BE49-F238E27FC236}">
+                <a16:creationId xmlns:a16="http://schemas.microsoft.com/office/drawing/2014/main" id="{8780658A-9374-3B76-BDCE-904EF23D4846}"/>
+              </a:ext>
+            </a:extLst>
+          </p:cNvPr>
+          <p:cNvPicPr>
+            <a:picLocks noChangeAspect="1"/>
+          </p:cNvPicPr>
+          <p:nvPr/>
+        </p:nvPicPr>
+        <p:blipFill>
+          <a:blip r:embed="rId2"/>
+          <a:stretch>
+            <a:fillRect/>
+          </a:stretch>
+        </p:blipFill>
+        <p:spPr>
+          <a:xfrm>
+            <a:off x="3419856" y="1860931"/>
+            <a:ext cx="4873752" cy="4619026"/>
+          </a:xfrm>
+          <a:prstGeom prst="rect">
+            <a:avLst/>
+          </a:prstGeom>
+        </p:spPr>
+      </p:pic>
+      <p:pic>
+        <p:nvPicPr>
+          <p:cNvPr id="6" name="그림 5">
+            <a:extLst>
+              <a:ext uri="{FF2B5EF4-FFF2-40B4-BE49-F238E27FC236}">
+                <a16:creationId xmlns:a16="http://schemas.microsoft.com/office/drawing/2014/main" id="{611DA15C-8714-B221-93F5-6197FB75AE46}"/>
+              </a:ext>
+            </a:extLst>
+          </p:cNvPr>
+          <p:cNvPicPr>
+            <a:picLocks noChangeAspect="1"/>
+          </p:cNvPicPr>
+          <p:nvPr/>
+        </p:nvPicPr>
+        <p:blipFill>
+          <a:blip r:embed="rId3"/>
+          <a:stretch>
+            <a:fillRect/>
+          </a:stretch>
+        </p:blipFill>
+        <p:spPr>
+          <a:xfrm>
+            <a:off x="102108" y="4462394"/>
+            <a:ext cx="11719560" cy="466223"/>
+          </a:xfrm>
+          <a:prstGeom prst="rect">
+            <a:avLst/>
+          </a:prstGeom>
+        </p:spPr>
+      </p:pic>
+    </p:spTree>
+    <p:extLst>
+      <p:ext uri="{BB962C8B-B14F-4D97-AF65-F5344CB8AC3E}">
+        <p14:creationId xmlns:p14="http://schemas.microsoft.com/office/powerpoint/2010/main" val="3500754530"/>
       </p:ext>
     </p:extLst>
   </p:cSld>

--- a/ppt/2.Kafka 기본 개념.pptx
+++ b/ppt/2.Kafka 기본 개념.pptx
@@ -27,6 +27,13 @@
     <p:sldId id="276" r:id="rId21"/>
     <p:sldId id="277" r:id="rId22"/>
     <p:sldId id="278" r:id="rId23"/>
+    <p:sldId id="279" r:id="rId24"/>
+    <p:sldId id="280" r:id="rId25"/>
+    <p:sldId id="281" r:id="rId26"/>
+    <p:sldId id="283" r:id="rId27"/>
+    <p:sldId id="282" r:id="rId28"/>
+    <p:sldId id="284" r:id="rId29"/>
+    <p:sldId id="285" r:id="rId30"/>
   </p:sldIdLst>
   <p:sldSz cx="12192000" cy="6858000"/>
   <p:notesSz cx="7105650" cy="10236200"/>
@@ -162,7 +169,7 @@
             <p14:sldId id="269"/>
           </p14:sldIdLst>
         </p14:section>
-        <p14:section name="SpringBoot(Producer) 작성" id="{854DDE63-1510-455A-8AA0-BFC4AD822F67}">
+        <p14:section name="SpringBoot(Producer) 서버작성" id="{854DDE63-1510-455A-8AA0-BFC4AD822F67}">
           <p14:sldIdLst>
             <p14:sldId id="271"/>
             <p14:sldId id="272"/>
@@ -176,6 +183,21 @@
           <p14:sldIdLst>
             <p14:sldId id="277"/>
             <p14:sldId id="278"/>
+          </p14:sldIdLst>
+        </p14:section>
+        <p14:section name="SpringBoot(Consumer) 서버 작성" id="{9573E626-26AA-4DD8-BE43-A6E4F45FC735}">
+          <p14:sldIdLst>
+            <p14:sldId id="279"/>
+            <p14:sldId id="280"/>
+            <p14:sldId id="281"/>
+            <p14:sldId id="283"/>
+            <p14:sldId id="282"/>
+          </p14:sldIdLst>
+        </p14:section>
+        <p14:section name="Kafka 비동기 처리인한 이점 느껴보기" id="{AF27D742-4D25-4E61-A650-721198C85C19}">
+          <p14:sldIdLst>
+            <p14:sldId id="284"/>
+            <p14:sldId id="285"/>
           </p14:sldIdLst>
         </p14:section>
       </p14:sectionLst>
@@ -14701,6 +14723,5912 @@
     <p:extLst>
       <p:ext uri="{BB962C8B-B14F-4D97-AF65-F5344CB8AC3E}">
         <p14:creationId xmlns:p14="http://schemas.microsoft.com/office/powerpoint/2010/main" val="3500754530"/>
+      </p:ext>
+    </p:extLst>
+  </p:cSld>
+  <p:clrMapOvr>
+    <a:masterClrMapping/>
+  </p:clrMapOvr>
+</p:sld>
+</file>
+
+<file path=ppt/slides/slide23.xml><?xml version="1.0" encoding="utf-8"?>
+<p:sld xmlns:a="http://schemas.openxmlformats.org/drawingml/2006/main" xmlns:r="http://schemas.openxmlformats.org/officeDocument/2006/relationships" xmlns:p="http://schemas.openxmlformats.org/presentationml/2006/main">
+  <p:cSld>
+    <p:spTree>
+      <p:nvGrpSpPr>
+        <p:cNvPr id="1" name=""/>
+        <p:cNvGrpSpPr/>
+        <p:nvPr/>
+      </p:nvGrpSpPr>
+      <p:grpSpPr>
+        <a:xfrm>
+          <a:off x="0" y="0"/>
+          <a:ext cx="0" cy="0"/>
+          <a:chOff x="0" y="0"/>
+          <a:chExt cx="0" cy="0"/>
+        </a:xfrm>
+      </p:grpSpPr>
+      <p:sp>
+        <p:nvSpPr>
+          <p:cNvPr id="2" name="제목 1">
+            <a:extLst>
+              <a:ext uri="{FF2B5EF4-FFF2-40B4-BE49-F238E27FC236}">
+                <a16:creationId xmlns:a16="http://schemas.microsoft.com/office/drawing/2014/main" id="{4F4F9DD2-C592-1D93-38E2-ABDD2CB5D13E}"/>
+              </a:ext>
+            </a:extLst>
+          </p:cNvPr>
+          <p:cNvSpPr>
+            <a:spLocks noGrp="1"/>
+          </p:cNvSpPr>
+          <p:nvPr>
+            <p:ph type="title"/>
+          </p:nvPr>
+        </p:nvSpPr>
+        <p:spPr/>
+        <p:txBody>
+          <a:bodyPr>
+            <a:normAutofit/>
+          </a:bodyPr>
+          <a:lstStyle/>
+          <a:p>
+            <a:r>
+              <a:rPr lang="en-US" altLang="ko-KR" sz="4000"/>
+              <a:t>Kafka Consumer</a:t>
+            </a:r>
+            <a:r>
+              <a:rPr lang="ko-KR" altLang="en-US" sz="4000"/>
+              <a:t> 서버 애플리케이션 생성</a:t>
+            </a:r>
+          </a:p>
+        </p:txBody>
+      </p:sp>
+      <p:pic>
+        <p:nvPicPr>
+          <p:cNvPr id="6" name="그림 5">
+            <a:extLst>
+              <a:ext uri="{FF2B5EF4-FFF2-40B4-BE49-F238E27FC236}">
+                <a16:creationId xmlns:a16="http://schemas.microsoft.com/office/drawing/2014/main" id="{E50A446F-4160-7187-F6AF-8BDB2329B98D}"/>
+              </a:ext>
+            </a:extLst>
+          </p:cNvPr>
+          <p:cNvPicPr>
+            <a:picLocks noChangeAspect="1"/>
+          </p:cNvPicPr>
+          <p:nvPr/>
+        </p:nvPicPr>
+        <p:blipFill>
+          <a:blip r:embed="rId2"/>
+          <a:stretch>
+            <a:fillRect/>
+          </a:stretch>
+        </p:blipFill>
+        <p:spPr>
+          <a:xfrm>
+            <a:off x="1706236" y="1866308"/>
+            <a:ext cx="8535044" cy="4863676"/>
+          </a:xfrm>
+          <a:prstGeom prst="rect">
+            <a:avLst/>
+          </a:prstGeom>
+          <a:ln>
+            <a:solidFill>
+              <a:schemeClr val="tx1"/>
+            </a:solidFill>
+          </a:ln>
+        </p:spPr>
+      </p:pic>
+    </p:spTree>
+    <p:extLst>
+      <p:ext uri="{BB962C8B-B14F-4D97-AF65-F5344CB8AC3E}">
+        <p14:creationId xmlns:p14="http://schemas.microsoft.com/office/powerpoint/2010/main" val="1750388459"/>
+      </p:ext>
+    </p:extLst>
+  </p:cSld>
+  <p:clrMapOvr>
+    <a:masterClrMapping/>
+  </p:clrMapOvr>
+</p:sld>
+</file>
+
+<file path=ppt/slides/slide24.xml><?xml version="1.0" encoding="utf-8"?>
+<p:sld xmlns:a="http://schemas.openxmlformats.org/drawingml/2006/main" xmlns:r="http://schemas.openxmlformats.org/officeDocument/2006/relationships" xmlns:p="http://schemas.openxmlformats.org/presentationml/2006/main">
+  <p:cSld>
+    <p:spTree>
+      <p:nvGrpSpPr>
+        <p:cNvPr id="1" name=""/>
+        <p:cNvGrpSpPr/>
+        <p:nvPr/>
+      </p:nvGrpSpPr>
+      <p:grpSpPr>
+        <a:xfrm>
+          <a:off x="0" y="0"/>
+          <a:ext cx="0" cy="0"/>
+          <a:chOff x="0" y="0"/>
+          <a:chExt cx="0" cy="0"/>
+        </a:xfrm>
+      </p:grpSpPr>
+      <p:sp>
+        <p:nvSpPr>
+          <p:cNvPr id="2" name="제목 1">
+            <a:extLst>
+              <a:ext uri="{FF2B5EF4-FFF2-40B4-BE49-F238E27FC236}">
+                <a16:creationId xmlns:a16="http://schemas.microsoft.com/office/drawing/2014/main" id="{CE2BBFEF-9735-8B32-13BD-175E7AA68D78}"/>
+              </a:ext>
+            </a:extLst>
+          </p:cNvPr>
+          <p:cNvSpPr>
+            <a:spLocks noGrp="1"/>
+          </p:cNvSpPr>
+          <p:nvPr>
+            <p:ph type="title"/>
+          </p:nvPr>
+        </p:nvSpPr>
+        <p:spPr/>
+        <p:txBody>
+          <a:bodyPr/>
+          <a:lstStyle/>
+          <a:p>
+            <a:r>
+              <a:rPr lang="en-US" altLang="ko-KR"/>
+              <a:t>application.yml kafka </a:t>
+            </a:r>
+            <a:r>
+              <a:rPr lang="ko-KR" altLang="en-US"/>
+              <a:t>설정</a:t>
+            </a:r>
+          </a:p>
+        </p:txBody>
+      </p:sp>
+      <p:sp>
+        <p:nvSpPr>
+          <p:cNvPr id="4" name="TextBox 3">
+            <a:extLst>
+              <a:ext uri="{FF2B5EF4-FFF2-40B4-BE49-F238E27FC236}">
+                <a16:creationId xmlns:a16="http://schemas.microsoft.com/office/drawing/2014/main" id="{CBF0F3CB-9249-633D-9271-958BB67BBEDC}"/>
+              </a:ext>
+            </a:extLst>
+          </p:cNvPr>
+          <p:cNvSpPr txBox="1"/>
+          <p:nvPr/>
+        </p:nvSpPr>
+        <p:spPr>
+          <a:xfrm>
+            <a:off x="3412998" y="1944211"/>
+            <a:ext cx="7742682" cy="2766078"/>
+          </a:xfrm>
+          <a:prstGeom prst="rect">
+            <a:avLst/>
+          </a:prstGeom>
+          <a:solidFill>
+            <a:schemeClr val="tx1"/>
+          </a:solidFill>
+        </p:spPr>
+        <p:txBody>
+          <a:bodyPr wrap="square">
+            <a:spAutoFit/>
+          </a:bodyPr>
+          <a:lstStyle/>
+          <a:p>
+            <a:pPr>
+              <a:lnSpc>
+                <a:spcPts val="1425"/>
+              </a:lnSpc>
+              <a:buNone/>
+            </a:pPr>
+            <a:r>
+              <a:rPr lang="en-US" altLang="ko-KR" sz="1000" b="0">
+                <a:solidFill>
+                  <a:srgbClr val="7EE787"/>
+                </a:solidFill>
+                <a:effectLst/>
+                <a:latin typeface="Consolas" panose="020B0609020204030204" pitchFamily="49" charset="0"/>
+              </a:rPr>
+              <a:t>server</a:t>
+            </a:r>
+            <a:r>
+              <a:rPr lang="en-US" altLang="ko-KR" sz="1000" b="0">
+                <a:solidFill>
+                  <a:srgbClr val="BBBEBF"/>
+                </a:solidFill>
+                <a:effectLst/>
+                <a:latin typeface="Consolas" panose="020B0609020204030204" pitchFamily="49" charset="0"/>
+              </a:rPr>
+              <a:t>:</a:t>
+            </a:r>
+          </a:p>
+          <a:p>
+            <a:pPr>
+              <a:lnSpc>
+                <a:spcPts val="1425"/>
+              </a:lnSpc>
+              <a:buNone/>
+            </a:pPr>
+            <a:r>
+              <a:rPr lang="en-US" altLang="ko-KR" sz="1000" b="0">
+                <a:solidFill>
+                  <a:srgbClr val="BBBEBF"/>
+                </a:solidFill>
+                <a:effectLst/>
+                <a:latin typeface="Consolas" panose="020B0609020204030204" pitchFamily="49" charset="0"/>
+              </a:rPr>
+              <a:t>  </a:t>
+            </a:r>
+            <a:r>
+              <a:rPr lang="en-US" altLang="ko-KR" sz="1000" b="0">
+                <a:solidFill>
+                  <a:srgbClr val="7EE787"/>
+                </a:solidFill>
+                <a:effectLst/>
+                <a:latin typeface="Consolas" panose="020B0609020204030204" pitchFamily="49" charset="0"/>
+              </a:rPr>
+              <a:t>port</a:t>
+            </a:r>
+            <a:r>
+              <a:rPr lang="en-US" altLang="ko-KR" sz="1000" b="0">
+                <a:solidFill>
+                  <a:srgbClr val="BBBEBF"/>
+                </a:solidFill>
+                <a:effectLst/>
+                <a:latin typeface="Consolas" panose="020B0609020204030204" pitchFamily="49" charset="0"/>
+              </a:rPr>
+              <a:t>: </a:t>
+            </a:r>
+            <a:r>
+              <a:rPr lang="en-US" altLang="ko-KR" sz="1000" b="0">
+                <a:solidFill>
+                  <a:srgbClr val="B5CEA8"/>
+                </a:solidFill>
+                <a:effectLst/>
+                <a:latin typeface="Consolas" panose="020B0609020204030204" pitchFamily="49" charset="0"/>
+              </a:rPr>
+              <a:t>0</a:t>
+            </a:r>
+            <a:endParaRPr lang="en-US" altLang="ko-KR" sz="1000" b="0">
+              <a:solidFill>
+                <a:srgbClr val="BBBEBF"/>
+              </a:solidFill>
+              <a:effectLst/>
+              <a:latin typeface="Consolas" panose="020B0609020204030204" pitchFamily="49" charset="0"/>
+            </a:endParaRPr>
+          </a:p>
+          <a:p>
+            <a:pPr>
+              <a:lnSpc>
+                <a:spcPts val="1425"/>
+              </a:lnSpc>
+              <a:buNone/>
+            </a:pPr>
+            <a:br>
+              <a:rPr lang="en-US" altLang="ko-KR" sz="1000" b="0">
+                <a:solidFill>
+                  <a:srgbClr val="BBBEBF"/>
+                </a:solidFill>
+                <a:effectLst/>
+                <a:latin typeface="Consolas" panose="020B0609020204030204" pitchFamily="49" charset="0"/>
+              </a:rPr>
+            </a:br>
+            <a:endParaRPr lang="en-US" altLang="ko-KR" sz="1000" b="0">
+              <a:solidFill>
+                <a:srgbClr val="BBBEBF"/>
+              </a:solidFill>
+              <a:effectLst/>
+              <a:latin typeface="Consolas" panose="020B0609020204030204" pitchFamily="49" charset="0"/>
+            </a:endParaRPr>
+          </a:p>
+          <a:p>
+            <a:pPr>
+              <a:lnSpc>
+                <a:spcPts val="1425"/>
+              </a:lnSpc>
+              <a:buNone/>
+            </a:pPr>
+            <a:r>
+              <a:rPr lang="en-US" altLang="ko-KR" sz="1000" b="0">
+                <a:solidFill>
+                  <a:srgbClr val="7EE787"/>
+                </a:solidFill>
+                <a:effectLst/>
+                <a:latin typeface="Consolas" panose="020B0609020204030204" pitchFamily="49" charset="0"/>
+              </a:rPr>
+              <a:t>spring</a:t>
+            </a:r>
+            <a:r>
+              <a:rPr lang="en-US" altLang="ko-KR" sz="1000" b="0">
+                <a:solidFill>
+                  <a:srgbClr val="BBBEBF"/>
+                </a:solidFill>
+                <a:effectLst/>
+                <a:latin typeface="Consolas" panose="020B0609020204030204" pitchFamily="49" charset="0"/>
+              </a:rPr>
+              <a:t>:</a:t>
+            </a:r>
+          </a:p>
+          <a:p>
+            <a:pPr>
+              <a:lnSpc>
+                <a:spcPts val="1425"/>
+              </a:lnSpc>
+              <a:buNone/>
+            </a:pPr>
+            <a:r>
+              <a:rPr lang="en-US" altLang="ko-KR" sz="1000" b="0">
+                <a:solidFill>
+                  <a:srgbClr val="BBBEBF"/>
+                </a:solidFill>
+                <a:effectLst/>
+                <a:latin typeface="Consolas" panose="020B0609020204030204" pitchFamily="49" charset="0"/>
+              </a:rPr>
+              <a:t>  </a:t>
+            </a:r>
+            <a:r>
+              <a:rPr lang="en-US" altLang="ko-KR" sz="1000" b="0">
+                <a:solidFill>
+                  <a:srgbClr val="7EE787"/>
+                </a:solidFill>
+                <a:effectLst/>
+                <a:latin typeface="Consolas" panose="020B0609020204030204" pitchFamily="49" charset="0"/>
+              </a:rPr>
+              <a:t>application</a:t>
+            </a:r>
+            <a:r>
+              <a:rPr lang="en-US" altLang="ko-KR" sz="1000" b="0">
+                <a:solidFill>
+                  <a:srgbClr val="BBBEBF"/>
+                </a:solidFill>
+                <a:effectLst/>
+                <a:latin typeface="Consolas" panose="020B0609020204030204" pitchFamily="49" charset="0"/>
+              </a:rPr>
+              <a:t>:</a:t>
+            </a:r>
+          </a:p>
+          <a:p>
+            <a:pPr>
+              <a:lnSpc>
+                <a:spcPts val="1425"/>
+              </a:lnSpc>
+              <a:buNone/>
+            </a:pPr>
+            <a:r>
+              <a:rPr lang="en-US" altLang="ko-KR" sz="1000" b="0">
+                <a:solidFill>
+                  <a:srgbClr val="BBBEBF"/>
+                </a:solidFill>
+                <a:effectLst/>
+                <a:latin typeface="Consolas" panose="020B0609020204030204" pitchFamily="49" charset="0"/>
+              </a:rPr>
+              <a:t>    </a:t>
+            </a:r>
+            <a:r>
+              <a:rPr lang="en-US" altLang="ko-KR" sz="1000" b="0">
+                <a:solidFill>
+                  <a:srgbClr val="7EE787"/>
+                </a:solidFill>
+                <a:effectLst/>
+                <a:latin typeface="Consolas" panose="020B0609020204030204" pitchFamily="49" charset="0"/>
+              </a:rPr>
+              <a:t>name</a:t>
+            </a:r>
+            <a:r>
+              <a:rPr lang="en-US" altLang="ko-KR" sz="1000" b="0">
+                <a:solidFill>
+                  <a:srgbClr val="BBBEBF"/>
+                </a:solidFill>
+                <a:effectLst/>
+                <a:latin typeface="Consolas" panose="020B0609020204030204" pitchFamily="49" charset="0"/>
+              </a:rPr>
+              <a:t>: </a:t>
+            </a:r>
+            <a:r>
+              <a:rPr lang="en-US" altLang="ko-KR" sz="1000" b="0">
+                <a:solidFill>
+                  <a:srgbClr val="A5D6FF"/>
+                </a:solidFill>
+                <a:effectLst/>
+                <a:latin typeface="Consolas" panose="020B0609020204030204" pitchFamily="49" charset="0"/>
+              </a:rPr>
+              <a:t>email-send-consumer</a:t>
+            </a:r>
+            <a:endParaRPr lang="en-US" altLang="ko-KR" sz="1000" b="0">
+              <a:solidFill>
+                <a:srgbClr val="BBBEBF"/>
+              </a:solidFill>
+              <a:effectLst/>
+              <a:latin typeface="Consolas" panose="020B0609020204030204" pitchFamily="49" charset="0"/>
+            </a:endParaRPr>
+          </a:p>
+          <a:p>
+            <a:pPr>
+              <a:lnSpc>
+                <a:spcPts val="1425"/>
+              </a:lnSpc>
+              <a:buNone/>
+            </a:pPr>
+            <a:r>
+              <a:rPr lang="en-US" altLang="ko-KR" sz="1000" b="0">
+                <a:solidFill>
+                  <a:srgbClr val="BBBEBF"/>
+                </a:solidFill>
+                <a:effectLst/>
+                <a:latin typeface="Consolas" panose="020B0609020204030204" pitchFamily="49" charset="0"/>
+              </a:rPr>
+              <a:t>  </a:t>
+            </a:r>
+            <a:r>
+              <a:rPr lang="en-US" altLang="ko-KR" sz="1000" b="0">
+                <a:solidFill>
+                  <a:srgbClr val="7EE787"/>
+                </a:solidFill>
+                <a:effectLst/>
+                <a:latin typeface="Consolas" panose="020B0609020204030204" pitchFamily="49" charset="0"/>
+              </a:rPr>
+              <a:t>kafka</a:t>
+            </a:r>
+            <a:r>
+              <a:rPr lang="en-US" altLang="ko-KR" sz="1000" b="0">
+                <a:solidFill>
+                  <a:srgbClr val="BBBEBF"/>
+                </a:solidFill>
+                <a:effectLst/>
+                <a:latin typeface="Consolas" panose="020B0609020204030204" pitchFamily="49" charset="0"/>
+              </a:rPr>
+              <a:t>:</a:t>
+            </a:r>
+          </a:p>
+          <a:p>
+            <a:pPr>
+              <a:lnSpc>
+                <a:spcPts val="1425"/>
+              </a:lnSpc>
+              <a:buNone/>
+            </a:pPr>
+            <a:r>
+              <a:rPr lang="en-US" altLang="ko-KR" sz="1000" b="0">
+                <a:solidFill>
+                  <a:srgbClr val="BBBEBF"/>
+                </a:solidFill>
+                <a:effectLst/>
+                <a:latin typeface="Consolas" panose="020B0609020204030204" pitchFamily="49" charset="0"/>
+              </a:rPr>
+              <a:t>    </a:t>
+            </a:r>
+            <a:r>
+              <a:rPr lang="en-US" altLang="ko-KR" sz="1000" b="0">
+                <a:solidFill>
+                  <a:srgbClr val="7EE787"/>
+                </a:solidFill>
+                <a:effectLst/>
+                <a:latin typeface="Consolas" panose="020B0609020204030204" pitchFamily="49" charset="0"/>
+              </a:rPr>
+              <a:t>bootstrap-servers</a:t>
+            </a:r>
+            <a:r>
+              <a:rPr lang="en-US" altLang="ko-KR" sz="1000" b="0">
+                <a:solidFill>
+                  <a:srgbClr val="BBBEBF"/>
+                </a:solidFill>
+                <a:effectLst/>
+                <a:latin typeface="Consolas" panose="020B0609020204030204" pitchFamily="49" charset="0"/>
+              </a:rPr>
+              <a:t>: </a:t>
+            </a:r>
+            <a:r>
+              <a:rPr lang="en-US" altLang="ko-KR" sz="1000" b="0">
+                <a:solidFill>
+                  <a:srgbClr val="A5D6FF"/>
+                </a:solidFill>
+                <a:effectLst/>
+                <a:latin typeface="Consolas" panose="020B0609020204030204" pitchFamily="49" charset="0"/>
+              </a:rPr>
+              <a:t>43.200.183.198:9092</a:t>
+            </a:r>
+            <a:endParaRPr lang="en-US" altLang="ko-KR" sz="1000" b="0">
+              <a:solidFill>
+                <a:srgbClr val="BBBEBF"/>
+              </a:solidFill>
+              <a:effectLst/>
+              <a:latin typeface="Consolas" panose="020B0609020204030204" pitchFamily="49" charset="0"/>
+            </a:endParaRPr>
+          </a:p>
+          <a:p>
+            <a:pPr>
+              <a:lnSpc>
+                <a:spcPts val="1425"/>
+              </a:lnSpc>
+              <a:buNone/>
+            </a:pPr>
+            <a:r>
+              <a:rPr lang="en-US" altLang="ko-KR" sz="1000" b="0">
+                <a:solidFill>
+                  <a:srgbClr val="BBBEBF"/>
+                </a:solidFill>
+                <a:effectLst/>
+                <a:latin typeface="Consolas" panose="020B0609020204030204" pitchFamily="49" charset="0"/>
+              </a:rPr>
+              <a:t>    </a:t>
+            </a:r>
+            <a:r>
+              <a:rPr lang="en-US" altLang="ko-KR" sz="1000" b="0">
+                <a:solidFill>
+                  <a:srgbClr val="7EE787"/>
+                </a:solidFill>
+                <a:effectLst/>
+                <a:latin typeface="Consolas" panose="020B0609020204030204" pitchFamily="49" charset="0"/>
+              </a:rPr>
+              <a:t>consumer</a:t>
+            </a:r>
+            <a:r>
+              <a:rPr lang="en-US" altLang="ko-KR" sz="1000" b="0">
+                <a:solidFill>
+                  <a:srgbClr val="BBBEBF"/>
+                </a:solidFill>
+                <a:effectLst/>
+                <a:latin typeface="Consolas" panose="020B0609020204030204" pitchFamily="49" charset="0"/>
+              </a:rPr>
+              <a:t>:</a:t>
+            </a:r>
+          </a:p>
+          <a:p>
+            <a:pPr>
+              <a:lnSpc>
+                <a:spcPts val="1425"/>
+              </a:lnSpc>
+              <a:buNone/>
+            </a:pPr>
+            <a:r>
+              <a:rPr lang="en-US" altLang="ko-KR" sz="1000" b="0">
+                <a:solidFill>
+                  <a:srgbClr val="BBBEBF"/>
+                </a:solidFill>
+                <a:effectLst/>
+                <a:latin typeface="Consolas" panose="020B0609020204030204" pitchFamily="49" charset="0"/>
+              </a:rPr>
+              <a:t>      </a:t>
+            </a:r>
+            <a:r>
+              <a:rPr lang="en-US" altLang="ko-KR" sz="1000" b="0">
+                <a:solidFill>
+                  <a:srgbClr val="7EE787"/>
+                </a:solidFill>
+                <a:effectLst/>
+                <a:latin typeface="Consolas" panose="020B0609020204030204" pitchFamily="49" charset="0"/>
+              </a:rPr>
+              <a:t>key-deserializer</a:t>
+            </a:r>
+            <a:r>
+              <a:rPr lang="en-US" altLang="ko-KR" sz="1000" b="0">
+                <a:solidFill>
+                  <a:srgbClr val="BBBEBF"/>
+                </a:solidFill>
+                <a:effectLst/>
+                <a:latin typeface="Consolas" panose="020B0609020204030204" pitchFamily="49" charset="0"/>
+              </a:rPr>
+              <a:t>: </a:t>
+            </a:r>
+            <a:r>
+              <a:rPr lang="en-US" altLang="ko-KR" sz="1000" b="0">
+                <a:solidFill>
+                  <a:srgbClr val="A5D6FF"/>
+                </a:solidFill>
+                <a:effectLst/>
+                <a:latin typeface="Consolas" panose="020B0609020204030204" pitchFamily="49" charset="0"/>
+              </a:rPr>
+              <a:t>org.apache.kafka.common.serialization.StringDeserializer</a:t>
+            </a:r>
+            <a:endParaRPr lang="en-US" altLang="ko-KR" sz="1000" b="0">
+              <a:solidFill>
+                <a:srgbClr val="BBBEBF"/>
+              </a:solidFill>
+              <a:effectLst/>
+              <a:latin typeface="Consolas" panose="020B0609020204030204" pitchFamily="49" charset="0"/>
+            </a:endParaRPr>
+          </a:p>
+          <a:p>
+            <a:pPr>
+              <a:lnSpc>
+                <a:spcPts val="1425"/>
+              </a:lnSpc>
+              <a:buNone/>
+            </a:pPr>
+            <a:r>
+              <a:rPr lang="en-US" altLang="ko-KR" sz="1000" b="0">
+                <a:solidFill>
+                  <a:srgbClr val="BBBEBF"/>
+                </a:solidFill>
+                <a:effectLst/>
+                <a:latin typeface="Consolas" panose="020B0609020204030204" pitchFamily="49" charset="0"/>
+              </a:rPr>
+              <a:t>      </a:t>
+            </a:r>
+            <a:r>
+              <a:rPr lang="en-US" altLang="ko-KR" sz="1000" b="0">
+                <a:solidFill>
+                  <a:srgbClr val="7EE787"/>
+                </a:solidFill>
+                <a:effectLst/>
+                <a:latin typeface="Consolas" panose="020B0609020204030204" pitchFamily="49" charset="0"/>
+              </a:rPr>
+              <a:t>value-deserializer</a:t>
+            </a:r>
+            <a:r>
+              <a:rPr lang="en-US" altLang="ko-KR" sz="1000" b="0">
+                <a:solidFill>
+                  <a:srgbClr val="BBBEBF"/>
+                </a:solidFill>
+                <a:effectLst/>
+                <a:latin typeface="Consolas" panose="020B0609020204030204" pitchFamily="49" charset="0"/>
+              </a:rPr>
+              <a:t>: </a:t>
+            </a:r>
+            <a:r>
+              <a:rPr lang="en-US" altLang="ko-KR" sz="1000" b="0">
+                <a:solidFill>
+                  <a:srgbClr val="A5D6FF"/>
+                </a:solidFill>
+                <a:effectLst/>
+                <a:latin typeface="Consolas" panose="020B0609020204030204" pitchFamily="49" charset="0"/>
+              </a:rPr>
+              <a:t>org.apache.kafka.common.serialization.StringDeserializer</a:t>
+            </a:r>
+            <a:endParaRPr lang="en-US" altLang="ko-KR" sz="1000" b="0">
+              <a:solidFill>
+                <a:srgbClr val="BBBEBF"/>
+              </a:solidFill>
+              <a:effectLst/>
+              <a:latin typeface="Consolas" panose="020B0609020204030204" pitchFamily="49" charset="0"/>
+            </a:endParaRPr>
+          </a:p>
+          <a:p>
+            <a:pPr>
+              <a:lnSpc>
+                <a:spcPts val="1425"/>
+              </a:lnSpc>
+              <a:buNone/>
+            </a:pPr>
+            <a:br>
+              <a:rPr lang="en-US" altLang="ko-KR" sz="1000" b="0">
+                <a:solidFill>
+                  <a:srgbClr val="BBBEBF"/>
+                </a:solidFill>
+                <a:effectLst/>
+                <a:latin typeface="Consolas" panose="020B0609020204030204" pitchFamily="49" charset="0"/>
+              </a:rPr>
+            </a:br>
+            <a:endParaRPr lang="en-US" altLang="ko-KR" sz="1000" b="0">
+              <a:solidFill>
+                <a:srgbClr val="BBBEBF"/>
+              </a:solidFill>
+              <a:effectLst/>
+              <a:latin typeface="Consolas" panose="020B0609020204030204" pitchFamily="49" charset="0"/>
+            </a:endParaRPr>
+          </a:p>
+          <a:p>
+            <a:pPr>
+              <a:lnSpc>
+                <a:spcPts val="1425"/>
+              </a:lnSpc>
+              <a:buNone/>
+            </a:pPr>
+            <a:r>
+              <a:rPr lang="en-US" altLang="ko-KR" sz="1000" b="0">
+                <a:solidFill>
+                  <a:srgbClr val="BBBEBF"/>
+                </a:solidFill>
+                <a:effectLst/>
+                <a:latin typeface="Consolas" panose="020B0609020204030204" pitchFamily="49" charset="0"/>
+              </a:rPr>
+              <a:t>      </a:t>
+            </a:r>
+            <a:r>
+              <a:rPr lang="en-US" altLang="ko-KR" sz="1000" b="0">
+                <a:solidFill>
+                  <a:srgbClr val="7EE787"/>
+                </a:solidFill>
+                <a:effectLst/>
+                <a:latin typeface="Consolas" panose="020B0609020204030204" pitchFamily="49" charset="0"/>
+              </a:rPr>
+              <a:t>auto-offset-reset</a:t>
+            </a:r>
+            <a:r>
+              <a:rPr lang="en-US" altLang="ko-KR" sz="1000" b="0">
+                <a:solidFill>
+                  <a:srgbClr val="BBBEBF"/>
+                </a:solidFill>
+                <a:effectLst/>
+                <a:latin typeface="Consolas" panose="020B0609020204030204" pitchFamily="49" charset="0"/>
+              </a:rPr>
+              <a:t>: </a:t>
+            </a:r>
+            <a:r>
+              <a:rPr lang="en-US" altLang="ko-KR" sz="1000" b="0">
+                <a:solidFill>
+                  <a:srgbClr val="A5D6FF"/>
+                </a:solidFill>
+                <a:effectLst/>
+                <a:latin typeface="Consolas" panose="020B0609020204030204" pitchFamily="49" charset="0"/>
+              </a:rPr>
+              <a:t>earliest</a:t>
+            </a:r>
+            <a:r>
+              <a:rPr lang="en-US" altLang="ko-KR" sz="1000" b="0">
+                <a:solidFill>
+                  <a:srgbClr val="BBBEBF"/>
+                </a:solidFill>
+                <a:effectLst/>
+                <a:latin typeface="Consolas" panose="020B0609020204030204" pitchFamily="49" charset="0"/>
+              </a:rPr>
+              <a:t>  </a:t>
+            </a:r>
+            <a:r>
+              <a:rPr lang="en-US" altLang="ko-KR" sz="1000" b="0">
+                <a:solidFill>
+                  <a:srgbClr val="8B949E"/>
+                </a:solidFill>
+                <a:effectLst/>
+                <a:latin typeface="Consolas" panose="020B0609020204030204" pitchFamily="49" charset="0"/>
+              </a:rPr>
+              <a:t># </a:t>
+            </a:r>
+            <a:r>
+              <a:rPr lang="ko-KR" altLang="en-US" sz="1000" b="0">
+                <a:solidFill>
+                  <a:srgbClr val="8B949E"/>
+                </a:solidFill>
+                <a:effectLst/>
+                <a:latin typeface="Consolas" panose="020B0609020204030204" pitchFamily="49" charset="0"/>
+              </a:rPr>
+              <a:t>컨슈머 그룹이 없으면 컨슈머 그룹 직접 생성 및 </a:t>
+            </a:r>
+            <a:r>
+              <a:rPr lang="en-US" altLang="ko-KR" sz="1000" b="0">
+                <a:solidFill>
+                  <a:srgbClr val="8B949E"/>
+                </a:solidFill>
+                <a:effectLst/>
+                <a:latin typeface="Consolas" panose="020B0609020204030204" pitchFamily="49" charset="0"/>
+              </a:rPr>
+              <a:t>--from-beginning </a:t>
+            </a:r>
+            <a:r>
+              <a:rPr lang="ko-KR" altLang="en-US" sz="1000" b="0">
+                <a:solidFill>
+                  <a:srgbClr val="8B949E"/>
+                </a:solidFill>
+                <a:effectLst/>
+                <a:latin typeface="Consolas" panose="020B0609020204030204" pitchFamily="49" charset="0"/>
+              </a:rPr>
+              <a:t>옵션 실행</a:t>
+            </a:r>
+            <a:endParaRPr lang="ko-KR" altLang="en-US" sz="1000" b="0">
+              <a:solidFill>
+                <a:srgbClr val="BBBEBF"/>
+              </a:solidFill>
+              <a:effectLst/>
+              <a:latin typeface="Consolas" panose="020B0609020204030204" pitchFamily="49" charset="0"/>
+            </a:endParaRPr>
+          </a:p>
+        </p:txBody>
+      </p:sp>
+      <p:pic>
+        <p:nvPicPr>
+          <p:cNvPr id="6" name="그림 5">
+            <a:extLst>
+              <a:ext uri="{FF2B5EF4-FFF2-40B4-BE49-F238E27FC236}">
+                <a16:creationId xmlns:a16="http://schemas.microsoft.com/office/drawing/2014/main" id="{000DFC3B-6714-E2E0-9586-12DC654C2E79}"/>
+              </a:ext>
+            </a:extLst>
+          </p:cNvPr>
+          <p:cNvPicPr>
+            <a:picLocks noChangeAspect="1"/>
+          </p:cNvPicPr>
+          <p:nvPr/>
+        </p:nvPicPr>
+        <p:blipFill>
+          <a:blip r:embed="rId2"/>
+          <a:stretch>
+            <a:fillRect/>
+          </a:stretch>
+        </p:blipFill>
+        <p:spPr>
+          <a:xfrm>
+            <a:off x="737425" y="1944211"/>
+            <a:ext cx="2545272" cy="4913789"/>
+          </a:xfrm>
+          <a:prstGeom prst="rect">
+            <a:avLst/>
+          </a:prstGeom>
+        </p:spPr>
+      </p:pic>
+      <p:sp>
+        <p:nvSpPr>
+          <p:cNvPr id="7" name="직사각형 6">
+            <a:extLst>
+              <a:ext uri="{FF2B5EF4-FFF2-40B4-BE49-F238E27FC236}">
+                <a16:creationId xmlns:a16="http://schemas.microsoft.com/office/drawing/2014/main" id="{C0F5C03F-4FFF-06F3-7A12-E78C1BAFF120}"/>
+              </a:ext>
+            </a:extLst>
+          </p:cNvPr>
+          <p:cNvSpPr/>
+          <p:nvPr/>
+        </p:nvSpPr>
+        <p:spPr>
+          <a:xfrm>
+            <a:off x="914400" y="4928616"/>
+            <a:ext cx="1252728" cy="237744"/>
+          </a:xfrm>
+          <a:prstGeom prst="rect">
+            <a:avLst/>
+          </a:prstGeom>
+          <a:noFill/>
+          <a:ln>
+            <a:solidFill>
+              <a:srgbClr val="FF0000"/>
+            </a:solidFill>
+          </a:ln>
+        </p:spPr>
+        <p:style>
+          <a:lnRef idx="2">
+            <a:schemeClr val="accent1">
+              <a:shade val="15000"/>
+            </a:schemeClr>
+          </a:lnRef>
+          <a:fillRef idx="1">
+            <a:schemeClr val="accent1"/>
+          </a:fillRef>
+          <a:effectRef idx="0">
+            <a:schemeClr val="accent1"/>
+          </a:effectRef>
+          <a:fontRef idx="minor">
+            <a:schemeClr val="lt1"/>
+          </a:fontRef>
+        </p:style>
+        <p:txBody>
+          <a:bodyPr rtlCol="0" anchor="ctr"/>
+          <a:lstStyle/>
+          <a:p>
+            <a:pPr algn="ctr"/>
+            <a:endParaRPr lang="ko-KR" altLang="en-US"/>
+          </a:p>
+        </p:txBody>
+      </p:sp>
+      <p:sp>
+        <p:nvSpPr>
+          <p:cNvPr id="8" name="TextBox 7">
+            <a:extLst>
+              <a:ext uri="{FF2B5EF4-FFF2-40B4-BE49-F238E27FC236}">
+                <a16:creationId xmlns:a16="http://schemas.microsoft.com/office/drawing/2014/main" id="{D3697D37-A111-AB27-258A-B7C72E8E595C}"/>
+              </a:ext>
+            </a:extLst>
+          </p:cNvPr>
+          <p:cNvSpPr txBox="1"/>
+          <p:nvPr/>
+        </p:nvSpPr>
+        <p:spPr>
+          <a:xfrm>
+            <a:off x="3483864" y="4818888"/>
+            <a:ext cx="7970711" cy="954107"/>
+          </a:xfrm>
+          <a:prstGeom prst="rect">
+            <a:avLst/>
+          </a:prstGeom>
+          <a:noFill/>
+        </p:spPr>
+        <p:txBody>
+          <a:bodyPr wrap="square" rtlCol="0">
+            <a:spAutoFit/>
+          </a:bodyPr>
+          <a:lstStyle/>
+          <a:p>
+            <a:r>
+              <a:rPr lang="en-US" altLang="ko-KR" sz="1400"/>
+              <a:t>consumer</a:t>
+            </a:r>
+            <a:r>
+              <a:rPr lang="ko-KR" altLang="en-US" sz="1400"/>
+              <a:t>는 </a:t>
+            </a:r>
+            <a:r>
+              <a:rPr lang="en-US" altLang="ko-KR" sz="1400"/>
+              <a:t>Json </a:t>
+            </a:r>
+            <a:r>
+              <a:rPr lang="ko-KR" altLang="en-US" sz="1400"/>
+              <a:t>문자열을 받아 </a:t>
+            </a:r>
+            <a:r>
+              <a:rPr lang="en-US" altLang="ko-KR" sz="1400"/>
+              <a:t>Java</a:t>
+            </a:r>
+            <a:r>
+              <a:rPr lang="ko-KR" altLang="en-US" sz="1400"/>
+              <a:t>객체로 변환해야 함으로 </a:t>
+            </a:r>
+            <a:r>
+              <a:rPr lang="en-US" altLang="ko-KR" sz="1400"/>
+              <a:t>(</a:t>
+            </a:r>
+            <a:r>
+              <a:rPr lang="ko-KR" altLang="en-US" sz="1400"/>
+              <a:t>역직렬화</a:t>
+            </a:r>
+            <a:r>
+              <a:rPr lang="en-US" altLang="ko-KR" sz="1400"/>
+              <a:t>)</a:t>
+            </a:r>
+          </a:p>
+          <a:p>
+            <a:r>
+              <a:rPr lang="en-US" altLang="ko-KR" sz="1400"/>
+              <a:t>deserializer </a:t>
+            </a:r>
+            <a:r>
+              <a:rPr lang="ko-KR" altLang="en-US" sz="1400"/>
+              <a:t>설정을 해주어야한다</a:t>
+            </a:r>
+            <a:r>
+              <a:rPr lang="en-US" altLang="ko-KR" sz="1400"/>
+              <a:t>.</a:t>
+            </a:r>
+          </a:p>
+          <a:p>
+            <a:endParaRPr lang="en-US" altLang="ko-KR" sz="1400"/>
+          </a:p>
+          <a:p>
+            <a:r>
+              <a:rPr lang="en-US" altLang="ko-KR" sz="1400"/>
+              <a:t>producer kafka</a:t>
+            </a:r>
+            <a:r>
+              <a:rPr lang="ko-KR" altLang="en-US" sz="1400"/>
+              <a:t>서버랑 포트가 겹치지 않도록 </a:t>
+            </a:r>
+            <a:r>
+              <a:rPr lang="en-US" altLang="ko-KR" sz="1400"/>
+              <a:t>0(</a:t>
+            </a:r>
+            <a:r>
+              <a:rPr lang="ko-KR" altLang="en-US" sz="1400"/>
+              <a:t>가용할수 있는 랜덤 포트</a:t>
+            </a:r>
+            <a:r>
+              <a:rPr lang="en-US" altLang="ko-KR" sz="1400"/>
+              <a:t>) </a:t>
+            </a:r>
+            <a:r>
+              <a:rPr lang="ko-KR" altLang="en-US" sz="1400"/>
+              <a:t>를 설정하였다</a:t>
+            </a:r>
+            <a:r>
+              <a:rPr lang="en-US" altLang="ko-KR" sz="1400"/>
+              <a:t>.</a:t>
+            </a:r>
+            <a:endParaRPr lang="ko-KR" altLang="en-US" sz="1400"/>
+          </a:p>
+        </p:txBody>
+      </p:sp>
+    </p:spTree>
+    <p:extLst>
+      <p:ext uri="{BB962C8B-B14F-4D97-AF65-F5344CB8AC3E}">
+        <p14:creationId xmlns:p14="http://schemas.microsoft.com/office/powerpoint/2010/main" val="2474123408"/>
+      </p:ext>
+    </p:extLst>
+  </p:cSld>
+  <p:clrMapOvr>
+    <a:masterClrMapping/>
+  </p:clrMapOvr>
+</p:sld>
+</file>
+
+<file path=ppt/slides/slide25.xml><?xml version="1.0" encoding="utf-8"?>
+<p:sld xmlns:a="http://schemas.openxmlformats.org/drawingml/2006/main" xmlns:r="http://schemas.openxmlformats.org/officeDocument/2006/relationships" xmlns:p="http://schemas.openxmlformats.org/presentationml/2006/main">
+  <p:cSld>
+    <p:spTree>
+      <p:nvGrpSpPr>
+        <p:cNvPr id="1" name=""/>
+        <p:cNvGrpSpPr/>
+        <p:nvPr/>
+      </p:nvGrpSpPr>
+      <p:grpSpPr>
+        <a:xfrm>
+          <a:off x="0" y="0"/>
+          <a:ext cx="0" cy="0"/>
+          <a:chOff x="0" y="0"/>
+          <a:chExt cx="0" cy="0"/>
+        </a:xfrm>
+      </p:grpSpPr>
+      <p:sp>
+        <p:nvSpPr>
+          <p:cNvPr id="2" name="제목 1">
+            <a:extLst>
+              <a:ext uri="{FF2B5EF4-FFF2-40B4-BE49-F238E27FC236}">
+                <a16:creationId xmlns:a16="http://schemas.microsoft.com/office/drawing/2014/main" id="{9849B22C-7E25-6021-D5F1-018CC3F43E79}"/>
+              </a:ext>
+            </a:extLst>
+          </p:cNvPr>
+          <p:cNvSpPr>
+            <a:spLocks noGrp="1"/>
+          </p:cNvSpPr>
+          <p:nvPr>
+            <p:ph type="title"/>
+          </p:nvPr>
+        </p:nvSpPr>
+        <p:spPr/>
+        <p:txBody>
+          <a:bodyPr/>
+          <a:lstStyle/>
+          <a:p>
+            <a:r>
+              <a:rPr lang="ko-KR" altLang="en-US"/>
+              <a:t>역직렬화 </a:t>
+            </a:r>
+            <a:r>
+              <a:rPr lang="en-US" altLang="ko-KR"/>
+              <a:t>DTO </a:t>
+            </a:r>
+            <a:r>
+              <a:rPr lang="ko-KR" altLang="en-US"/>
+              <a:t>작성</a:t>
+            </a:r>
+          </a:p>
+        </p:txBody>
+      </p:sp>
+      <p:sp>
+        <p:nvSpPr>
+          <p:cNvPr id="4" name="TextBox 3">
+            <a:extLst>
+              <a:ext uri="{FF2B5EF4-FFF2-40B4-BE49-F238E27FC236}">
+                <a16:creationId xmlns:a16="http://schemas.microsoft.com/office/drawing/2014/main" id="{C999889C-B7A8-CA12-08EA-3E7E1B8BCD55}"/>
+              </a:ext>
+            </a:extLst>
+          </p:cNvPr>
+          <p:cNvSpPr txBox="1"/>
+          <p:nvPr/>
+        </p:nvSpPr>
+        <p:spPr>
+          <a:xfrm>
+            <a:off x="237744" y="1871706"/>
+            <a:ext cx="6318504" cy="2775119"/>
+          </a:xfrm>
+          <a:prstGeom prst="rect">
+            <a:avLst/>
+          </a:prstGeom>
+          <a:solidFill>
+            <a:schemeClr val="tx1"/>
+          </a:solidFill>
+        </p:spPr>
+        <p:txBody>
+          <a:bodyPr wrap="square">
+            <a:spAutoFit/>
+          </a:bodyPr>
+          <a:lstStyle/>
+          <a:p>
+            <a:pPr>
+              <a:lnSpc>
+                <a:spcPts val="1425"/>
+              </a:lnSpc>
+              <a:buNone/>
+            </a:pPr>
+            <a:r>
+              <a:rPr lang="en-US" altLang="ko-KR" sz="1050" b="0">
+                <a:solidFill>
+                  <a:srgbClr val="569CD6"/>
+                </a:solidFill>
+                <a:effectLst/>
+                <a:latin typeface="Consolas" panose="020B0609020204030204" pitchFamily="49" charset="0"/>
+              </a:rPr>
+              <a:t>public</a:t>
+            </a:r>
+            <a:r>
+              <a:rPr lang="en-US" altLang="ko-KR" sz="1050" b="0">
+                <a:solidFill>
+                  <a:srgbClr val="BBBEBF"/>
+                </a:solidFill>
+                <a:effectLst/>
+                <a:latin typeface="Consolas" panose="020B0609020204030204" pitchFamily="49" charset="0"/>
+              </a:rPr>
+              <a:t> </a:t>
+            </a:r>
+            <a:r>
+              <a:rPr lang="en-US" altLang="ko-KR" sz="1050" b="0">
+                <a:solidFill>
+                  <a:srgbClr val="569CD6"/>
+                </a:solidFill>
+                <a:effectLst/>
+                <a:latin typeface="Consolas" panose="020B0609020204030204" pitchFamily="49" charset="0"/>
+              </a:rPr>
+              <a:t>class</a:t>
+            </a:r>
+            <a:r>
+              <a:rPr lang="en-US" altLang="ko-KR" sz="1050" b="0">
+                <a:solidFill>
+                  <a:srgbClr val="BBBEBF"/>
+                </a:solidFill>
+                <a:effectLst/>
+                <a:latin typeface="Consolas" panose="020B0609020204030204" pitchFamily="49" charset="0"/>
+              </a:rPr>
+              <a:t> </a:t>
+            </a:r>
+            <a:r>
+              <a:rPr lang="en-US" altLang="ko-KR" sz="1050" b="0">
+                <a:solidFill>
+                  <a:srgbClr val="4EC9B0"/>
+                </a:solidFill>
+                <a:effectLst/>
+                <a:latin typeface="Consolas" panose="020B0609020204030204" pitchFamily="49" charset="0"/>
+              </a:rPr>
+              <a:t>EmailSendMessage</a:t>
+            </a:r>
+            <a:r>
+              <a:rPr lang="en-US" altLang="ko-KR" sz="1050" b="0">
+                <a:solidFill>
+                  <a:srgbClr val="BBBEBF"/>
+                </a:solidFill>
+                <a:effectLst/>
+                <a:latin typeface="Consolas" panose="020B0609020204030204" pitchFamily="49" charset="0"/>
+              </a:rPr>
+              <a:t> {</a:t>
+            </a:r>
+          </a:p>
+          <a:p>
+            <a:pPr>
+              <a:lnSpc>
+                <a:spcPts val="1425"/>
+              </a:lnSpc>
+              <a:buNone/>
+            </a:pPr>
+            <a:r>
+              <a:rPr lang="en-US" altLang="ko-KR" sz="1050" b="0">
+                <a:solidFill>
+                  <a:srgbClr val="BBBEBF"/>
+                </a:solidFill>
+                <a:effectLst/>
+                <a:latin typeface="Consolas" panose="020B0609020204030204" pitchFamily="49" charset="0"/>
+              </a:rPr>
+              <a:t>    </a:t>
+            </a:r>
+            <a:r>
+              <a:rPr lang="en-US" altLang="ko-KR" sz="1050" b="0">
+                <a:solidFill>
+                  <a:srgbClr val="569CD6"/>
+                </a:solidFill>
+                <a:effectLst/>
+                <a:latin typeface="Consolas" panose="020B0609020204030204" pitchFamily="49" charset="0"/>
+              </a:rPr>
+              <a:t>private</a:t>
+            </a:r>
+            <a:r>
+              <a:rPr lang="en-US" altLang="ko-KR" sz="1050" b="0">
+                <a:solidFill>
+                  <a:srgbClr val="BBBEBF"/>
+                </a:solidFill>
+                <a:effectLst/>
+                <a:latin typeface="Consolas" panose="020B0609020204030204" pitchFamily="49" charset="0"/>
+              </a:rPr>
+              <a:t> </a:t>
+            </a:r>
+            <a:r>
+              <a:rPr lang="en-US" altLang="ko-KR" sz="1050" b="0">
+                <a:solidFill>
+                  <a:srgbClr val="4EC9B0"/>
+                </a:solidFill>
+                <a:effectLst/>
+                <a:latin typeface="Consolas" panose="020B0609020204030204" pitchFamily="49" charset="0"/>
+              </a:rPr>
+              <a:t>String</a:t>
+            </a:r>
+            <a:r>
+              <a:rPr lang="en-US" altLang="ko-KR" sz="1050" b="0">
+                <a:solidFill>
+                  <a:srgbClr val="FFA657"/>
+                </a:solidFill>
+                <a:effectLst/>
+                <a:latin typeface="Consolas" panose="020B0609020204030204" pitchFamily="49" charset="0"/>
+              </a:rPr>
+              <a:t> </a:t>
+            </a:r>
+            <a:r>
+              <a:rPr lang="en-US" altLang="ko-KR" sz="1050" b="0">
+                <a:solidFill>
+                  <a:srgbClr val="C9D1D9"/>
+                </a:solidFill>
+                <a:effectLst/>
+                <a:latin typeface="Consolas" panose="020B0609020204030204" pitchFamily="49" charset="0"/>
+              </a:rPr>
+              <a:t>from</a:t>
+            </a:r>
+            <a:r>
+              <a:rPr lang="en-US" altLang="ko-KR" sz="1050" b="0">
+                <a:solidFill>
+                  <a:srgbClr val="BBBEBF"/>
+                </a:solidFill>
+                <a:effectLst/>
+                <a:latin typeface="Consolas" panose="020B0609020204030204" pitchFamily="49" charset="0"/>
+              </a:rPr>
+              <a:t>;</a:t>
+            </a:r>
+          </a:p>
+          <a:p>
+            <a:pPr>
+              <a:lnSpc>
+                <a:spcPts val="1425"/>
+              </a:lnSpc>
+              <a:buNone/>
+            </a:pPr>
+            <a:r>
+              <a:rPr lang="en-US" altLang="ko-KR" sz="1050" b="0">
+                <a:solidFill>
+                  <a:srgbClr val="BBBEBF"/>
+                </a:solidFill>
+                <a:effectLst/>
+                <a:latin typeface="Consolas" panose="020B0609020204030204" pitchFamily="49" charset="0"/>
+              </a:rPr>
+              <a:t>    </a:t>
+            </a:r>
+            <a:r>
+              <a:rPr lang="en-US" altLang="ko-KR" sz="1050" b="0">
+                <a:solidFill>
+                  <a:srgbClr val="569CD6"/>
+                </a:solidFill>
+                <a:effectLst/>
+                <a:latin typeface="Consolas" panose="020B0609020204030204" pitchFamily="49" charset="0"/>
+              </a:rPr>
+              <a:t>private</a:t>
+            </a:r>
+            <a:r>
+              <a:rPr lang="en-US" altLang="ko-KR" sz="1050" b="0">
+                <a:solidFill>
+                  <a:srgbClr val="BBBEBF"/>
+                </a:solidFill>
+                <a:effectLst/>
+                <a:latin typeface="Consolas" panose="020B0609020204030204" pitchFamily="49" charset="0"/>
+              </a:rPr>
+              <a:t> </a:t>
+            </a:r>
+            <a:r>
+              <a:rPr lang="en-US" altLang="ko-KR" sz="1050" b="0">
+                <a:solidFill>
+                  <a:srgbClr val="4EC9B0"/>
+                </a:solidFill>
+                <a:effectLst/>
+                <a:latin typeface="Consolas" panose="020B0609020204030204" pitchFamily="49" charset="0"/>
+              </a:rPr>
+              <a:t>String</a:t>
+            </a:r>
+            <a:r>
+              <a:rPr lang="en-US" altLang="ko-KR" sz="1050" b="0">
+                <a:solidFill>
+                  <a:srgbClr val="FFA657"/>
+                </a:solidFill>
+                <a:effectLst/>
+                <a:latin typeface="Consolas" panose="020B0609020204030204" pitchFamily="49" charset="0"/>
+              </a:rPr>
+              <a:t> </a:t>
+            </a:r>
+            <a:r>
+              <a:rPr lang="en-US" altLang="ko-KR" sz="1050" b="0">
+                <a:solidFill>
+                  <a:srgbClr val="C9D1D9"/>
+                </a:solidFill>
+                <a:effectLst/>
+                <a:latin typeface="Consolas" panose="020B0609020204030204" pitchFamily="49" charset="0"/>
+              </a:rPr>
+              <a:t>to</a:t>
+            </a:r>
+            <a:r>
+              <a:rPr lang="en-US" altLang="ko-KR" sz="1050" b="0">
+                <a:solidFill>
+                  <a:srgbClr val="BBBEBF"/>
+                </a:solidFill>
+                <a:effectLst/>
+                <a:latin typeface="Consolas" panose="020B0609020204030204" pitchFamily="49" charset="0"/>
+              </a:rPr>
+              <a:t>;</a:t>
+            </a:r>
+          </a:p>
+          <a:p>
+            <a:pPr>
+              <a:lnSpc>
+                <a:spcPts val="1425"/>
+              </a:lnSpc>
+              <a:buNone/>
+            </a:pPr>
+            <a:r>
+              <a:rPr lang="en-US" altLang="ko-KR" sz="1050" b="0">
+                <a:solidFill>
+                  <a:srgbClr val="BBBEBF"/>
+                </a:solidFill>
+                <a:effectLst/>
+                <a:latin typeface="Consolas" panose="020B0609020204030204" pitchFamily="49" charset="0"/>
+              </a:rPr>
+              <a:t>    </a:t>
+            </a:r>
+            <a:r>
+              <a:rPr lang="en-US" altLang="ko-KR" sz="1050" b="0">
+                <a:solidFill>
+                  <a:srgbClr val="569CD6"/>
+                </a:solidFill>
+                <a:effectLst/>
+                <a:latin typeface="Consolas" panose="020B0609020204030204" pitchFamily="49" charset="0"/>
+              </a:rPr>
+              <a:t>private</a:t>
+            </a:r>
+            <a:r>
+              <a:rPr lang="en-US" altLang="ko-KR" sz="1050" b="0">
+                <a:solidFill>
+                  <a:srgbClr val="BBBEBF"/>
+                </a:solidFill>
+                <a:effectLst/>
+                <a:latin typeface="Consolas" panose="020B0609020204030204" pitchFamily="49" charset="0"/>
+              </a:rPr>
+              <a:t> </a:t>
+            </a:r>
+            <a:r>
+              <a:rPr lang="en-US" altLang="ko-KR" sz="1050" b="0">
+                <a:solidFill>
+                  <a:srgbClr val="4EC9B0"/>
+                </a:solidFill>
+                <a:effectLst/>
+                <a:latin typeface="Consolas" panose="020B0609020204030204" pitchFamily="49" charset="0"/>
+              </a:rPr>
+              <a:t>String</a:t>
+            </a:r>
+            <a:r>
+              <a:rPr lang="en-US" altLang="ko-KR" sz="1050" b="0">
+                <a:solidFill>
+                  <a:srgbClr val="FFA657"/>
+                </a:solidFill>
+                <a:effectLst/>
+                <a:latin typeface="Consolas" panose="020B0609020204030204" pitchFamily="49" charset="0"/>
+              </a:rPr>
+              <a:t> </a:t>
+            </a:r>
+            <a:r>
+              <a:rPr lang="en-US" altLang="ko-KR" sz="1050" b="0">
+                <a:solidFill>
+                  <a:srgbClr val="C9D1D9"/>
+                </a:solidFill>
+                <a:effectLst/>
+                <a:latin typeface="Consolas" panose="020B0609020204030204" pitchFamily="49" charset="0"/>
+              </a:rPr>
+              <a:t>subject</a:t>
+            </a:r>
+            <a:r>
+              <a:rPr lang="en-US" altLang="ko-KR" sz="1050" b="0">
+                <a:solidFill>
+                  <a:srgbClr val="BBBEBF"/>
+                </a:solidFill>
+                <a:effectLst/>
+                <a:latin typeface="Consolas" panose="020B0609020204030204" pitchFamily="49" charset="0"/>
+              </a:rPr>
+              <a:t>;</a:t>
+            </a:r>
+          </a:p>
+          <a:p>
+            <a:pPr>
+              <a:lnSpc>
+                <a:spcPts val="1425"/>
+              </a:lnSpc>
+              <a:buNone/>
+            </a:pPr>
+            <a:r>
+              <a:rPr lang="en-US" altLang="ko-KR" sz="1050" b="0">
+                <a:solidFill>
+                  <a:srgbClr val="BBBEBF"/>
+                </a:solidFill>
+                <a:effectLst/>
+                <a:latin typeface="Consolas" panose="020B0609020204030204" pitchFamily="49" charset="0"/>
+              </a:rPr>
+              <a:t>    </a:t>
+            </a:r>
+            <a:r>
+              <a:rPr lang="en-US" altLang="ko-KR" sz="1050" b="0">
+                <a:solidFill>
+                  <a:srgbClr val="569CD6"/>
+                </a:solidFill>
+                <a:effectLst/>
+                <a:latin typeface="Consolas" panose="020B0609020204030204" pitchFamily="49" charset="0"/>
+              </a:rPr>
+              <a:t>private</a:t>
+            </a:r>
+            <a:r>
+              <a:rPr lang="en-US" altLang="ko-KR" sz="1050" b="0">
+                <a:solidFill>
+                  <a:srgbClr val="BBBEBF"/>
+                </a:solidFill>
+                <a:effectLst/>
+                <a:latin typeface="Consolas" panose="020B0609020204030204" pitchFamily="49" charset="0"/>
+              </a:rPr>
+              <a:t> </a:t>
+            </a:r>
+            <a:r>
+              <a:rPr lang="en-US" altLang="ko-KR" sz="1050" b="0">
+                <a:solidFill>
+                  <a:srgbClr val="4EC9B0"/>
+                </a:solidFill>
+                <a:effectLst/>
+                <a:latin typeface="Consolas" panose="020B0609020204030204" pitchFamily="49" charset="0"/>
+              </a:rPr>
+              <a:t>String</a:t>
+            </a:r>
+            <a:r>
+              <a:rPr lang="en-US" altLang="ko-KR" sz="1050" b="0">
+                <a:solidFill>
+                  <a:srgbClr val="FFA657"/>
+                </a:solidFill>
+                <a:effectLst/>
+                <a:latin typeface="Consolas" panose="020B0609020204030204" pitchFamily="49" charset="0"/>
+              </a:rPr>
+              <a:t> </a:t>
+            </a:r>
+            <a:r>
+              <a:rPr lang="en-US" altLang="ko-KR" sz="1050" b="0">
+                <a:solidFill>
+                  <a:srgbClr val="C9D1D9"/>
+                </a:solidFill>
+                <a:effectLst/>
+                <a:latin typeface="Consolas" panose="020B0609020204030204" pitchFamily="49" charset="0"/>
+              </a:rPr>
+              <a:t>body</a:t>
+            </a:r>
+            <a:r>
+              <a:rPr lang="en-US" altLang="ko-KR" sz="1050" b="0">
+                <a:solidFill>
+                  <a:srgbClr val="BBBEBF"/>
+                </a:solidFill>
+                <a:effectLst/>
+                <a:latin typeface="Consolas" panose="020B0609020204030204" pitchFamily="49" charset="0"/>
+              </a:rPr>
+              <a:t>;</a:t>
+            </a:r>
+          </a:p>
+          <a:p>
+            <a:pPr>
+              <a:lnSpc>
+                <a:spcPts val="1425"/>
+              </a:lnSpc>
+              <a:buNone/>
+            </a:pPr>
+            <a:br>
+              <a:rPr lang="en-US" altLang="ko-KR" sz="1050" b="0">
+                <a:solidFill>
+                  <a:srgbClr val="BBBEBF"/>
+                </a:solidFill>
+                <a:effectLst/>
+                <a:latin typeface="Consolas" panose="020B0609020204030204" pitchFamily="49" charset="0"/>
+              </a:rPr>
+            </a:br>
+            <a:endParaRPr lang="en-US" altLang="ko-KR" sz="1050" b="0">
+              <a:solidFill>
+                <a:srgbClr val="BBBEBF"/>
+              </a:solidFill>
+              <a:effectLst/>
+              <a:latin typeface="Consolas" panose="020B0609020204030204" pitchFamily="49" charset="0"/>
+            </a:endParaRPr>
+          </a:p>
+          <a:p>
+            <a:pPr>
+              <a:lnSpc>
+                <a:spcPts val="1425"/>
+              </a:lnSpc>
+              <a:buNone/>
+            </a:pPr>
+            <a:r>
+              <a:rPr lang="en-US" altLang="ko-KR" sz="1050" b="0">
+                <a:solidFill>
+                  <a:srgbClr val="BBBEBF"/>
+                </a:solidFill>
+                <a:effectLst/>
+                <a:latin typeface="Consolas" panose="020B0609020204030204" pitchFamily="49" charset="0"/>
+              </a:rPr>
+              <a:t>    </a:t>
+            </a:r>
+            <a:r>
+              <a:rPr lang="en-US" altLang="ko-KR" sz="1050" b="0">
+                <a:solidFill>
+                  <a:srgbClr val="569CD6"/>
+                </a:solidFill>
+                <a:effectLst/>
+                <a:latin typeface="Consolas" panose="020B0609020204030204" pitchFamily="49" charset="0"/>
+              </a:rPr>
+              <a:t>public</a:t>
+            </a:r>
+            <a:r>
+              <a:rPr lang="en-US" altLang="ko-KR" sz="1050" b="0">
+                <a:solidFill>
+                  <a:srgbClr val="BBBEBF"/>
+                </a:solidFill>
+                <a:effectLst/>
+                <a:latin typeface="Consolas" panose="020B0609020204030204" pitchFamily="49" charset="0"/>
+              </a:rPr>
+              <a:t> </a:t>
+            </a:r>
+            <a:r>
+              <a:rPr lang="en-US" altLang="ko-KR" sz="1050" b="0">
+                <a:solidFill>
+                  <a:srgbClr val="D2A8FF"/>
+                </a:solidFill>
+                <a:effectLst/>
+                <a:latin typeface="Consolas" panose="020B0609020204030204" pitchFamily="49" charset="0"/>
+              </a:rPr>
+              <a:t>EmailSendMessage</a:t>
+            </a:r>
+            <a:r>
+              <a:rPr lang="en-US" altLang="ko-KR" sz="1050" b="0">
+                <a:solidFill>
+                  <a:srgbClr val="BBBEBF"/>
+                </a:solidFill>
+                <a:effectLst/>
+                <a:latin typeface="Consolas" panose="020B0609020204030204" pitchFamily="49" charset="0"/>
+              </a:rPr>
+              <a:t>(){}</a:t>
+            </a:r>
+          </a:p>
+          <a:p>
+            <a:pPr>
+              <a:lnSpc>
+                <a:spcPts val="1425"/>
+              </a:lnSpc>
+              <a:buNone/>
+            </a:pPr>
+            <a:r>
+              <a:rPr lang="en-US" altLang="ko-KR" sz="1050" b="0">
+                <a:solidFill>
+                  <a:srgbClr val="BBBEBF"/>
+                </a:solidFill>
+                <a:effectLst/>
+                <a:latin typeface="Consolas" panose="020B0609020204030204" pitchFamily="49" charset="0"/>
+              </a:rPr>
+              <a:t>    </a:t>
+            </a:r>
+            <a:r>
+              <a:rPr lang="en-US" altLang="ko-KR" sz="1050" b="0">
+                <a:solidFill>
+                  <a:srgbClr val="569CD6"/>
+                </a:solidFill>
+                <a:effectLst/>
+                <a:latin typeface="Consolas" panose="020B0609020204030204" pitchFamily="49" charset="0"/>
+              </a:rPr>
+              <a:t>public</a:t>
+            </a:r>
+            <a:r>
+              <a:rPr lang="en-US" altLang="ko-KR" sz="1050" b="0">
+                <a:solidFill>
+                  <a:srgbClr val="BBBEBF"/>
+                </a:solidFill>
+                <a:effectLst/>
+                <a:latin typeface="Consolas" panose="020B0609020204030204" pitchFamily="49" charset="0"/>
+              </a:rPr>
+              <a:t> </a:t>
+            </a:r>
+            <a:r>
+              <a:rPr lang="en-US" altLang="ko-KR" sz="1050" b="0">
+                <a:solidFill>
+                  <a:srgbClr val="D2A8FF"/>
+                </a:solidFill>
+                <a:effectLst/>
+                <a:latin typeface="Consolas" panose="020B0609020204030204" pitchFamily="49" charset="0"/>
+              </a:rPr>
+              <a:t>EmailSendMessage</a:t>
+            </a:r>
+            <a:r>
+              <a:rPr lang="en-US" altLang="ko-KR" sz="1050" b="0">
+                <a:solidFill>
+                  <a:srgbClr val="BBBEBF"/>
+                </a:solidFill>
+                <a:effectLst/>
+                <a:latin typeface="Consolas" panose="020B0609020204030204" pitchFamily="49" charset="0"/>
+              </a:rPr>
+              <a:t>(</a:t>
+            </a:r>
+            <a:r>
+              <a:rPr lang="en-US" altLang="ko-KR" sz="1050" b="0">
+                <a:solidFill>
+                  <a:srgbClr val="4EC9B0"/>
+                </a:solidFill>
+                <a:effectLst/>
+                <a:latin typeface="Consolas" panose="020B0609020204030204" pitchFamily="49" charset="0"/>
+              </a:rPr>
+              <a:t>String</a:t>
+            </a:r>
+            <a:r>
+              <a:rPr lang="en-US" altLang="ko-KR" sz="1050" b="0">
+                <a:solidFill>
+                  <a:srgbClr val="BBBEBF"/>
+                </a:solidFill>
+                <a:effectLst/>
+                <a:latin typeface="Consolas" panose="020B0609020204030204" pitchFamily="49" charset="0"/>
+              </a:rPr>
+              <a:t> </a:t>
+            </a:r>
+            <a:r>
+              <a:rPr lang="en-US" altLang="ko-KR" sz="1050" b="0">
+                <a:solidFill>
+                  <a:srgbClr val="FFA657"/>
+                </a:solidFill>
+                <a:effectLst/>
+                <a:latin typeface="Consolas" panose="020B0609020204030204" pitchFamily="49" charset="0"/>
+              </a:rPr>
+              <a:t>from</a:t>
+            </a:r>
+            <a:r>
+              <a:rPr lang="en-US" altLang="ko-KR" sz="1050" b="0">
+                <a:solidFill>
+                  <a:srgbClr val="BBBEBF"/>
+                </a:solidFill>
+                <a:effectLst/>
+                <a:latin typeface="Consolas" panose="020B0609020204030204" pitchFamily="49" charset="0"/>
+              </a:rPr>
+              <a:t>, </a:t>
+            </a:r>
+            <a:r>
+              <a:rPr lang="en-US" altLang="ko-KR" sz="1050" b="0">
+                <a:solidFill>
+                  <a:srgbClr val="4EC9B0"/>
+                </a:solidFill>
+                <a:effectLst/>
+                <a:latin typeface="Consolas" panose="020B0609020204030204" pitchFamily="49" charset="0"/>
+              </a:rPr>
+              <a:t>String</a:t>
+            </a:r>
+            <a:r>
+              <a:rPr lang="en-US" altLang="ko-KR" sz="1050" b="0">
+                <a:solidFill>
+                  <a:srgbClr val="BBBEBF"/>
+                </a:solidFill>
+                <a:effectLst/>
+                <a:latin typeface="Consolas" panose="020B0609020204030204" pitchFamily="49" charset="0"/>
+              </a:rPr>
+              <a:t> </a:t>
+            </a:r>
+            <a:r>
+              <a:rPr lang="en-US" altLang="ko-KR" sz="1050" b="0">
+                <a:solidFill>
+                  <a:srgbClr val="FFA657"/>
+                </a:solidFill>
+                <a:effectLst/>
+                <a:latin typeface="Consolas" panose="020B0609020204030204" pitchFamily="49" charset="0"/>
+              </a:rPr>
+              <a:t>to</a:t>
+            </a:r>
+            <a:r>
+              <a:rPr lang="en-US" altLang="ko-KR" sz="1050" b="0">
+                <a:solidFill>
+                  <a:srgbClr val="BBBEBF"/>
+                </a:solidFill>
+                <a:effectLst/>
+                <a:latin typeface="Consolas" panose="020B0609020204030204" pitchFamily="49" charset="0"/>
+              </a:rPr>
+              <a:t>, </a:t>
+            </a:r>
+            <a:r>
+              <a:rPr lang="en-US" altLang="ko-KR" sz="1050" b="0">
+                <a:solidFill>
+                  <a:srgbClr val="4EC9B0"/>
+                </a:solidFill>
+                <a:effectLst/>
+                <a:latin typeface="Consolas" panose="020B0609020204030204" pitchFamily="49" charset="0"/>
+              </a:rPr>
+              <a:t>String</a:t>
+            </a:r>
+            <a:r>
+              <a:rPr lang="en-US" altLang="ko-KR" sz="1050" b="0">
+                <a:solidFill>
+                  <a:srgbClr val="BBBEBF"/>
+                </a:solidFill>
+                <a:effectLst/>
+                <a:latin typeface="Consolas" panose="020B0609020204030204" pitchFamily="49" charset="0"/>
+              </a:rPr>
+              <a:t> </a:t>
+            </a:r>
+            <a:r>
+              <a:rPr lang="en-US" altLang="ko-KR" sz="1050" b="0">
+                <a:solidFill>
+                  <a:srgbClr val="FFA657"/>
+                </a:solidFill>
+                <a:effectLst/>
+                <a:latin typeface="Consolas" panose="020B0609020204030204" pitchFamily="49" charset="0"/>
+              </a:rPr>
+              <a:t>subject</a:t>
+            </a:r>
+            <a:r>
+              <a:rPr lang="en-US" altLang="ko-KR" sz="1050" b="0">
+                <a:solidFill>
+                  <a:srgbClr val="BBBEBF"/>
+                </a:solidFill>
+                <a:effectLst/>
+                <a:latin typeface="Consolas" panose="020B0609020204030204" pitchFamily="49" charset="0"/>
+              </a:rPr>
+              <a:t>, </a:t>
+            </a:r>
+            <a:r>
+              <a:rPr lang="en-US" altLang="ko-KR" sz="1050" b="0">
+                <a:solidFill>
+                  <a:srgbClr val="4EC9B0"/>
+                </a:solidFill>
+                <a:effectLst/>
+                <a:latin typeface="Consolas" panose="020B0609020204030204" pitchFamily="49" charset="0"/>
+              </a:rPr>
+              <a:t>String</a:t>
+            </a:r>
+            <a:r>
+              <a:rPr lang="en-US" altLang="ko-KR" sz="1050" b="0">
+                <a:solidFill>
+                  <a:srgbClr val="BBBEBF"/>
+                </a:solidFill>
+                <a:effectLst/>
+                <a:latin typeface="Consolas" panose="020B0609020204030204" pitchFamily="49" charset="0"/>
+              </a:rPr>
+              <a:t> </a:t>
+            </a:r>
+            <a:r>
+              <a:rPr lang="en-US" altLang="ko-KR" sz="1050" b="0">
+                <a:solidFill>
+                  <a:srgbClr val="FFA657"/>
+                </a:solidFill>
+                <a:effectLst/>
+                <a:latin typeface="Consolas" panose="020B0609020204030204" pitchFamily="49" charset="0"/>
+              </a:rPr>
+              <a:t>body</a:t>
+            </a:r>
+            <a:r>
+              <a:rPr lang="en-US" altLang="ko-KR" sz="1050" b="0">
+                <a:solidFill>
+                  <a:srgbClr val="BBBEBF"/>
+                </a:solidFill>
+                <a:effectLst/>
+                <a:latin typeface="Consolas" panose="020B0609020204030204" pitchFamily="49" charset="0"/>
+              </a:rPr>
+              <a:t>) {</a:t>
+            </a:r>
+          </a:p>
+          <a:p>
+            <a:pPr>
+              <a:lnSpc>
+                <a:spcPts val="1425"/>
+              </a:lnSpc>
+              <a:buNone/>
+            </a:pPr>
+            <a:r>
+              <a:rPr lang="en-US" altLang="ko-KR" sz="1050" b="0">
+                <a:solidFill>
+                  <a:srgbClr val="BBBEBF"/>
+                </a:solidFill>
+                <a:effectLst/>
+                <a:latin typeface="Consolas" panose="020B0609020204030204" pitchFamily="49" charset="0"/>
+              </a:rPr>
+              <a:t>        </a:t>
+            </a:r>
+            <a:r>
+              <a:rPr lang="en-US" altLang="ko-KR" sz="1050" b="0">
+                <a:solidFill>
+                  <a:srgbClr val="79C0FF"/>
+                </a:solidFill>
+                <a:effectLst/>
+                <a:latin typeface="Consolas" panose="020B0609020204030204" pitchFamily="49" charset="0"/>
+              </a:rPr>
+              <a:t>this</a:t>
+            </a:r>
+            <a:r>
+              <a:rPr lang="en-US" altLang="ko-KR" sz="1050" b="0">
+                <a:solidFill>
+                  <a:srgbClr val="BBBEBF"/>
+                </a:solidFill>
+                <a:effectLst/>
+                <a:latin typeface="Consolas" panose="020B0609020204030204" pitchFamily="49" charset="0"/>
+              </a:rPr>
+              <a:t>.</a:t>
+            </a:r>
+            <a:r>
+              <a:rPr lang="en-US" altLang="ko-KR" sz="1050" b="0">
+                <a:solidFill>
+                  <a:srgbClr val="C9D1D9"/>
+                </a:solidFill>
+                <a:effectLst/>
+                <a:latin typeface="Consolas" panose="020B0609020204030204" pitchFamily="49" charset="0"/>
+              </a:rPr>
+              <a:t>from</a:t>
+            </a:r>
+            <a:r>
+              <a:rPr lang="en-US" altLang="ko-KR" sz="1050" b="0">
+                <a:solidFill>
+                  <a:srgbClr val="BBBEBF"/>
+                </a:solidFill>
+                <a:effectLst/>
+                <a:latin typeface="Consolas" panose="020B0609020204030204" pitchFamily="49" charset="0"/>
+              </a:rPr>
+              <a:t> </a:t>
+            </a:r>
+            <a:r>
+              <a:rPr lang="en-US" altLang="ko-KR" sz="1050" b="0">
+                <a:solidFill>
+                  <a:srgbClr val="D4D4D4"/>
+                </a:solidFill>
+                <a:effectLst/>
+                <a:latin typeface="Consolas" panose="020B0609020204030204" pitchFamily="49" charset="0"/>
+              </a:rPr>
+              <a:t>=</a:t>
+            </a:r>
+            <a:r>
+              <a:rPr lang="en-US" altLang="ko-KR" sz="1050" b="0">
+                <a:solidFill>
+                  <a:srgbClr val="BBBEBF"/>
+                </a:solidFill>
+                <a:effectLst/>
+                <a:latin typeface="Consolas" panose="020B0609020204030204" pitchFamily="49" charset="0"/>
+              </a:rPr>
+              <a:t> </a:t>
+            </a:r>
+            <a:r>
+              <a:rPr lang="en-US" altLang="ko-KR" sz="1050" b="0">
+                <a:solidFill>
+                  <a:srgbClr val="FFA657"/>
+                </a:solidFill>
+                <a:effectLst/>
+                <a:latin typeface="Consolas" panose="020B0609020204030204" pitchFamily="49" charset="0"/>
+              </a:rPr>
+              <a:t>from</a:t>
+            </a:r>
+            <a:r>
+              <a:rPr lang="en-US" altLang="ko-KR" sz="1050" b="0">
+                <a:solidFill>
+                  <a:srgbClr val="BBBEBF"/>
+                </a:solidFill>
+                <a:effectLst/>
+                <a:latin typeface="Consolas" panose="020B0609020204030204" pitchFamily="49" charset="0"/>
+              </a:rPr>
+              <a:t>;</a:t>
+            </a:r>
+          </a:p>
+          <a:p>
+            <a:pPr>
+              <a:lnSpc>
+                <a:spcPts val="1425"/>
+              </a:lnSpc>
+              <a:buNone/>
+            </a:pPr>
+            <a:r>
+              <a:rPr lang="en-US" altLang="ko-KR" sz="1050" b="0">
+                <a:solidFill>
+                  <a:srgbClr val="BBBEBF"/>
+                </a:solidFill>
+                <a:effectLst/>
+                <a:latin typeface="Consolas" panose="020B0609020204030204" pitchFamily="49" charset="0"/>
+              </a:rPr>
+              <a:t>        </a:t>
+            </a:r>
+            <a:r>
+              <a:rPr lang="en-US" altLang="ko-KR" sz="1050" b="0">
+                <a:solidFill>
+                  <a:srgbClr val="79C0FF"/>
+                </a:solidFill>
+                <a:effectLst/>
+                <a:latin typeface="Consolas" panose="020B0609020204030204" pitchFamily="49" charset="0"/>
+              </a:rPr>
+              <a:t>this</a:t>
+            </a:r>
+            <a:r>
+              <a:rPr lang="en-US" altLang="ko-KR" sz="1050" b="0">
+                <a:solidFill>
+                  <a:srgbClr val="BBBEBF"/>
+                </a:solidFill>
+                <a:effectLst/>
+                <a:latin typeface="Consolas" panose="020B0609020204030204" pitchFamily="49" charset="0"/>
+              </a:rPr>
+              <a:t>.</a:t>
+            </a:r>
+            <a:r>
+              <a:rPr lang="en-US" altLang="ko-KR" sz="1050" b="0">
+                <a:solidFill>
+                  <a:srgbClr val="C9D1D9"/>
+                </a:solidFill>
+                <a:effectLst/>
+                <a:latin typeface="Consolas" panose="020B0609020204030204" pitchFamily="49" charset="0"/>
+              </a:rPr>
+              <a:t>to</a:t>
+            </a:r>
+            <a:r>
+              <a:rPr lang="en-US" altLang="ko-KR" sz="1050" b="0">
+                <a:solidFill>
+                  <a:srgbClr val="BBBEBF"/>
+                </a:solidFill>
+                <a:effectLst/>
+                <a:latin typeface="Consolas" panose="020B0609020204030204" pitchFamily="49" charset="0"/>
+              </a:rPr>
+              <a:t> </a:t>
+            </a:r>
+            <a:r>
+              <a:rPr lang="en-US" altLang="ko-KR" sz="1050" b="0">
+                <a:solidFill>
+                  <a:srgbClr val="D4D4D4"/>
+                </a:solidFill>
+                <a:effectLst/>
+                <a:latin typeface="Consolas" panose="020B0609020204030204" pitchFamily="49" charset="0"/>
+              </a:rPr>
+              <a:t>=</a:t>
+            </a:r>
+            <a:r>
+              <a:rPr lang="en-US" altLang="ko-KR" sz="1050" b="0">
+                <a:solidFill>
+                  <a:srgbClr val="BBBEBF"/>
+                </a:solidFill>
+                <a:effectLst/>
+                <a:latin typeface="Consolas" panose="020B0609020204030204" pitchFamily="49" charset="0"/>
+              </a:rPr>
+              <a:t> </a:t>
+            </a:r>
+            <a:r>
+              <a:rPr lang="en-US" altLang="ko-KR" sz="1050" b="0">
+                <a:solidFill>
+                  <a:srgbClr val="FFA657"/>
+                </a:solidFill>
+                <a:effectLst/>
+                <a:latin typeface="Consolas" panose="020B0609020204030204" pitchFamily="49" charset="0"/>
+              </a:rPr>
+              <a:t>to</a:t>
+            </a:r>
+            <a:r>
+              <a:rPr lang="en-US" altLang="ko-KR" sz="1050" b="0">
+                <a:solidFill>
+                  <a:srgbClr val="BBBEBF"/>
+                </a:solidFill>
+                <a:effectLst/>
+                <a:latin typeface="Consolas" panose="020B0609020204030204" pitchFamily="49" charset="0"/>
+              </a:rPr>
+              <a:t>;</a:t>
+            </a:r>
+          </a:p>
+          <a:p>
+            <a:pPr>
+              <a:lnSpc>
+                <a:spcPts val="1425"/>
+              </a:lnSpc>
+              <a:buNone/>
+            </a:pPr>
+            <a:r>
+              <a:rPr lang="en-US" altLang="ko-KR" sz="1050" b="0">
+                <a:solidFill>
+                  <a:srgbClr val="BBBEBF"/>
+                </a:solidFill>
+                <a:effectLst/>
+                <a:latin typeface="Consolas" panose="020B0609020204030204" pitchFamily="49" charset="0"/>
+              </a:rPr>
+              <a:t>        </a:t>
+            </a:r>
+            <a:r>
+              <a:rPr lang="en-US" altLang="ko-KR" sz="1050" b="0">
+                <a:solidFill>
+                  <a:srgbClr val="79C0FF"/>
+                </a:solidFill>
+                <a:effectLst/>
+                <a:latin typeface="Consolas" panose="020B0609020204030204" pitchFamily="49" charset="0"/>
+              </a:rPr>
+              <a:t>this</a:t>
+            </a:r>
+            <a:r>
+              <a:rPr lang="en-US" altLang="ko-KR" sz="1050" b="0">
+                <a:solidFill>
+                  <a:srgbClr val="BBBEBF"/>
+                </a:solidFill>
+                <a:effectLst/>
+                <a:latin typeface="Consolas" panose="020B0609020204030204" pitchFamily="49" charset="0"/>
+              </a:rPr>
+              <a:t>.</a:t>
+            </a:r>
+            <a:r>
+              <a:rPr lang="en-US" altLang="ko-KR" sz="1050" b="0">
+                <a:solidFill>
+                  <a:srgbClr val="C9D1D9"/>
+                </a:solidFill>
+                <a:effectLst/>
+                <a:latin typeface="Consolas" panose="020B0609020204030204" pitchFamily="49" charset="0"/>
+              </a:rPr>
+              <a:t>subject</a:t>
+            </a:r>
+            <a:r>
+              <a:rPr lang="en-US" altLang="ko-KR" sz="1050" b="0">
+                <a:solidFill>
+                  <a:srgbClr val="BBBEBF"/>
+                </a:solidFill>
+                <a:effectLst/>
+                <a:latin typeface="Consolas" panose="020B0609020204030204" pitchFamily="49" charset="0"/>
+              </a:rPr>
+              <a:t> </a:t>
+            </a:r>
+            <a:r>
+              <a:rPr lang="en-US" altLang="ko-KR" sz="1050" b="0">
+                <a:solidFill>
+                  <a:srgbClr val="D4D4D4"/>
+                </a:solidFill>
+                <a:effectLst/>
+                <a:latin typeface="Consolas" panose="020B0609020204030204" pitchFamily="49" charset="0"/>
+              </a:rPr>
+              <a:t>=</a:t>
+            </a:r>
+            <a:r>
+              <a:rPr lang="en-US" altLang="ko-KR" sz="1050" b="0">
+                <a:solidFill>
+                  <a:srgbClr val="BBBEBF"/>
+                </a:solidFill>
+                <a:effectLst/>
+                <a:latin typeface="Consolas" panose="020B0609020204030204" pitchFamily="49" charset="0"/>
+              </a:rPr>
+              <a:t> </a:t>
+            </a:r>
+            <a:r>
+              <a:rPr lang="en-US" altLang="ko-KR" sz="1050" b="0">
+                <a:solidFill>
+                  <a:srgbClr val="FFA657"/>
+                </a:solidFill>
+                <a:effectLst/>
+                <a:latin typeface="Consolas" panose="020B0609020204030204" pitchFamily="49" charset="0"/>
+              </a:rPr>
+              <a:t>subject</a:t>
+            </a:r>
+            <a:r>
+              <a:rPr lang="en-US" altLang="ko-KR" sz="1050" b="0">
+                <a:solidFill>
+                  <a:srgbClr val="BBBEBF"/>
+                </a:solidFill>
+                <a:effectLst/>
+                <a:latin typeface="Consolas" panose="020B0609020204030204" pitchFamily="49" charset="0"/>
+              </a:rPr>
+              <a:t>;</a:t>
+            </a:r>
+          </a:p>
+          <a:p>
+            <a:pPr>
+              <a:lnSpc>
+                <a:spcPts val="1425"/>
+              </a:lnSpc>
+              <a:buNone/>
+            </a:pPr>
+            <a:r>
+              <a:rPr lang="en-US" altLang="ko-KR" sz="1050" b="0">
+                <a:solidFill>
+                  <a:srgbClr val="BBBEBF"/>
+                </a:solidFill>
+                <a:effectLst/>
+                <a:latin typeface="Consolas" panose="020B0609020204030204" pitchFamily="49" charset="0"/>
+              </a:rPr>
+              <a:t>        </a:t>
+            </a:r>
+            <a:r>
+              <a:rPr lang="en-US" altLang="ko-KR" sz="1050" b="0">
+                <a:solidFill>
+                  <a:srgbClr val="79C0FF"/>
+                </a:solidFill>
+                <a:effectLst/>
+                <a:latin typeface="Consolas" panose="020B0609020204030204" pitchFamily="49" charset="0"/>
+              </a:rPr>
+              <a:t>this</a:t>
+            </a:r>
+            <a:r>
+              <a:rPr lang="en-US" altLang="ko-KR" sz="1050" b="0">
+                <a:solidFill>
+                  <a:srgbClr val="BBBEBF"/>
+                </a:solidFill>
+                <a:effectLst/>
+                <a:latin typeface="Consolas" panose="020B0609020204030204" pitchFamily="49" charset="0"/>
+              </a:rPr>
+              <a:t>.</a:t>
+            </a:r>
+            <a:r>
+              <a:rPr lang="en-US" altLang="ko-KR" sz="1050" b="0">
+                <a:solidFill>
+                  <a:srgbClr val="C9D1D9"/>
+                </a:solidFill>
+                <a:effectLst/>
+                <a:latin typeface="Consolas" panose="020B0609020204030204" pitchFamily="49" charset="0"/>
+              </a:rPr>
+              <a:t>body</a:t>
+            </a:r>
+            <a:r>
+              <a:rPr lang="en-US" altLang="ko-KR" sz="1050" b="0">
+                <a:solidFill>
+                  <a:srgbClr val="BBBEBF"/>
+                </a:solidFill>
+                <a:effectLst/>
+                <a:latin typeface="Consolas" panose="020B0609020204030204" pitchFamily="49" charset="0"/>
+              </a:rPr>
+              <a:t> </a:t>
+            </a:r>
+            <a:r>
+              <a:rPr lang="en-US" altLang="ko-KR" sz="1050" b="0">
+                <a:solidFill>
+                  <a:srgbClr val="D4D4D4"/>
+                </a:solidFill>
+                <a:effectLst/>
+                <a:latin typeface="Consolas" panose="020B0609020204030204" pitchFamily="49" charset="0"/>
+              </a:rPr>
+              <a:t>=</a:t>
+            </a:r>
+            <a:r>
+              <a:rPr lang="en-US" altLang="ko-KR" sz="1050" b="0">
+                <a:solidFill>
+                  <a:srgbClr val="BBBEBF"/>
+                </a:solidFill>
+                <a:effectLst/>
+                <a:latin typeface="Consolas" panose="020B0609020204030204" pitchFamily="49" charset="0"/>
+              </a:rPr>
+              <a:t> </a:t>
+            </a:r>
+            <a:r>
+              <a:rPr lang="en-US" altLang="ko-KR" sz="1050" b="0">
+                <a:solidFill>
+                  <a:srgbClr val="FFA657"/>
+                </a:solidFill>
+                <a:effectLst/>
+                <a:latin typeface="Consolas" panose="020B0609020204030204" pitchFamily="49" charset="0"/>
+              </a:rPr>
+              <a:t>body</a:t>
+            </a:r>
+            <a:r>
+              <a:rPr lang="en-US" altLang="ko-KR" sz="1050" b="0">
+                <a:solidFill>
+                  <a:srgbClr val="BBBEBF"/>
+                </a:solidFill>
+                <a:effectLst/>
+                <a:latin typeface="Consolas" panose="020B0609020204030204" pitchFamily="49" charset="0"/>
+              </a:rPr>
+              <a:t>;</a:t>
+            </a:r>
+          </a:p>
+          <a:p>
+            <a:pPr>
+              <a:lnSpc>
+                <a:spcPts val="1425"/>
+              </a:lnSpc>
+              <a:buNone/>
+            </a:pPr>
+            <a:r>
+              <a:rPr lang="en-US" altLang="ko-KR" sz="1050" b="0">
+                <a:solidFill>
+                  <a:srgbClr val="BBBEBF"/>
+                </a:solidFill>
+                <a:effectLst/>
+                <a:latin typeface="Consolas" panose="020B0609020204030204" pitchFamily="49" charset="0"/>
+              </a:rPr>
+              <a:t>    }</a:t>
+            </a:r>
+            <a:br>
+              <a:rPr lang="en-US" altLang="ko-KR" sz="1050" b="0">
+                <a:solidFill>
+                  <a:srgbClr val="BBBEBF"/>
+                </a:solidFill>
+                <a:effectLst/>
+                <a:latin typeface="Consolas" panose="020B0609020204030204" pitchFamily="49" charset="0"/>
+              </a:rPr>
+            </a:br>
+            <a:endParaRPr lang="en-US" altLang="ko-KR" sz="1050" b="0">
+              <a:solidFill>
+                <a:srgbClr val="BBBEBF"/>
+              </a:solidFill>
+              <a:effectLst/>
+              <a:latin typeface="Consolas" panose="020B0609020204030204" pitchFamily="49" charset="0"/>
+            </a:endParaRPr>
+          </a:p>
+        </p:txBody>
+      </p:sp>
+      <p:sp>
+        <p:nvSpPr>
+          <p:cNvPr id="6" name="TextBox 5">
+            <a:extLst>
+              <a:ext uri="{FF2B5EF4-FFF2-40B4-BE49-F238E27FC236}">
+                <a16:creationId xmlns:a16="http://schemas.microsoft.com/office/drawing/2014/main" id="{1C1D8930-A25E-1DC5-BB14-0A424F29A08A}"/>
+              </a:ext>
+            </a:extLst>
+          </p:cNvPr>
+          <p:cNvSpPr txBox="1"/>
+          <p:nvPr/>
+        </p:nvSpPr>
+        <p:spPr>
+          <a:xfrm>
+            <a:off x="6796278" y="1871706"/>
+            <a:ext cx="5237226" cy="4568815"/>
+          </a:xfrm>
+          <a:prstGeom prst="rect">
+            <a:avLst/>
+          </a:prstGeom>
+          <a:solidFill>
+            <a:schemeClr val="tx1"/>
+          </a:solidFill>
+        </p:spPr>
+        <p:txBody>
+          <a:bodyPr wrap="square">
+            <a:spAutoFit/>
+          </a:bodyPr>
+          <a:lstStyle/>
+          <a:p>
+            <a:pPr>
+              <a:lnSpc>
+                <a:spcPts val="1425"/>
+              </a:lnSpc>
+              <a:buNone/>
+            </a:pPr>
+            <a:r>
+              <a:rPr lang="en-US" altLang="ko-KR" sz="1000" b="0">
+                <a:solidFill>
+                  <a:srgbClr val="BBBEBF"/>
+                </a:solidFill>
+                <a:effectLst/>
+                <a:latin typeface="Consolas" panose="020B0609020204030204" pitchFamily="49" charset="0"/>
+              </a:rPr>
+              <a:t>    </a:t>
+            </a:r>
+            <a:r>
+              <a:rPr lang="en-US" altLang="ko-KR" sz="1000" b="0">
+                <a:solidFill>
+                  <a:srgbClr val="569CD6"/>
+                </a:solidFill>
+                <a:effectLst/>
+                <a:latin typeface="Consolas" panose="020B0609020204030204" pitchFamily="49" charset="0"/>
+              </a:rPr>
+              <a:t>public</a:t>
+            </a:r>
+            <a:r>
+              <a:rPr lang="en-US" altLang="ko-KR" sz="1000" b="0">
+                <a:solidFill>
+                  <a:srgbClr val="BBBEBF"/>
+                </a:solidFill>
+                <a:effectLst/>
+                <a:latin typeface="Consolas" panose="020B0609020204030204" pitchFamily="49" charset="0"/>
+              </a:rPr>
+              <a:t> </a:t>
+            </a:r>
+            <a:r>
+              <a:rPr lang="en-US" altLang="ko-KR" sz="1000" b="0">
+                <a:solidFill>
+                  <a:srgbClr val="4EC9B0"/>
+                </a:solidFill>
+                <a:effectLst/>
+                <a:latin typeface="Consolas" panose="020B0609020204030204" pitchFamily="49" charset="0"/>
+              </a:rPr>
+              <a:t>String</a:t>
+            </a:r>
+            <a:r>
+              <a:rPr lang="en-US" altLang="ko-KR" sz="1000" b="0">
+                <a:solidFill>
+                  <a:srgbClr val="BBBEBF"/>
+                </a:solidFill>
+                <a:effectLst/>
+                <a:latin typeface="Consolas" panose="020B0609020204030204" pitchFamily="49" charset="0"/>
+              </a:rPr>
+              <a:t> </a:t>
+            </a:r>
+            <a:r>
+              <a:rPr lang="en-US" altLang="ko-KR" sz="1000" b="0">
+                <a:solidFill>
+                  <a:srgbClr val="D2A8FF"/>
+                </a:solidFill>
+                <a:effectLst/>
+                <a:latin typeface="Consolas" panose="020B0609020204030204" pitchFamily="49" charset="0"/>
+              </a:rPr>
+              <a:t>getFrom</a:t>
+            </a:r>
+            <a:r>
+              <a:rPr lang="en-US" altLang="ko-KR" sz="1000" b="0">
+                <a:solidFill>
+                  <a:srgbClr val="BBBEBF"/>
+                </a:solidFill>
+                <a:effectLst/>
+                <a:latin typeface="Consolas" panose="020B0609020204030204" pitchFamily="49" charset="0"/>
+              </a:rPr>
+              <a:t>() {</a:t>
+            </a:r>
+          </a:p>
+          <a:p>
+            <a:pPr>
+              <a:lnSpc>
+                <a:spcPts val="1425"/>
+              </a:lnSpc>
+              <a:buNone/>
+            </a:pPr>
+            <a:r>
+              <a:rPr lang="en-US" altLang="ko-KR" sz="1000" b="0">
+                <a:solidFill>
+                  <a:srgbClr val="BBBEBF"/>
+                </a:solidFill>
+                <a:effectLst/>
+                <a:latin typeface="Consolas" panose="020B0609020204030204" pitchFamily="49" charset="0"/>
+              </a:rPr>
+              <a:t>        </a:t>
+            </a:r>
+            <a:r>
+              <a:rPr lang="en-US" altLang="ko-KR" sz="1000" b="0">
+                <a:solidFill>
+                  <a:srgbClr val="C586C0"/>
+                </a:solidFill>
+                <a:effectLst/>
+                <a:latin typeface="Consolas" panose="020B0609020204030204" pitchFamily="49" charset="0"/>
+              </a:rPr>
+              <a:t>return</a:t>
+            </a:r>
+            <a:r>
+              <a:rPr lang="en-US" altLang="ko-KR" sz="1000" b="0">
+                <a:solidFill>
+                  <a:srgbClr val="BBBEBF"/>
+                </a:solidFill>
+                <a:effectLst/>
+                <a:latin typeface="Consolas" panose="020B0609020204030204" pitchFamily="49" charset="0"/>
+              </a:rPr>
+              <a:t> </a:t>
+            </a:r>
+            <a:r>
+              <a:rPr lang="en-US" altLang="ko-KR" sz="1000" b="0">
+                <a:solidFill>
+                  <a:srgbClr val="C9D1D9"/>
+                </a:solidFill>
+                <a:effectLst/>
+                <a:latin typeface="Consolas" panose="020B0609020204030204" pitchFamily="49" charset="0"/>
+              </a:rPr>
+              <a:t>from</a:t>
+            </a:r>
+            <a:r>
+              <a:rPr lang="en-US" altLang="ko-KR" sz="1000" b="0">
+                <a:solidFill>
+                  <a:srgbClr val="BBBEBF"/>
+                </a:solidFill>
+                <a:effectLst/>
+                <a:latin typeface="Consolas" panose="020B0609020204030204" pitchFamily="49" charset="0"/>
+              </a:rPr>
+              <a:t>;</a:t>
+            </a:r>
+          </a:p>
+          <a:p>
+            <a:pPr>
+              <a:lnSpc>
+                <a:spcPts val="1425"/>
+              </a:lnSpc>
+              <a:buNone/>
+            </a:pPr>
+            <a:r>
+              <a:rPr lang="en-US" altLang="ko-KR" sz="1000" b="0">
+                <a:solidFill>
+                  <a:srgbClr val="BBBEBF"/>
+                </a:solidFill>
+                <a:effectLst/>
+                <a:latin typeface="Consolas" panose="020B0609020204030204" pitchFamily="49" charset="0"/>
+              </a:rPr>
+              <a:t>    }</a:t>
+            </a:r>
+          </a:p>
+          <a:p>
+            <a:pPr>
+              <a:lnSpc>
+                <a:spcPts val="1425"/>
+              </a:lnSpc>
+              <a:buNone/>
+            </a:pPr>
+            <a:endParaRPr lang="en-US" altLang="ko-KR" sz="1000" b="0">
+              <a:solidFill>
+                <a:srgbClr val="BBBEBF"/>
+              </a:solidFill>
+              <a:effectLst/>
+              <a:latin typeface="Consolas" panose="020B0609020204030204" pitchFamily="49" charset="0"/>
+            </a:endParaRPr>
+          </a:p>
+          <a:p>
+            <a:pPr>
+              <a:lnSpc>
+                <a:spcPts val="1425"/>
+              </a:lnSpc>
+              <a:buNone/>
+            </a:pPr>
+            <a:r>
+              <a:rPr lang="en-US" altLang="ko-KR" sz="1000" b="0">
+                <a:solidFill>
+                  <a:srgbClr val="BBBEBF"/>
+                </a:solidFill>
+                <a:effectLst/>
+                <a:latin typeface="Consolas" panose="020B0609020204030204" pitchFamily="49" charset="0"/>
+              </a:rPr>
+              <a:t>    </a:t>
+            </a:r>
+            <a:r>
+              <a:rPr lang="en-US" altLang="ko-KR" sz="1000" b="0">
+                <a:solidFill>
+                  <a:srgbClr val="569CD6"/>
+                </a:solidFill>
+                <a:effectLst/>
+                <a:latin typeface="Consolas" panose="020B0609020204030204" pitchFamily="49" charset="0"/>
+              </a:rPr>
+              <a:t>public</a:t>
+            </a:r>
+            <a:r>
+              <a:rPr lang="en-US" altLang="ko-KR" sz="1000" b="0">
+                <a:solidFill>
+                  <a:srgbClr val="BBBEBF"/>
+                </a:solidFill>
+                <a:effectLst/>
+                <a:latin typeface="Consolas" panose="020B0609020204030204" pitchFamily="49" charset="0"/>
+              </a:rPr>
+              <a:t> </a:t>
+            </a:r>
+            <a:r>
+              <a:rPr lang="en-US" altLang="ko-KR" sz="1000" b="0">
+                <a:solidFill>
+                  <a:srgbClr val="4EC9B0"/>
+                </a:solidFill>
+                <a:effectLst/>
+                <a:latin typeface="Consolas" panose="020B0609020204030204" pitchFamily="49" charset="0"/>
+              </a:rPr>
+              <a:t>String</a:t>
+            </a:r>
+            <a:r>
+              <a:rPr lang="en-US" altLang="ko-KR" sz="1000" b="0">
+                <a:solidFill>
+                  <a:srgbClr val="BBBEBF"/>
+                </a:solidFill>
+                <a:effectLst/>
+                <a:latin typeface="Consolas" panose="020B0609020204030204" pitchFamily="49" charset="0"/>
+              </a:rPr>
+              <a:t> </a:t>
+            </a:r>
+            <a:r>
+              <a:rPr lang="en-US" altLang="ko-KR" sz="1000" b="0">
+                <a:solidFill>
+                  <a:srgbClr val="D2A8FF"/>
+                </a:solidFill>
+                <a:effectLst/>
+                <a:latin typeface="Consolas" panose="020B0609020204030204" pitchFamily="49" charset="0"/>
+              </a:rPr>
+              <a:t>getTo</a:t>
+            </a:r>
+            <a:r>
+              <a:rPr lang="en-US" altLang="ko-KR" sz="1000" b="0">
+                <a:solidFill>
+                  <a:srgbClr val="BBBEBF"/>
+                </a:solidFill>
+                <a:effectLst/>
+                <a:latin typeface="Consolas" panose="020B0609020204030204" pitchFamily="49" charset="0"/>
+              </a:rPr>
+              <a:t>() {</a:t>
+            </a:r>
+          </a:p>
+          <a:p>
+            <a:pPr>
+              <a:lnSpc>
+                <a:spcPts val="1425"/>
+              </a:lnSpc>
+              <a:buNone/>
+            </a:pPr>
+            <a:r>
+              <a:rPr lang="en-US" altLang="ko-KR" sz="1000" b="0">
+                <a:solidFill>
+                  <a:srgbClr val="BBBEBF"/>
+                </a:solidFill>
+                <a:effectLst/>
+                <a:latin typeface="Consolas" panose="020B0609020204030204" pitchFamily="49" charset="0"/>
+              </a:rPr>
+              <a:t>        </a:t>
+            </a:r>
+            <a:r>
+              <a:rPr lang="en-US" altLang="ko-KR" sz="1000" b="0">
+                <a:solidFill>
+                  <a:srgbClr val="C586C0"/>
+                </a:solidFill>
+                <a:effectLst/>
+                <a:latin typeface="Consolas" panose="020B0609020204030204" pitchFamily="49" charset="0"/>
+              </a:rPr>
+              <a:t>return</a:t>
+            </a:r>
+            <a:r>
+              <a:rPr lang="en-US" altLang="ko-KR" sz="1000" b="0">
+                <a:solidFill>
+                  <a:srgbClr val="BBBEBF"/>
+                </a:solidFill>
+                <a:effectLst/>
+                <a:latin typeface="Consolas" panose="020B0609020204030204" pitchFamily="49" charset="0"/>
+              </a:rPr>
+              <a:t> </a:t>
+            </a:r>
+            <a:r>
+              <a:rPr lang="en-US" altLang="ko-KR" sz="1000" b="0">
+                <a:solidFill>
+                  <a:srgbClr val="C9D1D9"/>
+                </a:solidFill>
+                <a:effectLst/>
+                <a:latin typeface="Consolas" panose="020B0609020204030204" pitchFamily="49" charset="0"/>
+              </a:rPr>
+              <a:t>to</a:t>
+            </a:r>
+            <a:r>
+              <a:rPr lang="en-US" altLang="ko-KR" sz="1000" b="0">
+                <a:solidFill>
+                  <a:srgbClr val="BBBEBF"/>
+                </a:solidFill>
+                <a:effectLst/>
+                <a:latin typeface="Consolas" panose="020B0609020204030204" pitchFamily="49" charset="0"/>
+              </a:rPr>
+              <a:t>;</a:t>
+            </a:r>
+          </a:p>
+          <a:p>
+            <a:pPr>
+              <a:lnSpc>
+                <a:spcPts val="1425"/>
+              </a:lnSpc>
+              <a:buNone/>
+            </a:pPr>
+            <a:r>
+              <a:rPr lang="en-US" altLang="ko-KR" sz="1000" b="0">
+                <a:solidFill>
+                  <a:srgbClr val="BBBEBF"/>
+                </a:solidFill>
+                <a:effectLst/>
+                <a:latin typeface="Consolas" panose="020B0609020204030204" pitchFamily="49" charset="0"/>
+              </a:rPr>
+              <a:t>    }</a:t>
+            </a:r>
+          </a:p>
+          <a:p>
+            <a:pPr>
+              <a:lnSpc>
+                <a:spcPts val="1425"/>
+              </a:lnSpc>
+              <a:buNone/>
+            </a:pPr>
+            <a:endParaRPr lang="en-US" altLang="ko-KR" sz="1000" b="0">
+              <a:solidFill>
+                <a:srgbClr val="BBBEBF"/>
+              </a:solidFill>
+              <a:effectLst/>
+              <a:latin typeface="Consolas" panose="020B0609020204030204" pitchFamily="49" charset="0"/>
+            </a:endParaRPr>
+          </a:p>
+          <a:p>
+            <a:pPr>
+              <a:lnSpc>
+                <a:spcPts val="1425"/>
+              </a:lnSpc>
+              <a:buNone/>
+            </a:pPr>
+            <a:r>
+              <a:rPr lang="en-US" altLang="ko-KR" sz="1000" b="0">
+                <a:solidFill>
+                  <a:srgbClr val="BBBEBF"/>
+                </a:solidFill>
+                <a:effectLst/>
+                <a:latin typeface="Consolas" panose="020B0609020204030204" pitchFamily="49" charset="0"/>
+              </a:rPr>
+              <a:t>    </a:t>
+            </a:r>
+            <a:r>
+              <a:rPr lang="en-US" altLang="ko-KR" sz="1000" b="0">
+                <a:solidFill>
+                  <a:srgbClr val="569CD6"/>
+                </a:solidFill>
+                <a:effectLst/>
+                <a:latin typeface="Consolas" panose="020B0609020204030204" pitchFamily="49" charset="0"/>
+              </a:rPr>
+              <a:t>public</a:t>
+            </a:r>
+            <a:r>
+              <a:rPr lang="en-US" altLang="ko-KR" sz="1000" b="0">
+                <a:solidFill>
+                  <a:srgbClr val="BBBEBF"/>
+                </a:solidFill>
+                <a:effectLst/>
+                <a:latin typeface="Consolas" panose="020B0609020204030204" pitchFamily="49" charset="0"/>
+              </a:rPr>
+              <a:t> </a:t>
+            </a:r>
+            <a:r>
+              <a:rPr lang="en-US" altLang="ko-KR" sz="1000" b="0">
+                <a:solidFill>
+                  <a:srgbClr val="4EC9B0"/>
+                </a:solidFill>
+                <a:effectLst/>
+                <a:latin typeface="Consolas" panose="020B0609020204030204" pitchFamily="49" charset="0"/>
+              </a:rPr>
+              <a:t>String</a:t>
+            </a:r>
+            <a:r>
+              <a:rPr lang="en-US" altLang="ko-KR" sz="1000" b="0">
+                <a:solidFill>
+                  <a:srgbClr val="BBBEBF"/>
+                </a:solidFill>
+                <a:effectLst/>
+                <a:latin typeface="Consolas" panose="020B0609020204030204" pitchFamily="49" charset="0"/>
+              </a:rPr>
+              <a:t> </a:t>
+            </a:r>
+            <a:r>
+              <a:rPr lang="en-US" altLang="ko-KR" sz="1000" b="0">
+                <a:solidFill>
+                  <a:srgbClr val="D2A8FF"/>
+                </a:solidFill>
+                <a:effectLst/>
+                <a:latin typeface="Consolas" panose="020B0609020204030204" pitchFamily="49" charset="0"/>
+              </a:rPr>
+              <a:t>getSubject</a:t>
+            </a:r>
+            <a:r>
+              <a:rPr lang="en-US" altLang="ko-KR" sz="1000" b="0">
+                <a:solidFill>
+                  <a:srgbClr val="BBBEBF"/>
+                </a:solidFill>
+                <a:effectLst/>
+                <a:latin typeface="Consolas" panose="020B0609020204030204" pitchFamily="49" charset="0"/>
+              </a:rPr>
+              <a:t>() {</a:t>
+            </a:r>
+          </a:p>
+          <a:p>
+            <a:pPr>
+              <a:lnSpc>
+                <a:spcPts val="1425"/>
+              </a:lnSpc>
+              <a:buNone/>
+            </a:pPr>
+            <a:r>
+              <a:rPr lang="en-US" altLang="ko-KR" sz="1000" b="0">
+                <a:solidFill>
+                  <a:srgbClr val="BBBEBF"/>
+                </a:solidFill>
+                <a:effectLst/>
+                <a:latin typeface="Consolas" panose="020B0609020204030204" pitchFamily="49" charset="0"/>
+              </a:rPr>
+              <a:t>        </a:t>
+            </a:r>
+            <a:r>
+              <a:rPr lang="en-US" altLang="ko-KR" sz="1000" b="0">
+                <a:solidFill>
+                  <a:srgbClr val="C586C0"/>
+                </a:solidFill>
+                <a:effectLst/>
+                <a:latin typeface="Consolas" panose="020B0609020204030204" pitchFamily="49" charset="0"/>
+              </a:rPr>
+              <a:t>return</a:t>
+            </a:r>
+            <a:r>
+              <a:rPr lang="en-US" altLang="ko-KR" sz="1000" b="0">
+                <a:solidFill>
+                  <a:srgbClr val="BBBEBF"/>
+                </a:solidFill>
+                <a:effectLst/>
+                <a:latin typeface="Consolas" panose="020B0609020204030204" pitchFamily="49" charset="0"/>
+              </a:rPr>
+              <a:t> </a:t>
+            </a:r>
+            <a:r>
+              <a:rPr lang="en-US" altLang="ko-KR" sz="1000" b="0">
+                <a:solidFill>
+                  <a:srgbClr val="C9D1D9"/>
+                </a:solidFill>
+                <a:effectLst/>
+                <a:latin typeface="Consolas" panose="020B0609020204030204" pitchFamily="49" charset="0"/>
+              </a:rPr>
+              <a:t>subject</a:t>
+            </a:r>
+            <a:r>
+              <a:rPr lang="en-US" altLang="ko-KR" sz="1000" b="0">
+                <a:solidFill>
+                  <a:srgbClr val="BBBEBF"/>
+                </a:solidFill>
+                <a:effectLst/>
+                <a:latin typeface="Consolas" panose="020B0609020204030204" pitchFamily="49" charset="0"/>
+              </a:rPr>
+              <a:t>;</a:t>
+            </a:r>
+          </a:p>
+          <a:p>
+            <a:pPr>
+              <a:lnSpc>
+                <a:spcPts val="1425"/>
+              </a:lnSpc>
+              <a:buNone/>
+            </a:pPr>
+            <a:r>
+              <a:rPr lang="en-US" altLang="ko-KR" sz="1000" b="0">
+                <a:solidFill>
+                  <a:srgbClr val="BBBEBF"/>
+                </a:solidFill>
+                <a:effectLst/>
+                <a:latin typeface="Consolas" panose="020B0609020204030204" pitchFamily="49" charset="0"/>
+              </a:rPr>
+              <a:t>    }</a:t>
+            </a:r>
+          </a:p>
+          <a:p>
+            <a:pPr>
+              <a:lnSpc>
+                <a:spcPts val="1425"/>
+              </a:lnSpc>
+              <a:buNone/>
+            </a:pPr>
+            <a:endParaRPr lang="en-US" altLang="ko-KR" sz="1000" b="0">
+              <a:solidFill>
+                <a:srgbClr val="BBBEBF"/>
+              </a:solidFill>
+              <a:effectLst/>
+              <a:latin typeface="Consolas" panose="020B0609020204030204" pitchFamily="49" charset="0"/>
+            </a:endParaRPr>
+          </a:p>
+          <a:p>
+            <a:pPr>
+              <a:lnSpc>
+                <a:spcPts val="1425"/>
+              </a:lnSpc>
+              <a:buNone/>
+            </a:pPr>
+            <a:r>
+              <a:rPr lang="en-US" altLang="ko-KR" sz="1000" b="0">
+                <a:solidFill>
+                  <a:srgbClr val="BBBEBF"/>
+                </a:solidFill>
+                <a:effectLst/>
+                <a:latin typeface="Consolas" panose="020B0609020204030204" pitchFamily="49" charset="0"/>
+              </a:rPr>
+              <a:t>    </a:t>
+            </a:r>
+            <a:r>
+              <a:rPr lang="en-US" altLang="ko-KR" sz="1000" b="0">
+                <a:solidFill>
+                  <a:srgbClr val="569CD6"/>
+                </a:solidFill>
+                <a:effectLst/>
+                <a:latin typeface="Consolas" panose="020B0609020204030204" pitchFamily="49" charset="0"/>
+              </a:rPr>
+              <a:t>public</a:t>
+            </a:r>
+            <a:r>
+              <a:rPr lang="en-US" altLang="ko-KR" sz="1000" b="0">
+                <a:solidFill>
+                  <a:srgbClr val="BBBEBF"/>
+                </a:solidFill>
+                <a:effectLst/>
+                <a:latin typeface="Consolas" panose="020B0609020204030204" pitchFamily="49" charset="0"/>
+              </a:rPr>
+              <a:t> </a:t>
+            </a:r>
+            <a:r>
+              <a:rPr lang="en-US" altLang="ko-KR" sz="1000" b="0">
+                <a:solidFill>
+                  <a:srgbClr val="4EC9B0"/>
+                </a:solidFill>
+                <a:effectLst/>
+                <a:latin typeface="Consolas" panose="020B0609020204030204" pitchFamily="49" charset="0"/>
+              </a:rPr>
+              <a:t>String</a:t>
+            </a:r>
+            <a:r>
+              <a:rPr lang="en-US" altLang="ko-KR" sz="1000" b="0">
+                <a:solidFill>
+                  <a:srgbClr val="BBBEBF"/>
+                </a:solidFill>
+                <a:effectLst/>
+                <a:latin typeface="Consolas" panose="020B0609020204030204" pitchFamily="49" charset="0"/>
+              </a:rPr>
+              <a:t> </a:t>
+            </a:r>
+            <a:r>
+              <a:rPr lang="en-US" altLang="ko-KR" sz="1000" b="0">
+                <a:solidFill>
+                  <a:srgbClr val="D2A8FF"/>
+                </a:solidFill>
+                <a:effectLst/>
+                <a:latin typeface="Consolas" panose="020B0609020204030204" pitchFamily="49" charset="0"/>
+              </a:rPr>
+              <a:t>getBody</a:t>
+            </a:r>
+            <a:r>
+              <a:rPr lang="en-US" altLang="ko-KR" sz="1000" b="0">
+                <a:solidFill>
+                  <a:srgbClr val="BBBEBF"/>
+                </a:solidFill>
+                <a:effectLst/>
+                <a:latin typeface="Consolas" panose="020B0609020204030204" pitchFamily="49" charset="0"/>
+              </a:rPr>
+              <a:t>() {</a:t>
+            </a:r>
+          </a:p>
+          <a:p>
+            <a:pPr>
+              <a:lnSpc>
+                <a:spcPts val="1425"/>
+              </a:lnSpc>
+              <a:buNone/>
+            </a:pPr>
+            <a:r>
+              <a:rPr lang="en-US" altLang="ko-KR" sz="1000" b="0">
+                <a:solidFill>
+                  <a:srgbClr val="BBBEBF"/>
+                </a:solidFill>
+                <a:effectLst/>
+                <a:latin typeface="Consolas" panose="020B0609020204030204" pitchFamily="49" charset="0"/>
+              </a:rPr>
+              <a:t>        </a:t>
+            </a:r>
+            <a:r>
+              <a:rPr lang="en-US" altLang="ko-KR" sz="1000" b="0">
+                <a:solidFill>
+                  <a:srgbClr val="C586C0"/>
+                </a:solidFill>
+                <a:effectLst/>
+                <a:latin typeface="Consolas" panose="020B0609020204030204" pitchFamily="49" charset="0"/>
+              </a:rPr>
+              <a:t>return</a:t>
+            </a:r>
+            <a:r>
+              <a:rPr lang="en-US" altLang="ko-KR" sz="1000" b="0">
+                <a:solidFill>
+                  <a:srgbClr val="BBBEBF"/>
+                </a:solidFill>
+                <a:effectLst/>
+                <a:latin typeface="Consolas" panose="020B0609020204030204" pitchFamily="49" charset="0"/>
+              </a:rPr>
+              <a:t> </a:t>
+            </a:r>
+            <a:r>
+              <a:rPr lang="en-US" altLang="ko-KR" sz="1000" b="0">
+                <a:solidFill>
+                  <a:srgbClr val="C9D1D9"/>
+                </a:solidFill>
+                <a:effectLst/>
+                <a:latin typeface="Consolas" panose="020B0609020204030204" pitchFamily="49" charset="0"/>
+              </a:rPr>
+              <a:t>body</a:t>
+            </a:r>
+            <a:r>
+              <a:rPr lang="en-US" altLang="ko-KR" sz="1000" b="0">
+                <a:solidFill>
+                  <a:srgbClr val="BBBEBF"/>
+                </a:solidFill>
+                <a:effectLst/>
+                <a:latin typeface="Consolas" panose="020B0609020204030204" pitchFamily="49" charset="0"/>
+              </a:rPr>
+              <a:t>;</a:t>
+            </a:r>
+          </a:p>
+          <a:p>
+            <a:pPr>
+              <a:lnSpc>
+                <a:spcPts val="1425"/>
+              </a:lnSpc>
+              <a:buNone/>
+            </a:pPr>
+            <a:r>
+              <a:rPr lang="en-US" altLang="ko-KR" sz="1000" b="0">
+                <a:solidFill>
+                  <a:srgbClr val="BBBEBF"/>
+                </a:solidFill>
+                <a:effectLst/>
+                <a:latin typeface="Consolas" panose="020B0609020204030204" pitchFamily="49" charset="0"/>
+              </a:rPr>
+              <a:t>    }</a:t>
+            </a:r>
+          </a:p>
+          <a:p>
+            <a:pPr>
+              <a:lnSpc>
+                <a:spcPts val="1425"/>
+              </a:lnSpc>
+              <a:buNone/>
+            </a:pPr>
+            <a:r>
+              <a:rPr lang="en-US" altLang="ko-KR" sz="1000" b="0">
+                <a:solidFill>
+                  <a:srgbClr val="BBBEBF"/>
+                </a:solidFill>
+                <a:effectLst/>
+                <a:latin typeface="Consolas" panose="020B0609020204030204" pitchFamily="49" charset="0"/>
+              </a:rPr>
+              <a:t>    </a:t>
+            </a:r>
+          </a:p>
+          <a:p>
+            <a:pPr>
+              <a:lnSpc>
+                <a:spcPts val="1425"/>
+              </a:lnSpc>
+              <a:buNone/>
+            </a:pPr>
+            <a:r>
+              <a:rPr lang="en-US" altLang="ko-KR" sz="1000" b="0">
+                <a:solidFill>
+                  <a:srgbClr val="BBBEBF"/>
+                </a:solidFill>
+                <a:effectLst/>
+                <a:latin typeface="Consolas" panose="020B0609020204030204" pitchFamily="49" charset="0"/>
+              </a:rPr>
+              <a:t>    </a:t>
+            </a:r>
+            <a:r>
+              <a:rPr lang="en-US" altLang="ko-KR" sz="1000" b="0">
+                <a:solidFill>
+                  <a:srgbClr val="569CD6"/>
+                </a:solidFill>
+                <a:effectLst/>
+                <a:latin typeface="Consolas" panose="020B0609020204030204" pitchFamily="49" charset="0"/>
+              </a:rPr>
+              <a:t>public</a:t>
+            </a:r>
+            <a:r>
+              <a:rPr lang="en-US" altLang="ko-KR" sz="1000" b="0">
+                <a:solidFill>
+                  <a:srgbClr val="BBBEBF"/>
+                </a:solidFill>
+                <a:effectLst/>
+                <a:latin typeface="Consolas" panose="020B0609020204030204" pitchFamily="49" charset="0"/>
+              </a:rPr>
+              <a:t> </a:t>
+            </a:r>
+            <a:r>
+              <a:rPr lang="en-US" altLang="ko-KR" sz="1000" b="0">
+                <a:solidFill>
+                  <a:srgbClr val="569CD6"/>
+                </a:solidFill>
+                <a:effectLst/>
+                <a:latin typeface="Consolas" panose="020B0609020204030204" pitchFamily="49" charset="0"/>
+              </a:rPr>
+              <a:t>static</a:t>
+            </a:r>
+            <a:r>
+              <a:rPr lang="en-US" altLang="ko-KR" sz="1000" b="0">
+                <a:solidFill>
+                  <a:srgbClr val="BBBEBF"/>
+                </a:solidFill>
+                <a:effectLst/>
+                <a:latin typeface="Consolas" panose="020B0609020204030204" pitchFamily="49" charset="0"/>
+              </a:rPr>
+              <a:t> </a:t>
+            </a:r>
+            <a:r>
+              <a:rPr lang="en-US" altLang="ko-KR" sz="1000" b="0">
+                <a:solidFill>
+                  <a:srgbClr val="4EC9B0"/>
+                </a:solidFill>
+                <a:effectLst/>
+                <a:latin typeface="Consolas" panose="020B0609020204030204" pitchFamily="49" charset="0"/>
+              </a:rPr>
+              <a:t>EmailSendMessage</a:t>
+            </a:r>
+            <a:r>
+              <a:rPr lang="en-US" altLang="ko-KR" sz="1000" b="0">
+                <a:solidFill>
+                  <a:srgbClr val="BBBEBF"/>
+                </a:solidFill>
+                <a:effectLst/>
+                <a:latin typeface="Consolas" panose="020B0609020204030204" pitchFamily="49" charset="0"/>
+              </a:rPr>
+              <a:t> </a:t>
+            </a:r>
+            <a:r>
+              <a:rPr lang="en-US" altLang="ko-KR" sz="1000" b="0">
+                <a:solidFill>
+                  <a:srgbClr val="D2A8FF"/>
+                </a:solidFill>
+                <a:effectLst/>
+                <a:latin typeface="Consolas" panose="020B0609020204030204" pitchFamily="49" charset="0"/>
+              </a:rPr>
+              <a:t>fromJson</a:t>
+            </a:r>
+            <a:r>
+              <a:rPr lang="en-US" altLang="ko-KR" sz="1000" b="0">
+                <a:solidFill>
+                  <a:srgbClr val="BBBEBF"/>
+                </a:solidFill>
+                <a:effectLst/>
+                <a:latin typeface="Consolas" panose="020B0609020204030204" pitchFamily="49" charset="0"/>
+              </a:rPr>
+              <a:t>(</a:t>
+            </a:r>
+            <a:r>
+              <a:rPr lang="en-US" altLang="ko-KR" sz="1000" b="0">
+                <a:solidFill>
+                  <a:srgbClr val="4EC9B0"/>
+                </a:solidFill>
+                <a:effectLst/>
+                <a:latin typeface="Consolas" panose="020B0609020204030204" pitchFamily="49" charset="0"/>
+              </a:rPr>
+              <a:t>String</a:t>
+            </a:r>
+            <a:r>
+              <a:rPr lang="en-US" altLang="ko-KR" sz="1000" b="0">
+                <a:solidFill>
+                  <a:srgbClr val="BBBEBF"/>
+                </a:solidFill>
+                <a:effectLst/>
+                <a:latin typeface="Consolas" panose="020B0609020204030204" pitchFamily="49" charset="0"/>
+              </a:rPr>
+              <a:t> </a:t>
+            </a:r>
+            <a:r>
+              <a:rPr lang="en-US" altLang="ko-KR" sz="1000" b="0">
+                <a:solidFill>
+                  <a:srgbClr val="FFA657"/>
+                </a:solidFill>
+                <a:effectLst/>
+                <a:latin typeface="Consolas" panose="020B0609020204030204" pitchFamily="49" charset="0"/>
+              </a:rPr>
+              <a:t>json</a:t>
+            </a:r>
+            <a:r>
+              <a:rPr lang="en-US" altLang="ko-KR" sz="1000" b="0">
+                <a:solidFill>
+                  <a:srgbClr val="BBBEBF"/>
+                </a:solidFill>
+                <a:effectLst/>
+                <a:latin typeface="Consolas" panose="020B0609020204030204" pitchFamily="49" charset="0"/>
+              </a:rPr>
+              <a:t>){</a:t>
+            </a:r>
+          </a:p>
+          <a:p>
+            <a:pPr>
+              <a:lnSpc>
+                <a:spcPts val="1425"/>
+              </a:lnSpc>
+              <a:buNone/>
+            </a:pPr>
+            <a:r>
+              <a:rPr lang="en-US" altLang="ko-KR" sz="1000" b="0">
+                <a:solidFill>
+                  <a:srgbClr val="BBBEBF"/>
+                </a:solidFill>
+                <a:effectLst/>
+                <a:latin typeface="Consolas" panose="020B0609020204030204" pitchFamily="49" charset="0"/>
+              </a:rPr>
+              <a:t>        </a:t>
+            </a:r>
+            <a:r>
+              <a:rPr lang="en-US" altLang="ko-KR" sz="1000" b="0">
+                <a:solidFill>
+                  <a:srgbClr val="C586C0"/>
+                </a:solidFill>
+                <a:effectLst/>
+                <a:latin typeface="Consolas" panose="020B0609020204030204" pitchFamily="49" charset="0"/>
+              </a:rPr>
+              <a:t>try</a:t>
+            </a:r>
+            <a:r>
+              <a:rPr lang="en-US" altLang="ko-KR" sz="1000" b="0">
+                <a:solidFill>
+                  <a:srgbClr val="BBBEBF"/>
+                </a:solidFill>
+                <a:effectLst/>
+                <a:latin typeface="Consolas" panose="020B0609020204030204" pitchFamily="49" charset="0"/>
+              </a:rPr>
+              <a:t>{</a:t>
+            </a:r>
+          </a:p>
+          <a:p>
+            <a:pPr>
+              <a:lnSpc>
+                <a:spcPts val="1425"/>
+              </a:lnSpc>
+              <a:buNone/>
+            </a:pPr>
+            <a:r>
+              <a:rPr lang="en-US" altLang="ko-KR" sz="1000" b="0">
+                <a:solidFill>
+                  <a:srgbClr val="BBBEBF"/>
+                </a:solidFill>
+                <a:effectLst/>
+                <a:latin typeface="Consolas" panose="020B0609020204030204" pitchFamily="49" charset="0"/>
+              </a:rPr>
+              <a:t>            </a:t>
+            </a:r>
+            <a:r>
+              <a:rPr lang="en-US" altLang="ko-KR" sz="1000" b="0">
+                <a:solidFill>
+                  <a:srgbClr val="4EC9B0"/>
+                </a:solidFill>
+                <a:effectLst/>
+                <a:latin typeface="Consolas" panose="020B0609020204030204" pitchFamily="49" charset="0"/>
+              </a:rPr>
+              <a:t>ObjectMapper</a:t>
+            </a:r>
+            <a:r>
+              <a:rPr lang="en-US" altLang="ko-KR" sz="1000" b="0">
+                <a:solidFill>
+                  <a:srgbClr val="FFA657"/>
+                </a:solidFill>
+                <a:effectLst/>
+                <a:latin typeface="Consolas" panose="020B0609020204030204" pitchFamily="49" charset="0"/>
+              </a:rPr>
+              <a:t> </a:t>
+            </a:r>
+            <a:r>
+              <a:rPr lang="en-US" altLang="ko-KR" sz="1000" b="0">
+                <a:solidFill>
+                  <a:srgbClr val="C9D1D9"/>
+                </a:solidFill>
+                <a:effectLst/>
+                <a:latin typeface="Consolas" panose="020B0609020204030204" pitchFamily="49" charset="0"/>
+              </a:rPr>
+              <a:t>objectMapper</a:t>
+            </a:r>
+            <a:r>
+              <a:rPr lang="en-US" altLang="ko-KR" sz="1000" b="0">
+                <a:solidFill>
+                  <a:srgbClr val="FFA657"/>
+                </a:solidFill>
+                <a:effectLst/>
+                <a:latin typeface="Consolas" panose="020B0609020204030204" pitchFamily="49" charset="0"/>
+              </a:rPr>
+              <a:t> </a:t>
+            </a:r>
+            <a:r>
+              <a:rPr lang="en-US" altLang="ko-KR" sz="1000" b="0">
+                <a:solidFill>
+                  <a:srgbClr val="D4D4D4"/>
+                </a:solidFill>
+                <a:effectLst/>
+                <a:latin typeface="Consolas" panose="020B0609020204030204" pitchFamily="49" charset="0"/>
+              </a:rPr>
+              <a:t>=</a:t>
+            </a:r>
+            <a:r>
+              <a:rPr lang="en-US" altLang="ko-KR" sz="1000" b="0">
+                <a:solidFill>
+                  <a:srgbClr val="BBBEBF"/>
+                </a:solidFill>
+                <a:effectLst/>
+                <a:latin typeface="Consolas" panose="020B0609020204030204" pitchFamily="49" charset="0"/>
+              </a:rPr>
+              <a:t> </a:t>
+            </a:r>
+            <a:r>
+              <a:rPr lang="en-US" altLang="ko-KR" sz="1000" b="0">
+                <a:solidFill>
+                  <a:srgbClr val="C586C0"/>
+                </a:solidFill>
+                <a:effectLst/>
+                <a:latin typeface="Consolas" panose="020B0609020204030204" pitchFamily="49" charset="0"/>
+              </a:rPr>
+              <a:t>new</a:t>
+            </a:r>
+            <a:r>
+              <a:rPr lang="en-US" altLang="ko-KR" sz="1000" b="0">
+                <a:solidFill>
+                  <a:srgbClr val="BBBEBF"/>
+                </a:solidFill>
+                <a:effectLst/>
+                <a:latin typeface="Consolas" panose="020B0609020204030204" pitchFamily="49" charset="0"/>
+              </a:rPr>
+              <a:t> </a:t>
+            </a:r>
+            <a:r>
+              <a:rPr lang="en-US" altLang="ko-KR" sz="1000" b="0">
+                <a:solidFill>
+                  <a:srgbClr val="D2A8FF"/>
+                </a:solidFill>
+                <a:effectLst/>
+                <a:latin typeface="Consolas" panose="020B0609020204030204" pitchFamily="49" charset="0"/>
+              </a:rPr>
+              <a:t>ObjectMapper</a:t>
+            </a:r>
+            <a:r>
+              <a:rPr lang="en-US" altLang="ko-KR" sz="1000" b="0">
+                <a:solidFill>
+                  <a:srgbClr val="BBBEBF"/>
+                </a:solidFill>
+                <a:effectLst/>
+                <a:latin typeface="Consolas" panose="020B0609020204030204" pitchFamily="49" charset="0"/>
+              </a:rPr>
+              <a:t>();</a:t>
+            </a:r>
+          </a:p>
+          <a:p>
+            <a:pPr>
+              <a:lnSpc>
+                <a:spcPts val="1425"/>
+              </a:lnSpc>
+              <a:buNone/>
+            </a:pPr>
+            <a:r>
+              <a:rPr lang="en-US" altLang="ko-KR" sz="1000" b="0">
+                <a:solidFill>
+                  <a:srgbClr val="BBBEBF"/>
+                </a:solidFill>
+                <a:effectLst/>
+                <a:latin typeface="Consolas" panose="020B0609020204030204" pitchFamily="49" charset="0"/>
+              </a:rPr>
+              <a:t>            </a:t>
+            </a:r>
+            <a:r>
+              <a:rPr lang="en-US" altLang="ko-KR" sz="1000" b="0">
+                <a:solidFill>
+                  <a:srgbClr val="C586C0"/>
+                </a:solidFill>
+                <a:effectLst/>
+                <a:latin typeface="Consolas" panose="020B0609020204030204" pitchFamily="49" charset="0"/>
+              </a:rPr>
+              <a:t>return</a:t>
+            </a:r>
+            <a:r>
+              <a:rPr lang="en-US" altLang="ko-KR" sz="1000" b="0">
+                <a:solidFill>
+                  <a:srgbClr val="BBBEBF"/>
+                </a:solidFill>
+                <a:effectLst/>
+                <a:latin typeface="Consolas" panose="020B0609020204030204" pitchFamily="49" charset="0"/>
+              </a:rPr>
+              <a:t> </a:t>
+            </a:r>
+            <a:r>
+              <a:rPr lang="en-US" altLang="ko-KR" sz="1000" b="0">
+                <a:solidFill>
+                  <a:srgbClr val="C9D1D9"/>
+                </a:solidFill>
+                <a:effectLst/>
+                <a:latin typeface="Consolas" panose="020B0609020204030204" pitchFamily="49" charset="0"/>
+              </a:rPr>
+              <a:t>objectMapper</a:t>
+            </a:r>
+            <a:r>
+              <a:rPr lang="en-US" altLang="ko-KR" sz="1000" b="0">
+                <a:solidFill>
+                  <a:srgbClr val="BBBEBF"/>
+                </a:solidFill>
+                <a:effectLst/>
+                <a:latin typeface="Consolas" panose="020B0609020204030204" pitchFamily="49" charset="0"/>
+              </a:rPr>
+              <a:t>.</a:t>
+            </a:r>
+            <a:r>
+              <a:rPr lang="en-US" altLang="ko-KR" sz="1000" b="0">
+                <a:solidFill>
+                  <a:srgbClr val="D2A8FF"/>
+                </a:solidFill>
+                <a:effectLst/>
+                <a:latin typeface="Consolas" panose="020B0609020204030204" pitchFamily="49" charset="0"/>
+              </a:rPr>
+              <a:t>readValue</a:t>
+            </a:r>
+            <a:r>
+              <a:rPr lang="en-US" altLang="ko-KR" sz="1000" b="0">
+                <a:solidFill>
+                  <a:srgbClr val="BBBEBF"/>
+                </a:solidFill>
+                <a:effectLst/>
+                <a:latin typeface="Consolas" panose="020B0609020204030204" pitchFamily="49" charset="0"/>
+              </a:rPr>
+              <a:t>(</a:t>
+            </a:r>
+            <a:r>
+              <a:rPr lang="en-US" altLang="ko-KR" sz="1000" b="0">
+                <a:solidFill>
+                  <a:srgbClr val="FFA657"/>
+                </a:solidFill>
+                <a:effectLst/>
+                <a:latin typeface="Consolas" panose="020B0609020204030204" pitchFamily="49" charset="0"/>
+              </a:rPr>
+              <a:t>json</a:t>
+            </a:r>
+            <a:r>
+              <a:rPr lang="en-US" altLang="ko-KR" sz="1000" b="0">
+                <a:solidFill>
+                  <a:srgbClr val="BBBEBF"/>
+                </a:solidFill>
+                <a:effectLst/>
+                <a:latin typeface="Consolas" panose="020B0609020204030204" pitchFamily="49" charset="0"/>
+              </a:rPr>
+              <a:t>, </a:t>
+            </a:r>
+            <a:r>
+              <a:rPr lang="en-US" altLang="ko-KR" sz="1000" b="0">
+                <a:solidFill>
+                  <a:srgbClr val="4EC9B0"/>
+                </a:solidFill>
+                <a:effectLst/>
+                <a:latin typeface="Consolas" panose="020B0609020204030204" pitchFamily="49" charset="0"/>
+              </a:rPr>
+              <a:t>EmailSendMessage</a:t>
+            </a:r>
+            <a:r>
+              <a:rPr lang="en-US" altLang="ko-KR" sz="1000" b="0">
+                <a:solidFill>
+                  <a:srgbClr val="BBBEBF"/>
+                </a:solidFill>
+                <a:effectLst/>
+                <a:latin typeface="Consolas" panose="020B0609020204030204" pitchFamily="49" charset="0"/>
+              </a:rPr>
+              <a:t>.</a:t>
+            </a:r>
+            <a:r>
+              <a:rPr lang="en-US" altLang="ko-KR" sz="1000" b="0">
+                <a:solidFill>
+                  <a:srgbClr val="C586C0"/>
+                </a:solidFill>
+                <a:effectLst/>
+                <a:latin typeface="Consolas" panose="020B0609020204030204" pitchFamily="49" charset="0"/>
+              </a:rPr>
+              <a:t>class</a:t>
+            </a:r>
+            <a:r>
+              <a:rPr lang="en-US" altLang="ko-KR" sz="1000" b="0">
+                <a:solidFill>
+                  <a:srgbClr val="BBBEBF"/>
+                </a:solidFill>
+                <a:effectLst/>
+                <a:latin typeface="Consolas" panose="020B0609020204030204" pitchFamily="49" charset="0"/>
+              </a:rPr>
+              <a:t>);</a:t>
+            </a:r>
+          </a:p>
+          <a:p>
+            <a:pPr>
+              <a:lnSpc>
+                <a:spcPts val="1425"/>
+              </a:lnSpc>
+              <a:buNone/>
+            </a:pPr>
+            <a:r>
+              <a:rPr lang="en-US" altLang="ko-KR" sz="1000" b="0">
+                <a:solidFill>
+                  <a:srgbClr val="BBBEBF"/>
+                </a:solidFill>
+                <a:effectLst/>
+                <a:latin typeface="Consolas" panose="020B0609020204030204" pitchFamily="49" charset="0"/>
+              </a:rPr>
+              <a:t>        }</a:t>
+            </a:r>
+            <a:r>
+              <a:rPr lang="en-US" altLang="ko-KR" sz="1000" b="0">
+                <a:solidFill>
+                  <a:srgbClr val="C586C0"/>
+                </a:solidFill>
+                <a:effectLst/>
+                <a:latin typeface="Consolas" panose="020B0609020204030204" pitchFamily="49" charset="0"/>
+              </a:rPr>
+              <a:t>catch</a:t>
+            </a:r>
+            <a:r>
+              <a:rPr lang="en-US" altLang="ko-KR" sz="1000" b="0">
+                <a:solidFill>
+                  <a:srgbClr val="BBBEBF"/>
+                </a:solidFill>
+                <a:effectLst/>
+                <a:latin typeface="Consolas" panose="020B0609020204030204" pitchFamily="49" charset="0"/>
+              </a:rPr>
+              <a:t>(</a:t>
+            </a:r>
+            <a:r>
+              <a:rPr lang="en-US" altLang="ko-KR" sz="1000" b="0">
+                <a:solidFill>
+                  <a:srgbClr val="4EC9B0"/>
+                </a:solidFill>
+                <a:effectLst/>
+                <a:latin typeface="Consolas" panose="020B0609020204030204" pitchFamily="49" charset="0"/>
+              </a:rPr>
+              <a:t>JacksonException</a:t>
+            </a:r>
+            <a:r>
+              <a:rPr lang="en-US" altLang="ko-KR" sz="1000" b="0">
+                <a:solidFill>
+                  <a:srgbClr val="BBBEBF"/>
+                </a:solidFill>
+                <a:effectLst/>
+                <a:latin typeface="Consolas" panose="020B0609020204030204" pitchFamily="49" charset="0"/>
+              </a:rPr>
+              <a:t> </a:t>
+            </a:r>
+            <a:r>
+              <a:rPr lang="en-US" altLang="ko-KR" sz="1000" b="0">
+                <a:solidFill>
+                  <a:srgbClr val="C9D1D9"/>
+                </a:solidFill>
+                <a:effectLst/>
+                <a:latin typeface="Consolas" panose="020B0609020204030204" pitchFamily="49" charset="0"/>
+              </a:rPr>
+              <a:t>e</a:t>
+            </a:r>
+            <a:r>
+              <a:rPr lang="en-US" altLang="ko-KR" sz="1000" b="0">
+                <a:solidFill>
+                  <a:srgbClr val="BBBEBF"/>
+                </a:solidFill>
+                <a:effectLst/>
+                <a:latin typeface="Consolas" panose="020B0609020204030204" pitchFamily="49" charset="0"/>
+              </a:rPr>
+              <a:t>){ </a:t>
+            </a:r>
+            <a:r>
+              <a:rPr lang="en-US" altLang="ko-KR" sz="1000" b="0">
+                <a:solidFill>
+                  <a:srgbClr val="8B949E"/>
+                </a:solidFill>
+                <a:effectLst/>
+                <a:latin typeface="Consolas" panose="020B0609020204030204" pitchFamily="49" charset="0"/>
+              </a:rPr>
+              <a:t>// JsonProcessingException</a:t>
+            </a:r>
+            <a:r>
+              <a:rPr lang="ko-KR" altLang="en-US" sz="1000" b="0">
+                <a:solidFill>
+                  <a:srgbClr val="8B949E"/>
+                </a:solidFill>
+                <a:effectLst/>
+                <a:latin typeface="Consolas" panose="020B0609020204030204" pitchFamily="49" charset="0"/>
+              </a:rPr>
+              <a:t>은</a:t>
+            </a:r>
+            <a:endParaRPr lang="ko-KR" altLang="en-US" sz="1000" b="0">
+              <a:solidFill>
+                <a:srgbClr val="BBBEBF"/>
+              </a:solidFill>
+              <a:effectLst/>
+              <a:latin typeface="Consolas" panose="020B0609020204030204" pitchFamily="49" charset="0"/>
+            </a:endParaRPr>
+          </a:p>
+          <a:p>
+            <a:pPr>
+              <a:lnSpc>
+                <a:spcPts val="1425"/>
+              </a:lnSpc>
+              <a:buNone/>
+            </a:pPr>
+            <a:r>
+              <a:rPr lang="ko-KR" altLang="en-US" sz="1000" b="0">
+                <a:solidFill>
+                  <a:srgbClr val="BBBEBF"/>
+                </a:solidFill>
+                <a:effectLst/>
+                <a:latin typeface="Consolas" panose="020B0609020204030204" pitchFamily="49" charset="0"/>
+              </a:rPr>
+              <a:t>            </a:t>
+            </a:r>
+            <a:r>
+              <a:rPr lang="en-US" altLang="ko-KR" sz="1000" b="0">
+                <a:solidFill>
+                  <a:srgbClr val="C586C0"/>
+                </a:solidFill>
+                <a:effectLst/>
+                <a:latin typeface="Consolas" panose="020B0609020204030204" pitchFamily="49" charset="0"/>
+              </a:rPr>
+              <a:t>throw</a:t>
+            </a:r>
+            <a:r>
+              <a:rPr lang="en-US" altLang="ko-KR" sz="1000" b="0">
+                <a:solidFill>
+                  <a:srgbClr val="BBBEBF"/>
+                </a:solidFill>
+                <a:effectLst/>
+                <a:latin typeface="Consolas" panose="020B0609020204030204" pitchFamily="49" charset="0"/>
+              </a:rPr>
+              <a:t> </a:t>
+            </a:r>
+            <a:r>
+              <a:rPr lang="en-US" altLang="ko-KR" sz="1000" b="0">
+                <a:solidFill>
+                  <a:srgbClr val="C586C0"/>
+                </a:solidFill>
+                <a:effectLst/>
+                <a:latin typeface="Consolas" panose="020B0609020204030204" pitchFamily="49" charset="0"/>
+              </a:rPr>
+              <a:t>new</a:t>
+            </a:r>
+            <a:r>
+              <a:rPr lang="en-US" altLang="ko-KR" sz="1000" b="0">
+                <a:solidFill>
+                  <a:srgbClr val="BBBEBF"/>
+                </a:solidFill>
+                <a:effectLst/>
+                <a:latin typeface="Consolas" panose="020B0609020204030204" pitchFamily="49" charset="0"/>
+              </a:rPr>
+              <a:t> </a:t>
+            </a:r>
+            <a:r>
+              <a:rPr lang="en-US" altLang="ko-KR" sz="1000" b="0">
+                <a:solidFill>
+                  <a:srgbClr val="D2A8FF"/>
+                </a:solidFill>
+                <a:effectLst/>
+                <a:latin typeface="Consolas" panose="020B0609020204030204" pitchFamily="49" charset="0"/>
+              </a:rPr>
+              <a:t>RuntimeException</a:t>
+            </a:r>
+            <a:r>
+              <a:rPr lang="en-US" altLang="ko-KR" sz="1000" b="0">
+                <a:solidFill>
+                  <a:srgbClr val="BBBEBF"/>
+                </a:solidFill>
+                <a:effectLst/>
+                <a:latin typeface="Consolas" panose="020B0609020204030204" pitchFamily="49" charset="0"/>
+              </a:rPr>
+              <a:t>(</a:t>
+            </a:r>
+            <a:r>
+              <a:rPr lang="en-US" altLang="ko-KR" sz="1000" b="0">
+                <a:solidFill>
+                  <a:srgbClr val="A5D6FF"/>
+                </a:solidFill>
+                <a:effectLst/>
+                <a:latin typeface="Consolas" panose="020B0609020204030204" pitchFamily="49" charset="0"/>
+              </a:rPr>
+              <a:t>"Json </a:t>
+            </a:r>
+            <a:r>
+              <a:rPr lang="ko-KR" altLang="en-US" sz="1000" b="0">
+                <a:solidFill>
+                  <a:srgbClr val="A5D6FF"/>
+                </a:solidFill>
+                <a:effectLst/>
+                <a:latin typeface="Consolas" panose="020B0609020204030204" pitchFamily="49" charset="0"/>
+              </a:rPr>
+              <a:t>파싱 실패</a:t>
+            </a:r>
+            <a:r>
+              <a:rPr lang="en-US" altLang="ko-KR" sz="1000" b="0">
+                <a:solidFill>
+                  <a:srgbClr val="A5D6FF"/>
+                </a:solidFill>
+                <a:effectLst/>
+                <a:latin typeface="Consolas" panose="020B0609020204030204" pitchFamily="49" charset="0"/>
+              </a:rPr>
+              <a:t>"</a:t>
+            </a:r>
+            <a:r>
+              <a:rPr lang="en-US" altLang="ko-KR" sz="1000" b="0">
+                <a:solidFill>
+                  <a:srgbClr val="BBBEBF"/>
+                </a:solidFill>
+                <a:effectLst/>
+                <a:latin typeface="Consolas" panose="020B0609020204030204" pitchFamily="49" charset="0"/>
+              </a:rPr>
+              <a:t>);</a:t>
+            </a:r>
+          </a:p>
+          <a:p>
+            <a:pPr>
+              <a:lnSpc>
+                <a:spcPts val="1425"/>
+              </a:lnSpc>
+              <a:buNone/>
+            </a:pPr>
+            <a:r>
+              <a:rPr lang="en-US" altLang="ko-KR" sz="1000" b="0">
+                <a:solidFill>
+                  <a:srgbClr val="BBBEBF"/>
+                </a:solidFill>
+                <a:effectLst/>
+                <a:latin typeface="Consolas" panose="020B0609020204030204" pitchFamily="49" charset="0"/>
+              </a:rPr>
+              <a:t>        }</a:t>
+            </a:r>
+          </a:p>
+          <a:p>
+            <a:pPr>
+              <a:lnSpc>
+                <a:spcPts val="1425"/>
+              </a:lnSpc>
+              <a:buNone/>
+            </a:pPr>
+            <a:r>
+              <a:rPr lang="en-US" altLang="ko-KR" sz="1000" b="0">
+                <a:solidFill>
+                  <a:srgbClr val="BBBEBF"/>
+                </a:solidFill>
+                <a:effectLst/>
+                <a:latin typeface="Consolas" panose="020B0609020204030204" pitchFamily="49" charset="0"/>
+              </a:rPr>
+              <a:t>    }</a:t>
+            </a:r>
+          </a:p>
+          <a:p>
+            <a:pPr>
+              <a:lnSpc>
+                <a:spcPts val="1425"/>
+              </a:lnSpc>
+              <a:buNone/>
+            </a:pPr>
+            <a:r>
+              <a:rPr lang="en-US" altLang="ko-KR" sz="1000" b="0">
+                <a:solidFill>
+                  <a:srgbClr val="BBBEBF"/>
+                </a:solidFill>
+                <a:effectLst/>
+                <a:latin typeface="Consolas" panose="020B0609020204030204" pitchFamily="49" charset="0"/>
+              </a:rPr>
+              <a:t>}</a:t>
+            </a:r>
+          </a:p>
+        </p:txBody>
+      </p:sp>
+      <p:sp>
+        <p:nvSpPr>
+          <p:cNvPr id="7" name="TextBox 6">
+            <a:extLst>
+              <a:ext uri="{FF2B5EF4-FFF2-40B4-BE49-F238E27FC236}">
+                <a16:creationId xmlns:a16="http://schemas.microsoft.com/office/drawing/2014/main" id="{E517865A-AD5E-6194-4B2C-E3E5C8DC00E3}"/>
+              </a:ext>
+            </a:extLst>
+          </p:cNvPr>
+          <p:cNvSpPr txBox="1"/>
+          <p:nvPr/>
+        </p:nvSpPr>
+        <p:spPr>
+          <a:xfrm>
+            <a:off x="237744" y="4745736"/>
+            <a:ext cx="6318504" cy="1569660"/>
+          </a:xfrm>
+          <a:prstGeom prst="rect">
+            <a:avLst/>
+          </a:prstGeom>
+          <a:noFill/>
+        </p:spPr>
+        <p:txBody>
+          <a:bodyPr wrap="square" rtlCol="0">
+            <a:spAutoFit/>
+          </a:bodyPr>
+          <a:lstStyle/>
+          <a:p>
+            <a:r>
+              <a:rPr lang="ko-KR" altLang="en-US" sz="1200"/>
+              <a:t>역직렬화 시에는 기본 생성자가 있어야하며</a:t>
+            </a:r>
+            <a:r>
+              <a:rPr lang="en-US" altLang="ko-KR" sz="1200"/>
+              <a:t>, getter </a:t>
+            </a:r>
+            <a:r>
+              <a:rPr lang="ko-KR" altLang="en-US" sz="1200"/>
+              <a:t>메소드는 필수이다</a:t>
+            </a:r>
+            <a:r>
+              <a:rPr lang="en-US" altLang="ko-KR" sz="1200"/>
+              <a:t>.</a:t>
+            </a:r>
+          </a:p>
+          <a:p>
+            <a:endParaRPr lang="en-US" altLang="ko-KR" sz="1200" b="1">
+              <a:solidFill>
+                <a:srgbClr val="FF0000"/>
+              </a:solidFill>
+            </a:endParaRPr>
+          </a:p>
+          <a:p>
+            <a:endParaRPr lang="en-US" altLang="ko-KR" sz="1200" b="1">
+              <a:solidFill>
+                <a:srgbClr val="FF0000"/>
+              </a:solidFill>
+            </a:endParaRPr>
+          </a:p>
+          <a:p>
+            <a:endParaRPr lang="en-US" altLang="ko-KR" sz="1200" b="1">
+              <a:solidFill>
+                <a:srgbClr val="FF0000"/>
+              </a:solidFill>
+            </a:endParaRPr>
+          </a:p>
+          <a:p>
+            <a:endParaRPr lang="en-US" altLang="ko-KR" sz="1200" b="1"/>
+          </a:p>
+          <a:p>
+            <a:r>
+              <a:rPr lang="en-US" altLang="ko-KR" sz="1200" b="1"/>
+              <a:t>fromJson </a:t>
+            </a:r>
+            <a:r>
+              <a:rPr lang="ko-KR" altLang="en-US" sz="1200" b="1"/>
+              <a:t>메소드 작성 이유 </a:t>
+            </a:r>
+            <a:r>
+              <a:rPr lang="en-US" altLang="ko-KR" sz="1200" b="1"/>
+              <a:t>: StringDeserializer </a:t>
+            </a:r>
+            <a:r>
+              <a:rPr lang="ko-KR" altLang="en-US" sz="1200" b="1"/>
+              <a:t>로써 역직렬화 결과가 결국에는 </a:t>
+            </a:r>
+            <a:r>
+              <a:rPr lang="en-US" altLang="ko-KR" sz="1200" b="1"/>
+              <a:t>String</a:t>
+            </a:r>
+            <a:r>
+              <a:rPr lang="ko-KR" altLang="en-US" sz="1200" b="1"/>
+              <a:t>이다</a:t>
+            </a:r>
+            <a:r>
+              <a:rPr lang="en-US" altLang="ko-KR" sz="1200" b="1"/>
+              <a:t>.</a:t>
+            </a:r>
+          </a:p>
+          <a:p>
+            <a:endParaRPr lang="en-US" altLang="ko-KR" sz="1200" b="1">
+              <a:solidFill>
+                <a:srgbClr val="FF0000"/>
+              </a:solidFill>
+            </a:endParaRPr>
+          </a:p>
+          <a:p>
+            <a:r>
+              <a:rPr lang="ko-KR" altLang="en-US" sz="1200" b="1">
+                <a:solidFill>
+                  <a:srgbClr val="FF0000"/>
+                </a:solidFill>
+              </a:rPr>
+              <a:t>알아두기 </a:t>
+            </a:r>
+            <a:r>
+              <a:rPr lang="en-US" altLang="ko-KR" sz="1200" b="1">
+                <a:solidFill>
+                  <a:srgbClr val="FF0000"/>
+                </a:solidFill>
+              </a:rPr>
+              <a:t>: objectMapper.readValue( JsonString , </a:t>
+            </a:r>
+            <a:r>
+              <a:rPr lang="ko-KR" altLang="en-US" sz="1200" b="1">
+                <a:solidFill>
+                  <a:srgbClr val="FF0000"/>
+                </a:solidFill>
+              </a:rPr>
+              <a:t>변환클래스명</a:t>
+            </a:r>
+            <a:r>
+              <a:rPr lang="en-US" altLang="ko-KR" sz="1200" b="1">
+                <a:solidFill>
+                  <a:srgbClr val="FF0000"/>
+                </a:solidFill>
+              </a:rPr>
+              <a:t>.class);</a:t>
+            </a:r>
+            <a:endParaRPr lang="ko-KR" altLang="en-US" sz="1200" b="1">
+              <a:solidFill>
+                <a:srgbClr val="FF0000"/>
+              </a:solidFill>
+            </a:endParaRPr>
+          </a:p>
+        </p:txBody>
+      </p:sp>
+      <p:pic>
+        <p:nvPicPr>
+          <p:cNvPr id="9" name="그림 8">
+            <a:extLst>
+              <a:ext uri="{FF2B5EF4-FFF2-40B4-BE49-F238E27FC236}">
+                <a16:creationId xmlns:a16="http://schemas.microsoft.com/office/drawing/2014/main" id="{18B8434B-A4B9-751E-D992-5AD1356F1A28}"/>
+              </a:ext>
+            </a:extLst>
+          </p:cNvPr>
+          <p:cNvPicPr>
+            <a:picLocks noChangeAspect="1"/>
+          </p:cNvPicPr>
+          <p:nvPr/>
+        </p:nvPicPr>
+        <p:blipFill>
+          <a:blip r:embed="rId2"/>
+          <a:stretch>
+            <a:fillRect/>
+          </a:stretch>
+        </p:blipFill>
+        <p:spPr>
+          <a:xfrm>
+            <a:off x="237744" y="5100417"/>
+            <a:ext cx="5677692" cy="476316"/>
+          </a:xfrm>
+          <a:prstGeom prst="rect">
+            <a:avLst/>
+          </a:prstGeom>
+        </p:spPr>
+      </p:pic>
+    </p:spTree>
+    <p:extLst>
+      <p:ext uri="{BB962C8B-B14F-4D97-AF65-F5344CB8AC3E}">
+        <p14:creationId xmlns:p14="http://schemas.microsoft.com/office/powerpoint/2010/main" val="3698925137"/>
+      </p:ext>
+    </p:extLst>
+  </p:cSld>
+  <p:clrMapOvr>
+    <a:masterClrMapping/>
+  </p:clrMapOvr>
+</p:sld>
+</file>
+
+<file path=ppt/slides/slide26.xml><?xml version="1.0" encoding="utf-8"?>
+<p:sld xmlns:a="http://schemas.openxmlformats.org/drawingml/2006/main" xmlns:r="http://schemas.openxmlformats.org/officeDocument/2006/relationships" xmlns:p="http://schemas.openxmlformats.org/presentationml/2006/main">
+  <p:cSld>
+    <p:spTree>
+      <p:nvGrpSpPr>
+        <p:cNvPr id="1" name=""/>
+        <p:cNvGrpSpPr/>
+        <p:nvPr/>
+      </p:nvGrpSpPr>
+      <p:grpSpPr>
+        <a:xfrm>
+          <a:off x="0" y="0"/>
+          <a:ext cx="0" cy="0"/>
+          <a:chOff x="0" y="0"/>
+          <a:chExt cx="0" cy="0"/>
+        </a:xfrm>
+      </p:grpSpPr>
+      <p:sp>
+        <p:nvSpPr>
+          <p:cNvPr id="2" name="제목 1">
+            <a:extLst>
+              <a:ext uri="{FF2B5EF4-FFF2-40B4-BE49-F238E27FC236}">
+                <a16:creationId xmlns:a16="http://schemas.microsoft.com/office/drawing/2014/main" id="{1487F78F-C94B-D046-4530-261ADE46DBED}"/>
+              </a:ext>
+            </a:extLst>
+          </p:cNvPr>
+          <p:cNvSpPr>
+            <a:spLocks noGrp="1"/>
+          </p:cNvSpPr>
+          <p:nvPr>
+            <p:ph type="title"/>
+          </p:nvPr>
+        </p:nvSpPr>
+        <p:spPr/>
+        <p:txBody>
+          <a:bodyPr/>
+          <a:lstStyle/>
+          <a:p>
+            <a:r>
+              <a:rPr lang="en-US" altLang="ko-KR"/>
+              <a:t>consumer Service </a:t>
+            </a:r>
+            <a:r>
+              <a:rPr lang="ko-KR" altLang="en-US"/>
+              <a:t>작성</a:t>
+            </a:r>
+          </a:p>
+        </p:txBody>
+      </p:sp>
+      <p:sp>
+        <p:nvSpPr>
+          <p:cNvPr id="4" name="TextBox 3">
+            <a:extLst>
+              <a:ext uri="{FF2B5EF4-FFF2-40B4-BE49-F238E27FC236}">
+                <a16:creationId xmlns:a16="http://schemas.microsoft.com/office/drawing/2014/main" id="{8AD13B62-68B5-829F-052E-007B38F02A87}"/>
+              </a:ext>
+            </a:extLst>
+          </p:cNvPr>
+          <p:cNvSpPr txBox="1"/>
+          <p:nvPr/>
+        </p:nvSpPr>
+        <p:spPr>
+          <a:xfrm>
+            <a:off x="715518" y="1912753"/>
+            <a:ext cx="6094476" cy="3674467"/>
+          </a:xfrm>
+          <a:prstGeom prst="rect">
+            <a:avLst/>
+          </a:prstGeom>
+          <a:solidFill>
+            <a:schemeClr val="tx1"/>
+          </a:solidFill>
+        </p:spPr>
+        <p:txBody>
+          <a:bodyPr wrap="square">
+            <a:spAutoFit/>
+          </a:bodyPr>
+          <a:lstStyle/>
+          <a:p>
+            <a:pPr>
+              <a:lnSpc>
+                <a:spcPts val="1425"/>
+              </a:lnSpc>
+              <a:buNone/>
+            </a:pPr>
+            <a:r>
+              <a:rPr lang="en-US" altLang="ko-KR" sz="1100" b="0">
+                <a:solidFill>
+                  <a:srgbClr val="BBBEBF"/>
+                </a:solidFill>
+                <a:effectLst/>
+                <a:latin typeface="Consolas" panose="020B0609020204030204" pitchFamily="49" charset="0"/>
+              </a:rPr>
+              <a:t>@</a:t>
+            </a:r>
+            <a:r>
+              <a:rPr lang="en-US" altLang="ko-KR" sz="1100" b="0">
+                <a:solidFill>
+                  <a:srgbClr val="4EC9B0"/>
+                </a:solidFill>
+                <a:effectLst/>
+                <a:latin typeface="Consolas" panose="020B0609020204030204" pitchFamily="49" charset="0"/>
+              </a:rPr>
+              <a:t>Service</a:t>
+            </a:r>
+            <a:endParaRPr lang="en-US" altLang="ko-KR" sz="1100" b="0">
+              <a:solidFill>
+                <a:srgbClr val="BBBEBF"/>
+              </a:solidFill>
+              <a:effectLst/>
+              <a:latin typeface="Consolas" panose="020B0609020204030204" pitchFamily="49" charset="0"/>
+            </a:endParaRPr>
+          </a:p>
+          <a:p>
+            <a:pPr>
+              <a:lnSpc>
+                <a:spcPts val="1425"/>
+              </a:lnSpc>
+              <a:buNone/>
+            </a:pPr>
+            <a:r>
+              <a:rPr lang="en-US" altLang="ko-KR" sz="1100" b="0">
+                <a:solidFill>
+                  <a:srgbClr val="569CD6"/>
+                </a:solidFill>
+                <a:effectLst/>
+                <a:latin typeface="Consolas" panose="020B0609020204030204" pitchFamily="49" charset="0"/>
+              </a:rPr>
+              <a:t>public</a:t>
+            </a:r>
+            <a:r>
+              <a:rPr lang="en-US" altLang="ko-KR" sz="1100" b="0">
+                <a:solidFill>
+                  <a:srgbClr val="BBBEBF"/>
+                </a:solidFill>
+                <a:effectLst/>
+                <a:latin typeface="Consolas" panose="020B0609020204030204" pitchFamily="49" charset="0"/>
+              </a:rPr>
+              <a:t> </a:t>
+            </a:r>
+            <a:r>
+              <a:rPr lang="en-US" altLang="ko-KR" sz="1100" b="0">
+                <a:solidFill>
+                  <a:srgbClr val="569CD6"/>
+                </a:solidFill>
+                <a:effectLst/>
+                <a:latin typeface="Consolas" panose="020B0609020204030204" pitchFamily="49" charset="0"/>
+              </a:rPr>
+              <a:t>class</a:t>
+            </a:r>
+            <a:r>
+              <a:rPr lang="en-US" altLang="ko-KR" sz="1100" b="0">
+                <a:solidFill>
+                  <a:srgbClr val="BBBEBF"/>
+                </a:solidFill>
+                <a:effectLst/>
+                <a:latin typeface="Consolas" panose="020B0609020204030204" pitchFamily="49" charset="0"/>
+              </a:rPr>
+              <a:t> </a:t>
+            </a:r>
+            <a:r>
+              <a:rPr lang="en-US" altLang="ko-KR" sz="1100" b="0">
+                <a:solidFill>
+                  <a:srgbClr val="4EC9B0"/>
+                </a:solidFill>
+                <a:effectLst/>
+                <a:latin typeface="Consolas" panose="020B0609020204030204" pitchFamily="49" charset="0"/>
+              </a:rPr>
+              <a:t>EmailSendConsumer</a:t>
+            </a:r>
+            <a:r>
+              <a:rPr lang="en-US" altLang="ko-KR" sz="1100" b="0">
+                <a:solidFill>
+                  <a:srgbClr val="BBBEBF"/>
+                </a:solidFill>
+                <a:effectLst/>
+                <a:latin typeface="Consolas" panose="020B0609020204030204" pitchFamily="49" charset="0"/>
+              </a:rPr>
+              <a:t> {</a:t>
+            </a:r>
+          </a:p>
+          <a:p>
+            <a:pPr>
+              <a:lnSpc>
+                <a:spcPts val="1425"/>
+              </a:lnSpc>
+              <a:buNone/>
+            </a:pPr>
+            <a:br>
+              <a:rPr lang="en-US" altLang="ko-KR" sz="1100" b="0">
+                <a:solidFill>
+                  <a:srgbClr val="BBBEBF"/>
+                </a:solidFill>
+                <a:effectLst/>
+                <a:latin typeface="Consolas" panose="020B0609020204030204" pitchFamily="49" charset="0"/>
+              </a:rPr>
+            </a:br>
+            <a:endParaRPr lang="en-US" altLang="ko-KR" sz="1100" b="0">
+              <a:solidFill>
+                <a:srgbClr val="BBBEBF"/>
+              </a:solidFill>
+              <a:effectLst/>
+              <a:latin typeface="Consolas" panose="020B0609020204030204" pitchFamily="49" charset="0"/>
+            </a:endParaRPr>
+          </a:p>
+          <a:p>
+            <a:pPr>
+              <a:lnSpc>
+                <a:spcPts val="1425"/>
+              </a:lnSpc>
+              <a:buNone/>
+            </a:pPr>
+            <a:r>
+              <a:rPr lang="en-US" altLang="ko-KR" sz="1100" b="0">
+                <a:solidFill>
+                  <a:srgbClr val="BBBEBF"/>
+                </a:solidFill>
+                <a:effectLst/>
+                <a:latin typeface="Consolas" panose="020B0609020204030204" pitchFamily="49" charset="0"/>
+              </a:rPr>
+              <a:t>    @</a:t>
+            </a:r>
+            <a:r>
+              <a:rPr lang="en-US" altLang="ko-KR" sz="1100" b="0">
+                <a:solidFill>
+                  <a:srgbClr val="4EC9B0"/>
+                </a:solidFill>
+                <a:effectLst/>
+                <a:latin typeface="Consolas" panose="020B0609020204030204" pitchFamily="49" charset="0"/>
+              </a:rPr>
+              <a:t>KafkaListener</a:t>
+            </a:r>
+            <a:r>
+              <a:rPr lang="en-US" altLang="ko-KR" sz="1100" b="0">
+                <a:solidFill>
+                  <a:srgbClr val="BBBEBF"/>
+                </a:solidFill>
+                <a:effectLst/>
+                <a:latin typeface="Consolas" panose="020B0609020204030204" pitchFamily="49" charset="0"/>
+              </a:rPr>
+              <a:t>(</a:t>
+            </a:r>
+          </a:p>
+          <a:p>
+            <a:pPr>
+              <a:lnSpc>
+                <a:spcPts val="1425"/>
+              </a:lnSpc>
+              <a:buNone/>
+            </a:pPr>
+            <a:r>
+              <a:rPr lang="en-US" altLang="ko-KR" sz="1100" b="0">
+                <a:solidFill>
+                  <a:srgbClr val="BBBEBF"/>
+                </a:solidFill>
+                <a:effectLst/>
+                <a:latin typeface="Consolas" panose="020B0609020204030204" pitchFamily="49" charset="0"/>
+              </a:rPr>
+              <a:t>        </a:t>
+            </a:r>
+            <a:r>
+              <a:rPr lang="en-US" altLang="ko-KR" sz="1100" b="0">
+                <a:solidFill>
+                  <a:srgbClr val="FFA657"/>
+                </a:solidFill>
+                <a:effectLst/>
+                <a:latin typeface="Consolas" panose="020B0609020204030204" pitchFamily="49" charset="0"/>
+              </a:rPr>
+              <a:t>topics</a:t>
+            </a:r>
+            <a:r>
+              <a:rPr lang="en-US" altLang="ko-KR" sz="1100" b="0">
+                <a:solidFill>
+                  <a:srgbClr val="D4D4D4"/>
+                </a:solidFill>
+                <a:effectLst/>
+                <a:latin typeface="Consolas" panose="020B0609020204030204" pitchFamily="49" charset="0"/>
+              </a:rPr>
+              <a:t>=</a:t>
+            </a:r>
+            <a:r>
+              <a:rPr lang="en-US" altLang="ko-KR" sz="1100" b="0">
+                <a:solidFill>
+                  <a:srgbClr val="A5D6FF"/>
+                </a:solidFill>
+                <a:effectLst/>
+                <a:latin typeface="Consolas" panose="020B0609020204030204" pitchFamily="49" charset="0"/>
+              </a:rPr>
+              <a:t>"email.send"</a:t>
+            </a:r>
+            <a:r>
+              <a:rPr lang="en-US" altLang="ko-KR" sz="1100" b="0">
+                <a:solidFill>
+                  <a:srgbClr val="BBBEBF"/>
+                </a:solidFill>
+                <a:effectLst/>
+                <a:latin typeface="Consolas" panose="020B0609020204030204" pitchFamily="49" charset="0"/>
+              </a:rPr>
+              <a:t>,</a:t>
+            </a:r>
+          </a:p>
+          <a:p>
+            <a:pPr>
+              <a:lnSpc>
+                <a:spcPts val="1425"/>
+              </a:lnSpc>
+              <a:buNone/>
+            </a:pPr>
+            <a:r>
+              <a:rPr lang="en-US" altLang="ko-KR" sz="1100" b="0">
+                <a:solidFill>
+                  <a:srgbClr val="BBBEBF"/>
+                </a:solidFill>
+                <a:effectLst/>
+                <a:latin typeface="Consolas" panose="020B0609020204030204" pitchFamily="49" charset="0"/>
+              </a:rPr>
+              <a:t>        </a:t>
+            </a:r>
+            <a:r>
+              <a:rPr lang="en-US" altLang="ko-KR" sz="1100" b="0">
+                <a:solidFill>
+                  <a:srgbClr val="FFA657"/>
+                </a:solidFill>
+                <a:effectLst/>
+                <a:latin typeface="Consolas" panose="020B0609020204030204" pitchFamily="49" charset="0"/>
+              </a:rPr>
+              <a:t>groupId</a:t>
+            </a:r>
+            <a:r>
+              <a:rPr lang="en-US" altLang="ko-KR" sz="1100" b="0">
+                <a:solidFill>
+                  <a:srgbClr val="BBBEBF"/>
+                </a:solidFill>
+                <a:effectLst/>
+                <a:latin typeface="Consolas" panose="020B0609020204030204" pitchFamily="49" charset="0"/>
+              </a:rPr>
+              <a:t> </a:t>
+            </a:r>
+            <a:r>
+              <a:rPr lang="en-US" altLang="ko-KR" sz="1100" b="0">
+                <a:solidFill>
+                  <a:srgbClr val="D4D4D4"/>
+                </a:solidFill>
+                <a:effectLst/>
+                <a:latin typeface="Consolas" panose="020B0609020204030204" pitchFamily="49" charset="0"/>
+              </a:rPr>
+              <a:t>=</a:t>
+            </a:r>
+            <a:r>
+              <a:rPr lang="en-US" altLang="ko-KR" sz="1100" b="0">
+                <a:solidFill>
+                  <a:srgbClr val="BBBEBF"/>
+                </a:solidFill>
+                <a:effectLst/>
+                <a:latin typeface="Consolas" panose="020B0609020204030204" pitchFamily="49" charset="0"/>
+              </a:rPr>
+              <a:t> </a:t>
+            </a:r>
+            <a:r>
+              <a:rPr lang="en-US" altLang="ko-KR" sz="1100" b="0">
+                <a:solidFill>
+                  <a:srgbClr val="A5D6FF"/>
+                </a:solidFill>
+                <a:effectLst/>
+                <a:latin typeface="Consolas" panose="020B0609020204030204" pitchFamily="49" charset="0"/>
+              </a:rPr>
+              <a:t>"email-send-group"</a:t>
+            </a:r>
+            <a:endParaRPr lang="en-US" altLang="ko-KR" sz="1100" b="0">
+              <a:solidFill>
+                <a:srgbClr val="BBBEBF"/>
+              </a:solidFill>
+              <a:effectLst/>
+              <a:latin typeface="Consolas" panose="020B0609020204030204" pitchFamily="49" charset="0"/>
+            </a:endParaRPr>
+          </a:p>
+          <a:p>
+            <a:pPr>
+              <a:lnSpc>
+                <a:spcPts val="1425"/>
+              </a:lnSpc>
+              <a:buNone/>
+            </a:pPr>
+            <a:r>
+              <a:rPr lang="en-US" altLang="ko-KR" sz="1100" b="0">
+                <a:solidFill>
+                  <a:srgbClr val="BBBEBF"/>
+                </a:solidFill>
+                <a:effectLst/>
+                <a:latin typeface="Consolas" panose="020B0609020204030204" pitchFamily="49" charset="0"/>
+              </a:rPr>
+              <a:t>    )</a:t>
+            </a:r>
+          </a:p>
+          <a:p>
+            <a:pPr>
+              <a:lnSpc>
+                <a:spcPts val="1425"/>
+              </a:lnSpc>
+              <a:buNone/>
+            </a:pPr>
+            <a:r>
+              <a:rPr lang="en-US" altLang="ko-KR" sz="1100" b="0">
+                <a:solidFill>
+                  <a:srgbClr val="BBBEBF"/>
+                </a:solidFill>
+                <a:effectLst/>
+                <a:latin typeface="Consolas" panose="020B0609020204030204" pitchFamily="49" charset="0"/>
+              </a:rPr>
+              <a:t>    </a:t>
+            </a:r>
+            <a:r>
+              <a:rPr lang="en-US" altLang="ko-KR" sz="1100" b="0">
+                <a:solidFill>
+                  <a:srgbClr val="569CD6"/>
+                </a:solidFill>
+                <a:effectLst/>
+                <a:latin typeface="Consolas" panose="020B0609020204030204" pitchFamily="49" charset="0"/>
+              </a:rPr>
+              <a:t>public</a:t>
+            </a:r>
+            <a:r>
+              <a:rPr lang="en-US" altLang="ko-KR" sz="1100" b="0">
+                <a:solidFill>
+                  <a:srgbClr val="BBBEBF"/>
+                </a:solidFill>
+                <a:effectLst/>
+                <a:latin typeface="Consolas" panose="020B0609020204030204" pitchFamily="49" charset="0"/>
+              </a:rPr>
+              <a:t> </a:t>
+            </a:r>
+            <a:r>
+              <a:rPr lang="en-US" altLang="ko-KR" sz="1100" b="0">
+                <a:solidFill>
+                  <a:srgbClr val="4EC9B0"/>
+                </a:solidFill>
+                <a:effectLst/>
+                <a:latin typeface="Consolas" panose="020B0609020204030204" pitchFamily="49" charset="0"/>
+              </a:rPr>
+              <a:t>void</a:t>
+            </a:r>
+            <a:r>
+              <a:rPr lang="en-US" altLang="ko-KR" sz="1100" b="0">
+                <a:solidFill>
+                  <a:srgbClr val="BBBEBF"/>
+                </a:solidFill>
+                <a:effectLst/>
+                <a:latin typeface="Consolas" panose="020B0609020204030204" pitchFamily="49" charset="0"/>
+              </a:rPr>
+              <a:t> </a:t>
+            </a:r>
+            <a:r>
+              <a:rPr lang="en-US" altLang="ko-KR" sz="1100" b="0">
+                <a:solidFill>
+                  <a:srgbClr val="D2A8FF"/>
+                </a:solidFill>
+                <a:effectLst/>
+                <a:latin typeface="Consolas" panose="020B0609020204030204" pitchFamily="49" charset="0"/>
+              </a:rPr>
+              <a:t>consumer</a:t>
+            </a:r>
+            <a:r>
+              <a:rPr lang="en-US" altLang="ko-KR" sz="1100" b="0">
+                <a:solidFill>
+                  <a:srgbClr val="BBBEBF"/>
+                </a:solidFill>
+                <a:effectLst/>
+                <a:latin typeface="Consolas" panose="020B0609020204030204" pitchFamily="49" charset="0"/>
+              </a:rPr>
+              <a:t>(</a:t>
+            </a:r>
+            <a:r>
+              <a:rPr lang="en-US" altLang="ko-KR" sz="1100" b="0">
+                <a:solidFill>
+                  <a:srgbClr val="4EC9B0"/>
+                </a:solidFill>
+                <a:effectLst/>
+                <a:latin typeface="Consolas" panose="020B0609020204030204" pitchFamily="49" charset="0"/>
+              </a:rPr>
+              <a:t>String</a:t>
+            </a:r>
+            <a:r>
+              <a:rPr lang="en-US" altLang="ko-KR" sz="1100" b="0">
+                <a:solidFill>
+                  <a:srgbClr val="BBBEBF"/>
+                </a:solidFill>
+                <a:effectLst/>
+                <a:latin typeface="Consolas" panose="020B0609020204030204" pitchFamily="49" charset="0"/>
+              </a:rPr>
+              <a:t> </a:t>
+            </a:r>
+            <a:r>
+              <a:rPr lang="en-US" altLang="ko-KR" sz="1100" b="0">
+                <a:solidFill>
+                  <a:srgbClr val="FFA657"/>
+                </a:solidFill>
+                <a:effectLst/>
+                <a:latin typeface="Consolas" panose="020B0609020204030204" pitchFamily="49" charset="0"/>
+              </a:rPr>
+              <a:t>message</a:t>
+            </a:r>
+            <a:r>
+              <a:rPr lang="en-US" altLang="ko-KR" sz="1100" b="0">
+                <a:solidFill>
+                  <a:srgbClr val="BBBEBF"/>
+                </a:solidFill>
+                <a:effectLst/>
+                <a:latin typeface="Consolas" panose="020B0609020204030204" pitchFamily="49" charset="0"/>
+              </a:rPr>
+              <a:t>){</a:t>
+            </a:r>
+          </a:p>
+          <a:p>
+            <a:pPr>
+              <a:lnSpc>
+                <a:spcPts val="1425"/>
+              </a:lnSpc>
+              <a:buNone/>
+            </a:pPr>
+            <a:r>
+              <a:rPr lang="en-US" altLang="ko-KR" sz="1100" b="0">
+                <a:solidFill>
+                  <a:srgbClr val="BBBEBF"/>
+                </a:solidFill>
+                <a:effectLst/>
+                <a:latin typeface="Consolas" panose="020B0609020204030204" pitchFamily="49" charset="0"/>
+              </a:rPr>
+              <a:t>        </a:t>
+            </a:r>
+            <a:r>
+              <a:rPr lang="en-US" altLang="ko-KR" sz="1100" b="0">
+                <a:solidFill>
+                  <a:srgbClr val="4EC9B0"/>
+                </a:solidFill>
+                <a:effectLst/>
+                <a:latin typeface="Consolas" panose="020B0609020204030204" pitchFamily="49" charset="0"/>
+              </a:rPr>
+              <a:t>System</a:t>
+            </a:r>
+            <a:r>
+              <a:rPr lang="en-US" altLang="ko-KR" sz="1100" b="0">
+                <a:solidFill>
+                  <a:srgbClr val="BBBEBF"/>
+                </a:solidFill>
+                <a:effectLst/>
+                <a:latin typeface="Consolas" panose="020B0609020204030204" pitchFamily="49" charset="0"/>
+              </a:rPr>
+              <a:t>.</a:t>
+            </a:r>
+            <a:r>
+              <a:rPr lang="en-US" altLang="ko-KR" sz="1100" b="0">
+                <a:solidFill>
+                  <a:srgbClr val="79C0FF"/>
+                </a:solidFill>
+                <a:effectLst/>
+                <a:latin typeface="Consolas" panose="020B0609020204030204" pitchFamily="49" charset="0"/>
+              </a:rPr>
+              <a:t>out</a:t>
+            </a:r>
+            <a:r>
+              <a:rPr lang="en-US" altLang="ko-KR" sz="1100" b="0">
+                <a:solidFill>
+                  <a:srgbClr val="BBBEBF"/>
+                </a:solidFill>
+                <a:effectLst/>
+                <a:latin typeface="Consolas" panose="020B0609020204030204" pitchFamily="49" charset="0"/>
+              </a:rPr>
+              <a:t>.</a:t>
+            </a:r>
+            <a:r>
+              <a:rPr lang="en-US" altLang="ko-KR" sz="1100" b="0">
+                <a:solidFill>
+                  <a:srgbClr val="D2A8FF"/>
+                </a:solidFill>
+                <a:effectLst/>
+                <a:latin typeface="Consolas" panose="020B0609020204030204" pitchFamily="49" charset="0"/>
+              </a:rPr>
+              <a:t>println</a:t>
+            </a:r>
+            <a:r>
+              <a:rPr lang="en-US" altLang="ko-KR" sz="1100" b="0">
+                <a:solidFill>
+                  <a:srgbClr val="BBBEBF"/>
+                </a:solidFill>
+                <a:effectLst/>
+                <a:latin typeface="Consolas" panose="020B0609020204030204" pitchFamily="49" charset="0"/>
+              </a:rPr>
+              <a:t>(</a:t>
+            </a:r>
+            <a:r>
+              <a:rPr lang="en-US" altLang="ko-KR" sz="1100" b="0">
+                <a:solidFill>
+                  <a:srgbClr val="A5D6FF"/>
+                </a:solidFill>
+                <a:effectLst/>
+                <a:latin typeface="Consolas" panose="020B0609020204030204" pitchFamily="49" charset="0"/>
+              </a:rPr>
+              <a:t>"Kafka</a:t>
+            </a:r>
+            <a:r>
+              <a:rPr lang="ko-KR" altLang="en-US" sz="1100" b="0">
+                <a:solidFill>
+                  <a:srgbClr val="A5D6FF"/>
+                </a:solidFill>
+                <a:effectLst/>
+                <a:latin typeface="Consolas" panose="020B0609020204030204" pitchFamily="49" charset="0"/>
+              </a:rPr>
+              <a:t>로부터 받아온 메시지 </a:t>
+            </a:r>
+            <a:r>
+              <a:rPr lang="en-US" altLang="ko-KR" sz="1100" b="0">
+                <a:solidFill>
+                  <a:srgbClr val="A5D6FF"/>
+                </a:solidFill>
+                <a:effectLst/>
+                <a:latin typeface="Consolas" panose="020B0609020204030204" pitchFamily="49" charset="0"/>
+              </a:rPr>
+              <a:t>: "</a:t>
+            </a:r>
+            <a:r>
+              <a:rPr lang="ko-KR" altLang="en-US" sz="1100" b="0">
+                <a:solidFill>
+                  <a:srgbClr val="BBBEBF"/>
+                </a:solidFill>
+                <a:effectLst/>
+                <a:latin typeface="Consolas" panose="020B0609020204030204" pitchFamily="49" charset="0"/>
+              </a:rPr>
+              <a:t> </a:t>
+            </a:r>
+            <a:r>
+              <a:rPr lang="en-US" altLang="ko-KR" sz="1100" b="0">
+                <a:solidFill>
+                  <a:srgbClr val="D4D4D4"/>
+                </a:solidFill>
+                <a:effectLst/>
+                <a:latin typeface="Consolas" panose="020B0609020204030204" pitchFamily="49" charset="0"/>
+              </a:rPr>
+              <a:t>+</a:t>
+            </a:r>
+            <a:r>
+              <a:rPr lang="ko-KR" altLang="en-US" sz="1100" b="0">
+                <a:solidFill>
+                  <a:srgbClr val="BBBEBF"/>
+                </a:solidFill>
+                <a:effectLst/>
+                <a:latin typeface="Consolas" panose="020B0609020204030204" pitchFamily="49" charset="0"/>
+              </a:rPr>
+              <a:t> </a:t>
+            </a:r>
+            <a:r>
+              <a:rPr lang="en-US" altLang="ko-KR" sz="1100" b="0">
+                <a:solidFill>
+                  <a:srgbClr val="FFA657"/>
+                </a:solidFill>
+                <a:effectLst/>
+                <a:latin typeface="Consolas" panose="020B0609020204030204" pitchFamily="49" charset="0"/>
+              </a:rPr>
+              <a:t>message</a:t>
+            </a:r>
+            <a:r>
+              <a:rPr lang="en-US" altLang="ko-KR" sz="1100" b="0">
+                <a:solidFill>
+                  <a:srgbClr val="BBBEBF"/>
+                </a:solidFill>
+                <a:effectLst/>
+                <a:latin typeface="Consolas" panose="020B0609020204030204" pitchFamily="49" charset="0"/>
+              </a:rPr>
+              <a:t>);</a:t>
+            </a:r>
+          </a:p>
+          <a:p>
+            <a:pPr>
+              <a:lnSpc>
+                <a:spcPts val="1425"/>
+              </a:lnSpc>
+              <a:buNone/>
+            </a:pPr>
+            <a:r>
+              <a:rPr lang="en-US" altLang="ko-KR" sz="1100" b="0">
+                <a:solidFill>
+                  <a:srgbClr val="BBBEBF"/>
+                </a:solidFill>
+                <a:effectLst/>
+                <a:latin typeface="Consolas" panose="020B0609020204030204" pitchFamily="49" charset="0"/>
+              </a:rPr>
+              <a:t>        </a:t>
+            </a:r>
+            <a:r>
+              <a:rPr lang="en-US" altLang="ko-KR" sz="1100" b="0">
+                <a:solidFill>
+                  <a:srgbClr val="4EC9B0"/>
+                </a:solidFill>
+                <a:effectLst/>
+                <a:latin typeface="Consolas" panose="020B0609020204030204" pitchFamily="49" charset="0"/>
+              </a:rPr>
+              <a:t>EmailSendMessage</a:t>
+            </a:r>
+            <a:r>
+              <a:rPr lang="en-US" altLang="ko-KR" sz="1100" b="0">
+                <a:solidFill>
+                  <a:srgbClr val="FFA657"/>
+                </a:solidFill>
+                <a:effectLst/>
+                <a:latin typeface="Consolas" panose="020B0609020204030204" pitchFamily="49" charset="0"/>
+              </a:rPr>
+              <a:t> </a:t>
+            </a:r>
+            <a:r>
+              <a:rPr lang="en-US" altLang="ko-KR" sz="1100" b="0">
+                <a:solidFill>
+                  <a:srgbClr val="C9D1D9"/>
+                </a:solidFill>
+                <a:effectLst/>
+                <a:latin typeface="Consolas" panose="020B0609020204030204" pitchFamily="49" charset="0"/>
+              </a:rPr>
+              <a:t>emailSendMessage</a:t>
+            </a:r>
+            <a:r>
+              <a:rPr lang="en-US" altLang="ko-KR" sz="1100" b="0">
+                <a:solidFill>
+                  <a:srgbClr val="FFA657"/>
+                </a:solidFill>
+                <a:effectLst/>
+                <a:latin typeface="Consolas" panose="020B0609020204030204" pitchFamily="49" charset="0"/>
+              </a:rPr>
+              <a:t> </a:t>
+            </a:r>
+            <a:r>
+              <a:rPr lang="en-US" altLang="ko-KR" sz="1100" b="0">
+                <a:solidFill>
+                  <a:srgbClr val="D4D4D4"/>
+                </a:solidFill>
+                <a:effectLst/>
+                <a:latin typeface="Consolas" panose="020B0609020204030204" pitchFamily="49" charset="0"/>
+              </a:rPr>
+              <a:t>=</a:t>
+            </a:r>
+            <a:r>
+              <a:rPr lang="en-US" altLang="ko-KR" sz="1100" b="0">
+                <a:solidFill>
+                  <a:srgbClr val="4EC9B0"/>
+                </a:solidFill>
+                <a:effectLst/>
+                <a:latin typeface="Consolas" panose="020B0609020204030204" pitchFamily="49" charset="0"/>
+              </a:rPr>
+              <a:t>EmailSendMessage</a:t>
+            </a:r>
+            <a:r>
+              <a:rPr lang="en-US" altLang="ko-KR" sz="1100" b="0">
+                <a:solidFill>
+                  <a:srgbClr val="BBBEBF"/>
+                </a:solidFill>
+                <a:effectLst/>
+                <a:latin typeface="Consolas" panose="020B0609020204030204" pitchFamily="49" charset="0"/>
+              </a:rPr>
+              <a:t>.</a:t>
+            </a:r>
+            <a:r>
+              <a:rPr lang="en-US" altLang="ko-KR" sz="1100" b="0">
+                <a:solidFill>
+                  <a:srgbClr val="D2A8FF"/>
+                </a:solidFill>
+                <a:effectLst/>
+                <a:latin typeface="Consolas" panose="020B0609020204030204" pitchFamily="49" charset="0"/>
+              </a:rPr>
+              <a:t>fromJson</a:t>
+            </a:r>
+            <a:r>
+              <a:rPr lang="en-US" altLang="ko-KR" sz="1100" b="0">
+                <a:solidFill>
+                  <a:srgbClr val="BBBEBF"/>
+                </a:solidFill>
+                <a:effectLst/>
+                <a:latin typeface="Consolas" panose="020B0609020204030204" pitchFamily="49" charset="0"/>
+              </a:rPr>
+              <a:t>(</a:t>
+            </a:r>
+            <a:r>
+              <a:rPr lang="en-US" altLang="ko-KR" sz="1100" b="0">
+                <a:solidFill>
+                  <a:srgbClr val="FFA657"/>
+                </a:solidFill>
+                <a:effectLst/>
+                <a:latin typeface="Consolas" panose="020B0609020204030204" pitchFamily="49" charset="0"/>
+              </a:rPr>
+              <a:t>message</a:t>
+            </a:r>
+            <a:r>
+              <a:rPr lang="en-US" altLang="ko-KR" sz="1100" b="0">
+                <a:solidFill>
+                  <a:srgbClr val="BBBEBF"/>
+                </a:solidFill>
+                <a:effectLst/>
+                <a:latin typeface="Consolas" panose="020B0609020204030204" pitchFamily="49" charset="0"/>
+              </a:rPr>
+              <a:t>);</a:t>
+            </a:r>
+          </a:p>
+          <a:p>
+            <a:pPr>
+              <a:lnSpc>
+                <a:spcPts val="1425"/>
+              </a:lnSpc>
+              <a:buNone/>
+            </a:pPr>
+            <a:br>
+              <a:rPr lang="en-US" altLang="ko-KR" sz="1100" b="0">
+                <a:solidFill>
+                  <a:srgbClr val="BBBEBF"/>
+                </a:solidFill>
+                <a:effectLst/>
+                <a:latin typeface="Consolas" panose="020B0609020204030204" pitchFamily="49" charset="0"/>
+              </a:rPr>
+            </a:br>
+            <a:endParaRPr lang="en-US" altLang="ko-KR" sz="1100" b="0">
+              <a:solidFill>
+                <a:srgbClr val="BBBEBF"/>
+              </a:solidFill>
+              <a:effectLst/>
+              <a:latin typeface="Consolas" panose="020B0609020204030204" pitchFamily="49" charset="0"/>
+            </a:endParaRPr>
+          </a:p>
+          <a:p>
+            <a:pPr>
+              <a:lnSpc>
+                <a:spcPts val="1425"/>
+              </a:lnSpc>
+              <a:buNone/>
+            </a:pPr>
+            <a:r>
+              <a:rPr lang="en-US" altLang="ko-KR" sz="1100" b="0">
+                <a:solidFill>
+                  <a:srgbClr val="BBBEBF"/>
+                </a:solidFill>
+                <a:effectLst/>
+                <a:latin typeface="Consolas" panose="020B0609020204030204" pitchFamily="49" charset="0"/>
+              </a:rPr>
+              <a:t>        </a:t>
+            </a:r>
+            <a:r>
+              <a:rPr lang="en-US" altLang="ko-KR" sz="1100" b="0">
+                <a:solidFill>
+                  <a:srgbClr val="8B949E"/>
+                </a:solidFill>
+                <a:effectLst/>
+                <a:latin typeface="Consolas" panose="020B0609020204030204" pitchFamily="49" charset="0"/>
+              </a:rPr>
+              <a:t>// ... </a:t>
+            </a:r>
+            <a:r>
+              <a:rPr lang="ko-KR" altLang="en-US" sz="1100" b="0">
+                <a:solidFill>
+                  <a:srgbClr val="8B949E"/>
+                </a:solidFill>
+                <a:effectLst/>
+                <a:latin typeface="Consolas" panose="020B0609020204030204" pitchFamily="49" charset="0"/>
+              </a:rPr>
+              <a:t>실제 이메일 발송 로직은 생략 </a:t>
+            </a:r>
+            <a:r>
+              <a:rPr lang="en-US" altLang="ko-KR" sz="1100" b="0">
+                <a:solidFill>
+                  <a:srgbClr val="8B949E"/>
+                </a:solidFill>
+                <a:effectLst/>
+                <a:latin typeface="Consolas" panose="020B0609020204030204" pitchFamily="49" charset="0"/>
+              </a:rPr>
+              <a:t>...</a:t>
+            </a:r>
+            <a:endParaRPr lang="ko-KR" altLang="en-US" sz="1100" b="0">
+              <a:solidFill>
+                <a:srgbClr val="BBBEBF"/>
+              </a:solidFill>
+              <a:effectLst/>
+              <a:latin typeface="Consolas" panose="020B0609020204030204" pitchFamily="49" charset="0"/>
+            </a:endParaRPr>
+          </a:p>
+          <a:p>
+            <a:pPr>
+              <a:lnSpc>
+                <a:spcPts val="1425"/>
+              </a:lnSpc>
+              <a:buNone/>
+            </a:pPr>
+            <a:br>
+              <a:rPr lang="ko-KR" altLang="en-US" sz="1100" b="0">
+                <a:solidFill>
+                  <a:srgbClr val="BBBEBF"/>
+                </a:solidFill>
+                <a:effectLst/>
+                <a:latin typeface="Consolas" panose="020B0609020204030204" pitchFamily="49" charset="0"/>
+              </a:rPr>
+            </a:br>
+            <a:endParaRPr lang="ko-KR" altLang="en-US" sz="1100" b="0">
+              <a:solidFill>
+                <a:srgbClr val="BBBEBF"/>
+              </a:solidFill>
+              <a:effectLst/>
+              <a:latin typeface="Consolas" panose="020B0609020204030204" pitchFamily="49" charset="0"/>
+            </a:endParaRPr>
+          </a:p>
+          <a:p>
+            <a:pPr>
+              <a:lnSpc>
+                <a:spcPts val="1425"/>
+              </a:lnSpc>
+              <a:buNone/>
+            </a:pPr>
+            <a:r>
+              <a:rPr lang="ko-KR" altLang="en-US" sz="1100" b="0">
+                <a:solidFill>
+                  <a:srgbClr val="BBBEBF"/>
+                </a:solidFill>
+                <a:effectLst/>
+                <a:latin typeface="Consolas" panose="020B0609020204030204" pitchFamily="49" charset="0"/>
+              </a:rPr>
+              <a:t>        </a:t>
+            </a:r>
+            <a:r>
+              <a:rPr lang="en-US" altLang="ko-KR" sz="1100" b="0">
+                <a:solidFill>
+                  <a:srgbClr val="4EC9B0"/>
+                </a:solidFill>
+                <a:effectLst/>
+                <a:latin typeface="Consolas" panose="020B0609020204030204" pitchFamily="49" charset="0"/>
+              </a:rPr>
+              <a:t>System</a:t>
+            </a:r>
+            <a:r>
+              <a:rPr lang="en-US" altLang="ko-KR" sz="1100" b="0">
+                <a:solidFill>
+                  <a:srgbClr val="BBBEBF"/>
+                </a:solidFill>
+                <a:effectLst/>
+                <a:latin typeface="Consolas" panose="020B0609020204030204" pitchFamily="49" charset="0"/>
+              </a:rPr>
+              <a:t>.</a:t>
+            </a:r>
+            <a:r>
+              <a:rPr lang="en-US" altLang="ko-KR" sz="1100" b="0">
+                <a:solidFill>
+                  <a:srgbClr val="79C0FF"/>
+                </a:solidFill>
+                <a:effectLst/>
+                <a:latin typeface="Consolas" panose="020B0609020204030204" pitchFamily="49" charset="0"/>
+              </a:rPr>
+              <a:t>out</a:t>
+            </a:r>
+            <a:r>
+              <a:rPr lang="en-US" altLang="ko-KR" sz="1100" b="0">
+                <a:solidFill>
+                  <a:srgbClr val="BBBEBF"/>
+                </a:solidFill>
+                <a:effectLst/>
+                <a:latin typeface="Consolas" panose="020B0609020204030204" pitchFamily="49" charset="0"/>
+              </a:rPr>
+              <a:t>.</a:t>
+            </a:r>
+            <a:r>
+              <a:rPr lang="en-US" altLang="ko-KR" sz="1100" b="0">
+                <a:solidFill>
+                  <a:srgbClr val="D2A8FF"/>
+                </a:solidFill>
+                <a:effectLst/>
+                <a:latin typeface="Consolas" panose="020B0609020204030204" pitchFamily="49" charset="0"/>
+              </a:rPr>
+              <a:t>println</a:t>
+            </a:r>
+            <a:r>
+              <a:rPr lang="en-US" altLang="ko-KR" sz="1100" b="0">
+                <a:solidFill>
+                  <a:srgbClr val="BBBEBF"/>
+                </a:solidFill>
+                <a:effectLst/>
+                <a:latin typeface="Consolas" panose="020B0609020204030204" pitchFamily="49" charset="0"/>
+              </a:rPr>
+              <a:t>(</a:t>
+            </a:r>
+            <a:r>
+              <a:rPr lang="en-US" altLang="ko-KR" sz="1100" b="0">
+                <a:solidFill>
+                  <a:srgbClr val="A5D6FF"/>
+                </a:solidFill>
+                <a:effectLst/>
+                <a:latin typeface="Consolas" panose="020B0609020204030204" pitchFamily="49" charset="0"/>
+              </a:rPr>
+              <a:t>"</a:t>
+            </a:r>
+            <a:r>
+              <a:rPr lang="ko-KR" altLang="en-US" sz="1100" b="0">
+                <a:solidFill>
+                  <a:srgbClr val="A5D6FF"/>
+                </a:solidFill>
+                <a:effectLst/>
+                <a:latin typeface="Consolas" panose="020B0609020204030204" pitchFamily="49" charset="0"/>
+              </a:rPr>
+              <a:t>이메일 발송 완료</a:t>
+            </a:r>
+            <a:r>
+              <a:rPr lang="en-US" altLang="ko-KR" sz="1100" b="0">
+                <a:solidFill>
+                  <a:srgbClr val="A5D6FF"/>
+                </a:solidFill>
+                <a:effectLst/>
+                <a:latin typeface="Consolas" panose="020B0609020204030204" pitchFamily="49" charset="0"/>
+              </a:rPr>
+              <a:t>"</a:t>
+            </a:r>
+            <a:r>
+              <a:rPr lang="en-US" altLang="ko-KR" sz="1100" b="0">
+                <a:solidFill>
+                  <a:srgbClr val="BBBEBF"/>
+                </a:solidFill>
+                <a:effectLst/>
+                <a:latin typeface="Consolas" panose="020B0609020204030204" pitchFamily="49" charset="0"/>
+              </a:rPr>
+              <a:t>);</a:t>
+            </a:r>
+          </a:p>
+          <a:p>
+            <a:pPr>
+              <a:lnSpc>
+                <a:spcPts val="1425"/>
+              </a:lnSpc>
+              <a:buNone/>
+            </a:pPr>
+            <a:r>
+              <a:rPr lang="en-US" altLang="ko-KR" sz="1100" b="0">
+                <a:solidFill>
+                  <a:srgbClr val="BBBEBF"/>
+                </a:solidFill>
+                <a:effectLst/>
+                <a:latin typeface="Consolas" panose="020B0609020204030204" pitchFamily="49" charset="0"/>
+              </a:rPr>
+              <a:t>        </a:t>
+            </a:r>
+          </a:p>
+          <a:p>
+            <a:pPr>
+              <a:lnSpc>
+                <a:spcPts val="1425"/>
+              </a:lnSpc>
+              <a:buNone/>
+            </a:pPr>
+            <a:r>
+              <a:rPr lang="en-US" altLang="ko-KR" sz="1100" b="0">
+                <a:solidFill>
+                  <a:srgbClr val="BBBEBF"/>
+                </a:solidFill>
+                <a:effectLst/>
+                <a:latin typeface="Consolas" panose="020B0609020204030204" pitchFamily="49" charset="0"/>
+              </a:rPr>
+              <a:t>    }</a:t>
+            </a:r>
+          </a:p>
+          <a:p>
+            <a:pPr>
+              <a:lnSpc>
+                <a:spcPts val="1425"/>
+              </a:lnSpc>
+              <a:buNone/>
+            </a:pPr>
+            <a:r>
+              <a:rPr lang="en-US" altLang="ko-KR" sz="1100" b="0">
+                <a:solidFill>
+                  <a:srgbClr val="BBBEBF"/>
+                </a:solidFill>
+                <a:effectLst/>
+                <a:latin typeface="Consolas" panose="020B0609020204030204" pitchFamily="49" charset="0"/>
+              </a:rPr>
+              <a:t>}</a:t>
+            </a:r>
+          </a:p>
+        </p:txBody>
+      </p:sp>
+      <p:sp>
+        <p:nvSpPr>
+          <p:cNvPr id="5" name="TextBox 4">
+            <a:extLst>
+              <a:ext uri="{FF2B5EF4-FFF2-40B4-BE49-F238E27FC236}">
+                <a16:creationId xmlns:a16="http://schemas.microsoft.com/office/drawing/2014/main" id="{B698FEFF-B170-6E5D-F168-937C22828675}"/>
+              </a:ext>
+            </a:extLst>
+          </p:cNvPr>
+          <p:cNvSpPr txBox="1"/>
+          <p:nvPr/>
+        </p:nvSpPr>
+        <p:spPr>
+          <a:xfrm>
+            <a:off x="6809994" y="1912753"/>
+            <a:ext cx="5077206" cy="1015663"/>
+          </a:xfrm>
+          <a:prstGeom prst="rect">
+            <a:avLst/>
+          </a:prstGeom>
+          <a:noFill/>
+        </p:spPr>
+        <p:txBody>
+          <a:bodyPr wrap="square" rtlCol="0">
+            <a:spAutoFit/>
+          </a:bodyPr>
+          <a:lstStyle/>
+          <a:p>
+            <a:r>
+              <a:rPr lang="en-US" altLang="ko-KR" sz="1200"/>
+              <a:t>@KafkaListener </a:t>
+            </a:r>
+            <a:r>
+              <a:rPr lang="ko-KR" altLang="en-US" sz="1200"/>
+              <a:t>를 통해 </a:t>
+            </a:r>
+            <a:endParaRPr lang="en-US" altLang="ko-KR" sz="1200"/>
+          </a:p>
+          <a:p>
+            <a:r>
+              <a:rPr lang="en-US" altLang="ko-KR" sz="1200"/>
+              <a:t>Consumer</a:t>
+            </a:r>
+            <a:r>
+              <a:rPr lang="ko-KR" altLang="en-US" sz="1200"/>
+              <a:t>가 </a:t>
+            </a:r>
+            <a:r>
+              <a:rPr lang="en-US" altLang="ko-KR" sz="1200"/>
+              <a:t>topic</a:t>
+            </a:r>
+            <a:r>
+              <a:rPr lang="ko-KR" altLang="en-US" sz="1200"/>
+              <a:t>에 관한 </a:t>
+            </a:r>
+            <a:r>
+              <a:rPr lang="en-US" altLang="ko-KR" sz="1200"/>
+              <a:t>Queue</a:t>
+            </a:r>
+            <a:r>
+              <a:rPr lang="ko-KR" altLang="en-US" sz="1200"/>
+              <a:t>를 </a:t>
+            </a:r>
+            <a:r>
+              <a:rPr lang="en-US" altLang="ko-KR" sz="1200"/>
+              <a:t>Listen </a:t>
+            </a:r>
+            <a:r>
+              <a:rPr lang="ko-KR" altLang="en-US" sz="1200"/>
+              <a:t>하고 있는다</a:t>
+            </a:r>
+            <a:r>
+              <a:rPr lang="en-US" altLang="ko-KR" sz="1200"/>
+              <a:t>.</a:t>
+            </a:r>
+          </a:p>
+          <a:p>
+            <a:r>
+              <a:rPr lang="ko-KR" altLang="en-US" sz="1200"/>
+              <a:t>즉</a:t>
+            </a:r>
+            <a:r>
+              <a:rPr lang="en-US" altLang="ko-KR" sz="1200"/>
+              <a:t>. producer </a:t>
+            </a:r>
+            <a:r>
+              <a:rPr lang="ko-KR" altLang="en-US" sz="1200"/>
+              <a:t>서버에서 메세지 큐로 메시지 등록 즉시 </a:t>
+            </a:r>
+            <a:endParaRPr lang="en-US" altLang="ko-KR" sz="1200"/>
+          </a:p>
+          <a:p>
+            <a:r>
+              <a:rPr lang="en-US" altLang="ko-KR" sz="1200"/>
+              <a:t>Consumer</a:t>
+            </a:r>
+            <a:r>
+              <a:rPr lang="ko-KR" altLang="en-US" sz="1200"/>
+              <a:t>가 읽어 들인다</a:t>
+            </a:r>
+            <a:r>
+              <a:rPr lang="en-US" altLang="ko-KR" sz="1200"/>
+              <a:t>.</a:t>
+            </a:r>
+          </a:p>
+          <a:p>
+            <a:endParaRPr lang="ko-KR" altLang="en-US" sz="1200"/>
+          </a:p>
+        </p:txBody>
+      </p:sp>
+    </p:spTree>
+    <p:extLst>
+      <p:ext uri="{BB962C8B-B14F-4D97-AF65-F5344CB8AC3E}">
+        <p14:creationId xmlns:p14="http://schemas.microsoft.com/office/powerpoint/2010/main" val="135989235"/>
+      </p:ext>
+    </p:extLst>
+  </p:cSld>
+  <p:clrMapOvr>
+    <a:masterClrMapping/>
+  </p:clrMapOvr>
+</p:sld>
+</file>
+
+<file path=ppt/slides/slide27.xml><?xml version="1.0" encoding="utf-8"?>
+<p:sld xmlns:a="http://schemas.openxmlformats.org/drawingml/2006/main" xmlns:r="http://schemas.openxmlformats.org/officeDocument/2006/relationships" xmlns:p="http://schemas.openxmlformats.org/presentationml/2006/main">
+  <p:cSld>
+    <p:spTree>
+      <p:nvGrpSpPr>
+        <p:cNvPr id="1" name=""/>
+        <p:cNvGrpSpPr/>
+        <p:nvPr/>
+      </p:nvGrpSpPr>
+      <p:grpSpPr>
+        <a:xfrm>
+          <a:off x="0" y="0"/>
+          <a:ext cx="0" cy="0"/>
+          <a:chOff x="0" y="0"/>
+          <a:chExt cx="0" cy="0"/>
+        </a:xfrm>
+      </p:grpSpPr>
+      <p:sp>
+        <p:nvSpPr>
+          <p:cNvPr id="2" name="제목 1">
+            <a:extLst>
+              <a:ext uri="{FF2B5EF4-FFF2-40B4-BE49-F238E27FC236}">
+                <a16:creationId xmlns:a16="http://schemas.microsoft.com/office/drawing/2014/main" id="{CDF47E3F-1027-5242-FF27-9B4D3BE94950}"/>
+              </a:ext>
+            </a:extLst>
+          </p:cNvPr>
+          <p:cNvSpPr>
+            <a:spLocks noGrp="1"/>
+          </p:cNvSpPr>
+          <p:nvPr>
+            <p:ph type="title"/>
+          </p:nvPr>
+        </p:nvSpPr>
+        <p:spPr/>
+        <p:txBody>
+          <a:bodyPr>
+            <a:normAutofit/>
+          </a:bodyPr>
+          <a:lstStyle/>
+          <a:p>
+            <a:r>
+              <a:rPr lang="en-US" altLang="ko-KR" sz="3600"/>
+              <a:t>Producer </a:t>
+            </a:r>
+            <a:r>
+              <a:rPr lang="ko-KR" altLang="en-US" sz="3600"/>
+              <a:t>메세지 전송 </a:t>
+            </a:r>
+            <a:r>
+              <a:rPr lang="en-US" altLang="ko-KR" sz="3600"/>
+              <a:t>/ Consumer </a:t>
+            </a:r>
+            <a:r>
+              <a:rPr lang="ko-KR" altLang="en-US" sz="3600"/>
+              <a:t>실시간 확인</a:t>
+            </a:r>
+          </a:p>
+        </p:txBody>
+      </p:sp>
+      <p:pic>
+        <p:nvPicPr>
+          <p:cNvPr id="4" name="그림 3">
+            <a:extLst>
+              <a:ext uri="{FF2B5EF4-FFF2-40B4-BE49-F238E27FC236}">
+                <a16:creationId xmlns:a16="http://schemas.microsoft.com/office/drawing/2014/main" id="{25A5A32B-40D5-6267-15C9-722781484E9E}"/>
+              </a:ext>
+            </a:extLst>
+          </p:cNvPr>
+          <p:cNvPicPr>
+            <a:picLocks noChangeAspect="1"/>
+          </p:cNvPicPr>
+          <p:nvPr/>
+        </p:nvPicPr>
+        <p:blipFill>
+          <a:blip r:embed="rId2"/>
+          <a:stretch>
+            <a:fillRect/>
+          </a:stretch>
+        </p:blipFill>
+        <p:spPr>
+          <a:xfrm>
+            <a:off x="369912" y="1937301"/>
+            <a:ext cx="6020640" cy="3934374"/>
+          </a:xfrm>
+          <a:prstGeom prst="rect">
+            <a:avLst/>
+          </a:prstGeom>
+        </p:spPr>
+      </p:pic>
+      <p:grpSp>
+        <p:nvGrpSpPr>
+          <p:cNvPr id="8" name="그룹 7">
+            <a:extLst>
+              <a:ext uri="{FF2B5EF4-FFF2-40B4-BE49-F238E27FC236}">
+                <a16:creationId xmlns:a16="http://schemas.microsoft.com/office/drawing/2014/main" id="{6670A558-93D0-0585-B4A2-CADD81C3C28D}"/>
+              </a:ext>
+            </a:extLst>
+          </p:cNvPr>
+          <p:cNvGrpSpPr/>
+          <p:nvPr/>
+        </p:nvGrpSpPr>
+        <p:grpSpPr>
+          <a:xfrm>
+            <a:off x="6572236" y="1937301"/>
+            <a:ext cx="5452124" cy="4449577"/>
+            <a:chOff x="6572236" y="1937301"/>
+            <a:chExt cx="5452124" cy="4449577"/>
+          </a:xfrm>
+        </p:grpSpPr>
+        <p:pic>
+          <p:nvPicPr>
+            <p:cNvPr id="6" name="그림 5">
+              <a:extLst>
+                <a:ext uri="{FF2B5EF4-FFF2-40B4-BE49-F238E27FC236}">
+                  <a16:creationId xmlns:a16="http://schemas.microsoft.com/office/drawing/2014/main" id="{0A09909A-0B05-896C-6EE5-C90E7C2D102E}"/>
+                </a:ext>
+              </a:extLst>
+            </p:cNvPr>
+            <p:cNvPicPr>
+              <a:picLocks noChangeAspect="1"/>
+            </p:cNvPicPr>
+            <p:nvPr/>
+          </p:nvPicPr>
+          <p:blipFill>
+            <a:blip r:embed="rId3"/>
+            <a:stretch>
+              <a:fillRect/>
+            </a:stretch>
+          </p:blipFill>
+          <p:spPr>
+            <a:xfrm>
+              <a:off x="6572236" y="1937301"/>
+              <a:ext cx="5452124" cy="4449577"/>
+            </a:xfrm>
+            <a:prstGeom prst="rect">
+              <a:avLst/>
+            </a:prstGeom>
+          </p:spPr>
+        </p:pic>
+        <p:sp>
+          <p:nvSpPr>
+            <p:cNvPr id="7" name="직사각형 6">
+              <a:extLst>
+                <a:ext uri="{FF2B5EF4-FFF2-40B4-BE49-F238E27FC236}">
+                  <a16:creationId xmlns:a16="http://schemas.microsoft.com/office/drawing/2014/main" id="{9BE422FA-F920-EFBF-1192-C30FBCF644F6}"/>
+                </a:ext>
+              </a:extLst>
+            </p:cNvPr>
+            <p:cNvSpPr/>
+            <p:nvPr/>
+          </p:nvSpPr>
+          <p:spPr>
+            <a:xfrm>
+              <a:off x="8448805" y="5824603"/>
+              <a:ext cx="3444658" cy="501041"/>
+            </a:xfrm>
+            <a:prstGeom prst="rect">
+              <a:avLst/>
+            </a:prstGeom>
+            <a:noFill/>
+            <a:ln>
+              <a:solidFill>
+                <a:srgbClr val="FF0000"/>
+              </a:solidFill>
+            </a:ln>
+          </p:spPr>
+          <p:style>
+            <a:lnRef idx="2">
+              <a:schemeClr val="accent1">
+                <a:shade val="15000"/>
+              </a:schemeClr>
+            </a:lnRef>
+            <a:fillRef idx="1">
+              <a:schemeClr val="accent1"/>
+            </a:fillRef>
+            <a:effectRef idx="0">
+              <a:schemeClr val="accent1"/>
+            </a:effectRef>
+            <a:fontRef idx="minor">
+              <a:schemeClr val="lt1"/>
+            </a:fontRef>
+          </p:style>
+          <p:txBody>
+            <a:bodyPr rtlCol="0" anchor="ctr"/>
+            <a:lstStyle/>
+            <a:p>
+              <a:pPr algn="ctr"/>
+              <a:endParaRPr lang="ko-KR" altLang="en-US"/>
+            </a:p>
+          </p:txBody>
+        </p:sp>
+      </p:grpSp>
+      <p:sp>
+        <p:nvSpPr>
+          <p:cNvPr id="9" name="TextBox 8">
+            <a:extLst>
+              <a:ext uri="{FF2B5EF4-FFF2-40B4-BE49-F238E27FC236}">
+                <a16:creationId xmlns:a16="http://schemas.microsoft.com/office/drawing/2014/main" id="{7109AA4A-F5EB-5C24-1E9E-5F93835BF039}"/>
+              </a:ext>
+            </a:extLst>
+          </p:cNvPr>
+          <p:cNvSpPr txBox="1"/>
+          <p:nvPr/>
+        </p:nvSpPr>
+        <p:spPr>
+          <a:xfrm>
+            <a:off x="369912" y="5931074"/>
+            <a:ext cx="6020640" cy="261610"/>
+          </a:xfrm>
+          <a:prstGeom prst="rect">
+            <a:avLst/>
+          </a:prstGeom>
+          <a:noFill/>
+        </p:spPr>
+        <p:txBody>
+          <a:bodyPr wrap="square" rtlCol="0">
+            <a:spAutoFit/>
+          </a:bodyPr>
+          <a:lstStyle/>
+          <a:p>
+            <a:r>
+              <a:rPr lang="en-US" altLang="ko-KR" sz="1050"/>
+              <a:t>postman </a:t>
+            </a:r>
+            <a:r>
+              <a:rPr lang="en-US" altLang="ko-KR" sz="1050">
+                <a:sym typeface="Wingdings" panose="05000000000000000000" pitchFamily="2" charset="2"/>
+              </a:rPr>
+              <a:t> producer</a:t>
+            </a:r>
+            <a:r>
+              <a:rPr lang="ko-KR" altLang="en-US" sz="1050">
+                <a:sym typeface="Wingdings" panose="05000000000000000000" pitchFamily="2" charset="2"/>
+              </a:rPr>
+              <a:t> 메시지 전송 </a:t>
+            </a:r>
+            <a:r>
+              <a:rPr lang="en-US" altLang="ko-KR" sz="1050">
+                <a:sym typeface="Wingdings" panose="05000000000000000000" pitchFamily="2" charset="2"/>
+              </a:rPr>
+              <a:t> producer </a:t>
+            </a:r>
+            <a:r>
+              <a:rPr lang="ko-KR" altLang="en-US" sz="1050">
+                <a:sym typeface="Wingdings" panose="05000000000000000000" pitchFamily="2" charset="2"/>
+              </a:rPr>
+              <a:t>메세지 </a:t>
+            </a:r>
+            <a:r>
+              <a:rPr lang="en-US" altLang="ko-KR" sz="1050">
+                <a:sym typeface="Wingdings" panose="05000000000000000000" pitchFamily="2" charset="2"/>
+              </a:rPr>
+              <a:t>Kafka</a:t>
+            </a:r>
+            <a:r>
+              <a:rPr lang="ko-KR" altLang="en-US" sz="1050">
+                <a:sym typeface="Wingdings" panose="05000000000000000000" pitchFamily="2" charset="2"/>
+              </a:rPr>
+              <a:t>저장 </a:t>
+            </a:r>
+            <a:r>
+              <a:rPr lang="en-US" altLang="ko-KR" sz="1050">
+                <a:sym typeface="Wingdings" panose="05000000000000000000" pitchFamily="2" charset="2"/>
+              </a:rPr>
+              <a:t> consumer Kafka </a:t>
+            </a:r>
+            <a:r>
+              <a:rPr lang="ko-KR" altLang="en-US" sz="1050">
+                <a:sym typeface="Wingdings" panose="05000000000000000000" pitchFamily="2" charset="2"/>
+              </a:rPr>
+              <a:t>큐 </a:t>
+            </a:r>
+            <a:r>
+              <a:rPr lang="en-US" altLang="ko-KR" sz="1050">
+                <a:sym typeface="Wingdings" panose="05000000000000000000" pitchFamily="2" charset="2"/>
+              </a:rPr>
+              <a:t>Listen</a:t>
+            </a:r>
+            <a:endParaRPr lang="ko-KR" altLang="en-US" sz="1050"/>
+          </a:p>
+        </p:txBody>
+      </p:sp>
+    </p:spTree>
+    <p:extLst>
+      <p:ext uri="{BB962C8B-B14F-4D97-AF65-F5344CB8AC3E}">
+        <p14:creationId xmlns:p14="http://schemas.microsoft.com/office/powerpoint/2010/main" val="2202959119"/>
+      </p:ext>
+    </p:extLst>
+  </p:cSld>
+  <p:clrMapOvr>
+    <a:masterClrMapping/>
+  </p:clrMapOvr>
+</p:sld>
+</file>
+
+<file path=ppt/slides/slide28.xml><?xml version="1.0" encoding="utf-8"?>
+<p:sld xmlns:a="http://schemas.openxmlformats.org/drawingml/2006/main" xmlns:r="http://schemas.openxmlformats.org/officeDocument/2006/relationships" xmlns:p="http://schemas.openxmlformats.org/presentationml/2006/main">
+  <p:cSld>
+    <p:spTree>
+      <p:nvGrpSpPr>
+        <p:cNvPr id="1" name=""/>
+        <p:cNvGrpSpPr/>
+        <p:nvPr/>
+      </p:nvGrpSpPr>
+      <p:grpSpPr>
+        <a:xfrm>
+          <a:off x="0" y="0"/>
+          <a:ext cx="0" cy="0"/>
+          <a:chOff x="0" y="0"/>
+          <a:chExt cx="0" cy="0"/>
+        </a:xfrm>
+      </p:grpSpPr>
+      <p:sp>
+        <p:nvSpPr>
+          <p:cNvPr id="2" name="제목 1">
+            <a:extLst>
+              <a:ext uri="{FF2B5EF4-FFF2-40B4-BE49-F238E27FC236}">
+                <a16:creationId xmlns:a16="http://schemas.microsoft.com/office/drawing/2014/main" id="{84C79291-506C-4090-6AD9-54CD54559B1C}"/>
+              </a:ext>
+            </a:extLst>
+          </p:cNvPr>
+          <p:cNvSpPr>
+            <a:spLocks noGrp="1"/>
+          </p:cNvSpPr>
+          <p:nvPr>
+            <p:ph type="title"/>
+          </p:nvPr>
+        </p:nvSpPr>
+        <p:spPr/>
+        <p:txBody>
+          <a:bodyPr>
+            <a:normAutofit/>
+          </a:bodyPr>
+          <a:lstStyle/>
+          <a:p>
+            <a:r>
+              <a:rPr lang="ko-KR" altLang="en-US" sz="3600"/>
+              <a:t>이메일 발송 로직에 부하를 가정하여 코드 수정</a:t>
+            </a:r>
+          </a:p>
+        </p:txBody>
+      </p:sp>
+      <p:grpSp>
+        <p:nvGrpSpPr>
+          <p:cNvPr id="8" name="그룹 7">
+            <a:extLst>
+              <a:ext uri="{FF2B5EF4-FFF2-40B4-BE49-F238E27FC236}">
+                <a16:creationId xmlns:a16="http://schemas.microsoft.com/office/drawing/2014/main" id="{EC89A045-A643-83AC-5BF0-653382FF7A20}"/>
+              </a:ext>
+            </a:extLst>
+          </p:cNvPr>
+          <p:cNvGrpSpPr/>
+          <p:nvPr/>
+        </p:nvGrpSpPr>
+        <p:grpSpPr>
+          <a:xfrm>
+            <a:off x="425508" y="1967027"/>
+            <a:ext cx="6439799" cy="3820058"/>
+            <a:chOff x="425508" y="1967027"/>
+            <a:chExt cx="6439799" cy="3820058"/>
+          </a:xfrm>
+        </p:grpSpPr>
+        <p:grpSp>
+          <p:nvGrpSpPr>
+            <p:cNvPr id="6" name="그룹 5">
+              <a:extLst>
+                <a:ext uri="{FF2B5EF4-FFF2-40B4-BE49-F238E27FC236}">
+                  <a16:creationId xmlns:a16="http://schemas.microsoft.com/office/drawing/2014/main" id="{6B96DF8A-9465-9D72-1F88-508063ED775D}"/>
+                </a:ext>
+              </a:extLst>
+            </p:cNvPr>
+            <p:cNvGrpSpPr/>
+            <p:nvPr/>
+          </p:nvGrpSpPr>
+          <p:grpSpPr>
+            <a:xfrm>
+              <a:off x="425508" y="1967027"/>
+              <a:ext cx="6439799" cy="3820058"/>
+              <a:chOff x="425508" y="1967027"/>
+              <a:chExt cx="6439799" cy="3820058"/>
+            </a:xfrm>
+          </p:grpSpPr>
+          <p:pic>
+            <p:nvPicPr>
+              <p:cNvPr id="4" name="그림 3">
+                <a:extLst>
+                  <a:ext uri="{FF2B5EF4-FFF2-40B4-BE49-F238E27FC236}">
+                    <a16:creationId xmlns:a16="http://schemas.microsoft.com/office/drawing/2014/main" id="{ABD78A4B-CAA1-32B3-E3D8-701F7D41A22E}"/>
+                  </a:ext>
+                </a:extLst>
+              </p:cNvPr>
+              <p:cNvPicPr>
+                <a:picLocks noChangeAspect="1"/>
+              </p:cNvPicPr>
+              <p:nvPr/>
+            </p:nvPicPr>
+            <p:blipFill>
+              <a:blip r:embed="rId2"/>
+              <a:stretch>
+                <a:fillRect/>
+              </a:stretch>
+            </p:blipFill>
+            <p:spPr>
+              <a:xfrm>
+                <a:off x="425508" y="1967027"/>
+                <a:ext cx="6439799" cy="3820058"/>
+              </a:xfrm>
+              <a:prstGeom prst="rect">
+                <a:avLst/>
+              </a:prstGeom>
+            </p:spPr>
+          </p:pic>
+          <p:sp>
+            <p:nvSpPr>
+              <p:cNvPr id="5" name="직사각형 4">
+                <a:extLst>
+                  <a:ext uri="{FF2B5EF4-FFF2-40B4-BE49-F238E27FC236}">
+                    <a16:creationId xmlns:a16="http://schemas.microsoft.com/office/drawing/2014/main" id="{8DBDDF9C-F766-22C1-0BBC-1A47F2B2170C}"/>
+                  </a:ext>
+                </a:extLst>
+              </p:cNvPr>
+              <p:cNvSpPr/>
+              <p:nvPr/>
+            </p:nvSpPr>
+            <p:spPr>
+              <a:xfrm>
+                <a:off x="4032504" y="2203704"/>
+                <a:ext cx="2459736" cy="877824"/>
+              </a:xfrm>
+              <a:prstGeom prst="rect">
+                <a:avLst/>
+              </a:prstGeom>
+            </p:spPr>
+            <p:style>
+              <a:lnRef idx="2">
+                <a:schemeClr val="accent1">
+                  <a:shade val="15000"/>
+                </a:schemeClr>
+              </a:lnRef>
+              <a:fillRef idx="1">
+                <a:schemeClr val="accent1"/>
+              </a:fillRef>
+              <a:effectRef idx="0">
+                <a:schemeClr val="accent1"/>
+              </a:effectRef>
+              <a:fontRef idx="minor">
+                <a:schemeClr val="lt1"/>
+              </a:fontRef>
+            </p:style>
+            <p:txBody>
+              <a:bodyPr rtlCol="0" anchor="ctr"/>
+              <a:lstStyle/>
+              <a:p>
+                <a:pPr algn="ctr"/>
+                <a:r>
+                  <a:rPr lang="en-US" altLang="ko-KR"/>
+                  <a:t>Consumer Server</a:t>
+                </a:r>
+                <a:endParaRPr lang="ko-KR" altLang="en-US"/>
+              </a:p>
+            </p:txBody>
+          </p:sp>
+        </p:grpSp>
+        <p:sp>
+          <p:nvSpPr>
+            <p:cNvPr id="7" name="직사각형 6">
+              <a:extLst>
+                <a:ext uri="{FF2B5EF4-FFF2-40B4-BE49-F238E27FC236}">
+                  <a16:creationId xmlns:a16="http://schemas.microsoft.com/office/drawing/2014/main" id="{97D19D89-EA78-1986-3729-9B4A3056659E}"/>
+                </a:ext>
+              </a:extLst>
+            </p:cNvPr>
+            <p:cNvSpPr/>
+            <p:nvPr/>
+          </p:nvSpPr>
+          <p:spPr>
+            <a:xfrm>
+              <a:off x="1700784" y="4315968"/>
+              <a:ext cx="2185416" cy="256032"/>
+            </a:xfrm>
+            <a:prstGeom prst="rect">
+              <a:avLst/>
+            </a:prstGeom>
+            <a:noFill/>
+            <a:ln>
+              <a:solidFill>
+                <a:srgbClr val="FF0000"/>
+              </a:solidFill>
+            </a:ln>
+          </p:spPr>
+          <p:style>
+            <a:lnRef idx="2">
+              <a:schemeClr val="accent1">
+                <a:shade val="15000"/>
+              </a:schemeClr>
+            </a:lnRef>
+            <a:fillRef idx="1">
+              <a:schemeClr val="accent1"/>
+            </a:fillRef>
+            <a:effectRef idx="0">
+              <a:schemeClr val="accent1"/>
+            </a:effectRef>
+            <a:fontRef idx="minor">
+              <a:schemeClr val="lt1"/>
+            </a:fontRef>
+          </p:style>
+          <p:txBody>
+            <a:bodyPr rtlCol="0" anchor="ctr"/>
+            <a:lstStyle/>
+            <a:p>
+              <a:pPr algn="ctr"/>
+              <a:endParaRPr lang="ko-KR" altLang="en-US"/>
+            </a:p>
+          </p:txBody>
+        </p:sp>
+      </p:grpSp>
+      <p:grpSp>
+        <p:nvGrpSpPr>
+          <p:cNvPr id="12" name="그룹 11">
+            <a:extLst>
+              <a:ext uri="{FF2B5EF4-FFF2-40B4-BE49-F238E27FC236}">
+                <a16:creationId xmlns:a16="http://schemas.microsoft.com/office/drawing/2014/main" id="{897DB6E3-0FF5-B15D-C6D6-CCC32059E39B}"/>
+              </a:ext>
+            </a:extLst>
+          </p:cNvPr>
+          <p:cNvGrpSpPr/>
+          <p:nvPr/>
+        </p:nvGrpSpPr>
+        <p:grpSpPr>
+          <a:xfrm>
+            <a:off x="5532120" y="3187050"/>
+            <a:ext cx="6329982" cy="3384347"/>
+            <a:chOff x="5532120" y="3187050"/>
+            <a:chExt cx="6329982" cy="3384347"/>
+          </a:xfrm>
+        </p:grpSpPr>
+        <p:pic>
+          <p:nvPicPr>
+            <p:cNvPr id="10" name="그림 9">
+              <a:extLst>
+                <a:ext uri="{FF2B5EF4-FFF2-40B4-BE49-F238E27FC236}">
+                  <a16:creationId xmlns:a16="http://schemas.microsoft.com/office/drawing/2014/main" id="{5B530B6B-57EA-2502-F575-A9517CF3DC32}"/>
+                </a:ext>
+              </a:extLst>
+            </p:cNvPr>
+            <p:cNvPicPr>
+              <a:picLocks noChangeAspect="1"/>
+            </p:cNvPicPr>
+            <p:nvPr/>
+          </p:nvPicPr>
+          <p:blipFill>
+            <a:blip r:embed="rId3"/>
+            <a:srcRect l="19425" t="11467" r="19975" b="30933"/>
+            <a:stretch>
+              <a:fillRect/>
+            </a:stretch>
+          </p:blipFill>
+          <p:spPr>
+            <a:xfrm>
+              <a:off x="5532120" y="3187050"/>
+              <a:ext cx="6329982" cy="3384347"/>
+            </a:xfrm>
+            <a:prstGeom prst="rect">
+              <a:avLst/>
+            </a:prstGeom>
+          </p:spPr>
+        </p:pic>
+        <p:sp>
+          <p:nvSpPr>
+            <p:cNvPr id="11" name="직사각형 10">
+              <a:extLst>
+                <a:ext uri="{FF2B5EF4-FFF2-40B4-BE49-F238E27FC236}">
+                  <a16:creationId xmlns:a16="http://schemas.microsoft.com/office/drawing/2014/main" id="{E607375A-26EF-FA8D-5C75-D85105C85605}"/>
+                </a:ext>
+              </a:extLst>
+            </p:cNvPr>
+            <p:cNvSpPr/>
+            <p:nvPr/>
+          </p:nvSpPr>
+          <p:spPr>
+            <a:xfrm>
+              <a:off x="10049256" y="5787085"/>
+              <a:ext cx="896112" cy="256032"/>
+            </a:xfrm>
+            <a:prstGeom prst="rect">
+              <a:avLst/>
+            </a:prstGeom>
+            <a:noFill/>
+            <a:ln>
+              <a:solidFill>
+                <a:srgbClr val="FF0000"/>
+              </a:solidFill>
+            </a:ln>
+          </p:spPr>
+          <p:style>
+            <a:lnRef idx="2">
+              <a:schemeClr val="accent1">
+                <a:shade val="15000"/>
+              </a:schemeClr>
+            </a:lnRef>
+            <a:fillRef idx="1">
+              <a:schemeClr val="accent1"/>
+            </a:fillRef>
+            <a:effectRef idx="0">
+              <a:schemeClr val="accent1"/>
+            </a:effectRef>
+            <a:fontRef idx="minor">
+              <a:schemeClr val="lt1"/>
+            </a:fontRef>
+          </p:style>
+          <p:txBody>
+            <a:bodyPr rtlCol="0" anchor="ctr"/>
+            <a:lstStyle/>
+            <a:p>
+              <a:pPr algn="ctr"/>
+              <a:endParaRPr lang="ko-KR" altLang="en-US"/>
+            </a:p>
+          </p:txBody>
+        </p:sp>
+      </p:grpSp>
+      <p:sp>
+        <p:nvSpPr>
+          <p:cNvPr id="13" name="TextBox 12">
+            <a:extLst>
+              <a:ext uri="{FF2B5EF4-FFF2-40B4-BE49-F238E27FC236}">
+                <a16:creationId xmlns:a16="http://schemas.microsoft.com/office/drawing/2014/main" id="{DD5ADBF9-D909-B6AC-A941-A7FAFAA7203D}"/>
+              </a:ext>
+            </a:extLst>
+          </p:cNvPr>
+          <p:cNvSpPr txBox="1"/>
+          <p:nvPr/>
+        </p:nvSpPr>
+        <p:spPr>
+          <a:xfrm>
+            <a:off x="7004304" y="1967027"/>
+            <a:ext cx="4857798" cy="830997"/>
+          </a:xfrm>
+          <a:prstGeom prst="rect">
+            <a:avLst/>
+          </a:prstGeom>
+          <a:noFill/>
+        </p:spPr>
+        <p:txBody>
+          <a:bodyPr wrap="square" rtlCol="0">
+            <a:spAutoFit/>
+          </a:bodyPr>
+          <a:lstStyle/>
+          <a:p>
+            <a:r>
+              <a:rPr lang="ko-KR" altLang="en-US" sz="1200"/>
+              <a:t>이메일 발송로직에 부하를  강제 주입해도 이메일 발송 </a:t>
+            </a:r>
+            <a:r>
+              <a:rPr lang="en-US" altLang="ko-KR" sz="1200"/>
+              <a:t>API</a:t>
+            </a:r>
+            <a:r>
+              <a:rPr lang="ko-KR" altLang="en-US" sz="1200"/>
+              <a:t>에서는</a:t>
+            </a:r>
+            <a:endParaRPr lang="en-US" altLang="ko-KR" sz="1200"/>
+          </a:p>
+          <a:p>
+            <a:r>
+              <a:rPr lang="ko-KR" altLang="en-US" sz="1200"/>
+              <a:t>빠른 응답을 받을수 있다</a:t>
+            </a:r>
+            <a:r>
+              <a:rPr lang="en-US" altLang="ko-KR" sz="1200"/>
+              <a:t>. (</a:t>
+            </a:r>
+            <a:r>
+              <a:rPr lang="ko-KR" altLang="en-US" sz="1200"/>
+              <a:t>사용자는 처리된 것으로 앎</a:t>
+            </a:r>
+            <a:r>
+              <a:rPr lang="en-US" altLang="ko-KR" sz="1200"/>
+              <a:t>)</a:t>
+            </a:r>
+          </a:p>
+          <a:p>
+            <a:r>
+              <a:rPr lang="en-US" altLang="ko-KR" sz="1200">
+                <a:sym typeface="Wingdings" panose="05000000000000000000" pitchFamily="2" charset="2"/>
+              </a:rPr>
+              <a:t> </a:t>
+            </a:r>
+            <a:r>
+              <a:rPr lang="ko-KR" altLang="en-US" sz="1200">
+                <a:sym typeface="Wingdings" panose="05000000000000000000" pitchFamily="2" charset="2"/>
+              </a:rPr>
+              <a:t>하지만 서버에서는 해당 이메일 전송로직이 큐에 대기 중이거나 </a:t>
+            </a:r>
+            <a:br>
+              <a:rPr lang="en-US" altLang="ko-KR" sz="1200">
+                <a:sym typeface="Wingdings" panose="05000000000000000000" pitchFamily="2" charset="2"/>
+              </a:rPr>
+            </a:br>
+            <a:r>
+              <a:rPr lang="en-US" altLang="ko-KR" sz="1200">
+                <a:sym typeface="Wingdings" panose="05000000000000000000" pitchFamily="2" charset="2"/>
+              </a:rPr>
+              <a:t>      </a:t>
+            </a:r>
+            <a:r>
+              <a:rPr lang="ko-KR" altLang="en-US" sz="1200">
+                <a:sym typeface="Wingdings" panose="05000000000000000000" pitchFamily="2" charset="2"/>
+              </a:rPr>
+              <a:t>처리중에 있다</a:t>
+            </a:r>
+            <a:r>
+              <a:rPr lang="en-US" altLang="ko-KR" sz="1200">
+                <a:sym typeface="Wingdings" panose="05000000000000000000" pitchFamily="2" charset="2"/>
+              </a:rPr>
+              <a:t>.</a:t>
+            </a:r>
+            <a:endParaRPr lang="ko-KR" altLang="en-US" sz="1200"/>
+          </a:p>
+        </p:txBody>
+      </p:sp>
+    </p:spTree>
+    <p:extLst>
+      <p:ext uri="{BB962C8B-B14F-4D97-AF65-F5344CB8AC3E}">
+        <p14:creationId xmlns:p14="http://schemas.microsoft.com/office/powerpoint/2010/main" val="2135442582"/>
+      </p:ext>
+    </p:extLst>
+  </p:cSld>
+  <p:clrMapOvr>
+    <a:masterClrMapping/>
+  </p:clrMapOvr>
+</p:sld>
+</file>
+
+<file path=ppt/slides/slide29.xml><?xml version="1.0" encoding="utf-8"?>
+<p:sld xmlns:a="http://schemas.openxmlformats.org/drawingml/2006/main" xmlns:r="http://schemas.openxmlformats.org/officeDocument/2006/relationships" xmlns:p="http://schemas.openxmlformats.org/presentationml/2006/main">
+  <p:cSld>
+    <p:spTree>
+      <p:nvGrpSpPr>
+        <p:cNvPr id="1" name=""/>
+        <p:cNvGrpSpPr/>
+        <p:nvPr/>
+      </p:nvGrpSpPr>
+      <p:grpSpPr>
+        <a:xfrm>
+          <a:off x="0" y="0"/>
+          <a:ext cx="0" cy="0"/>
+          <a:chOff x="0" y="0"/>
+          <a:chExt cx="0" cy="0"/>
+        </a:xfrm>
+      </p:grpSpPr>
+      <p:sp>
+        <p:nvSpPr>
+          <p:cNvPr id="2" name="제목 1">
+            <a:extLst>
+              <a:ext uri="{FF2B5EF4-FFF2-40B4-BE49-F238E27FC236}">
+                <a16:creationId xmlns:a16="http://schemas.microsoft.com/office/drawing/2014/main" id="{D46D4E86-099C-98D6-2F68-DD45922F5EE9}"/>
+              </a:ext>
+            </a:extLst>
+          </p:cNvPr>
+          <p:cNvSpPr>
+            <a:spLocks noGrp="1"/>
+          </p:cNvSpPr>
+          <p:nvPr>
+            <p:ph type="title"/>
+          </p:nvPr>
+        </p:nvSpPr>
+        <p:spPr/>
+        <p:txBody>
+          <a:bodyPr/>
+          <a:lstStyle/>
+          <a:p>
+            <a:r>
+              <a:rPr lang="ko-KR" altLang="en-US"/>
+              <a:t>비동기 처리로 인한 문제점 보완</a:t>
+            </a:r>
+            <a:r>
+              <a:rPr lang="en-US" altLang="ko-KR"/>
+              <a:t>.</a:t>
+            </a:r>
+            <a:endParaRPr lang="ko-KR" altLang="en-US"/>
+          </a:p>
+        </p:txBody>
+      </p:sp>
+      <p:sp>
+        <p:nvSpPr>
+          <p:cNvPr id="3" name="TextBox 2">
+            <a:extLst>
+              <a:ext uri="{FF2B5EF4-FFF2-40B4-BE49-F238E27FC236}">
+                <a16:creationId xmlns:a16="http://schemas.microsoft.com/office/drawing/2014/main" id="{200F3C19-C621-23DB-42D0-538B18963E06}"/>
+              </a:ext>
+            </a:extLst>
+          </p:cNvPr>
+          <p:cNvSpPr txBox="1"/>
+          <p:nvPr/>
+        </p:nvSpPr>
+        <p:spPr>
+          <a:xfrm>
+            <a:off x="1124712" y="1901952"/>
+            <a:ext cx="10067544" cy="2246769"/>
+          </a:xfrm>
+          <a:prstGeom prst="rect">
+            <a:avLst/>
+          </a:prstGeom>
+          <a:noFill/>
+        </p:spPr>
+        <p:txBody>
+          <a:bodyPr wrap="square" rtlCol="0">
+            <a:spAutoFit/>
+          </a:bodyPr>
+          <a:lstStyle/>
+          <a:p>
+            <a:r>
+              <a:rPr lang="ko-KR" altLang="en-US" sz="1400"/>
+              <a:t>사용자에게는 처리가 정상적으로 되었다는 메세지를 보냈지만 실제로 처리가 정상 동작했는지에 대한 보장이 되어야한다는 것이다</a:t>
+            </a:r>
+            <a:r>
+              <a:rPr lang="en-US" altLang="ko-KR" sz="1400"/>
+              <a:t>.</a:t>
+            </a:r>
+          </a:p>
+          <a:p>
+            <a:endParaRPr lang="en-US" altLang="ko-KR" sz="1400"/>
+          </a:p>
+          <a:p>
+            <a:r>
+              <a:rPr lang="ko-KR" altLang="en-US" sz="1400"/>
+              <a:t>이를 위해 시스템에서 다양한 보완전략을 사용한다</a:t>
+            </a:r>
+            <a:r>
+              <a:rPr lang="en-US" altLang="ko-KR" sz="1400"/>
+              <a:t>. </a:t>
+            </a:r>
+          </a:p>
+          <a:p>
+            <a:endParaRPr lang="en-US" altLang="ko-KR" sz="1400"/>
+          </a:p>
+          <a:p>
+            <a:pPr marL="285750" indent="-285750">
+              <a:buFont typeface="Wingdings" panose="05000000000000000000" pitchFamily="2" charset="2"/>
+              <a:buChar char="n"/>
+            </a:pPr>
+            <a:r>
+              <a:rPr lang="ko-KR" altLang="en-US" sz="1400"/>
+              <a:t>보완 전략 방식 </a:t>
+            </a:r>
+            <a:endParaRPr lang="en-US" altLang="ko-KR" sz="1400"/>
+          </a:p>
+          <a:p>
+            <a:pPr marL="342900" indent="-342900">
+              <a:buAutoNum type="arabicPeriod"/>
+            </a:pPr>
+            <a:r>
+              <a:rPr lang="ko-KR" altLang="en-US" sz="1400"/>
+              <a:t>메시지 처리 중 실패 발생시 재시도</a:t>
+            </a:r>
+            <a:r>
+              <a:rPr lang="en-US" altLang="ko-KR" sz="1400"/>
+              <a:t>(retry) </a:t>
+            </a:r>
+            <a:r>
+              <a:rPr lang="ko-KR" altLang="en-US" sz="1400"/>
+              <a:t>방식</a:t>
+            </a:r>
+            <a:endParaRPr lang="en-US" altLang="ko-KR" sz="1400"/>
+          </a:p>
+          <a:p>
+            <a:pPr marL="342900" indent="-342900">
+              <a:buAutoNum type="arabicPeriod"/>
+            </a:pPr>
+            <a:r>
+              <a:rPr lang="ko-KR" altLang="en-US" sz="1400"/>
+              <a:t>여러번의 재시도 끝에도 실패할 경우 </a:t>
+            </a:r>
+            <a:r>
+              <a:rPr lang="en-US" altLang="ko-KR" sz="1400">
+                <a:sym typeface="Wingdings" panose="05000000000000000000" pitchFamily="2" charset="2"/>
+              </a:rPr>
+              <a:t> Dead Letter Topic (DLT) </a:t>
+            </a:r>
+            <a:r>
+              <a:rPr lang="ko-KR" altLang="en-US" sz="1400">
+                <a:sym typeface="Wingdings" panose="05000000000000000000" pitchFamily="2" charset="2"/>
+              </a:rPr>
+              <a:t>실패한 메세지를 별도 보관 </a:t>
+            </a:r>
+            <a:endParaRPr lang="en-US" altLang="ko-KR" sz="1400">
+              <a:sym typeface="Wingdings" panose="05000000000000000000" pitchFamily="2" charset="2"/>
+            </a:endParaRPr>
+          </a:p>
+          <a:p>
+            <a:pPr marL="342900" indent="-342900">
+              <a:buAutoNum type="arabicPeriod"/>
+            </a:pPr>
+            <a:endParaRPr lang="en-US" altLang="ko-KR" sz="1400">
+              <a:sym typeface="Wingdings" panose="05000000000000000000" pitchFamily="2" charset="2"/>
+            </a:endParaRPr>
+          </a:p>
+          <a:p>
+            <a:r>
+              <a:rPr lang="ko-KR" altLang="en-US" sz="1400"/>
+              <a:t>두 보완 전략이 주로 사용된다</a:t>
+            </a:r>
+            <a:r>
+              <a:rPr lang="en-US" altLang="ko-KR" sz="1400"/>
+              <a:t>.</a:t>
+            </a:r>
+          </a:p>
+        </p:txBody>
+      </p:sp>
+    </p:spTree>
+    <p:extLst>
+      <p:ext uri="{BB962C8B-B14F-4D97-AF65-F5344CB8AC3E}">
+        <p14:creationId xmlns:p14="http://schemas.microsoft.com/office/powerpoint/2010/main" val="80982997"/>
       </p:ext>
     </p:extLst>
   </p:cSld>
